--- a/presentation/url_detector.pptx
+++ b/presentation/url_detector.pptx
@@ -5,22 +5,22 @@
     <p:sldMasterId id="2147483648" r:id="rId1"/>
   </p:sldMasterIdLst>
   <p:sldIdLst>
-    <p:sldId id="256" r:id="rId7"/>
-    <p:sldId id="257" r:id="rId8"/>
-    <p:sldId id="258" r:id="rId9"/>
-    <p:sldId id="259" r:id="rId10"/>
-    <p:sldId id="260" r:id="rId11"/>
-    <p:sldId id="261" r:id="rId12"/>
-    <p:sldId id="262" r:id="rId13"/>
-    <p:sldId id="263" r:id="rId14"/>
-    <p:sldId id="264" r:id="rId15"/>
-    <p:sldId id="265" r:id="rId16"/>
-    <p:sldId id="266" r:id="rId17"/>
-    <p:sldId id="267" r:id="rId18"/>
-    <p:sldId id="268" r:id="rId19"/>
-    <p:sldId id="269" r:id="rId20"/>
+    <p:sldId id="256" r:id="rId2"/>
+    <p:sldId id="257" r:id="rId3"/>
+    <p:sldId id="258" r:id="rId4"/>
+    <p:sldId id="259" r:id="rId5"/>
+    <p:sldId id="260" r:id="rId6"/>
+    <p:sldId id="261" r:id="rId7"/>
+    <p:sldId id="262" r:id="rId8"/>
+    <p:sldId id="263" r:id="rId9"/>
+    <p:sldId id="264" r:id="rId10"/>
+    <p:sldId id="265" r:id="rId11"/>
+    <p:sldId id="266" r:id="rId12"/>
+    <p:sldId id="267" r:id="rId13"/>
+    <p:sldId id="268" r:id="rId14"/>
+    <p:sldId id="269" r:id="rId15"/>
   </p:sldIdLst>
-  <p:sldSz cx="12191695" cy="6858000" type="screen4x3"/>
+  <p:sldSz cx="12192000" cy="6858000"/>
   <p:notesSz cx="6858000" cy="9144000"/>
   <p:defaultTextStyle>
     <a:defPPr>
@@ -117,6 +117,22 @@
       </a:defRPr>
     </a:lvl9pPr>
   </p:defaultTextStyle>
+  <p:extLst>
+    <p:ext uri="{EFAFB233-063F-42B5-8137-9DF3F51BA10A}">
+      <p15:sldGuideLst xmlns:p15="http://schemas.microsoft.com/office/powerpoint/2012/main">
+        <p15:guide id="1" orient="horz" pos="2160">
+          <p15:clr>
+            <a:srgbClr val="A4A3A4"/>
+          </p15:clr>
+        </p15:guide>
+        <p15:guide id="2" pos="2880">
+          <p15:clr>
+            <a:srgbClr val="A4A3A4"/>
+          </p15:clr>
+        </p15:guide>
+      </p15:sldGuideLst>
+    </p:ext>
+  </p:extLst>
 </p:presentation>
 </file>
 
@@ -158,10 +174,9 @@
           <a:lstStyle/>
           <a:p>
             <a:r>
-              <a:rPr lang="en-US" smtClean="0"/>
+              <a:rPr lang="en-US"/>
               <a:t>Click to edit Master title style</a:t>
             </a:r>
-            <a:endParaRPr lang="en-US"/>
           </a:p>
         </p:txBody>
       </p:sp>
@@ -277,10 +292,9 @@
           </a:lstStyle>
           <a:p>
             <a:r>
-              <a:rPr lang="en-US" smtClean="0"/>
+              <a:rPr lang="en-US"/>
               <a:t>Click to edit Master subtitle style</a:t>
             </a:r>
-            <a:endParaRPr lang="en-US"/>
           </a:p>
         </p:txBody>
       </p:sp>
@@ -301,7 +315,7 @@
           <a:p>
             <a:fld id="{5BCAD085-E8A6-8845-BD4E-CB4CCA059FC4}" type="datetimeFigureOut">
               <a:rPr lang="en-US" smtClean="0"/>
-              <a:t>1/27/13</a:t>
+              <a:t>7/21/2026</a:t>
             </a:fld>
             <a:endParaRPr lang="en-US"/>
           </a:p>
@@ -395,10 +409,9 @@
           <a:lstStyle/>
           <a:p>
             <a:r>
-              <a:rPr lang="en-US" smtClean="0"/>
+              <a:rPr lang="en-US"/>
               <a:t>Click to edit Master title style</a:t>
             </a:r>
-            <a:endParaRPr lang="en-US"/>
           </a:p>
         </p:txBody>
       </p:sp>
@@ -419,38 +432,37 @@
           <a:p>
             <a:pPr lvl="0"/>
             <a:r>
-              <a:rPr lang="en-US" smtClean="0"/>
+              <a:rPr lang="en-US"/>
               <a:t>Click to edit Master text styles</a:t>
             </a:r>
           </a:p>
           <a:p>
             <a:pPr lvl="1"/>
             <a:r>
-              <a:rPr lang="en-US" smtClean="0"/>
+              <a:rPr lang="en-US"/>
               <a:t>Second level</a:t>
             </a:r>
           </a:p>
           <a:p>
             <a:pPr lvl="2"/>
             <a:r>
-              <a:rPr lang="en-US" smtClean="0"/>
+              <a:rPr lang="en-US"/>
               <a:t>Third level</a:t>
             </a:r>
           </a:p>
           <a:p>
             <a:pPr lvl="3"/>
             <a:r>
-              <a:rPr lang="en-US" smtClean="0"/>
+              <a:rPr lang="en-US"/>
               <a:t>Fourth level</a:t>
             </a:r>
           </a:p>
           <a:p>
             <a:pPr lvl="4"/>
             <a:r>
-              <a:rPr lang="en-US" smtClean="0"/>
+              <a:rPr lang="en-US"/>
               <a:t>Fifth level</a:t>
             </a:r>
-            <a:endParaRPr lang="en-US"/>
           </a:p>
         </p:txBody>
       </p:sp>
@@ -471,7 +483,7 @@
           <a:p>
             <a:fld id="{5BCAD085-E8A6-8845-BD4E-CB4CCA059FC4}" type="datetimeFigureOut">
               <a:rPr lang="en-US" smtClean="0"/>
-              <a:t>1/27/13</a:t>
+              <a:t>7/21/2026</a:t>
             </a:fld>
             <a:endParaRPr lang="en-US"/>
           </a:p>
@@ -570,10 +582,9 @@
           <a:lstStyle/>
           <a:p>
             <a:r>
-              <a:rPr lang="en-US" smtClean="0"/>
+              <a:rPr lang="en-US"/>
               <a:t>Click to edit Master title style</a:t>
             </a:r>
-            <a:endParaRPr lang="en-US"/>
           </a:p>
         </p:txBody>
       </p:sp>
@@ -599,38 +610,37 @@
           <a:p>
             <a:pPr lvl="0"/>
             <a:r>
-              <a:rPr lang="en-US" smtClean="0"/>
+              <a:rPr lang="en-US"/>
               <a:t>Click to edit Master text styles</a:t>
             </a:r>
           </a:p>
           <a:p>
             <a:pPr lvl="1"/>
             <a:r>
-              <a:rPr lang="en-US" smtClean="0"/>
+              <a:rPr lang="en-US"/>
               <a:t>Second level</a:t>
             </a:r>
           </a:p>
           <a:p>
             <a:pPr lvl="2"/>
             <a:r>
-              <a:rPr lang="en-US" smtClean="0"/>
+              <a:rPr lang="en-US"/>
               <a:t>Third level</a:t>
             </a:r>
           </a:p>
           <a:p>
             <a:pPr lvl="3"/>
             <a:r>
-              <a:rPr lang="en-US" smtClean="0"/>
+              <a:rPr lang="en-US"/>
               <a:t>Fourth level</a:t>
             </a:r>
           </a:p>
           <a:p>
             <a:pPr lvl="4"/>
             <a:r>
-              <a:rPr lang="en-US" smtClean="0"/>
+              <a:rPr lang="en-US"/>
               <a:t>Fifth level</a:t>
             </a:r>
-            <a:endParaRPr lang="en-US"/>
           </a:p>
         </p:txBody>
       </p:sp>
@@ -651,7 +661,7 @@
           <a:p>
             <a:fld id="{5BCAD085-E8A6-8845-BD4E-CB4CCA059FC4}" type="datetimeFigureOut">
               <a:rPr lang="en-US" smtClean="0"/>
-              <a:t>1/27/13</a:t>
+              <a:t>7/21/2026</a:t>
             </a:fld>
             <a:endParaRPr lang="en-US"/>
           </a:p>
@@ -745,10 +755,9 @@
           <a:lstStyle/>
           <a:p>
             <a:r>
-              <a:rPr lang="en-US" smtClean="0"/>
+              <a:rPr lang="en-US"/>
               <a:t>Click to edit Master title style</a:t>
             </a:r>
-            <a:endParaRPr lang="en-US"/>
           </a:p>
         </p:txBody>
       </p:sp>
@@ -769,38 +778,37 @@
           <a:p>
             <a:pPr lvl="0"/>
             <a:r>
-              <a:rPr lang="en-US" smtClean="0"/>
+              <a:rPr lang="en-US"/>
               <a:t>Click to edit Master text styles</a:t>
             </a:r>
           </a:p>
           <a:p>
             <a:pPr lvl="1"/>
             <a:r>
-              <a:rPr lang="en-US" smtClean="0"/>
+              <a:rPr lang="en-US"/>
               <a:t>Second level</a:t>
             </a:r>
           </a:p>
           <a:p>
             <a:pPr lvl="2"/>
             <a:r>
-              <a:rPr lang="en-US" smtClean="0"/>
+              <a:rPr lang="en-US"/>
               <a:t>Third level</a:t>
             </a:r>
           </a:p>
           <a:p>
             <a:pPr lvl="3"/>
             <a:r>
-              <a:rPr lang="en-US" smtClean="0"/>
+              <a:rPr lang="en-US"/>
               <a:t>Fourth level</a:t>
             </a:r>
           </a:p>
           <a:p>
             <a:pPr lvl="4"/>
             <a:r>
-              <a:rPr lang="en-US" smtClean="0"/>
+              <a:rPr lang="en-US"/>
               <a:t>Fifth level</a:t>
             </a:r>
-            <a:endParaRPr lang="en-US"/>
           </a:p>
         </p:txBody>
       </p:sp>
@@ -821,7 +829,7 @@
           <a:p>
             <a:fld id="{5BCAD085-E8A6-8845-BD4E-CB4CCA059FC4}" type="datetimeFigureOut">
               <a:rPr lang="en-US" smtClean="0"/>
-              <a:t>1/27/13</a:t>
+              <a:t>7/21/2026</a:t>
             </a:fld>
             <a:endParaRPr lang="en-US"/>
           </a:p>
@@ -924,10 +932,9 @@
           </a:lstStyle>
           <a:p>
             <a:r>
-              <a:rPr lang="en-US" smtClean="0"/>
+              <a:rPr lang="en-US"/>
               <a:t>Click to edit Master title style</a:t>
             </a:r>
-            <a:endParaRPr lang="en-US"/>
           </a:p>
         </p:txBody>
       </p:sp>
@@ -1044,7 +1051,7 @@
           <a:p>
             <a:pPr lvl="0"/>
             <a:r>
-              <a:rPr lang="en-US" smtClean="0"/>
+              <a:rPr lang="en-US"/>
               <a:t>Click to edit Master text styles</a:t>
             </a:r>
           </a:p>
@@ -1067,7 +1074,7 @@
           <a:p>
             <a:fld id="{5BCAD085-E8A6-8845-BD4E-CB4CCA059FC4}" type="datetimeFigureOut">
               <a:rPr lang="en-US" smtClean="0"/>
-              <a:t>1/27/13</a:t>
+              <a:t>7/21/2026</a:t>
             </a:fld>
             <a:endParaRPr lang="en-US"/>
           </a:p>
@@ -1161,10 +1168,9 @@
           <a:lstStyle/>
           <a:p>
             <a:r>
-              <a:rPr lang="en-US" smtClean="0"/>
+              <a:rPr lang="en-US"/>
               <a:t>Click to edit Master title style</a:t>
             </a:r>
-            <a:endParaRPr lang="en-US"/>
           </a:p>
         </p:txBody>
       </p:sp>
@@ -1218,38 +1224,37 @@
           <a:p>
             <a:pPr lvl="0"/>
             <a:r>
-              <a:rPr lang="en-US" smtClean="0"/>
+              <a:rPr lang="en-US"/>
               <a:t>Click to edit Master text styles</a:t>
             </a:r>
           </a:p>
           <a:p>
             <a:pPr lvl="1"/>
             <a:r>
-              <a:rPr lang="en-US" smtClean="0"/>
+              <a:rPr lang="en-US"/>
               <a:t>Second level</a:t>
             </a:r>
           </a:p>
           <a:p>
             <a:pPr lvl="2"/>
             <a:r>
-              <a:rPr lang="en-US" smtClean="0"/>
+              <a:rPr lang="en-US"/>
               <a:t>Third level</a:t>
             </a:r>
           </a:p>
           <a:p>
             <a:pPr lvl="3"/>
             <a:r>
-              <a:rPr lang="en-US" smtClean="0"/>
+              <a:rPr lang="en-US"/>
               <a:t>Fourth level</a:t>
             </a:r>
           </a:p>
           <a:p>
             <a:pPr lvl="4"/>
             <a:r>
-              <a:rPr lang="en-US" smtClean="0"/>
+              <a:rPr lang="en-US"/>
               <a:t>Fifth level</a:t>
             </a:r>
-            <a:endParaRPr lang="en-US"/>
           </a:p>
         </p:txBody>
       </p:sp>
@@ -1303,38 +1308,37 @@
           <a:p>
             <a:pPr lvl="0"/>
             <a:r>
-              <a:rPr lang="en-US" smtClean="0"/>
+              <a:rPr lang="en-US"/>
               <a:t>Click to edit Master text styles</a:t>
             </a:r>
           </a:p>
           <a:p>
             <a:pPr lvl="1"/>
             <a:r>
-              <a:rPr lang="en-US" smtClean="0"/>
+              <a:rPr lang="en-US"/>
               <a:t>Second level</a:t>
             </a:r>
           </a:p>
           <a:p>
             <a:pPr lvl="2"/>
             <a:r>
-              <a:rPr lang="en-US" smtClean="0"/>
+              <a:rPr lang="en-US"/>
               <a:t>Third level</a:t>
             </a:r>
           </a:p>
           <a:p>
             <a:pPr lvl="3"/>
             <a:r>
-              <a:rPr lang="en-US" smtClean="0"/>
+              <a:rPr lang="en-US"/>
               <a:t>Fourth level</a:t>
             </a:r>
           </a:p>
           <a:p>
             <a:pPr lvl="4"/>
             <a:r>
-              <a:rPr lang="en-US" smtClean="0"/>
+              <a:rPr lang="en-US"/>
               <a:t>Fifth level</a:t>
             </a:r>
-            <a:endParaRPr lang="en-US"/>
           </a:p>
         </p:txBody>
       </p:sp>
@@ -1355,7 +1359,7 @@
           <a:p>
             <a:fld id="{5BCAD085-E8A6-8845-BD4E-CB4CCA059FC4}" type="datetimeFigureOut">
               <a:rPr lang="en-US" smtClean="0"/>
-              <a:t>1/27/13</a:t>
+              <a:t>7/21/2026</a:t>
             </a:fld>
             <a:endParaRPr lang="en-US"/>
           </a:p>
@@ -1453,10 +1457,9 @@
           </a:lstStyle>
           <a:p>
             <a:r>
-              <a:rPr lang="en-US" smtClean="0"/>
+              <a:rPr lang="en-US"/>
               <a:t>Click to edit Master title style</a:t>
             </a:r>
-            <a:endParaRPr lang="en-US"/>
           </a:p>
         </p:txBody>
       </p:sp>
@@ -1519,7 +1522,7 @@
           <a:p>
             <a:pPr lvl="0"/>
             <a:r>
-              <a:rPr lang="en-US" smtClean="0"/>
+              <a:rPr lang="en-US"/>
               <a:t>Click to edit Master text styles</a:t>
             </a:r>
           </a:p>
@@ -1575,38 +1578,37 @@
           <a:p>
             <a:pPr lvl="0"/>
             <a:r>
-              <a:rPr lang="en-US" smtClean="0"/>
+              <a:rPr lang="en-US"/>
               <a:t>Click to edit Master text styles</a:t>
             </a:r>
           </a:p>
           <a:p>
             <a:pPr lvl="1"/>
             <a:r>
-              <a:rPr lang="en-US" smtClean="0"/>
+              <a:rPr lang="en-US"/>
               <a:t>Second level</a:t>
             </a:r>
           </a:p>
           <a:p>
             <a:pPr lvl="2"/>
             <a:r>
-              <a:rPr lang="en-US" smtClean="0"/>
+              <a:rPr lang="en-US"/>
               <a:t>Third level</a:t>
             </a:r>
           </a:p>
           <a:p>
             <a:pPr lvl="3"/>
             <a:r>
-              <a:rPr lang="en-US" smtClean="0"/>
+              <a:rPr lang="en-US"/>
               <a:t>Fourth level</a:t>
             </a:r>
           </a:p>
           <a:p>
             <a:pPr lvl="4"/>
             <a:r>
-              <a:rPr lang="en-US" smtClean="0"/>
+              <a:rPr lang="en-US"/>
               <a:t>Fifth level</a:t>
             </a:r>
-            <a:endParaRPr lang="en-US"/>
           </a:p>
         </p:txBody>
       </p:sp>
@@ -1669,7 +1671,7 @@
           <a:p>
             <a:pPr lvl="0"/>
             <a:r>
-              <a:rPr lang="en-US" smtClean="0"/>
+              <a:rPr lang="en-US"/>
               <a:t>Click to edit Master text styles</a:t>
             </a:r>
           </a:p>
@@ -1725,38 +1727,37 @@
           <a:p>
             <a:pPr lvl="0"/>
             <a:r>
-              <a:rPr lang="en-US" smtClean="0"/>
+              <a:rPr lang="en-US"/>
               <a:t>Click to edit Master text styles</a:t>
             </a:r>
           </a:p>
           <a:p>
             <a:pPr lvl="1"/>
             <a:r>
-              <a:rPr lang="en-US" smtClean="0"/>
+              <a:rPr lang="en-US"/>
               <a:t>Second level</a:t>
             </a:r>
           </a:p>
           <a:p>
             <a:pPr lvl="2"/>
             <a:r>
-              <a:rPr lang="en-US" smtClean="0"/>
+              <a:rPr lang="en-US"/>
               <a:t>Third level</a:t>
             </a:r>
           </a:p>
           <a:p>
             <a:pPr lvl="3"/>
             <a:r>
-              <a:rPr lang="en-US" smtClean="0"/>
+              <a:rPr lang="en-US"/>
               <a:t>Fourth level</a:t>
             </a:r>
           </a:p>
           <a:p>
             <a:pPr lvl="4"/>
             <a:r>
-              <a:rPr lang="en-US" smtClean="0"/>
+              <a:rPr lang="en-US"/>
               <a:t>Fifth level</a:t>
             </a:r>
-            <a:endParaRPr lang="en-US"/>
           </a:p>
         </p:txBody>
       </p:sp>
@@ -1777,7 +1778,7 @@
           <a:p>
             <a:fld id="{5BCAD085-E8A6-8845-BD4E-CB4CCA059FC4}" type="datetimeFigureOut">
               <a:rPr lang="en-US" smtClean="0"/>
-              <a:t>1/27/13</a:t>
+              <a:t>7/21/2026</a:t>
             </a:fld>
             <a:endParaRPr lang="en-US"/>
           </a:p>
@@ -1871,10 +1872,9 @@
           <a:lstStyle/>
           <a:p>
             <a:r>
-              <a:rPr lang="en-US" smtClean="0"/>
+              <a:rPr lang="en-US"/>
               <a:t>Click to edit Master title style</a:t>
             </a:r>
-            <a:endParaRPr lang="en-US"/>
           </a:p>
         </p:txBody>
       </p:sp>
@@ -1895,7 +1895,7 @@
           <a:p>
             <a:fld id="{5BCAD085-E8A6-8845-BD4E-CB4CCA059FC4}" type="datetimeFigureOut">
               <a:rPr lang="en-US" smtClean="0"/>
-              <a:t>1/27/13</a:t>
+              <a:t>7/21/2026</a:t>
             </a:fld>
             <a:endParaRPr lang="en-US"/>
           </a:p>
@@ -1990,7 +1990,7 @@
           <a:p>
             <a:fld id="{5BCAD085-E8A6-8845-BD4E-CB4CCA059FC4}" type="datetimeFigureOut">
               <a:rPr lang="en-US" smtClean="0"/>
-              <a:t>1/27/13</a:t>
+              <a:t>7/21/2026</a:t>
             </a:fld>
             <a:endParaRPr lang="en-US"/>
           </a:p>
@@ -2093,10 +2093,9 @@
           </a:lstStyle>
           <a:p>
             <a:r>
-              <a:rPr lang="en-US" smtClean="0"/>
+              <a:rPr lang="en-US"/>
               <a:t>Click to edit Master title style</a:t>
             </a:r>
-            <a:endParaRPr lang="en-US"/>
           </a:p>
         </p:txBody>
       </p:sp>
@@ -2150,38 +2149,37 @@
           <a:p>
             <a:pPr lvl="0"/>
             <a:r>
-              <a:rPr lang="en-US" smtClean="0"/>
+              <a:rPr lang="en-US"/>
               <a:t>Click to edit Master text styles</a:t>
             </a:r>
           </a:p>
           <a:p>
             <a:pPr lvl="1"/>
             <a:r>
-              <a:rPr lang="en-US" smtClean="0"/>
+              <a:rPr lang="en-US"/>
               <a:t>Second level</a:t>
             </a:r>
           </a:p>
           <a:p>
             <a:pPr lvl="2"/>
             <a:r>
-              <a:rPr lang="en-US" smtClean="0"/>
+              <a:rPr lang="en-US"/>
               <a:t>Third level</a:t>
             </a:r>
           </a:p>
           <a:p>
             <a:pPr lvl="3"/>
             <a:r>
-              <a:rPr lang="en-US" smtClean="0"/>
+              <a:rPr lang="en-US"/>
               <a:t>Fourth level</a:t>
             </a:r>
           </a:p>
           <a:p>
             <a:pPr lvl="4"/>
             <a:r>
-              <a:rPr lang="en-US" smtClean="0"/>
+              <a:rPr lang="en-US"/>
               <a:t>Fifth level</a:t>
             </a:r>
-            <a:endParaRPr lang="en-US"/>
           </a:p>
         </p:txBody>
       </p:sp>
@@ -2244,7 +2242,7 @@
           <a:p>
             <a:pPr lvl="0"/>
             <a:r>
-              <a:rPr lang="en-US" smtClean="0"/>
+              <a:rPr lang="en-US"/>
               <a:t>Click to edit Master text styles</a:t>
             </a:r>
           </a:p>
@@ -2267,7 +2265,7 @@
           <a:p>
             <a:fld id="{5BCAD085-E8A6-8845-BD4E-CB4CCA059FC4}" type="datetimeFigureOut">
               <a:rPr lang="en-US" smtClean="0"/>
-              <a:t>1/27/13</a:t>
+              <a:t>7/21/2026</a:t>
             </a:fld>
             <a:endParaRPr lang="en-US"/>
           </a:p>
@@ -2370,10 +2368,9 @@
           </a:lstStyle>
           <a:p>
             <a:r>
-              <a:rPr lang="en-US" smtClean="0"/>
+              <a:rPr lang="en-US"/>
               <a:t>Click to edit Master title style</a:t>
             </a:r>
-            <a:endParaRPr lang="en-US"/>
           </a:p>
         </p:txBody>
       </p:sp>
@@ -2497,7 +2494,7 @@
           <a:p>
             <a:pPr lvl="0"/>
             <a:r>
-              <a:rPr lang="en-US" smtClean="0"/>
+              <a:rPr lang="en-US"/>
               <a:t>Click to edit Master text styles</a:t>
             </a:r>
           </a:p>
@@ -2520,7 +2517,7 @@
           <a:p>
             <a:fld id="{5BCAD085-E8A6-8845-BD4E-CB4CCA059FC4}" type="datetimeFigureOut">
               <a:rPr lang="en-US" smtClean="0"/>
-              <a:t>1/27/13</a:t>
+              <a:t>7/21/2026</a:t>
             </a:fld>
             <a:endParaRPr lang="en-US"/>
           </a:p>
@@ -2629,10 +2626,9 @@
           <a:lstStyle/>
           <a:p>
             <a:r>
-              <a:rPr lang="en-US" smtClean="0"/>
+              <a:rPr lang="en-US"/>
               <a:t>Click to edit Master title style</a:t>
             </a:r>
-            <a:endParaRPr lang="en-US"/>
           </a:p>
         </p:txBody>
       </p:sp>
@@ -2663,38 +2659,37 @@
           <a:p>
             <a:pPr lvl="0"/>
             <a:r>
-              <a:rPr lang="en-US" smtClean="0"/>
+              <a:rPr lang="en-US"/>
               <a:t>Click to edit Master text styles</a:t>
             </a:r>
           </a:p>
           <a:p>
             <a:pPr lvl="1"/>
             <a:r>
-              <a:rPr lang="en-US" smtClean="0"/>
+              <a:rPr lang="en-US"/>
               <a:t>Second level</a:t>
             </a:r>
           </a:p>
           <a:p>
             <a:pPr lvl="2"/>
             <a:r>
-              <a:rPr lang="en-US" smtClean="0"/>
+              <a:rPr lang="en-US"/>
               <a:t>Third level</a:t>
             </a:r>
           </a:p>
           <a:p>
             <a:pPr lvl="3"/>
             <a:r>
-              <a:rPr lang="en-US" smtClean="0"/>
+              <a:rPr lang="en-US"/>
               <a:t>Fourth level</a:t>
             </a:r>
           </a:p>
           <a:p>
             <a:pPr lvl="4"/>
             <a:r>
-              <a:rPr lang="en-US" smtClean="0"/>
+              <a:rPr lang="en-US"/>
               <a:t>Fifth level</a:t>
             </a:r>
-            <a:endParaRPr lang="en-US"/>
           </a:p>
         </p:txBody>
       </p:sp>
@@ -2733,7 +2728,7 @@
           <a:p>
             <a:fld id="{5BCAD085-E8A6-8845-BD4E-CB4CCA059FC4}" type="datetimeFigureOut">
               <a:rPr lang="en-US" smtClean="0"/>
-              <a:t>1/27/13</a:t>
+              <a:t>7/21/2026</a:t>
             </a:fld>
             <a:endParaRPr lang="en-US"/>
           </a:p>
@@ -3092,7 +3087,7 @@
 </file>
 
 <file path=ppt/slides/slide1.xml><?xml version="1.0" encoding="utf-8"?>
-<p:sld xmlns:a="http://schemas.openxmlformats.org/drawingml/2006/main" xmlns:p="http://schemas.openxmlformats.org/presentationml/2006/main" xmlns:r="http://schemas.openxmlformats.org/officeDocument/2006/relationships">
+<p:sld xmlns:a="http://schemas.openxmlformats.org/drawingml/2006/main" xmlns:r="http://schemas.openxmlformats.org/officeDocument/2006/relationships" xmlns:p="http://schemas.openxmlformats.org/presentationml/2006/main">
   <p:cSld>
     <p:spTree>
       <p:nvGrpSpPr>
@@ -3100,7 +3095,14 @@
         <p:cNvGrpSpPr/>
         <p:nvPr/>
       </p:nvGrpSpPr>
-      <p:grpSpPr/>
+      <p:grpSpPr>
+        <a:xfrm>
+          <a:off x="0" y="0"/>
+          <a:ext cx="0" cy="0"/>
+          <a:chOff x="0" y="0"/>
+          <a:chExt cx="0" cy="0"/>
+        </a:xfrm>
+      </p:grpSpPr>
       <p:sp>
         <p:nvSpPr>
           <p:cNvPr id="2" name="Rectangle 1"/>
@@ -3141,6 +3143,7 @@
           <a:lstStyle/>
           <a:p>
             <a:pPr algn="ctr"/>
+            <a:endParaRPr/>
           </a:p>
         </p:txBody>
       </p:sp>
@@ -3153,7 +3156,7 @@
         <p:spPr>
           <a:xfrm>
             <a:off x="822960" y="2194560"/>
-            <a:ext cx="10515600" cy="2743200"/>
+            <a:ext cx="10515600" cy="1554272"/>
           </a:xfrm>
           <a:prstGeom prst="rect">
             <a:avLst/>
@@ -3167,7 +3170,7 @@
           <a:lstStyle/>
           <a:p>
             <a:r>
-              <a:rPr sz="4000" b="1" i="0">
+              <a:rPr sz="4000" b="1" i="0" dirty="0">
                 <a:solidFill>
                   <a:srgbClr val="FFFFFF"/>
                 </a:solidFill>
@@ -3178,7 +3181,7 @@
           </a:p>
           <a:p>
             <a:r>
-              <a:rPr sz="2000" b="0" i="1">
+              <a:rPr sz="2000" b="0" i="1" dirty="0">
                 <a:solidFill>
                   <a:srgbClr val="9AD1C9"/>
                 </a:solidFill>
@@ -3194,14 +3197,29 @@
               </a:spcBef>
             </a:pPr>
             <a:r>
+              <a:rPr sz="1500" b="0" i="0" dirty="0">
+                <a:solidFill>
+                  <a:srgbClr val="C7D0D8"/>
+                </a:solidFill>
+                <a:latin typeface="Calibri"/>
+              </a:rPr>
+              <a:t>Data Science &amp; Cyber  ·  the URL / </a:t>
+            </a:r>
+            <a:r>
               <a:rPr sz="1500" b="0" i="0">
                 <a:solidFill>
                   <a:srgbClr val="C7D0D8"/>
                 </a:solidFill>
                 <a:latin typeface="Calibri"/>
               </a:rPr>
-              <a:t>Data Science &amp; Cyber  ·  the URL / link detector (Student B)</a:t>
-            </a:r>
+              <a:t>link detector</a:t>
+            </a:r>
+            <a:endParaRPr sz="1500" b="0" i="0" dirty="0">
+              <a:solidFill>
+                <a:srgbClr val="C7D0D8"/>
+              </a:solidFill>
+              <a:latin typeface="Calibri"/>
+            </a:endParaRPr>
           </a:p>
         </p:txBody>
       </p:sp>
@@ -3214,7 +3232,7 @@
 </file>
 
 <file path=ppt/slides/slide10.xml><?xml version="1.0" encoding="utf-8"?>
-<p:sld xmlns:a="http://schemas.openxmlformats.org/drawingml/2006/main" xmlns:p="http://schemas.openxmlformats.org/presentationml/2006/main" xmlns:r="http://schemas.openxmlformats.org/officeDocument/2006/relationships">
+<p:sld xmlns:a="http://schemas.openxmlformats.org/drawingml/2006/main" xmlns:r="http://schemas.openxmlformats.org/officeDocument/2006/relationships" xmlns:p="http://schemas.openxmlformats.org/presentationml/2006/main">
   <p:cSld>
     <p:spTree>
       <p:nvGrpSpPr>
@@ -3222,7 +3240,14 @@
         <p:cNvGrpSpPr/>
         <p:nvPr/>
       </p:nvGrpSpPr>
-      <p:grpSpPr/>
+      <p:grpSpPr>
+        <a:xfrm>
+          <a:off x="0" y="0"/>
+          <a:ext cx="0" cy="0"/>
+          <a:chOff x="0" y="0"/>
+          <a:chExt cx="0" cy="0"/>
+        </a:xfrm>
+      </p:grpSpPr>
       <p:sp>
         <p:nvSpPr>
           <p:cNvPr id="2" name="Rectangle 1"/>
@@ -3263,6 +3288,7 @@
           <a:lstStyle/>
           <a:p>
             <a:pPr algn="ctr"/>
+            <a:endParaRPr/>
           </a:p>
         </p:txBody>
       </p:sp>
@@ -3431,7 +3457,7 @@
 </file>
 
 <file path=ppt/slides/slide11.xml><?xml version="1.0" encoding="utf-8"?>
-<p:sld xmlns:a="http://schemas.openxmlformats.org/drawingml/2006/main" xmlns:p="http://schemas.openxmlformats.org/presentationml/2006/main" xmlns:r="http://schemas.openxmlformats.org/officeDocument/2006/relationships">
+<p:sld xmlns:a="http://schemas.openxmlformats.org/drawingml/2006/main" xmlns:r="http://schemas.openxmlformats.org/officeDocument/2006/relationships" xmlns:p="http://schemas.openxmlformats.org/presentationml/2006/main">
   <p:cSld>
     <p:spTree>
       <p:nvGrpSpPr>
@@ -3439,7 +3465,14 @@
         <p:cNvGrpSpPr/>
         <p:nvPr/>
       </p:nvGrpSpPr>
-      <p:grpSpPr/>
+      <p:grpSpPr>
+        <a:xfrm>
+          <a:off x="0" y="0"/>
+          <a:ext cx="0" cy="0"/>
+          <a:chOff x="0" y="0"/>
+          <a:chExt cx="0" cy="0"/>
+        </a:xfrm>
+      </p:grpSpPr>
       <p:sp>
         <p:nvSpPr>
           <p:cNvPr id="2" name="Rectangle 1"/>
@@ -3480,6 +3513,7 @@
           <a:lstStyle/>
           <a:p>
             <a:pPr algn="ctr"/>
+            <a:endParaRPr/>
           </a:p>
         </p:txBody>
       </p:sp>
@@ -3648,7 +3682,7 @@
 </file>
 
 <file path=ppt/slides/slide12.xml><?xml version="1.0" encoding="utf-8"?>
-<p:sld xmlns:a="http://schemas.openxmlformats.org/drawingml/2006/main" xmlns:p="http://schemas.openxmlformats.org/presentationml/2006/main" xmlns:r="http://schemas.openxmlformats.org/officeDocument/2006/relationships">
+<p:sld xmlns:a="http://schemas.openxmlformats.org/drawingml/2006/main" xmlns:r="http://schemas.openxmlformats.org/officeDocument/2006/relationships" xmlns:p="http://schemas.openxmlformats.org/presentationml/2006/main">
   <p:cSld>
     <p:spTree>
       <p:nvGrpSpPr>
@@ -3656,7 +3690,14 @@
         <p:cNvGrpSpPr/>
         <p:nvPr/>
       </p:nvGrpSpPr>
-      <p:grpSpPr/>
+      <p:grpSpPr>
+        <a:xfrm>
+          <a:off x="0" y="0"/>
+          <a:ext cx="0" cy="0"/>
+          <a:chOff x="0" y="0"/>
+          <a:chExt cx="0" cy="0"/>
+        </a:xfrm>
+      </p:grpSpPr>
       <p:sp>
         <p:nvSpPr>
           <p:cNvPr id="2" name="Rectangle 1"/>
@@ -3697,6 +3738,7 @@
           <a:lstStyle/>
           <a:p>
             <a:pPr algn="ctr"/>
+            <a:endParaRPr/>
           </a:p>
         </p:txBody>
       </p:sp>
@@ -3880,7 +3922,7 @@
 </file>
 
 <file path=ppt/slides/slide13.xml><?xml version="1.0" encoding="utf-8"?>
-<p:sld xmlns:a="http://schemas.openxmlformats.org/drawingml/2006/main" xmlns:p="http://schemas.openxmlformats.org/presentationml/2006/main" xmlns:r="http://schemas.openxmlformats.org/officeDocument/2006/relationships">
+<p:sld xmlns:a="http://schemas.openxmlformats.org/drawingml/2006/main" xmlns:r="http://schemas.openxmlformats.org/officeDocument/2006/relationships" xmlns:p="http://schemas.openxmlformats.org/presentationml/2006/main">
   <p:cSld>
     <p:spTree>
       <p:nvGrpSpPr>
@@ -3888,7 +3930,14 @@
         <p:cNvGrpSpPr/>
         <p:nvPr/>
       </p:nvGrpSpPr>
-      <p:grpSpPr/>
+      <p:grpSpPr>
+        <a:xfrm>
+          <a:off x="0" y="0"/>
+          <a:ext cx="0" cy="0"/>
+          <a:chOff x="0" y="0"/>
+          <a:chExt cx="0" cy="0"/>
+        </a:xfrm>
+      </p:grpSpPr>
       <p:sp>
         <p:nvSpPr>
           <p:cNvPr id="2" name="Rectangle 1"/>
@@ -3929,6 +3978,7 @@
           <a:lstStyle/>
           <a:p>
             <a:pPr algn="ctr"/>
+            <a:endParaRPr/>
           </a:p>
         </p:txBody>
       </p:sp>
@@ -4094,7 +4144,7 @@
 </file>
 
 <file path=ppt/slides/slide14.xml><?xml version="1.0" encoding="utf-8"?>
-<p:sld xmlns:a="http://schemas.openxmlformats.org/drawingml/2006/main" xmlns:p="http://schemas.openxmlformats.org/presentationml/2006/main" xmlns:r="http://schemas.openxmlformats.org/officeDocument/2006/relationships">
+<p:sld xmlns:a="http://schemas.openxmlformats.org/drawingml/2006/main" xmlns:r="http://schemas.openxmlformats.org/officeDocument/2006/relationships" xmlns:p="http://schemas.openxmlformats.org/presentationml/2006/main">
   <p:cSld>
     <p:spTree>
       <p:nvGrpSpPr>
@@ -4102,7 +4152,14 @@
         <p:cNvGrpSpPr/>
         <p:nvPr/>
       </p:nvGrpSpPr>
-      <p:grpSpPr/>
+      <p:grpSpPr>
+        <a:xfrm>
+          <a:off x="0" y="0"/>
+          <a:ext cx="0" cy="0"/>
+          <a:chOff x="0" y="0"/>
+          <a:chExt cx="0" cy="0"/>
+        </a:xfrm>
+      </p:grpSpPr>
       <p:sp>
         <p:nvSpPr>
           <p:cNvPr id="2" name="Rectangle 1"/>
@@ -4143,6 +4200,7 @@
           <a:lstStyle/>
           <a:p>
             <a:pPr algn="ctr"/>
+            <a:endParaRPr/>
           </a:p>
         </p:txBody>
       </p:sp>
@@ -4200,7 +4258,7 @@
 </file>
 
 <file path=ppt/slides/slide2.xml><?xml version="1.0" encoding="utf-8"?>
-<p:sld xmlns:a="http://schemas.openxmlformats.org/drawingml/2006/main" xmlns:p="http://schemas.openxmlformats.org/presentationml/2006/main" xmlns:r="http://schemas.openxmlformats.org/officeDocument/2006/relationships">
+<p:sld xmlns:a="http://schemas.openxmlformats.org/drawingml/2006/main" xmlns:r="http://schemas.openxmlformats.org/officeDocument/2006/relationships" xmlns:p="http://schemas.openxmlformats.org/presentationml/2006/main">
   <p:cSld>
     <p:spTree>
       <p:nvGrpSpPr>
@@ -4208,7 +4266,14 @@
         <p:cNvGrpSpPr/>
         <p:nvPr/>
       </p:nvGrpSpPr>
-      <p:grpSpPr/>
+      <p:grpSpPr>
+        <a:xfrm>
+          <a:off x="0" y="0"/>
+          <a:ext cx="0" cy="0"/>
+          <a:chOff x="0" y="0"/>
+          <a:chExt cx="0" cy="0"/>
+        </a:xfrm>
+      </p:grpSpPr>
       <p:sp>
         <p:nvSpPr>
           <p:cNvPr id="2" name="Rectangle 1"/>
@@ -4249,6 +4314,7 @@
           <a:lstStyle/>
           <a:p>
             <a:pPr algn="ctr"/>
+            <a:endParaRPr/>
           </a:p>
         </p:txBody>
       </p:sp>
@@ -4409,7 +4475,7 @@
 </file>
 
 <file path=ppt/slides/slide3.xml><?xml version="1.0" encoding="utf-8"?>
-<p:sld xmlns:a="http://schemas.openxmlformats.org/drawingml/2006/main" xmlns:p="http://schemas.openxmlformats.org/presentationml/2006/main" xmlns:r="http://schemas.openxmlformats.org/officeDocument/2006/relationships">
+<p:sld xmlns:a="http://schemas.openxmlformats.org/drawingml/2006/main" xmlns:r="http://schemas.openxmlformats.org/officeDocument/2006/relationships" xmlns:p="http://schemas.openxmlformats.org/presentationml/2006/main">
   <p:cSld>
     <p:spTree>
       <p:nvGrpSpPr>
@@ -4417,7 +4483,14 @@
         <p:cNvGrpSpPr/>
         <p:nvPr/>
       </p:nvGrpSpPr>
-      <p:grpSpPr/>
+      <p:grpSpPr>
+        <a:xfrm>
+          <a:off x="0" y="0"/>
+          <a:ext cx="0" cy="0"/>
+          <a:chOff x="0" y="0"/>
+          <a:chExt cx="0" cy="0"/>
+        </a:xfrm>
+      </p:grpSpPr>
       <p:sp>
         <p:nvSpPr>
           <p:cNvPr id="2" name="Rectangle 1"/>
@@ -4458,6 +4531,7 @@
           <a:lstStyle/>
           <a:p>
             <a:pPr algn="ctr"/>
+            <a:endParaRPr/>
           </a:p>
         </p:txBody>
       </p:sp>
@@ -4626,7 +4700,7 @@
 </file>
 
 <file path=ppt/slides/slide4.xml><?xml version="1.0" encoding="utf-8"?>
-<p:sld xmlns:a="http://schemas.openxmlformats.org/drawingml/2006/main" xmlns:p="http://schemas.openxmlformats.org/presentationml/2006/main" xmlns:r="http://schemas.openxmlformats.org/officeDocument/2006/relationships">
+<p:sld xmlns:a="http://schemas.openxmlformats.org/drawingml/2006/main" xmlns:r="http://schemas.openxmlformats.org/officeDocument/2006/relationships" xmlns:p="http://schemas.openxmlformats.org/presentationml/2006/main">
   <p:cSld>
     <p:spTree>
       <p:nvGrpSpPr>
@@ -4634,7 +4708,14 @@
         <p:cNvGrpSpPr/>
         <p:nvPr/>
       </p:nvGrpSpPr>
-      <p:grpSpPr/>
+      <p:grpSpPr>
+        <a:xfrm>
+          <a:off x="0" y="0"/>
+          <a:ext cx="0" cy="0"/>
+          <a:chOff x="0" y="0"/>
+          <a:chExt cx="0" cy="0"/>
+        </a:xfrm>
+      </p:grpSpPr>
       <p:sp>
         <p:nvSpPr>
           <p:cNvPr id="2" name="Rectangle 1"/>
@@ -4675,6 +4756,7 @@
           <a:lstStyle/>
           <a:p>
             <a:pPr algn="ctr"/>
+            <a:endParaRPr/>
           </a:p>
         </p:txBody>
       </p:sp>
@@ -4858,7 +4940,7 @@
 </file>
 
 <file path=ppt/slides/slide5.xml><?xml version="1.0" encoding="utf-8"?>
-<p:sld xmlns:a="http://schemas.openxmlformats.org/drawingml/2006/main" xmlns:p="http://schemas.openxmlformats.org/presentationml/2006/main" xmlns:r="http://schemas.openxmlformats.org/officeDocument/2006/relationships">
+<p:sld xmlns:a="http://schemas.openxmlformats.org/drawingml/2006/main" xmlns:r="http://schemas.openxmlformats.org/officeDocument/2006/relationships" xmlns:p="http://schemas.openxmlformats.org/presentationml/2006/main">
   <p:cSld>
     <p:spTree>
       <p:nvGrpSpPr>
@@ -4866,7 +4948,14 @@
         <p:cNvGrpSpPr/>
         <p:nvPr/>
       </p:nvGrpSpPr>
-      <p:grpSpPr/>
+      <p:grpSpPr>
+        <a:xfrm>
+          <a:off x="0" y="0"/>
+          <a:ext cx="0" cy="0"/>
+          <a:chOff x="0" y="0"/>
+          <a:chExt cx="0" cy="0"/>
+        </a:xfrm>
+      </p:grpSpPr>
       <p:sp>
         <p:nvSpPr>
           <p:cNvPr id="2" name="Rectangle 1"/>
@@ -4907,6 +4996,7 @@
           <a:lstStyle/>
           <a:p>
             <a:pPr algn="ctr"/>
+            <a:endParaRPr/>
           </a:p>
         </p:txBody>
       </p:sp>
@@ -5098,7 +5188,7 @@
 </file>
 
 <file path=ppt/slides/slide6.xml><?xml version="1.0" encoding="utf-8"?>
-<p:sld xmlns:a="http://schemas.openxmlformats.org/drawingml/2006/main" xmlns:p="http://schemas.openxmlformats.org/presentationml/2006/main" xmlns:r="http://schemas.openxmlformats.org/officeDocument/2006/relationships">
+<p:sld xmlns:a="http://schemas.openxmlformats.org/drawingml/2006/main" xmlns:r="http://schemas.openxmlformats.org/officeDocument/2006/relationships" xmlns:p="http://schemas.openxmlformats.org/presentationml/2006/main">
   <p:cSld>
     <p:spTree>
       <p:nvGrpSpPr>
@@ -5106,7 +5196,14 @@
         <p:cNvGrpSpPr/>
         <p:nvPr/>
       </p:nvGrpSpPr>
-      <p:grpSpPr/>
+      <p:grpSpPr>
+        <a:xfrm>
+          <a:off x="0" y="0"/>
+          <a:ext cx="0" cy="0"/>
+          <a:chOff x="0" y="0"/>
+          <a:chExt cx="0" cy="0"/>
+        </a:xfrm>
+      </p:grpSpPr>
       <p:sp>
         <p:nvSpPr>
           <p:cNvPr id="2" name="Rectangle 1"/>
@@ -5147,6 +5244,7 @@
           <a:lstStyle/>
           <a:p>
             <a:pPr algn="ctr"/>
+            <a:endParaRPr/>
           </a:p>
         </p:txBody>
       </p:sp>
@@ -5307,7 +5405,7 @@
 </file>
 
 <file path=ppt/slides/slide7.xml><?xml version="1.0" encoding="utf-8"?>
-<p:sld xmlns:a="http://schemas.openxmlformats.org/drawingml/2006/main" xmlns:p="http://schemas.openxmlformats.org/presentationml/2006/main" xmlns:r="http://schemas.openxmlformats.org/officeDocument/2006/relationships">
+<p:sld xmlns:a="http://schemas.openxmlformats.org/drawingml/2006/main" xmlns:r="http://schemas.openxmlformats.org/officeDocument/2006/relationships" xmlns:p="http://schemas.openxmlformats.org/presentationml/2006/main">
   <p:cSld>
     <p:spTree>
       <p:nvGrpSpPr>
@@ -5315,7 +5413,14 @@
         <p:cNvGrpSpPr/>
         <p:nvPr/>
       </p:nvGrpSpPr>
-      <p:grpSpPr/>
+      <p:grpSpPr>
+        <a:xfrm>
+          <a:off x="0" y="0"/>
+          <a:ext cx="0" cy="0"/>
+          <a:chOff x="0" y="0"/>
+          <a:chExt cx="0" cy="0"/>
+        </a:xfrm>
+      </p:grpSpPr>
       <p:sp>
         <p:nvSpPr>
           <p:cNvPr id="2" name="Rectangle 1"/>
@@ -5356,6 +5461,7 @@
           <a:lstStyle/>
           <a:p>
             <a:pPr algn="ctr"/>
+            <a:endParaRPr/>
           </a:p>
         </p:txBody>
       </p:sp>
@@ -5516,7 +5622,7 @@
 </file>
 
 <file path=ppt/slides/slide8.xml><?xml version="1.0" encoding="utf-8"?>
-<p:sld xmlns:a="http://schemas.openxmlformats.org/drawingml/2006/main" xmlns:p="http://schemas.openxmlformats.org/presentationml/2006/main" xmlns:r="http://schemas.openxmlformats.org/officeDocument/2006/relationships">
+<p:sld xmlns:a="http://schemas.openxmlformats.org/drawingml/2006/main" xmlns:r="http://schemas.openxmlformats.org/officeDocument/2006/relationships" xmlns:p="http://schemas.openxmlformats.org/presentationml/2006/main">
   <p:cSld>
     <p:spTree>
       <p:nvGrpSpPr>
@@ -5524,7 +5630,14 @@
         <p:cNvGrpSpPr/>
         <p:nvPr/>
       </p:nvGrpSpPr>
-      <p:grpSpPr/>
+      <p:grpSpPr>
+        <a:xfrm>
+          <a:off x="0" y="0"/>
+          <a:ext cx="0" cy="0"/>
+          <a:chOff x="0" y="0"/>
+          <a:chExt cx="0" cy="0"/>
+        </a:xfrm>
+      </p:grpSpPr>
       <p:sp>
         <p:nvSpPr>
           <p:cNvPr id="2" name="Rectangle 1"/>
@@ -5565,6 +5678,7 @@
           <a:lstStyle/>
           <a:p>
             <a:pPr algn="ctr"/>
+            <a:endParaRPr/>
           </a:p>
         </p:txBody>
       </p:sp>
@@ -5749,7 +5863,7 @@
 </file>
 
 <file path=ppt/slides/slide9.xml><?xml version="1.0" encoding="utf-8"?>
-<p:sld xmlns:a="http://schemas.openxmlformats.org/drawingml/2006/main" xmlns:p="http://schemas.openxmlformats.org/presentationml/2006/main" xmlns:r="http://schemas.openxmlformats.org/officeDocument/2006/relationships">
+<p:sld xmlns:a="http://schemas.openxmlformats.org/drawingml/2006/main" xmlns:r="http://schemas.openxmlformats.org/officeDocument/2006/relationships" xmlns:p="http://schemas.openxmlformats.org/presentationml/2006/main">
   <p:cSld>
     <p:spTree>
       <p:nvGrpSpPr>
@@ -5757,7 +5871,14 @@
         <p:cNvGrpSpPr/>
         <p:nvPr/>
       </p:nvGrpSpPr>
-      <p:grpSpPr/>
+      <p:grpSpPr>
+        <a:xfrm>
+          <a:off x="0" y="0"/>
+          <a:ext cx="0" cy="0"/>
+          <a:chOff x="0" y="0"/>
+          <a:chExt cx="0" cy="0"/>
+        </a:xfrm>
+      </p:grpSpPr>
       <p:sp>
         <p:nvSpPr>
           <p:cNvPr id="2" name="Rectangle 1"/>
@@ -5798,6 +5919,7 @@
           <a:lstStyle/>
           <a:p>
             <a:pPr algn="ctr"/>
+            <a:endParaRPr/>
           </a:p>
         </p:txBody>
       </p:sp>

--- a/presentation/url_detector.pptx
+++ b/presentation/url_detector.pptx
@@ -5,22 +5,25 @@
     <p:sldMasterId id="2147483648" r:id="rId1"/>
   </p:sldMasterIdLst>
   <p:sldIdLst>
-    <p:sldId id="256" r:id="rId2"/>
-    <p:sldId id="257" r:id="rId3"/>
-    <p:sldId id="258" r:id="rId4"/>
-    <p:sldId id="259" r:id="rId5"/>
-    <p:sldId id="260" r:id="rId6"/>
-    <p:sldId id="261" r:id="rId7"/>
-    <p:sldId id="262" r:id="rId8"/>
-    <p:sldId id="263" r:id="rId9"/>
-    <p:sldId id="264" r:id="rId10"/>
-    <p:sldId id="265" r:id="rId11"/>
-    <p:sldId id="266" r:id="rId12"/>
-    <p:sldId id="267" r:id="rId13"/>
-    <p:sldId id="268" r:id="rId14"/>
-    <p:sldId id="269" r:id="rId15"/>
+    <p:sldId id="256" r:id="rId7"/>
+    <p:sldId id="257" r:id="rId9"/>
+    <p:sldId id="258" r:id="rId10"/>
+    <p:sldId id="259" r:id="rId11"/>
+    <p:sldId id="260" r:id="rId12"/>
+    <p:sldId id="261" r:id="rId13"/>
+    <p:sldId id="262" r:id="rId14"/>
+    <p:sldId id="263" r:id="rId15"/>
+    <p:sldId id="264" r:id="rId16"/>
+    <p:sldId id="265" r:id="rId17"/>
+    <p:sldId id="266" r:id="rId18"/>
+    <p:sldId id="267" r:id="rId19"/>
+    <p:sldId id="268" r:id="rId20"/>
+    <p:sldId id="269" r:id="rId21"/>
+    <p:sldId id="270" r:id="rId22"/>
+    <p:sldId id="271" r:id="rId23"/>
+    <p:sldId id="272" r:id="rId24"/>
   </p:sldIdLst>
-  <p:sldSz cx="12192000" cy="6858000"/>
+  <p:sldSz cx="12191695" cy="6858000" type="screen4x3"/>
   <p:notesSz cx="6858000" cy="9144000"/>
   <p:defaultTextStyle>
     <a:defPPr>
@@ -117,23 +120,1547 @@
       </a:defRPr>
     </a:lvl9pPr>
   </p:defaultTextStyle>
-  <p:extLst>
-    <p:ext uri="{EFAFB233-063F-42B5-8137-9DF3F51BA10A}">
-      <p15:sldGuideLst xmlns:p15="http://schemas.microsoft.com/office/powerpoint/2012/main">
-        <p15:guide id="1" orient="horz" pos="2160">
-          <p15:clr>
-            <a:srgbClr val="A4A3A4"/>
-          </p15:clr>
-        </p15:guide>
-        <p15:guide id="2" pos="2880">
-          <p15:clr>
-            <a:srgbClr val="A4A3A4"/>
-          </p15:clr>
-        </p15:guide>
-      </p15:sldGuideLst>
-    </p:ext>
-  </p:extLst>
 </p:presentation>
+</file>
+
+<file path=ppt/notesMasters/notesMaster1.xml><?xml version="1.0" encoding="utf-8"?>
+<p:notesMaster xmlns:a="http://schemas.openxmlformats.org/drawingml/2006/main" xmlns:p="http://schemas.openxmlformats.org/presentationml/2006/main" xmlns:r="http://schemas.openxmlformats.org/officeDocument/2006/relationships">
+  <p:cSld>
+    <p:bg>
+      <p:bgRef idx="1001">
+        <a:schemeClr val="bg1"/>
+      </p:bgRef>
+    </p:bg>
+    <p:spTree>
+      <p:nvGrpSpPr>
+        <p:cNvPr id="1" name=""/>
+        <p:cNvGrpSpPr/>
+        <p:nvPr/>
+      </p:nvGrpSpPr>
+      <p:grpSpPr>
+        <a:xfrm>
+          <a:off x="0" y="0"/>
+          <a:ext cx="0" cy="0"/>
+          <a:chOff x="0" y="0"/>
+          <a:chExt cx="0" cy="0"/>
+        </a:xfrm>
+      </p:grpSpPr>
+      <p:sp>
+        <p:nvSpPr>
+          <p:cNvPr id="2" name="Header Placeholder 1"/>
+          <p:cNvSpPr>
+            <a:spLocks noGrp="1"/>
+          </p:cNvSpPr>
+          <p:nvPr>
+            <p:ph type="hdr" sz="quarter"/>
+          </p:nvPr>
+        </p:nvSpPr>
+        <p:spPr>
+          <a:xfrm>
+            <a:off x="0" y="0"/>
+            <a:ext cx="2971800" cy="457200"/>
+          </a:xfrm>
+          <a:prstGeom prst="rect">
+            <a:avLst/>
+          </a:prstGeom>
+        </p:spPr>
+        <p:txBody>
+          <a:bodyPr vert="horz" lIns="91440" tIns="45720" rIns="91440" bIns="45720" rtlCol="0"/>
+          <a:lstStyle>
+            <a:lvl1pPr algn="l">
+              <a:defRPr sz="1200"/>
+            </a:lvl1pPr>
+          </a:lstStyle>
+          <a:p>
+            <a:endParaRPr lang="en-US"/>
+          </a:p>
+        </p:txBody>
+      </p:sp>
+      <p:sp>
+        <p:nvSpPr>
+          <p:cNvPr id="3" name="Date Placeholder 2"/>
+          <p:cNvSpPr>
+            <a:spLocks noGrp="1"/>
+          </p:cNvSpPr>
+          <p:nvPr>
+            <p:ph type="dt" idx="1"/>
+          </p:nvPr>
+        </p:nvSpPr>
+        <p:spPr>
+          <a:xfrm>
+            <a:off x="3884613" y="0"/>
+            <a:ext cx="2971800" cy="457200"/>
+          </a:xfrm>
+          <a:prstGeom prst="rect">
+            <a:avLst/>
+          </a:prstGeom>
+        </p:spPr>
+        <p:txBody>
+          <a:bodyPr vert="horz" lIns="91440" tIns="45720" rIns="91440" bIns="45720" rtlCol="0"/>
+          <a:lstStyle>
+            <a:lvl1pPr algn="r">
+              <a:defRPr sz="1200"/>
+            </a:lvl1pPr>
+          </a:lstStyle>
+          <a:p>
+            <a:fld id="{0F89C1C7-3DCD-1040-A9CF-14679D8B5DDD}" type="datetimeFigureOut">
+              <a:rPr lang="en-US" smtClean="0"/>
+              <a:t>10/17/16</a:t>
+            </a:fld>
+            <a:endParaRPr lang="en-US"/>
+          </a:p>
+        </p:txBody>
+      </p:sp>
+      <p:sp>
+        <p:nvSpPr>
+          <p:cNvPr id="4" name="Slide Image Placeholder 3"/>
+          <p:cNvSpPr>
+            <a:spLocks noGrp="1" noRot="1" noChangeAspect="1"/>
+          </p:cNvSpPr>
+          <p:nvPr>
+            <p:ph type="sldImg" idx="2"/>
+          </p:nvPr>
+        </p:nvSpPr>
+        <p:spPr>
+          <a:xfrm>
+            <a:off x="1143000" y="685800"/>
+            <a:ext cx="4572000" cy="3429000"/>
+          </a:xfrm>
+          <a:prstGeom prst="rect">
+            <a:avLst/>
+          </a:prstGeom>
+          <a:noFill/>
+          <a:ln w="12700">
+            <a:solidFill>
+              <a:prstClr val="black"/>
+            </a:solidFill>
+          </a:ln>
+        </p:spPr>
+        <p:txBody>
+          <a:bodyPr vert="horz" lIns="91440" tIns="45720" rIns="91440" bIns="45720" rtlCol="0" anchor="ctr"/>
+          <a:lstStyle/>
+          <a:p>
+            <a:endParaRPr lang="en-US"/>
+          </a:p>
+        </p:txBody>
+      </p:sp>
+      <p:sp>
+        <p:nvSpPr>
+          <p:cNvPr id="5" name="Notes Placeholder 4"/>
+          <p:cNvSpPr>
+            <a:spLocks noGrp="1"/>
+          </p:cNvSpPr>
+          <p:nvPr>
+            <p:ph type="body" sz="quarter" idx="3"/>
+          </p:nvPr>
+        </p:nvSpPr>
+        <p:spPr>
+          <a:xfrm>
+            <a:off x="685800" y="4343400"/>
+            <a:ext cx="5486400" cy="4114800"/>
+          </a:xfrm>
+          <a:prstGeom prst="rect">
+            <a:avLst/>
+          </a:prstGeom>
+        </p:spPr>
+        <p:txBody>
+          <a:bodyPr vert="horz" lIns="91440" tIns="45720" rIns="91440" bIns="45720" rtlCol="0"/>
+          <a:lstStyle/>
+          <a:p>
+            <a:pPr lvl="0"/>
+            <a:r>
+              <a:rPr lang="en-US" smtClean="0"/>
+              <a:t>Click to edit Master text styles</a:t>
+            </a:r>
+          </a:p>
+          <a:p>
+            <a:pPr lvl="1"/>
+            <a:r>
+              <a:rPr lang="en-US" smtClean="0"/>
+              <a:t>Second level</a:t>
+            </a:r>
+          </a:p>
+          <a:p>
+            <a:pPr lvl="2"/>
+            <a:r>
+              <a:rPr lang="en-US" smtClean="0"/>
+              <a:t>Third level</a:t>
+            </a:r>
+          </a:p>
+          <a:p>
+            <a:pPr lvl="3"/>
+            <a:r>
+              <a:rPr lang="en-US" smtClean="0"/>
+              <a:t>Fourth level</a:t>
+            </a:r>
+          </a:p>
+          <a:p>
+            <a:pPr lvl="4"/>
+            <a:r>
+              <a:rPr lang="en-US" smtClean="0"/>
+              <a:t>Fifth level</a:t>
+            </a:r>
+            <a:endParaRPr lang="en-US"/>
+          </a:p>
+        </p:txBody>
+      </p:sp>
+      <p:sp>
+        <p:nvSpPr>
+          <p:cNvPr id="6" name="Footer Placeholder 5"/>
+          <p:cNvSpPr>
+            <a:spLocks noGrp="1"/>
+          </p:cNvSpPr>
+          <p:nvPr>
+            <p:ph type="ftr" sz="quarter" idx="4"/>
+          </p:nvPr>
+        </p:nvSpPr>
+        <p:spPr>
+          <a:xfrm>
+            <a:off x="0" y="8685213"/>
+            <a:ext cx="2971800" cy="457200"/>
+          </a:xfrm>
+          <a:prstGeom prst="rect">
+            <a:avLst/>
+          </a:prstGeom>
+        </p:spPr>
+        <p:txBody>
+          <a:bodyPr vert="horz" lIns="91440" tIns="45720" rIns="91440" bIns="45720" rtlCol="0" anchor="b"/>
+          <a:lstStyle>
+            <a:lvl1pPr algn="l">
+              <a:defRPr sz="1200"/>
+            </a:lvl1pPr>
+          </a:lstStyle>
+          <a:p>
+            <a:endParaRPr lang="en-US"/>
+          </a:p>
+        </p:txBody>
+      </p:sp>
+      <p:sp>
+        <p:nvSpPr>
+          <p:cNvPr id="7" name="Slide Number Placeholder 6"/>
+          <p:cNvSpPr>
+            <a:spLocks noGrp="1"/>
+          </p:cNvSpPr>
+          <p:nvPr>
+            <p:ph type="sldNum" sz="quarter" idx="5"/>
+          </p:nvPr>
+        </p:nvSpPr>
+        <p:spPr>
+          <a:xfrm>
+            <a:off x="3884613" y="8685213"/>
+            <a:ext cx="2971800" cy="457200"/>
+          </a:xfrm>
+          <a:prstGeom prst="rect">
+            <a:avLst/>
+          </a:prstGeom>
+        </p:spPr>
+        <p:txBody>
+          <a:bodyPr vert="horz" lIns="91440" tIns="45720" rIns="91440" bIns="45720" rtlCol="0" anchor="b"/>
+          <a:lstStyle>
+            <a:lvl1pPr algn="r">
+              <a:defRPr sz="1200"/>
+            </a:lvl1pPr>
+          </a:lstStyle>
+          <a:p>
+            <a:fld id="{BB5E49A5-4136-284D-997B-48E1D791AD67}" type="slidenum">
+              <a:rPr lang="en-US" smtClean="0"/>
+              <a:t>‹#›</a:t>
+            </a:fld>
+            <a:endParaRPr lang="en-US"/>
+          </a:p>
+        </p:txBody>
+      </p:sp>
+    </p:spTree>
+    <p:extLst>
+      <p:ext uri="{BB962C8B-B14F-4D97-AF65-F5344CB8AC3E}">
+        <p14:creationId xmlns:p14="http://schemas.microsoft.com/office/powerpoint/2010/main" val="2623252185"/>
+      </p:ext>
+    </p:extLst>
+  </p:cSld>
+  <p:clrMap bg1="lt1" tx1="dk1" bg2="lt2" tx2="dk2" accent1="accent1" accent2="accent2" accent3="accent3" accent4="accent4" accent5="accent5" accent6="accent6" hlink="hlink" folHlink="folHlink"/>
+  <p:notesStyle>
+    <a:lvl1pPr marL="0" algn="l" defTabSz="457200" rtl="0" eaLnBrk="1" latinLnBrk="0" hangingPunct="1">
+      <a:defRPr sz="1200" kern="1200">
+        <a:solidFill>
+          <a:schemeClr val="tx1"/>
+        </a:solidFill>
+        <a:latin typeface="+mn-lt"/>
+        <a:ea typeface="+mn-ea"/>
+        <a:cs typeface="+mn-cs"/>
+      </a:defRPr>
+    </a:lvl1pPr>
+    <a:lvl2pPr marL="457200" algn="l" defTabSz="457200" rtl="0" eaLnBrk="1" latinLnBrk="0" hangingPunct="1">
+      <a:defRPr sz="1200" kern="1200">
+        <a:solidFill>
+          <a:schemeClr val="tx1"/>
+        </a:solidFill>
+        <a:latin typeface="+mn-lt"/>
+        <a:ea typeface="+mn-ea"/>
+        <a:cs typeface="+mn-cs"/>
+      </a:defRPr>
+    </a:lvl2pPr>
+    <a:lvl3pPr marL="914400" algn="l" defTabSz="457200" rtl="0" eaLnBrk="1" latinLnBrk="0" hangingPunct="1">
+      <a:defRPr sz="1200" kern="1200">
+        <a:solidFill>
+          <a:schemeClr val="tx1"/>
+        </a:solidFill>
+        <a:latin typeface="+mn-lt"/>
+        <a:ea typeface="+mn-ea"/>
+        <a:cs typeface="+mn-cs"/>
+      </a:defRPr>
+    </a:lvl3pPr>
+    <a:lvl4pPr marL="1371600" algn="l" defTabSz="457200" rtl="0" eaLnBrk="1" latinLnBrk="0" hangingPunct="1">
+      <a:defRPr sz="1200" kern="1200">
+        <a:solidFill>
+          <a:schemeClr val="tx1"/>
+        </a:solidFill>
+        <a:latin typeface="+mn-lt"/>
+        <a:ea typeface="+mn-ea"/>
+        <a:cs typeface="+mn-cs"/>
+      </a:defRPr>
+    </a:lvl4pPr>
+    <a:lvl5pPr marL="1828800" algn="l" defTabSz="457200" rtl="0" eaLnBrk="1" latinLnBrk="0" hangingPunct="1">
+      <a:defRPr sz="1200" kern="1200">
+        <a:solidFill>
+          <a:schemeClr val="tx1"/>
+        </a:solidFill>
+        <a:latin typeface="+mn-lt"/>
+        <a:ea typeface="+mn-ea"/>
+        <a:cs typeface="+mn-cs"/>
+      </a:defRPr>
+    </a:lvl5pPr>
+    <a:lvl6pPr marL="2286000" algn="l" defTabSz="457200" rtl="0" eaLnBrk="1" latinLnBrk="0" hangingPunct="1">
+      <a:defRPr sz="1200" kern="1200">
+        <a:solidFill>
+          <a:schemeClr val="tx1"/>
+        </a:solidFill>
+        <a:latin typeface="+mn-lt"/>
+        <a:ea typeface="+mn-ea"/>
+        <a:cs typeface="+mn-cs"/>
+      </a:defRPr>
+    </a:lvl6pPr>
+    <a:lvl7pPr marL="2743200" algn="l" defTabSz="457200" rtl="0" eaLnBrk="1" latinLnBrk="0" hangingPunct="1">
+      <a:defRPr sz="1200" kern="1200">
+        <a:solidFill>
+          <a:schemeClr val="tx1"/>
+        </a:solidFill>
+        <a:latin typeface="+mn-lt"/>
+        <a:ea typeface="+mn-ea"/>
+        <a:cs typeface="+mn-cs"/>
+      </a:defRPr>
+    </a:lvl7pPr>
+    <a:lvl8pPr marL="3200400" algn="l" defTabSz="457200" rtl="0" eaLnBrk="1" latinLnBrk="0" hangingPunct="1">
+      <a:defRPr sz="1200" kern="1200">
+        <a:solidFill>
+          <a:schemeClr val="tx1"/>
+        </a:solidFill>
+        <a:latin typeface="+mn-lt"/>
+        <a:ea typeface="+mn-ea"/>
+        <a:cs typeface="+mn-cs"/>
+      </a:defRPr>
+    </a:lvl8pPr>
+    <a:lvl9pPr marL="3657600" algn="l" defTabSz="457200" rtl="0" eaLnBrk="1" latinLnBrk="0" hangingPunct="1">
+      <a:defRPr sz="1200" kern="1200">
+        <a:solidFill>
+          <a:schemeClr val="tx1"/>
+        </a:solidFill>
+        <a:latin typeface="+mn-lt"/>
+        <a:ea typeface="+mn-ea"/>
+        <a:cs typeface="+mn-cs"/>
+      </a:defRPr>
+    </a:lvl9pPr>
+  </p:notesStyle>
+</p:notesMaster>
+</file>
+
+<file path=ppt/notesSlides/notesSlide1.xml><?xml version="1.0" encoding="utf-8"?>
+<p:notes xmlns:a="http://schemas.openxmlformats.org/drawingml/2006/main" xmlns:p="http://schemas.openxmlformats.org/presentationml/2006/main" xmlns:r="http://schemas.openxmlformats.org/officeDocument/2006/relationships">
+  <p:cSld>
+    <p:spTree>
+      <p:nvGrpSpPr>
+        <p:cNvPr id="1" name=""/>
+        <p:cNvGrpSpPr/>
+        <p:nvPr/>
+      </p:nvGrpSpPr>
+      <p:grpSpPr>
+        <a:xfrm>
+          <a:off x="0" y="0"/>
+          <a:ext cx="0" cy="0"/>
+          <a:chOff x="0" y="0"/>
+          <a:chExt cx="0" cy="0"/>
+        </a:xfrm>
+      </p:grpSpPr>
+      <p:sp>
+        <p:nvSpPr>
+          <p:cNvPr id="2" name="Slide Image Placeholder 1"/>
+          <p:cNvSpPr>
+            <a:spLocks noGrp="1"/>
+          </p:cNvSpPr>
+          <p:nvPr>
+            <p:ph type="sldImg" idx="2"/>
+          </p:nvPr>
+        </p:nvSpPr>
+        <p:spPr/>
+      </p:sp>
+      <p:sp>
+        <p:nvSpPr>
+          <p:cNvPr id="3" name="Notes Placeholder 2"/>
+          <p:cNvSpPr>
+            <a:spLocks noGrp="1"/>
+          </p:cNvSpPr>
+          <p:nvPr>
+            <p:ph type="body" idx="3" sz="quarter"/>
+          </p:nvPr>
+        </p:nvSpPr>
+        <p:spPr/>
+        <p:txBody>
+          <a:bodyPr/>
+          <a:lstStyle/>
+          <a:p>
+            <a:r>
+              <a:t>~15 minute talk. Opening line: 'Can you tell if a link is phishing just from the URL string itself — no clicking, no page content?' I built a detector that does exactly that, got a near-perfect score, and then spent most of the project proving that score doesn't mean what it looks like. That honest audit is the real contribution.</a:t>
+            </a:r>
+          </a:p>
+        </p:txBody>
+      </p:sp>
+      <p:sp>
+        <p:nvSpPr>
+          <p:cNvPr id="4" name="Slide Number Placeholder 3"/>
+          <p:cNvSpPr>
+            <a:spLocks noGrp="1"/>
+          </p:cNvSpPr>
+          <p:nvPr>
+            <p:ph type="sldNum" idx="5" sz="quarter"/>
+          </p:nvPr>
+        </p:nvSpPr>
+        <p:spPr/>
+      </p:sp>
+    </p:spTree>
+  </p:cSld>
+  <p:clrMapOvr>
+    <a:masterClrMapping/>
+  </p:clrMapOvr>
+</p:notes>
+</file>
+
+<file path=ppt/notesSlides/notesSlide10.xml><?xml version="1.0" encoding="utf-8"?>
+<p:notes xmlns:a="http://schemas.openxmlformats.org/drawingml/2006/main" xmlns:p="http://schemas.openxmlformats.org/presentationml/2006/main" xmlns:r="http://schemas.openxmlformats.org/officeDocument/2006/relationships">
+  <p:cSld>
+    <p:spTree>
+      <p:nvGrpSpPr>
+        <p:cNvPr id="1" name=""/>
+        <p:cNvGrpSpPr/>
+        <p:nvPr/>
+      </p:nvGrpSpPr>
+      <p:grpSpPr>
+        <a:xfrm>
+          <a:off x="0" y="0"/>
+          <a:ext cx="0" cy="0"/>
+          <a:chOff x="0" y="0"/>
+          <a:chExt cx="0" cy="0"/>
+        </a:xfrm>
+      </p:grpSpPr>
+      <p:sp>
+        <p:nvSpPr>
+          <p:cNvPr id="2" name="Slide Image Placeholder 1"/>
+          <p:cNvSpPr>
+            <a:spLocks noGrp="1"/>
+          </p:cNvSpPr>
+          <p:nvPr>
+            <p:ph type="sldImg" idx="2"/>
+          </p:nvPr>
+        </p:nvSpPr>
+        <p:spPr/>
+      </p:sp>
+      <p:sp>
+        <p:nvSpPr>
+          <p:cNvPr id="3" name="Notes Placeholder 2"/>
+          <p:cNvSpPr>
+            <a:spLocks noGrp="1"/>
+          </p:cNvSpPr>
+          <p:nvPr>
+            <p:ph type="body" idx="3" sz="quarter"/>
+          </p:nvPr>
+        </p:nvSpPr>
+        <p:spPr/>
+        <p:txBody>
+          <a:bodyPr/>
+          <a:lstStyle/>
+          <a:p>
+            <a:r>
+              <a:t>[COURSE: explainability / SHAP.] SHAP (Lundberg &amp; Lee 2017) assigns each feature a fair share of credit for a prediction, borrowing the Shapley-value idea from game theory — it's faithful, not a guess. Result: is_https dominates by ~3×. So Discovery 1 (the HTTPS artifact) and Discovery 2 (SHAP) independently point at the same feature. That sets up the attacks: if the model leans on HTTPS, an attacker just needs to flip that.</a:t>
+            </a:r>
+          </a:p>
+        </p:txBody>
+      </p:sp>
+      <p:sp>
+        <p:nvSpPr>
+          <p:cNvPr id="4" name="Slide Number Placeholder 3"/>
+          <p:cNvSpPr>
+            <a:spLocks noGrp="1"/>
+          </p:cNvSpPr>
+          <p:nvPr>
+            <p:ph type="sldNum" idx="5" sz="quarter"/>
+          </p:nvPr>
+        </p:nvSpPr>
+        <p:spPr/>
+      </p:sp>
+    </p:spTree>
+  </p:cSld>
+  <p:clrMapOvr>
+    <a:masterClrMapping/>
+  </p:clrMapOvr>
+</p:notes>
+</file>
+
+<file path=ppt/notesSlides/notesSlide11.xml><?xml version="1.0" encoding="utf-8"?>
+<p:notes xmlns:a="http://schemas.openxmlformats.org/drawingml/2006/main" xmlns:p="http://schemas.openxmlformats.org/presentationml/2006/main" xmlns:r="http://schemas.openxmlformats.org/officeDocument/2006/relationships">
+  <p:cSld>
+    <p:spTree>
+      <p:nvGrpSpPr>
+        <p:cNvPr id="1" name=""/>
+        <p:cNvGrpSpPr/>
+        <p:nvPr/>
+      </p:nvGrpSpPr>
+      <p:grpSpPr>
+        <a:xfrm>
+          <a:off x="0" y="0"/>
+          <a:ext cx="0" cy="0"/>
+          <a:chOff x="0" y="0"/>
+          <a:chExt cx="0" cy="0"/>
+        </a:xfrm>
+      </p:grpSpPr>
+      <p:sp>
+        <p:nvSpPr>
+          <p:cNvPr id="2" name="Slide Image Placeholder 1"/>
+          <p:cNvSpPr>
+            <a:spLocks noGrp="1"/>
+          </p:cNvSpPr>
+          <p:nvPr>
+            <p:ph type="sldImg" idx="2"/>
+          </p:nvPr>
+        </p:nvSpPr>
+        <p:spPr/>
+      </p:sp>
+      <p:sp>
+        <p:nvSpPr>
+          <p:cNvPr id="3" name="Notes Placeholder 2"/>
+          <p:cNvSpPr>
+            <a:spLocks noGrp="1"/>
+          </p:cNvSpPr>
+          <p:nvPr>
+            <p:ph type="body" idx="3" sz="quarter"/>
+          </p:nvPr>
+        </p:nvSpPr>
+        <p:spPr/>
+        <p:txBody>
+          <a:bodyPr/>
+          <a:lstStyle/>
+          <a:p>
+            <a:r>
+              <a:t>[COURSE: adversarial ML — evasion, perturbation, homoglyphs, adversarial training.] The attacker keeps the URL working but reshapes its surface. Two findings: (1) character-level attacks (Cyrillic look-alikes, typosquats) barely move recall — a structural detector doesn't care about the exact letters, the opposite of a bag-of-words text model, which those same tricks defeat. Nice complementarity with my partner. (2) But the artifact is the hole: just serving over HTTPS cuts recall to 0.67, and a clean bare HTTPS domain evades completely (recall 0). This is what real phishing does — host on legitimate cloud infrastructure.</a:t>
+            </a:r>
+          </a:p>
+        </p:txBody>
+      </p:sp>
+      <p:sp>
+        <p:nvSpPr>
+          <p:cNvPr id="4" name="Slide Number Placeholder 3"/>
+          <p:cNvSpPr>
+            <a:spLocks noGrp="1"/>
+          </p:cNvSpPr>
+          <p:nvPr>
+            <p:ph type="sldNum" idx="5" sz="quarter"/>
+          </p:nvPr>
+        </p:nvSpPr>
+        <p:spPr/>
+      </p:sp>
+    </p:spTree>
+  </p:cSld>
+  <p:clrMapOvr>
+    <a:masterClrMapping/>
+  </p:clrMapOvr>
+</p:notes>
+</file>
+
+<file path=ppt/notesSlides/notesSlide12.xml><?xml version="1.0" encoding="utf-8"?>
+<p:notes xmlns:a="http://schemas.openxmlformats.org/drawingml/2006/main" xmlns:p="http://schemas.openxmlformats.org/presentationml/2006/main" xmlns:r="http://schemas.openxmlformats.org/officeDocument/2006/relationships">
+  <p:cSld>
+    <p:spTree>
+      <p:nvGrpSpPr>
+        <p:cNvPr id="1" name=""/>
+        <p:cNvGrpSpPr/>
+        <p:nvPr/>
+      </p:nvGrpSpPr>
+      <p:grpSpPr>
+        <a:xfrm>
+          <a:off x="0" y="0"/>
+          <a:ext cx="0" cy="0"/>
+          <a:chOff x="0" y="0"/>
+          <a:chExt cx="0" cy="0"/>
+        </a:xfrm>
+      </p:grpSpPr>
+      <p:sp>
+        <p:nvSpPr>
+          <p:cNvPr id="2" name="Slide Image Placeholder 1"/>
+          <p:cNvSpPr>
+            <a:spLocks noGrp="1"/>
+          </p:cNvSpPr>
+          <p:nvPr>
+            <p:ph type="sldImg" idx="2"/>
+          </p:nvPr>
+        </p:nvSpPr>
+        <p:spPr/>
+      </p:sp>
+      <p:sp>
+        <p:nvSpPr>
+          <p:cNvPr id="3" name="Notes Placeholder 2"/>
+          <p:cNvSpPr>
+            <a:spLocks noGrp="1"/>
+          </p:cNvSpPr>
+          <p:nvPr>
+            <p:ph type="body" idx="3" sz="quarter"/>
+          </p:nvPr>
+        </p:nvSpPr>
+        <p:spPr/>
+        <p:txBody>
+          <a:bodyPr/>
+          <a:lstStyle/>
+          <a:p>
+            <a:r>
+              <a:t>[COURSE: abnormality / anomaly detection — Isolation Forest, LOF.] A weaker-assumption sanity check: with no phishing labels at all, unsupervised detectors trained only on legit URLs still get AUC 0.83 / 0.94. Isolation Forest isolates anomalies quickly with random splits; LOF flags points in low-density regions relative to their neighbours. Useful, but still built on the same structural signals, so they inherit the same fragility.</a:t>
+            </a:r>
+          </a:p>
+        </p:txBody>
+      </p:sp>
+      <p:sp>
+        <p:nvSpPr>
+          <p:cNvPr id="4" name="Slide Number Placeholder 3"/>
+          <p:cNvSpPr>
+            <a:spLocks noGrp="1"/>
+          </p:cNvSpPr>
+          <p:nvPr>
+            <p:ph type="sldNum" idx="5" sz="quarter"/>
+          </p:nvPr>
+        </p:nvSpPr>
+        <p:spPr/>
+      </p:sp>
+    </p:spTree>
+  </p:cSld>
+  <p:clrMapOvr>
+    <a:masterClrMapping/>
+  </p:clrMapOvr>
+</p:notes>
+</file>
+
+<file path=ppt/notesSlides/notesSlide13.xml><?xml version="1.0" encoding="utf-8"?>
+<p:notes xmlns:a="http://schemas.openxmlformats.org/drawingml/2006/main" xmlns:p="http://schemas.openxmlformats.org/presentationml/2006/main" xmlns:r="http://schemas.openxmlformats.org/officeDocument/2006/relationships">
+  <p:cSld>
+    <p:spTree>
+      <p:nvGrpSpPr>
+        <p:cNvPr id="1" name=""/>
+        <p:cNvGrpSpPr/>
+        <p:nvPr/>
+      </p:nvGrpSpPr>
+      <p:grpSpPr>
+        <a:xfrm>
+          <a:off x="0" y="0"/>
+          <a:ext cx="0" cy="0"/>
+          <a:chOff x="0" y="0"/>
+          <a:chExt cx="0" cy="0"/>
+        </a:xfrm>
+      </p:grpSpPr>
+      <p:sp>
+        <p:nvSpPr>
+          <p:cNvPr id="2" name="Slide Image Placeholder 1"/>
+          <p:cNvSpPr>
+            <a:spLocks noGrp="1"/>
+          </p:cNvSpPr>
+          <p:nvPr>
+            <p:ph type="sldImg" idx="2"/>
+          </p:nvPr>
+        </p:nvSpPr>
+        <p:spPr/>
+      </p:sp>
+      <p:sp>
+        <p:nvSpPr>
+          <p:cNvPr id="3" name="Notes Placeholder 2"/>
+          <p:cNvSpPr>
+            <a:spLocks noGrp="1"/>
+          </p:cNvSpPr>
+          <p:nvPr>
+            <p:ph type="body" idx="3" sz="quarter"/>
+          </p:nvPr>
+        </p:nvSpPr>
+        <p:spPr/>
+        <p:txBody>
+          <a:bodyPr/>
+          <a:lstStyle/>
+          <a:p>
+            <a:r>
+              <a:t>[COURSE: domain shift / concept drift; AUC.] The real test — a totally different dataset. The near-perfect model collapses to F1 0.67, AUC 0.43. AUC below 0.5 is the key idea: AUC is the chance a random phishing URL scores above a random legit one; 0.5 is a coin flip. Below 0.5 means the model is systematically ranking legit ABOVE phishing — it learned a real pattern but that pattern is inverted in the new data. I call this 'confidently backwards': not clueless, but confidently wrong. The boxplot shows why: in-distribution the classes separate cleanly; on the new data both pile up at ~1.0. Yet it still catches 100% of live current phishing, because real phishing today is still structurally messy — a genuinely nuanced result.</a:t>
+            </a:r>
+          </a:p>
+        </p:txBody>
+      </p:sp>
+      <p:sp>
+        <p:nvSpPr>
+          <p:cNvPr id="4" name="Slide Number Placeholder 3"/>
+          <p:cNvSpPr>
+            <a:spLocks noGrp="1"/>
+          </p:cNvSpPr>
+          <p:nvPr>
+            <p:ph type="sldNum" idx="5" sz="quarter"/>
+          </p:nvPr>
+        </p:nvSpPr>
+        <p:spPr/>
+      </p:sp>
+    </p:spTree>
+  </p:cSld>
+  <p:clrMapOvr>
+    <a:masterClrMapping/>
+  </p:clrMapOvr>
+</p:notes>
+</file>
+
+<file path=ppt/notesSlides/notesSlide14.xml><?xml version="1.0" encoding="utf-8"?>
+<p:notes xmlns:a="http://schemas.openxmlformats.org/drawingml/2006/main" xmlns:p="http://schemas.openxmlformats.org/presentationml/2006/main" xmlns:r="http://schemas.openxmlformats.org/officeDocument/2006/relationships">
+  <p:cSld>
+    <p:spTree>
+      <p:nvGrpSpPr>
+        <p:cNvPr id="1" name=""/>
+        <p:cNvGrpSpPr/>
+        <p:nvPr/>
+      </p:nvGrpSpPr>
+      <p:grpSpPr>
+        <a:xfrm>
+          <a:off x="0" y="0"/>
+          <a:ext cx="0" cy="0"/>
+          <a:chOff x="0" y="0"/>
+          <a:chExt cx="0" cy="0"/>
+        </a:xfrm>
+      </p:grpSpPr>
+      <p:sp>
+        <p:nvSpPr>
+          <p:cNvPr id="2" name="Slide Image Placeholder 1"/>
+          <p:cNvSpPr>
+            <a:spLocks noGrp="1"/>
+          </p:cNvSpPr>
+          <p:nvPr>
+            <p:ph type="sldImg" idx="2"/>
+          </p:nvPr>
+        </p:nvSpPr>
+        <p:spPr/>
+      </p:sp>
+      <p:sp>
+        <p:nvSpPr>
+          <p:cNvPr id="3" name="Notes Placeholder 2"/>
+          <p:cNvSpPr>
+            <a:spLocks noGrp="1"/>
+          </p:cNvSpPr>
+          <p:nvPr>
+            <p:ph type="body" idx="3" sz="quarter"/>
+          </p:nvPr>
+        </p:nvSpPr>
+        <p:spPr/>
+        <p:txBody>
+          <a:bodyPr/>
+          <a:lstStyle/>
+          <a:p>
+            <a:r>
+              <a:t>[COURSE: distance metrics — Kolmogorov–Smirnov, Wasserstein/EMD.] This closes the loop. I measure, feature by feature, how different the two datasets are, using two standard distances: KS (largest gap between the two cumulative distribution curves) and Wasserstein (the earth-mover distance — how much probability mass must move, and how far). The most-shifted features turn out to be precisely is_https, path_len, n_subdomain — the same features SHAP flagged as the model's top drivers. So the collapse isn't mysterious: the model built its decision on the three least-transferable signals. Two different tools (SHAP + distance metrics) corroborate one causal story.</a:t>
+            </a:r>
+          </a:p>
+        </p:txBody>
+      </p:sp>
+      <p:sp>
+        <p:nvSpPr>
+          <p:cNvPr id="4" name="Slide Number Placeholder 3"/>
+          <p:cNvSpPr>
+            <a:spLocks noGrp="1"/>
+          </p:cNvSpPr>
+          <p:nvPr>
+            <p:ph type="sldNum" idx="5" sz="quarter"/>
+          </p:nvPr>
+        </p:nvSpPr>
+        <p:spPr/>
+      </p:sp>
+    </p:spTree>
+  </p:cSld>
+  <p:clrMapOvr>
+    <a:masterClrMapping/>
+  </p:clrMapOvr>
+</p:notes>
+</file>
+
+<file path=ppt/notesSlides/notesSlide15.xml><?xml version="1.0" encoding="utf-8"?>
+<p:notes xmlns:a="http://schemas.openxmlformats.org/drawingml/2006/main" xmlns:p="http://schemas.openxmlformats.org/presentationml/2006/main" xmlns:r="http://schemas.openxmlformats.org/officeDocument/2006/relationships">
+  <p:cSld>
+    <p:spTree>
+      <p:nvGrpSpPr>
+        <p:cNvPr id="1" name=""/>
+        <p:cNvGrpSpPr/>
+        <p:nvPr/>
+      </p:nvGrpSpPr>
+      <p:grpSpPr>
+        <a:xfrm>
+          <a:off x="0" y="0"/>
+          <a:ext cx="0" cy="0"/>
+          <a:chOff x="0" y="0"/>
+          <a:chExt cx="0" cy="0"/>
+        </a:xfrm>
+      </p:grpSpPr>
+      <p:sp>
+        <p:nvSpPr>
+          <p:cNvPr id="2" name="Slide Image Placeholder 1"/>
+          <p:cNvSpPr>
+            <a:spLocks noGrp="1"/>
+          </p:cNvSpPr>
+          <p:nvPr>
+            <p:ph type="sldImg" idx="2"/>
+          </p:nvPr>
+        </p:nvSpPr>
+        <p:spPr/>
+      </p:sp>
+      <p:sp>
+        <p:nvSpPr>
+          <p:cNvPr id="3" name="Notes Placeholder 2"/>
+          <p:cNvSpPr>
+            <a:spLocks noGrp="1"/>
+          </p:cNvSpPr>
+          <p:nvPr>
+            <p:ph type="body" idx="3" sz="quarter"/>
+          </p:nvPr>
+        </p:nvSpPr>
+        <p:spPr/>
+        <p:txBody>
+          <a:bodyPr/>
+          <a:lstStyle/>
+          <a:p>
+            <a:r>
+              <a:t>The honest bottom line. The detector isn't worthless — it's fast, private, interpretable, and resists cheap character tricks, and it catches today's messy phishing. But it can't stand alone: it's an artifact-driven benchmark score that an attacker beats by using legitimate hosting, and it doesn't survive a change of dataset. Hence fusion with the content channel — the two look at completely independent evidence.</a:t>
+            </a:r>
+          </a:p>
+        </p:txBody>
+      </p:sp>
+      <p:sp>
+        <p:nvSpPr>
+          <p:cNvPr id="4" name="Slide Number Placeholder 3"/>
+          <p:cNvSpPr>
+            <a:spLocks noGrp="1"/>
+          </p:cNvSpPr>
+          <p:nvPr>
+            <p:ph type="sldNum" idx="5" sz="quarter"/>
+          </p:nvPr>
+        </p:nvSpPr>
+        <p:spPr/>
+      </p:sp>
+    </p:spTree>
+  </p:cSld>
+  <p:clrMapOvr>
+    <a:masterClrMapping/>
+  </p:clrMapOvr>
+</p:notes>
+</file>
+
+<file path=ppt/notesSlides/notesSlide16.xml><?xml version="1.0" encoding="utf-8"?>
+<p:notes xmlns:a="http://schemas.openxmlformats.org/drawingml/2006/main" xmlns:p="http://schemas.openxmlformats.org/presentationml/2006/main" xmlns:r="http://schemas.openxmlformats.org/officeDocument/2006/relationships">
+  <p:cSld>
+    <p:spTree>
+      <p:nvGrpSpPr>
+        <p:cNvPr id="1" name=""/>
+        <p:cNvGrpSpPr/>
+        <p:nvPr/>
+      </p:nvGrpSpPr>
+      <p:grpSpPr>
+        <a:xfrm>
+          <a:off x="0" y="0"/>
+          <a:ext cx="0" cy="0"/>
+          <a:chOff x="0" y="0"/>
+          <a:chExt cx="0" cy="0"/>
+        </a:xfrm>
+      </p:grpSpPr>
+      <p:sp>
+        <p:nvSpPr>
+          <p:cNvPr id="2" name="Slide Image Placeholder 1"/>
+          <p:cNvSpPr>
+            <a:spLocks noGrp="1"/>
+          </p:cNvSpPr>
+          <p:nvPr>
+            <p:ph type="sldImg" idx="2"/>
+          </p:nvPr>
+        </p:nvSpPr>
+        <p:spPr/>
+      </p:sp>
+      <p:sp>
+        <p:nvSpPr>
+          <p:cNvPr id="3" name="Notes Placeholder 2"/>
+          <p:cNvSpPr>
+            <a:spLocks noGrp="1"/>
+          </p:cNvSpPr>
+          <p:nvPr>
+            <p:ph type="body" idx="3" sz="quarter"/>
+          </p:nvPr>
+        </p:nvSpPr>
+        <p:spPr/>
+        <p:txBody>
+          <a:bodyPr/>
+          <a:lstStyle/>
+          <a:p>
+            <a:r>
+              <a:t>The explicit concept map — this is the slide to point to if the lecturer asks 'where did you use what we taught?'. Every item here is earned in a specific experiment, and the mapping is also in the report appendix and the notebook's final section.</a:t>
+            </a:r>
+          </a:p>
+        </p:txBody>
+      </p:sp>
+      <p:sp>
+        <p:nvSpPr>
+          <p:cNvPr id="4" name="Slide Number Placeholder 3"/>
+          <p:cNvSpPr>
+            <a:spLocks noGrp="1"/>
+          </p:cNvSpPr>
+          <p:nvPr>
+            <p:ph type="sldNum" idx="5" sz="quarter"/>
+          </p:nvPr>
+        </p:nvSpPr>
+        <p:spPr/>
+      </p:sp>
+    </p:spTree>
+  </p:cSld>
+  <p:clrMapOvr>
+    <a:masterClrMapping/>
+  </p:clrMapOvr>
+</p:notes>
+</file>
+
+<file path=ppt/notesSlides/notesSlide17.xml><?xml version="1.0" encoding="utf-8"?>
+<p:notes xmlns:a="http://schemas.openxmlformats.org/drawingml/2006/main" xmlns:p="http://schemas.openxmlformats.org/presentationml/2006/main" xmlns:r="http://schemas.openxmlformats.org/officeDocument/2006/relationships">
+  <p:cSld>
+    <p:spTree>
+      <p:nvGrpSpPr>
+        <p:cNvPr id="1" name=""/>
+        <p:cNvGrpSpPr/>
+        <p:nvPr/>
+      </p:nvGrpSpPr>
+      <p:grpSpPr>
+        <a:xfrm>
+          <a:off x="0" y="0"/>
+          <a:ext cx="0" cy="0"/>
+          <a:chOff x="0" y="0"/>
+          <a:chExt cx="0" cy="0"/>
+        </a:xfrm>
+      </p:grpSpPr>
+      <p:sp>
+        <p:nvSpPr>
+          <p:cNvPr id="2" name="Slide Image Placeholder 1"/>
+          <p:cNvSpPr>
+            <a:spLocks noGrp="1"/>
+          </p:cNvSpPr>
+          <p:nvPr>
+            <p:ph type="sldImg" idx="2"/>
+          </p:nvPr>
+        </p:nvSpPr>
+        <p:spPr/>
+      </p:sp>
+      <p:sp>
+        <p:nvSpPr>
+          <p:cNvPr id="3" name="Notes Placeholder 2"/>
+          <p:cNvSpPr>
+            <a:spLocks noGrp="1"/>
+          </p:cNvSpPr>
+          <p:nvPr>
+            <p:ph type="body" idx="3" sz="quarter"/>
+          </p:nvPr>
+        </p:nvSpPr>
+        <p:spPr/>
+        <p:txBody>
+          <a:bodyPr/>
+          <a:lstStyle/>
+          <a:p>
+            <a:r>
+              <a:t>Likely questions: (1) 'Why is your score so high?' → it's an artifact, that's the whole point. (2) 'Did you cause it by preprocessing?' → no; only dedup + split, no rebalancing, hash logged. (3) 'Biggest weakness?' → doesn't generalise (AUC 0.43) and evaded by legit hosting → fusion. (4) 'Why not deep learning / URLNet?' → interpretability, so I can name the artifact.</a:t>
+            </a:r>
+          </a:p>
+        </p:txBody>
+      </p:sp>
+      <p:sp>
+        <p:nvSpPr>
+          <p:cNvPr id="4" name="Slide Number Placeholder 3"/>
+          <p:cNvSpPr>
+            <a:spLocks noGrp="1"/>
+          </p:cNvSpPr>
+          <p:nvPr>
+            <p:ph type="sldNum" idx="5" sz="quarter"/>
+          </p:nvPr>
+        </p:nvSpPr>
+        <p:spPr/>
+      </p:sp>
+    </p:spTree>
+  </p:cSld>
+  <p:clrMapOvr>
+    <a:masterClrMapping/>
+  </p:clrMapOvr>
+</p:notes>
+</file>
+
+<file path=ppt/notesSlides/notesSlide2.xml><?xml version="1.0" encoding="utf-8"?>
+<p:notes xmlns:a="http://schemas.openxmlformats.org/drawingml/2006/main" xmlns:p="http://schemas.openxmlformats.org/presentationml/2006/main" xmlns:r="http://schemas.openxmlformats.org/officeDocument/2006/relationships">
+  <p:cSld>
+    <p:spTree>
+      <p:nvGrpSpPr>
+        <p:cNvPr id="1" name=""/>
+        <p:cNvGrpSpPr/>
+        <p:nvPr/>
+      </p:nvGrpSpPr>
+      <p:grpSpPr>
+        <a:xfrm>
+          <a:off x="0" y="0"/>
+          <a:ext cx="0" cy="0"/>
+          <a:chOff x="0" y="0"/>
+          <a:chExt cx="0" cy="0"/>
+        </a:xfrm>
+      </p:grpSpPr>
+      <p:sp>
+        <p:nvSpPr>
+          <p:cNvPr id="2" name="Slide Image Placeholder 1"/>
+          <p:cNvSpPr>
+            <a:spLocks noGrp="1"/>
+          </p:cNvSpPr>
+          <p:nvPr>
+            <p:ph type="sldImg" idx="2"/>
+          </p:nvPr>
+        </p:nvSpPr>
+        <p:spPr/>
+      </p:sp>
+      <p:sp>
+        <p:nvSpPr>
+          <p:cNvPr id="3" name="Notes Placeholder 2"/>
+          <p:cNvSpPr>
+            <a:spLocks noGrp="1"/>
+          </p:cNvSpPr>
+          <p:nvPr>
+            <p:ph type="body" idx="3" sz="quarter"/>
+          </p:nvPr>
+        </p:nvSpPr>
+        <p:spPr/>
+        <p:txBody>
+          <a:bodyPr/>
+          <a:lstStyle/>
+          <a:p>
+            <a:r>
+              <a:t>Frame the two-part project: my partner reads the words of the email; I read the link. Both are meant to be fused later (out of scope here). The plan is deliberately 'build then break' — the 20% that is model-building sets up the 80% that is critical evaluation.</a:t>
+            </a:r>
+          </a:p>
+        </p:txBody>
+      </p:sp>
+      <p:sp>
+        <p:nvSpPr>
+          <p:cNvPr id="4" name="Slide Number Placeholder 3"/>
+          <p:cNvSpPr>
+            <a:spLocks noGrp="1"/>
+          </p:cNvSpPr>
+          <p:nvPr>
+            <p:ph type="sldNum" idx="5" sz="quarter"/>
+          </p:nvPr>
+        </p:nvSpPr>
+        <p:spPr/>
+      </p:sp>
+    </p:spTree>
+  </p:cSld>
+  <p:clrMapOvr>
+    <a:masterClrMapping/>
+  </p:clrMapOvr>
+</p:notes>
+</file>
+
+<file path=ppt/notesSlides/notesSlide3.xml><?xml version="1.0" encoding="utf-8"?>
+<p:notes xmlns:a="http://schemas.openxmlformats.org/drawingml/2006/main" xmlns:p="http://schemas.openxmlformats.org/presentationml/2006/main" xmlns:r="http://schemas.openxmlformats.org/officeDocument/2006/relationships">
+  <p:cSld>
+    <p:spTree>
+      <p:nvGrpSpPr>
+        <p:cNvPr id="1" name=""/>
+        <p:cNvGrpSpPr/>
+        <p:nvPr/>
+      </p:nvGrpSpPr>
+      <p:grpSpPr>
+        <a:xfrm>
+          <a:off x="0" y="0"/>
+          <a:ext cx="0" cy="0"/>
+          <a:chOff x="0" y="0"/>
+          <a:chExt cx="0" cy="0"/>
+        </a:xfrm>
+      </p:grpSpPr>
+      <p:sp>
+        <p:nvSpPr>
+          <p:cNvPr id="2" name="Slide Image Placeholder 1"/>
+          <p:cNvSpPr>
+            <a:spLocks noGrp="1"/>
+          </p:cNvSpPr>
+          <p:nvPr>
+            <p:ph type="sldImg" idx="2"/>
+          </p:nvPr>
+        </p:nvSpPr>
+        <p:spPr/>
+      </p:sp>
+      <p:sp>
+        <p:nvSpPr>
+          <p:cNvPr id="3" name="Notes Placeholder 2"/>
+          <p:cNvSpPr>
+            <a:spLocks noGrp="1"/>
+          </p:cNvSpPr>
+          <p:nvPr>
+            <p:ph type="body" idx="3" sz="quarter"/>
+          </p:nvPr>
+        </p:nvSpPr>
+        <p:spPr/>
+        <p:txBody>
+          <a:bodyPr/>
+          <a:lstStyle/>
+          <a:p>
+            <a:r>
+              <a:t>[COURSE: EDA + train/val/test methodology.] Data prep was minimal on purpose: only a label standardisation (1=phishing), dropping empties, and de-duplicating identical URLs before the split so the same URL can't appear in train and test. I did NOT rebalance classes, remove outliers, or scale the raw data — so the near-perfect score I'm about to show is a property of the RAW data, not of my cleaning. Right figure: the EDA already looks suspicious — the classes separate almost perfectly on trivial quantities, which never happens with genuinely hard data.</a:t>
+            </a:r>
+          </a:p>
+        </p:txBody>
+      </p:sp>
+      <p:sp>
+        <p:nvSpPr>
+          <p:cNvPr id="4" name="Slide Number Placeholder 3"/>
+          <p:cNvSpPr>
+            <a:spLocks noGrp="1"/>
+          </p:cNvSpPr>
+          <p:nvPr>
+            <p:ph type="sldNum" idx="5" sz="quarter"/>
+          </p:nvPr>
+        </p:nvSpPr>
+        <p:spPr/>
+      </p:sp>
+    </p:spTree>
+  </p:cSld>
+  <p:clrMapOvr>
+    <a:masterClrMapping/>
+  </p:clrMapOvr>
+</p:notes>
+</file>
+
+<file path=ppt/notesSlides/notesSlide4.xml><?xml version="1.0" encoding="utf-8"?>
+<p:notes xmlns:a="http://schemas.openxmlformats.org/drawingml/2006/main" xmlns:p="http://schemas.openxmlformats.org/presentationml/2006/main" xmlns:r="http://schemas.openxmlformats.org/officeDocument/2006/relationships">
+  <p:cSld>
+    <p:spTree>
+      <p:nvGrpSpPr>
+        <p:cNvPr id="1" name=""/>
+        <p:cNvGrpSpPr/>
+        <p:nvPr/>
+      </p:nvGrpSpPr>
+      <p:grpSpPr>
+        <a:xfrm>
+          <a:off x="0" y="0"/>
+          <a:ext cx="0" cy="0"/>
+          <a:chOff x="0" y="0"/>
+          <a:chExt cx="0" cy="0"/>
+        </a:xfrm>
+      </p:grpSpPr>
+      <p:sp>
+        <p:nvSpPr>
+          <p:cNvPr id="2" name="Slide Image Placeholder 1"/>
+          <p:cNvSpPr>
+            <a:spLocks noGrp="1"/>
+          </p:cNvSpPr>
+          <p:nvPr>
+            <p:ph type="sldImg" idx="2"/>
+          </p:nvPr>
+        </p:nvSpPr>
+        <p:spPr/>
+      </p:sp>
+      <p:sp>
+        <p:nvSpPr>
+          <p:cNvPr id="3" name="Notes Placeholder 2"/>
+          <p:cNvSpPr>
+            <a:spLocks noGrp="1"/>
+          </p:cNvSpPr>
+          <p:nvPr>
+            <p:ph type="body" idx="3" sz="quarter"/>
+          </p:nvPr>
+        </p:nvSpPr>
+        <p:spPr/>
+        <p:txBody>
+          <a:bodyPr/>
+          <a:lstStyle/>
+          <a:p>
+            <a:r>
+              <a:t>[COURSE: feature engineering.] This is the key design choice. Text has to be turned into numbers somehow — my partner uses TF-IDF (term frequency × inverse document frequency) over words. A URL isn't a sentence; it's structured (scheme://host/path?query). So I hand-engineer 40 numeric features straight from the string. I deliberately avoided a black-box deep model (like URLNet) because interpretability is the whole point: when I find the near-perfect score is an artifact, I want to name exactly which feature is responsible — which a black box would hide.</a:t>
+            </a:r>
+          </a:p>
+        </p:txBody>
+      </p:sp>
+      <p:sp>
+        <p:nvSpPr>
+          <p:cNvPr id="4" name="Slide Number Placeholder 3"/>
+          <p:cNvSpPr>
+            <a:spLocks noGrp="1"/>
+          </p:cNvSpPr>
+          <p:nvPr>
+            <p:ph type="sldNum" idx="5" sz="quarter"/>
+          </p:nvPr>
+        </p:nvSpPr>
+        <p:spPr/>
+      </p:sp>
+    </p:spTree>
+  </p:cSld>
+  <p:clrMapOvr>
+    <a:masterClrMapping/>
+  </p:clrMapOvr>
+</p:notes>
+</file>
+
+<file path=ppt/notesSlides/notesSlide5.xml><?xml version="1.0" encoding="utf-8"?>
+<p:notes xmlns:a="http://schemas.openxmlformats.org/drawingml/2006/main" xmlns:p="http://schemas.openxmlformats.org/presentationml/2006/main" xmlns:r="http://schemas.openxmlformats.org/officeDocument/2006/relationships">
+  <p:cSld>
+    <p:spTree>
+      <p:nvGrpSpPr>
+        <p:cNvPr id="1" name=""/>
+        <p:cNvGrpSpPr/>
+        <p:nvPr/>
+      </p:nvGrpSpPr>
+      <p:grpSpPr>
+        <a:xfrm>
+          <a:off x="0" y="0"/>
+          <a:ext cx="0" cy="0"/>
+          <a:chOff x="0" y="0"/>
+          <a:chExt cx="0" cy="0"/>
+        </a:xfrm>
+      </p:grpSpPr>
+      <p:sp>
+        <p:nvSpPr>
+          <p:cNvPr id="2" name="Slide Image Placeholder 1"/>
+          <p:cNvSpPr>
+            <a:spLocks noGrp="1"/>
+          </p:cNvSpPr>
+          <p:nvPr>
+            <p:ph type="sldImg" idx="2"/>
+          </p:nvPr>
+        </p:nvSpPr>
+        <p:spPr/>
+      </p:sp>
+      <p:sp>
+        <p:nvSpPr>
+          <p:cNvPr id="3" name="Notes Placeholder 2"/>
+          <p:cNvSpPr>
+            <a:spLocks noGrp="1"/>
+          </p:cNvSpPr>
+          <p:nvPr>
+            <p:ph type="body" idx="3" sz="quarter"/>
+          </p:nvPr>
+        </p:nvSpPr>
+        <p:spPr/>
+        <p:txBody>
+          <a:bodyPr/>
+          <a:lstStyle/>
+          <a:p>
+            <a:r>
+              <a:t>Walk the six families briefly. Lexical = size and punctuation of the string. Host/domain = structure of the hostname (an IP literal instead of a domain name is suspicious). TLD = the suffix; some cheap TLDs (.tk, .xyz) are over-represented in abuse feeds. Entropy and Brand each have real theory — next slide. Scheme/encoding includes HTTPS (which turns out to be the villain of the story) and punycode, the xn-- encoding used to register look-alike international-character domains.</a:t>
+            </a:r>
+          </a:p>
+        </p:txBody>
+      </p:sp>
+      <p:sp>
+        <p:nvSpPr>
+          <p:cNvPr id="4" name="Slide Number Placeholder 3"/>
+          <p:cNvSpPr>
+            <a:spLocks noGrp="1"/>
+          </p:cNvSpPr>
+          <p:nvPr>
+            <p:ph type="sldNum" idx="5" sz="quarter"/>
+          </p:nvPr>
+        </p:nvSpPr>
+        <p:spPr/>
+      </p:sp>
+    </p:spTree>
+  </p:cSld>
+  <p:clrMapOvr>
+    <a:masterClrMapping/>
+  </p:clrMapOvr>
+</p:notes>
+</file>
+
+<file path=ppt/notesSlides/notesSlide6.xml><?xml version="1.0" encoding="utf-8"?>
+<p:notes xmlns:a="http://schemas.openxmlformats.org/drawingml/2006/main" xmlns:p="http://schemas.openxmlformats.org/presentationml/2006/main" xmlns:r="http://schemas.openxmlformats.org/officeDocument/2006/relationships">
+  <p:cSld>
+    <p:spTree>
+      <p:nvGrpSpPr>
+        <p:cNvPr id="1" name=""/>
+        <p:cNvGrpSpPr/>
+        <p:nvPr/>
+      </p:nvGrpSpPr>
+      <p:grpSpPr>
+        <a:xfrm>
+          <a:off x="0" y="0"/>
+          <a:ext cx="0" cy="0"/>
+          <a:chOff x="0" y="0"/>
+          <a:chExt cx="0" cy="0"/>
+        </a:xfrm>
+      </p:grpSpPr>
+      <p:sp>
+        <p:nvSpPr>
+          <p:cNvPr id="2" name="Slide Image Placeholder 1"/>
+          <p:cNvSpPr>
+            <a:spLocks noGrp="1"/>
+          </p:cNvSpPr>
+          <p:nvPr>
+            <p:ph type="sldImg" idx="2"/>
+          </p:nvPr>
+        </p:nvSpPr>
+        <p:spPr/>
+      </p:sp>
+      <p:sp>
+        <p:nvSpPr>
+          <p:cNvPr id="3" name="Notes Placeholder 2"/>
+          <p:cNvSpPr>
+            <a:spLocks noGrp="1"/>
+          </p:cNvSpPr>
+          <p:nvPr>
+            <p:ph type="body" idx="3" sz="quarter"/>
+          </p:nvPr>
+        </p:nvSpPr>
+        <p:spPr/>
+        <p:txBody>
+          <a:bodyPr/>
+          <a:lstStyle/>
+          <a:p>
+            <a:r>
+              <a:t>[COURSE: Shannon entropy / information theory; edit distance.] Entropy formula: sum over the character distribution of the host, p·log2(p). Intuitively it measures unpredictability — a real brand name is low-entropy, a random string is high-entropy. Levenshtein distance is the classic string-similarity measure, computed by dynamic programming; paypa1→paypal is one substitution, so distance 1. Domains within edit distance 1–2 of a known brand get flagged as typosquats. These two features are where the URL side borrows the same math toolkit as the rest of the course.</a:t>
+            </a:r>
+          </a:p>
+        </p:txBody>
+      </p:sp>
+      <p:sp>
+        <p:nvSpPr>
+          <p:cNvPr id="4" name="Slide Number Placeholder 3"/>
+          <p:cNvSpPr>
+            <a:spLocks noGrp="1"/>
+          </p:cNvSpPr>
+          <p:nvPr>
+            <p:ph type="sldNum" idx="5" sz="quarter"/>
+          </p:nvPr>
+        </p:nvSpPr>
+        <p:spPr/>
+      </p:sp>
+    </p:spTree>
+  </p:cSld>
+  <p:clrMapOvr>
+    <a:masterClrMapping/>
+  </p:clrMapOvr>
+</p:notes>
+</file>
+
+<file path=ppt/notesSlides/notesSlide7.xml><?xml version="1.0" encoding="utf-8"?>
+<p:notes xmlns:a="http://schemas.openxmlformats.org/drawingml/2006/main" xmlns:p="http://schemas.openxmlformats.org/presentationml/2006/main" xmlns:r="http://schemas.openxmlformats.org/officeDocument/2006/relationships">
+  <p:cSld>
+    <p:spTree>
+      <p:nvGrpSpPr>
+        <p:cNvPr id="1" name=""/>
+        <p:cNvGrpSpPr/>
+        <p:nvPr/>
+      </p:nvGrpSpPr>
+      <p:grpSpPr>
+        <a:xfrm>
+          <a:off x="0" y="0"/>
+          <a:ext cx="0" cy="0"/>
+          <a:chOff x="0" y="0"/>
+          <a:chExt cx="0" cy="0"/>
+        </a:xfrm>
+      </p:grpSpPr>
+      <p:sp>
+        <p:nvSpPr>
+          <p:cNvPr id="2" name="Slide Image Placeholder 1"/>
+          <p:cNvSpPr>
+            <a:spLocks noGrp="1"/>
+          </p:cNvSpPr>
+          <p:nvPr>
+            <p:ph type="sldImg" idx="2"/>
+          </p:nvPr>
+        </p:nvSpPr>
+        <p:spPr/>
+      </p:sp>
+      <p:sp>
+        <p:nvSpPr>
+          <p:cNvPr id="3" name="Notes Placeholder 2"/>
+          <p:cNvSpPr>
+            <a:spLocks noGrp="1"/>
+          </p:cNvSpPr>
+          <p:nvPr>
+            <p:ph type="body" idx="3" sz="quarter"/>
+          </p:nvPr>
+        </p:nvSpPr>
+        <p:spPr/>
+        <p:txBody>
+          <a:bodyPr/>
+          <a:lstStyle/>
+          <a:p>
+            <a:r>
+              <a:t>[COURSE: the accuracy paradox.] This is the model you 'got' in the first round. It's excellent — and that's the problem. The decomposition is the first alarm: a single provided column scores 0.995, meaning it's essentially a copy of the answer key (leakage). And the accuracy paradox: 57% of the data is legit, so a do-nothing model looks 57% accurate while catching zero phishing — which is why I never report accuracy alone. Everything after this slide is a 'discovery' about why the perfect score is fake.</a:t>
+            </a:r>
+          </a:p>
+        </p:txBody>
+      </p:sp>
+      <p:sp>
+        <p:nvSpPr>
+          <p:cNvPr id="4" name="Slide Number Placeholder 3"/>
+          <p:cNvSpPr>
+            <a:spLocks noGrp="1"/>
+          </p:cNvSpPr>
+          <p:nvPr>
+            <p:ph type="sldNum" idx="5" sz="quarter"/>
+          </p:nvPr>
+        </p:nvSpPr>
+        <p:spPr/>
+      </p:sp>
+    </p:spTree>
+  </p:cSld>
+  <p:clrMapOvr>
+    <a:masterClrMapping/>
+  </p:clrMapOvr>
+</p:notes>
+</file>
+
+<file path=ppt/notesSlides/notesSlide8.xml><?xml version="1.0" encoding="utf-8"?>
+<p:notes xmlns:a="http://schemas.openxmlformats.org/drawingml/2006/main" xmlns:p="http://schemas.openxmlformats.org/presentationml/2006/main" xmlns:r="http://schemas.openxmlformats.org/officeDocument/2006/relationships">
+  <p:cSld>
+    <p:spTree>
+      <p:nvGrpSpPr>
+        <p:cNvPr id="1" name=""/>
+        <p:cNvGrpSpPr/>
+        <p:nvPr/>
+      </p:nvGrpSpPr>
+      <p:grpSpPr>
+        <a:xfrm>
+          <a:off x="0" y="0"/>
+          <a:ext cx="0" cy="0"/>
+          <a:chOff x="0" y="0"/>
+          <a:chExt cx="0" cy="0"/>
+        </a:xfrm>
+      </p:grpSpPr>
+      <p:sp>
+        <p:nvSpPr>
+          <p:cNvPr id="2" name="Slide Image Placeholder 1"/>
+          <p:cNvSpPr>
+            <a:spLocks noGrp="1"/>
+          </p:cNvSpPr>
+          <p:nvPr>
+            <p:ph type="sldImg" idx="2"/>
+          </p:nvPr>
+        </p:nvSpPr>
+        <p:spPr/>
+      </p:sp>
+      <p:sp>
+        <p:nvSpPr>
+          <p:cNvPr id="3" name="Notes Placeholder 2"/>
+          <p:cNvSpPr>
+            <a:spLocks noGrp="1"/>
+          </p:cNvSpPr>
+          <p:nvPr>
+            <p:ph type="body" idx="3" sz="quarter"/>
+          </p:nvPr>
+        </p:nvSpPr>
+        <p:spPr/>
+        <p:txBody>
+          <a:bodyPr/>
+          <a:lstStyle/>
+          <a:p>
+            <a:r>
+              <a:t>Discovery 1: WHY is it perfect? Legit URLs are 100% HTTPS, phishing only 49% — a 51-point gap baked into how the two classes were gathered. The model is basically an HTTPS detector. This is the core critical finding: near-perfect benchmark scores measure dataset construction, not the phishing problem. Note the irony — in the real world phishing is mostly HTTPS now, so this learned rule is actually backwards outside the dataset.</a:t>
+            </a:r>
+          </a:p>
+        </p:txBody>
+      </p:sp>
+      <p:sp>
+        <p:nvSpPr>
+          <p:cNvPr id="4" name="Slide Number Placeholder 3"/>
+          <p:cNvSpPr>
+            <a:spLocks noGrp="1"/>
+          </p:cNvSpPr>
+          <p:nvPr>
+            <p:ph type="sldNum" idx="5" sz="quarter"/>
+          </p:nvPr>
+        </p:nvSpPr>
+        <p:spPr/>
+      </p:sp>
+    </p:spTree>
+  </p:cSld>
+  <p:clrMapOvr>
+    <a:masterClrMapping/>
+  </p:clrMapOvr>
+</p:notes>
+</file>
+
+<file path=ppt/notesSlides/notesSlide9.xml><?xml version="1.0" encoding="utf-8"?>
+<p:notes xmlns:a="http://schemas.openxmlformats.org/drawingml/2006/main" xmlns:p="http://schemas.openxmlformats.org/presentationml/2006/main" xmlns:r="http://schemas.openxmlformats.org/officeDocument/2006/relationships">
+  <p:cSld>
+    <p:spTree>
+      <p:nvGrpSpPr>
+        <p:cNvPr id="1" name=""/>
+        <p:cNvGrpSpPr/>
+        <p:nvPr/>
+      </p:nvGrpSpPr>
+      <p:grpSpPr>
+        <a:xfrm>
+          <a:off x="0" y="0"/>
+          <a:ext cx="0" cy="0"/>
+          <a:chOff x="0" y="0"/>
+          <a:chExt cx="0" cy="0"/>
+        </a:xfrm>
+      </p:grpSpPr>
+      <p:sp>
+        <p:nvSpPr>
+          <p:cNvPr id="2" name="Slide Image Placeholder 1"/>
+          <p:cNvSpPr>
+            <a:spLocks noGrp="1"/>
+          </p:cNvSpPr>
+          <p:nvPr>
+            <p:ph type="sldImg" idx="2"/>
+          </p:nvPr>
+        </p:nvSpPr>
+        <p:spPr/>
+      </p:sp>
+      <p:sp>
+        <p:nvSpPr>
+          <p:cNvPr id="3" name="Notes Placeholder 2"/>
+          <p:cNvSpPr>
+            <a:spLocks noGrp="1"/>
+          </p:cNvSpPr>
+          <p:nvPr>
+            <p:ph type="body" idx="3" sz="quarter"/>
+          </p:nvPr>
+        </p:nvSpPr>
+        <p:spPr/>
+        <p:txBody>
+          <a:bodyPr/>
+          <a:lstStyle/>
+          <a:p>
+            <a:r>
+              <a:t>[COURSE: evaluation metrics + statistical validity.] Explain the two that get asked about. MCC = Matthews Correlation Coefficient: computed from true/false positives and negatives all four together, it ranges −1 (perfectly wrong) to +1 (perfect), 0 = random. Unlike accuracy or even F1, you can't fake a good MCC by exploiting the majority class — that's why it's the honest single number under imbalance. Bootstrap CI: instead of trusting one number from one test set, I resample the test set with replacement 1000 times, recompute the metric each time, and report the middle 95% — it tells me how much the number would wobble, so I don't over-read a 0.001 difference. McNemar does the same job for comparing two models.</a:t>
+            </a:r>
+          </a:p>
+        </p:txBody>
+      </p:sp>
+      <p:sp>
+        <p:nvSpPr>
+          <p:cNvPr id="4" name="Slide Number Placeholder 3"/>
+          <p:cNvSpPr>
+            <a:spLocks noGrp="1"/>
+          </p:cNvSpPr>
+          <p:nvPr>
+            <p:ph type="sldNum" idx="5" sz="quarter"/>
+          </p:nvPr>
+        </p:nvSpPr>
+        <p:spPr/>
+      </p:sp>
+    </p:spTree>
+  </p:cSld>
+  <p:clrMapOvr>
+    <a:masterClrMapping/>
+  </p:clrMapOvr>
+</p:notes>
 </file>
 
 <file path=ppt/slideLayouts/slideLayout1.xml><?xml version="1.0" encoding="utf-8"?>
@@ -174,9 +1701,10 @@
           <a:lstStyle/>
           <a:p>
             <a:r>
-              <a:rPr lang="en-US"/>
+              <a:rPr lang="en-US" smtClean="0"/>
               <a:t>Click to edit Master title style</a:t>
             </a:r>
+            <a:endParaRPr lang="en-US"/>
           </a:p>
         </p:txBody>
       </p:sp>
@@ -292,9 +1820,10 @@
           </a:lstStyle>
           <a:p>
             <a:r>
-              <a:rPr lang="en-US"/>
+              <a:rPr lang="en-US" smtClean="0"/>
               <a:t>Click to edit Master subtitle style</a:t>
             </a:r>
+            <a:endParaRPr lang="en-US"/>
           </a:p>
         </p:txBody>
       </p:sp>
@@ -315,7 +1844,7 @@
           <a:p>
             <a:fld id="{5BCAD085-E8A6-8845-BD4E-CB4CCA059FC4}" type="datetimeFigureOut">
               <a:rPr lang="en-US" smtClean="0"/>
-              <a:t>7/21/2026</a:t>
+              <a:t>1/27/13</a:t>
             </a:fld>
             <a:endParaRPr lang="en-US"/>
           </a:p>
@@ -409,9 +1938,10 @@
           <a:lstStyle/>
           <a:p>
             <a:r>
-              <a:rPr lang="en-US"/>
+              <a:rPr lang="en-US" smtClean="0"/>
               <a:t>Click to edit Master title style</a:t>
             </a:r>
+            <a:endParaRPr lang="en-US"/>
           </a:p>
         </p:txBody>
       </p:sp>
@@ -432,37 +1962,38 @@
           <a:p>
             <a:pPr lvl="0"/>
             <a:r>
-              <a:rPr lang="en-US"/>
+              <a:rPr lang="en-US" smtClean="0"/>
               <a:t>Click to edit Master text styles</a:t>
             </a:r>
           </a:p>
           <a:p>
             <a:pPr lvl="1"/>
             <a:r>
-              <a:rPr lang="en-US"/>
+              <a:rPr lang="en-US" smtClean="0"/>
               <a:t>Second level</a:t>
             </a:r>
           </a:p>
           <a:p>
             <a:pPr lvl="2"/>
             <a:r>
-              <a:rPr lang="en-US"/>
+              <a:rPr lang="en-US" smtClean="0"/>
               <a:t>Third level</a:t>
             </a:r>
           </a:p>
           <a:p>
             <a:pPr lvl="3"/>
             <a:r>
-              <a:rPr lang="en-US"/>
+              <a:rPr lang="en-US" smtClean="0"/>
               <a:t>Fourth level</a:t>
             </a:r>
           </a:p>
           <a:p>
             <a:pPr lvl="4"/>
             <a:r>
-              <a:rPr lang="en-US"/>
+              <a:rPr lang="en-US" smtClean="0"/>
               <a:t>Fifth level</a:t>
             </a:r>
+            <a:endParaRPr lang="en-US"/>
           </a:p>
         </p:txBody>
       </p:sp>
@@ -483,7 +2014,7 @@
           <a:p>
             <a:fld id="{5BCAD085-E8A6-8845-BD4E-CB4CCA059FC4}" type="datetimeFigureOut">
               <a:rPr lang="en-US" smtClean="0"/>
-              <a:t>7/21/2026</a:t>
+              <a:t>1/27/13</a:t>
             </a:fld>
             <a:endParaRPr lang="en-US"/>
           </a:p>
@@ -582,9 +2113,10 @@
           <a:lstStyle/>
           <a:p>
             <a:r>
-              <a:rPr lang="en-US"/>
+              <a:rPr lang="en-US" smtClean="0"/>
               <a:t>Click to edit Master title style</a:t>
             </a:r>
+            <a:endParaRPr lang="en-US"/>
           </a:p>
         </p:txBody>
       </p:sp>
@@ -610,37 +2142,38 @@
           <a:p>
             <a:pPr lvl="0"/>
             <a:r>
-              <a:rPr lang="en-US"/>
+              <a:rPr lang="en-US" smtClean="0"/>
               <a:t>Click to edit Master text styles</a:t>
             </a:r>
           </a:p>
           <a:p>
             <a:pPr lvl="1"/>
             <a:r>
-              <a:rPr lang="en-US"/>
+              <a:rPr lang="en-US" smtClean="0"/>
               <a:t>Second level</a:t>
             </a:r>
           </a:p>
           <a:p>
             <a:pPr lvl="2"/>
             <a:r>
-              <a:rPr lang="en-US"/>
+              <a:rPr lang="en-US" smtClean="0"/>
               <a:t>Third level</a:t>
             </a:r>
           </a:p>
           <a:p>
             <a:pPr lvl="3"/>
             <a:r>
-              <a:rPr lang="en-US"/>
+              <a:rPr lang="en-US" smtClean="0"/>
               <a:t>Fourth level</a:t>
             </a:r>
           </a:p>
           <a:p>
             <a:pPr lvl="4"/>
             <a:r>
-              <a:rPr lang="en-US"/>
+              <a:rPr lang="en-US" smtClean="0"/>
               <a:t>Fifth level</a:t>
             </a:r>
+            <a:endParaRPr lang="en-US"/>
           </a:p>
         </p:txBody>
       </p:sp>
@@ -661,7 +2194,7 @@
           <a:p>
             <a:fld id="{5BCAD085-E8A6-8845-BD4E-CB4CCA059FC4}" type="datetimeFigureOut">
               <a:rPr lang="en-US" smtClean="0"/>
-              <a:t>7/21/2026</a:t>
+              <a:t>1/27/13</a:t>
             </a:fld>
             <a:endParaRPr lang="en-US"/>
           </a:p>
@@ -755,9 +2288,10 @@
           <a:lstStyle/>
           <a:p>
             <a:r>
-              <a:rPr lang="en-US"/>
+              <a:rPr lang="en-US" smtClean="0"/>
               <a:t>Click to edit Master title style</a:t>
             </a:r>
+            <a:endParaRPr lang="en-US"/>
           </a:p>
         </p:txBody>
       </p:sp>
@@ -778,37 +2312,38 @@
           <a:p>
             <a:pPr lvl="0"/>
             <a:r>
-              <a:rPr lang="en-US"/>
+              <a:rPr lang="en-US" smtClean="0"/>
               <a:t>Click to edit Master text styles</a:t>
             </a:r>
           </a:p>
           <a:p>
             <a:pPr lvl="1"/>
             <a:r>
-              <a:rPr lang="en-US"/>
+              <a:rPr lang="en-US" smtClean="0"/>
               <a:t>Second level</a:t>
             </a:r>
           </a:p>
           <a:p>
             <a:pPr lvl="2"/>
             <a:r>
-              <a:rPr lang="en-US"/>
+              <a:rPr lang="en-US" smtClean="0"/>
               <a:t>Third level</a:t>
             </a:r>
           </a:p>
           <a:p>
             <a:pPr lvl="3"/>
             <a:r>
-              <a:rPr lang="en-US"/>
+              <a:rPr lang="en-US" smtClean="0"/>
               <a:t>Fourth level</a:t>
             </a:r>
           </a:p>
           <a:p>
             <a:pPr lvl="4"/>
             <a:r>
-              <a:rPr lang="en-US"/>
+              <a:rPr lang="en-US" smtClean="0"/>
               <a:t>Fifth level</a:t>
             </a:r>
+            <a:endParaRPr lang="en-US"/>
           </a:p>
         </p:txBody>
       </p:sp>
@@ -829,7 +2364,7 @@
           <a:p>
             <a:fld id="{5BCAD085-E8A6-8845-BD4E-CB4CCA059FC4}" type="datetimeFigureOut">
               <a:rPr lang="en-US" smtClean="0"/>
-              <a:t>7/21/2026</a:t>
+              <a:t>1/27/13</a:t>
             </a:fld>
             <a:endParaRPr lang="en-US"/>
           </a:p>
@@ -932,9 +2467,10 @@
           </a:lstStyle>
           <a:p>
             <a:r>
-              <a:rPr lang="en-US"/>
+              <a:rPr lang="en-US" smtClean="0"/>
               <a:t>Click to edit Master title style</a:t>
             </a:r>
+            <a:endParaRPr lang="en-US"/>
           </a:p>
         </p:txBody>
       </p:sp>
@@ -1051,7 +2587,7 @@
           <a:p>
             <a:pPr lvl="0"/>
             <a:r>
-              <a:rPr lang="en-US"/>
+              <a:rPr lang="en-US" smtClean="0"/>
               <a:t>Click to edit Master text styles</a:t>
             </a:r>
           </a:p>
@@ -1074,7 +2610,7 @@
           <a:p>
             <a:fld id="{5BCAD085-E8A6-8845-BD4E-CB4CCA059FC4}" type="datetimeFigureOut">
               <a:rPr lang="en-US" smtClean="0"/>
-              <a:t>7/21/2026</a:t>
+              <a:t>1/27/13</a:t>
             </a:fld>
             <a:endParaRPr lang="en-US"/>
           </a:p>
@@ -1168,9 +2704,10 @@
           <a:lstStyle/>
           <a:p>
             <a:r>
-              <a:rPr lang="en-US"/>
+              <a:rPr lang="en-US" smtClean="0"/>
               <a:t>Click to edit Master title style</a:t>
             </a:r>
+            <a:endParaRPr lang="en-US"/>
           </a:p>
         </p:txBody>
       </p:sp>
@@ -1224,37 +2761,38 @@
           <a:p>
             <a:pPr lvl="0"/>
             <a:r>
-              <a:rPr lang="en-US"/>
+              <a:rPr lang="en-US" smtClean="0"/>
               <a:t>Click to edit Master text styles</a:t>
             </a:r>
           </a:p>
           <a:p>
             <a:pPr lvl="1"/>
             <a:r>
-              <a:rPr lang="en-US"/>
+              <a:rPr lang="en-US" smtClean="0"/>
               <a:t>Second level</a:t>
             </a:r>
           </a:p>
           <a:p>
             <a:pPr lvl="2"/>
             <a:r>
-              <a:rPr lang="en-US"/>
+              <a:rPr lang="en-US" smtClean="0"/>
               <a:t>Third level</a:t>
             </a:r>
           </a:p>
           <a:p>
             <a:pPr lvl="3"/>
             <a:r>
-              <a:rPr lang="en-US"/>
+              <a:rPr lang="en-US" smtClean="0"/>
               <a:t>Fourth level</a:t>
             </a:r>
           </a:p>
           <a:p>
             <a:pPr lvl="4"/>
             <a:r>
-              <a:rPr lang="en-US"/>
+              <a:rPr lang="en-US" smtClean="0"/>
               <a:t>Fifth level</a:t>
             </a:r>
+            <a:endParaRPr lang="en-US"/>
           </a:p>
         </p:txBody>
       </p:sp>
@@ -1308,37 +2846,38 @@
           <a:p>
             <a:pPr lvl="0"/>
             <a:r>
-              <a:rPr lang="en-US"/>
+              <a:rPr lang="en-US" smtClean="0"/>
               <a:t>Click to edit Master text styles</a:t>
             </a:r>
           </a:p>
           <a:p>
             <a:pPr lvl="1"/>
             <a:r>
-              <a:rPr lang="en-US"/>
+              <a:rPr lang="en-US" smtClean="0"/>
               <a:t>Second level</a:t>
             </a:r>
           </a:p>
           <a:p>
             <a:pPr lvl="2"/>
             <a:r>
-              <a:rPr lang="en-US"/>
+              <a:rPr lang="en-US" smtClean="0"/>
               <a:t>Third level</a:t>
             </a:r>
           </a:p>
           <a:p>
             <a:pPr lvl="3"/>
             <a:r>
-              <a:rPr lang="en-US"/>
+              <a:rPr lang="en-US" smtClean="0"/>
               <a:t>Fourth level</a:t>
             </a:r>
           </a:p>
           <a:p>
             <a:pPr lvl="4"/>
             <a:r>
-              <a:rPr lang="en-US"/>
+              <a:rPr lang="en-US" smtClean="0"/>
               <a:t>Fifth level</a:t>
             </a:r>
+            <a:endParaRPr lang="en-US"/>
           </a:p>
         </p:txBody>
       </p:sp>
@@ -1359,7 +2898,7 @@
           <a:p>
             <a:fld id="{5BCAD085-E8A6-8845-BD4E-CB4CCA059FC4}" type="datetimeFigureOut">
               <a:rPr lang="en-US" smtClean="0"/>
-              <a:t>7/21/2026</a:t>
+              <a:t>1/27/13</a:t>
             </a:fld>
             <a:endParaRPr lang="en-US"/>
           </a:p>
@@ -1457,9 +2996,10 @@
           </a:lstStyle>
           <a:p>
             <a:r>
-              <a:rPr lang="en-US"/>
+              <a:rPr lang="en-US" smtClean="0"/>
               <a:t>Click to edit Master title style</a:t>
             </a:r>
+            <a:endParaRPr lang="en-US"/>
           </a:p>
         </p:txBody>
       </p:sp>
@@ -1522,7 +3062,7 @@
           <a:p>
             <a:pPr lvl="0"/>
             <a:r>
-              <a:rPr lang="en-US"/>
+              <a:rPr lang="en-US" smtClean="0"/>
               <a:t>Click to edit Master text styles</a:t>
             </a:r>
           </a:p>
@@ -1578,37 +3118,38 @@
           <a:p>
             <a:pPr lvl="0"/>
             <a:r>
-              <a:rPr lang="en-US"/>
+              <a:rPr lang="en-US" smtClean="0"/>
               <a:t>Click to edit Master text styles</a:t>
             </a:r>
           </a:p>
           <a:p>
             <a:pPr lvl="1"/>
             <a:r>
-              <a:rPr lang="en-US"/>
+              <a:rPr lang="en-US" smtClean="0"/>
               <a:t>Second level</a:t>
             </a:r>
           </a:p>
           <a:p>
             <a:pPr lvl="2"/>
             <a:r>
-              <a:rPr lang="en-US"/>
+              <a:rPr lang="en-US" smtClean="0"/>
               <a:t>Third level</a:t>
             </a:r>
           </a:p>
           <a:p>
             <a:pPr lvl="3"/>
             <a:r>
-              <a:rPr lang="en-US"/>
+              <a:rPr lang="en-US" smtClean="0"/>
               <a:t>Fourth level</a:t>
             </a:r>
           </a:p>
           <a:p>
             <a:pPr lvl="4"/>
             <a:r>
-              <a:rPr lang="en-US"/>
+              <a:rPr lang="en-US" smtClean="0"/>
               <a:t>Fifth level</a:t>
             </a:r>
+            <a:endParaRPr lang="en-US"/>
           </a:p>
         </p:txBody>
       </p:sp>
@@ -1671,7 +3212,7 @@
           <a:p>
             <a:pPr lvl="0"/>
             <a:r>
-              <a:rPr lang="en-US"/>
+              <a:rPr lang="en-US" smtClean="0"/>
               <a:t>Click to edit Master text styles</a:t>
             </a:r>
           </a:p>
@@ -1727,37 +3268,38 @@
           <a:p>
             <a:pPr lvl="0"/>
             <a:r>
-              <a:rPr lang="en-US"/>
+              <a:rPr lang="en-US" smtClean="0"/>
               <a:t>Click to edit Master text styles</a:t>
             </a:r>
           </a:p>
           <a:p>
             <a:pPr lvl="1"/>
             <a:r>
-              <a:rPr lang="en-US"/>
+              <a:rPr lang="en-US" smtClean="0"/>
               <a:t>Second level</a:t>
             </a:r>
           </a:p>
           <a:p>
             <a:pPr lvl="2"/>
             <a:r>
-              <a:rPr lang="en-US"/>
+              <a:rPr lang="en-US" smtClean="0"/>
               <a:t>Third level</a:t>
             </a:r>
           </a:p>
           <a:p>
             <a:pPr lvl="3"/>
             <a:r>
-              <a:rPr lang="en-US"/>
+              <a:rPr lang="en-US" smtClean="0"/>
               <a:t>Fourth level</a:t>
             </a:r>
           </a:p>
           <a:p>
             <a:pPr lvl="4"/>
             <a:r>
-              <a:rPr lang="en-US"/>
+              <a:rPr lang="en-US" smtClean="0"/>
               <a:t>Fifth level</a:t>
             </a:r>
+            <a:endParaRPr lang="en-US"/>
           </a:p>
         </p:txBody>
       </p:sp>
@@ -1778,7 +3320,7 @@
           <a:p>
             <a:fld id="{5BCAD085-E8A6-8845-BD4E-CB4CCA059FC4}" type="datetimeFigureOut">
               <a:rPr lang="en-US" smtClean="0"/>
-              <a:t>7/21/2026</a:t>
+              <a:t>1/27/13</a:t>
             </a:fld>
             <a:endParaRPr lang="en-US"/>
           </a:p>
@@ -1872,9 +3414,10 @@
           <a:lstStyle/>
           <a:p>
             <a:r>
-              <a:rPr lang="en-US"/>
+              <a:rPr lang="en-US" smtClean="0"/>
               <a:t>Click to edit Master title style</a:t>
             </a:r>
+            <a:endParaRPr lang="en-US"/>
           </a:p>
         </p:txBody>
       </p:sp>
@@ -1895,7 +3438,7 @@
           <a:p>
             <a:fld id="{5BCAD085-E8A6-8845-BD4E-CB4CCA059FC4}" type="datetimeFigureOut">
               <a:rPr lang="en-US" smtClean="0"/>
-              <a:t>7/21/2026</a:t>
+              <a:t>1/27/13</a:t>
             </a:fld>
             <a:endParaRPr lang="en-US"/>
           </a:p>
@@ -1990,7 +3533,7 @@
           <a:p>
             <a:fld id="{5BCAD085-E8A6-8845-BD4E-CB4CCA059FC4}" type="datetimeFigureOut">
               <a:rPr lang="en-US" smtClean="0"/>
-              <a:t>7/21/2026</a:t>
+              <a:t>1/27/13</a:t>
             </a:fld>
             <a:endParaRPr lang="en-US"/>
           </a:p>
@@ -2093,9 +3636,10 @@
           </a:lstStyle>
           <a:p>
             <a:r>
-              <a:rPr lang="en-US"/>
+              <a:rPr lang="en-US" smtClean="0"/>
               <a:t>Click to edit Master title style</a:t>
             </a:r>
+            <a:endParaRPr lang="en-US"/>
           </a:p>
         </p:txBody>
       </p:sp>
@@ -2149,37 +3693,38 @@
           <a:p>
             <a:pPr lvl="0"/>
             <a:r>
-              <a:rPr lang="en-US"/>
+              <a:rPr lang="en-US" smtClean="0"/>
               <a:t>Click to edit Master text styles</a:t>
             </a:r>
           </a:p>
           <a:p>
             <a:pPr lvl="1"/>
             <a:r>
-              <a:rPr lang="en-US"/>
+              <a:rPr lang="en-US" smtClean="0"/>
               <a:t>Second level</a:t>
             </a:r>
           </a:p>
           <a:p>
             <a:pPr lvl="2"/>
             <a:r>
-              <a:rPr lang="en-US"/>
+              <a:rPr lang="en-US" smtClean="0"/>
               <a:t>Third level</a:t>
             </a:r>
           </a:p>
           <a:p>
             <a:pPr lvl="3"/>
             <a:r>
-              <a:rPr lang="en-US"/>
+              <a:rPr lang="en-US" smtClean="0"/>
               <a:t>Fourth level</a:t>
             </a:r>
           </a:p>
           <a:p>
             <a:pPr lvl="4"/>
             <a:r>
-              <a:rPr lang="en-US"/>
+              <a:rPr lang="en-US" smtClean="0"/>
               <a:t>Fifth level</a:t>
             </a:r>
+            <a:endParaRPr lang="en-US"/>
           </a:p>
         </p:txBody>
       </p:sp>
@@ -2242,7 +3787,7 @@
           <a:p>
             <a:pPr lvl="0"/>
             <a:r>
-              <a:rPr lang="en-US"/>
+              <a:rPr lang="en-US" smtClean="0"/>
               <a:t>Click to edit Master text styles</a:t>
             </a:r>
           </a:p>
@@ -2265,7 +3810,7 @@
           <a:p>
             <a:fld id="{5BCAD085-E8A6-8845-BD4E-CB4CCA059FC4}" type="datetimeFigureOut">
               <a:rPr lang="en-US" smtClean="0"/>
-              <a:t>7/21/2026</a:t>
+              <a:t>1/27/13</a:t>
             </a:fld>
             <a:endParaRPr lang="en-US"/>
           </a:p>
@@ -2368,9 +3913,10 @@
           </a:lstStyle>
           <a:p>
             <a:r>
-              <a:rPr lang="en-US"/>
+              <a:rPr lang="en-US" smtClean="0"/>
               <a:t>Click to edit Master title style</a:t>
             </a:r>
+            <a:endParaRPr lang="en-US"/>
           </a:p>
         </p:txBody>
       </p:sp>
@@ -2494,7 +4040,7 @@
           <a:p>
             <a:pPr lvl="0"/>
             <a:r>
-              <a:rPr lang="en-US"/>
+              <a:rPr lang="en-US" smtClean="0"/>
               <a:t>Click to edit Master text styles</a:t>
             </a:r>
           </a:p>
@@ -2517,7 +4063,7 @@
           <a:p>
             <a:fld id="{5BCAD085-E8A6-8845-BD4E-CB4CCA059FC4}" type="datetimeFigureOut">
               <a:rPr lang="en-US" smtClean="0"/>
-              <a:t>7/21/2026</a:t>
+              <a:t>1/27/13</a:t>
             </a:fld>
             <a:endParaRPr lang="en-US"/>
           </a:p>
@@ -2626,9 +4172,10 @@
           <a:lstStyle/>
           <a:p>
             <a:r>
-              <a:rPr lang="en-US"/>
+              <a:rPr lang="en-US" smtClean="0"/>
               <a:t>Click to edit Master title style</a:t>
             </a:r>
+            <a:endParaRPr lang="en-US"/>
           </a:p>
         </p:txBody>
       </p:sp>
@@ -2659,37 +4206,38 @@
           <a:p>
             <a:pPr lvl="0"/>
             <a:r>
-              <a:rPr lang="en-US"/>
+              <a:rPr lang="en-US" smtClean="0"/>
               <a:t>Click to edit Master text styles</a:t>
             </a:r>
           </a:p>
           <a:p>
             <a:pPr lvl="1"/>
             <a:r>
-              <a:rPr lang="en-US"/>
+              <a:rPr lang="en-US" smtClean="0"/>
               <a:t>Second level</a:t>
             </a:r>
           </a:p>
           <a:p>
             <a:pPr lvl="2"/>
             <a:r>
-              <a:rPr lang="en-US"/>
+              <a:rPr lang="en-US" smtClean="0"/>
               <a:t>Third level</a:t>
             </a:r>
           </a:p>
           <a:p>
             <a:pPr lvl="3"/>
             <a:r>
-              <a:rPr lang="en-US"/>
+              <a:rPr lang="en-US" smtClean="0"/>
               <a:t>Fourth level</a:t>
             </a:r>
           </a:p>
           <a:p>
             <a:pPr lvl="4"/>
             <a:r>
-              <a:rPr lang="en-US"/>
+              <a:rPr lang="en-US" smtClean="0"/>
               <a:t>Fifth level</a:t>
             </a:r>
+            <a:endParaRPr lang="en-US"/>
           </a:p>
         </p:txBody>
       </p:sp>
@@ -2728,7 +4276,7 @@
           <a:p>
             <a:fld id="{5BCAD085-E8A6-8845-BD4E-CB4CCA059FC4}" type="datetimeFigureOut">
               <a:rPr lang="en-US" smtClean="0"/>
-              <a:t>7/21/2026</a:t>
+              <a:t>1/27/13</a:t>
             </a:fld>
             <a:endParaRPr lang="en-US"/>
           </a:p>
@@ -3087,7 +4635,7 @@
 </file>
 
 <file path=ppt/slides/slide1.xml><?xml version="1.0" encoding="utf-8"?>
-<p:sld xmlns:a="http://schemas.openxmlformats.org/drawingml/2006/main" xmlns:r="http://schemas.openxmlformats.org/officeDocument/2006/relationships" xmlns:p="http://schemas.openxmlformats.org/presentationml/2006/main">
+<p:sld xmlns:a="http://schemas.openxmlformats.org/drawingml/2006/main" xmlns:p="http://schemas.openxmlformats.org/presentationml/2006/main" xmlns:r="http://schemas.openxmlformats.org/officeDocument/2006/relationships">
   <p:cSld>
     <p:spTree>
       <p:nvGrpSpPr>
@@ -3095,14 +4643,7 @@
         <p:cNvGrpSpPr/>
         <p:nvPr/>
       </p:nvGrpSpPr>
-      <p:grpSpPr>
-        <a:xfrm>
-          <a:off x="0" y="0"/>
-          <a:ext cx="0" cy="0"/>
-          <a:chOff x="0" y="0"/>
-          <a:chExt cx="0" cy="0"/>
-        </a:xfrm>
-      </p:grpSpPr>
+      <p:grpSpPr/>
       <p:sp>
         <p:nvSpPr>
           <p:cNvPr id="2" name="Rectangle 1"/>
@@ -3143,7 +4684,6 @@
           <a:lstStyle/>
           <a:p>
             <a:pPr algn="ctr"/>
-            <a:endParaRPr/>
           </a:p>
         </p:txBody>
       </p:sp>
@@ -3155,8 +4695,8 @@
         </p:nvSpPr>
         <p:spPr>
           <a:xfrm>
-            <a:off x="822960" y="2194560"/>
-            <a:ext cx="10515600" cy="1554272"/>
+            <a:off x="822960" y="2103120"/>
+            <a:ext cx="10515600" cy="2926080"/>
           </a:xfrm>
           <a:prstGeom prst="rect">
             <a:avLst/>
@@ -3170,7 +4710,7 @@
           <a:lstStyle/>
           <a:p>
             <a:r>
-              <a:rPr sz="4000" b="1" i="0" dirty="0">
+              <a:rPr sz="4000" b="1" i="0">
                 <a:solidFill>
                   <a:srgbClr val="FFFFFF"/>
                 </a:solidFill>
@@ -3181,7 +4721,7 @@
           </a:p>
           <a:p>
             <a:r>
-              <a:rPr sz="2000" b="0" i="1" dirty="0">
+              <a:rPr sz="2000" b="0" i="1">
                 <a:solidFill>
                   <a:srgbClr val="9AD1C9"/>
                 </a:solidFill>
@@ -3193,33 +4733,18 @@
           <a:p>
             <a:pPr>
               <a:spcBef>
-                <a:spcPts val="2400"/>
+                <a:spcPts val="2600"/>
               </a:spcBef>
             </a:pPr>
             <a:r>
-              <a:rPr sz="1500" b="0" i="0" dirty="0">
+              <a:rPr sz="1500" b="0" i="0">
                 <a:solidFill>
                   <a:srgbClr val="C7D0D8"/>
                 </a:solidFill>
                 <a:latin typeface="Calibri"/>
               </a:rPr>
-              <a:t>Data Science &amp; Cyber  ·  the URL / </a:t>
-            </a:r>
-            <a:r>
-              <a:rPr sz="1500" b="0" i="0">
-                <a:solidFill>
-                  <a:srgbClr val="C7D0D8"/>
-                </a:solidFill>
-                <a:latin typeface="Calibri"/>
-              </a:rPr>
-              <a:t>link detector</a:t>
-            </a:r>
-            <a:endParaRPr sz="1500" b="0" i="0" dirty="0">
-              <a:solidFill>
-                <a:srgbClr val="C7D0D8"/>
-              </a:solidFill>
-              <a:latin typeface="Calibri"/>
-            </a:endParaRPr>
+              <a:t>Data Science &amp; Cyber  ·  the URL / link detector (Student B)</a:t>
+            </a:r>
           </a:p>
         </p:txBody>
       </p:sp>
@@ -3232,7 +4757,7 @@
 </file>
 
 <file path=ppt/slides/slide10.xml><?xml version="1.0" encoding="utf-8"?>
-<p:sld xmlns:a="http://schemas.openxmlformats.org/drawingml/2006/main" xmlns:r="http://schemas.openxmlformats.org/officeDocument/2006/relationships" xmlns:p="http://schemas.openxmlformats.org/presentationml/2006/main">
+<p:sld xmlns:a="http://schemas.openxmlformats.org/drawingml/2006/main" xmlns:p="http://schemas.openxmlformats.org/presentationml/2006/main" xmlns:r="http://schemas.openxmlformats.org/officeDocument/2006/relationships">
   <p:cSld>
     <p:spTree>
       <p:nvGrpSpPr>
@@ -3240,14 +4765,7 @@
         <p:cNvGrpSpPr/>
         <p:nvPr/>
       </p:nvGrpSpPr>
-      <p:grpSpPr>
-        <a:xfrm>
-          <a:off x="0" y="0"/>
-          <a:ext cx="0" cy="0"/>
-          <a:chOff x="0" y="0"/>
-          <a:chExt cx="0" cy="0"/>
-        </a:xfrm>
-      </p:grpSpPr>
+      <p:grpSpPr/>
       <p:sp>
         <p:nvSpPr>
           <p:cNvPr id="2" name="Rectangle 1"/>
@@ -3288,7 +4806,6 @@
           <a:lstStyle/>
           <a:p>
             <a:pPr algn="ctr"/>
-            <a:endParaRPr/>
           </a:p>
         </p:txBody>
       </p:sp>
@@ -3300,8 +4817,8 @@
         </p:nvSpPr>
         <p:spPr>
           <a:xfrm>
-            <a:off x="548640" y="411480"/>
-            <a:ext cx="11064240" cy="1097280"/>
+            <a:off x="548640" y="365760"/>
+            <a:ext cx="11064240" cy="1143000"/>
           </a:xfrm>
           <a:prstGeom prst="rect">
             <a:avLst/>
@@ -3315,24 +4832,13 @@
           <a:lstStyle/>
           <a:p>
             <a:r>
-              <a:rPr sz="3000" b="1" i="0">
+              <a:rPr sz="2900" b="1" i="0">
                 <a:solidFill>
                   <a:srgbClr val="1D2B3A"/>
                 </a:solidFill>
                 <a:latin typeface="Calibri"/>
               </a:rPr>
-              <a:t>The reality check: it does NOT generalize</a:t>
-            </a:r>
-          </a:p>
-          <a:p>
-            <a:r>
-              <a:rPr sz="1400" b="0" i="1">
-                <a:solidFill>
-                  <a:srgbClr val="2A9D8F"/>
-                </a:solidFill>
-                <a:latin typeface="Calibri"/>
-              </a:rPr>
-              <a:t>domain shift</a:t>
+              <a:t>Discovery 2 — SHAP confirms it: is_https drives everything</a:t>
             </a:r>
           </a:p>
         </p:txBody>
@@ -3345,8 +4851,8 @@
         </p:nvSpPr>
         <p:spPr>
           <a:xfrm>
-            <a:off x="640080" y="1737360"/>
-            <a:ext cx="5852160" cy="4572000"/>
+            <a:off x="9784080" y="384048"/>
+            <a:ext cx="2286000" cy="457200"/>
           </a:xfrm>
           <a:prstGeom prst="rect">
             <a:avLst/>
@@ -3359,41 +4865,92 @@
           </a:bodyPr>
           <a:lstStyle/>
           <a:p>
+            <a:pPr algn="ctr"/>
+            <a:r>
+              <a:rPr sz="1300" b="1" i="0">
+                <a:solidFill>
+                  <a:srgbClr val="E76F51"/>
+                </a:solidFill>
+                <a:latin typeface="Calibri"/>
+              </a:rPr>
+              <a:t>DISCOVERY 2</a:t>
+            </a:r>
+          </a:p>
+        </p:txBody>
+      </p:sp>
+      <p:sp>
+        <p:nvSpPr>
+          <p:cNvPr id="5" name="TextBox 4"/>
+          <p:cNvSpPr txBox="1"/>
+          <p:nvPr/>
+        </p:nvSpPr>
+        <p:spPr>
+          <a:xfrm>
+            <a:off x="640080" y="1783080"/>
+            <a:ext cx="5852160" cy="4754880"/>
+          </a:xfrm>
+          <a:prstGeom prst="rect">
+            <a:avLst/>
+          </a:prstGeom>
+          <a:noFill/>
+        </p:spPr>
+        <p:txBody>
+          <a:bodyPr wrap="square">
+            <a:spAutoFit/>
+          </a:bodyPr>
+          <a:lstStyle/>
+          <a:p>
             <a:pPr>
               <a:spcAft>
-                <a:spcPts val="1000"/>
+                <a:spcPts val="900"/>
               </a:spcAft>
             </a:pPr>
             <a:r>
-              <a:rPr sz="1800" b="0" i="0">
+              <a:rPr sz="1750" b="0" i="0">
                 <a:solidFill>
                   <a:srgbClr val="1D2B3A"/>
                 </a:solidFill>
                 <a:latin typeface="Calibri"/>
               </a:rPr>
-              <a:t>•  In-distribution: F1 0.997, AUC 0.999</a:t>
+              <a:t>•  SHAP = a faithful way to credit each feature for the prediction (game theory)</a:t>
             </a:r>
           </a:p>
           <a:p>
             <a:pPr>
               <a:spcAft>
-                <a:spcPts val="1000"/>
+                <a:spcPts val="900"/>
               </a:spcAft>
             </a:pPr>
             <a:r>
-              <a:rPr sz="1800" b="0" i="0">
+              <a:rPr sz="1750" b="0" i="0">
                 <a:solidFill>
                   <a:srgbClr val="1D2B3A"/>
                 </a:solidFill>
                 <a:latin typeface="Calibri"/>
               </a:rPr>
-              <a:t>•  Independent Kaggle 651k dataset: F1 0.666, AUC 0.434</a:t>
+              <a:t>•  #1 driver = is_https, ~3× the next feature</a:t>
+            </a:r>
+          </a:p>
+          <a:p>
+            <a:pPr>
+              <a:spcAft>
+                <a:spcPts val="900"/>
+              </a:spcAft>
+            </a:pPr>
+            <a:r>
+              <a:rPr sz="1750" b="0" i="0">
+                <a:solidFill>
+                  <a:srgbClr val="1D2B3A"/>
+                </a:solidFill>
+                <a:latin typeface="Calibri"/>
+              </a:rPr>
+              <a:t>•  The model is a thin veneer over the HTTPS artifact —</a:t>
             </a:r>
           </a:p>
           <a:p>
             <a:pPr lvl="1">
               <a:spcAft>
-                <a:spcPts val="1000"/>
+                <a:spcPts val="900"/>
               </a:spcAft>
             </a:pPr>
             <a:r>
@@ -3403,30 +4960,14 @@
                 </a:solidFill>
                 <a:latin typeface="Calibri"/>
               </a:rPr>
-              <a:t>–  AUC &lt; 0.5 → the ranking INVERTS (the artifact reverses across datasets)</a:t>
-            </a:r>
-          </a:p>
-          <a:p>
-            <a:pPr>
-              <a:spcAft>
-                <a:spcPts val="1000"/>
-              </a:spcAft>
-            </a:pPr>
-            <a:r>
-              <a:rPr sz="1800" b="0" i="0">
-                <a:solidFill>
-                  <a:srgbClr val="1D2B3A"/>
-                </a:solidFill>
-                <a:latin typeface="Calibri"/>
-              </a:rPr>
-              <a:t>•  But live OpenPhish phishing: recall 1.0 (today’s phishing is still messy)</a:t>
+              <a:t>–  which is exactly why the attacks on the next slide work</a:t>
             </a:r>
           </a:p>
         </p:txBody>
       </p:sp>
       <p:pic>
         <p:nvPicPr>
-          <p:cNvPr id="5" name="Picture 4" descr="F4_cross_dataset.png"/>
+          <p:cNvPr id="6" name="Picture 5" descr="F5_shap.png"/>
           <p:cNvPicPr>
             <a:picLocks noChangeAspect="1"/>
           </p:cNvPicPr>
@@ -3440,8 +4981,8 @@
         </p:blipFill>
         <p:spPr>
           <a:xfrm>
-            <a:off x="6583680" y="2103120"/>
-            <a:ext cx="5394960" cy="2877312"/>
+            <a:off x="6400800" y="1920240"/>
+            <a:ext cx="5486400" cy="3918857"/>
           </a:xfrm>
           <a:prstGeom prst="rect">
             <a:avLst/>
@@ -3457,7 +4998,7 @@
 </file>
 
 <file path=ppt/slides/slide11.xml><?xml version="1.0" encoding="utf-8"?>
-<p:sld xmlns:a="http://schemas.openxmlformats.org/drawingml/2006/main" xmlns:r="http://schemas.openxmlformats.org/officeDocument/2006/relationships" xmlns:p="http://schemas.openxmlformats.org/presentationml/2006/main">
+<p:sld xmlns:a="http://schemas.openxmlformats.org/drawingml/2006/main" xmlns:p="http://schemas.openxmlformats.org/presentationml/2006/main" xmlns:r="http://schemas.openxmlformats.org/officeDocument/2006/relationships">
   <p:cSld>
     <p:spTree>
       <p:nvGrpSpPr>
@@ -3465,14 +5006,7 @@
         <p:cNvGrpSpPr/>
         <p:nvPr/>
       </p:nvGrpSpPr>
-      <p:grpSpPr>
-        <a:xfrm>
-          <a:off x="0" y="0"/>
-          <a:ext cx="0" cy="0"/>
-          <a:chOff x="0" y="0"/>
-          <a:chExt cx="0" cy="0"/>
-        </a:xfrm>
-      </p:grpSpPr>
+      <p:grpSpPr/>
       <p:sp>
         <p:nvSpPr>
           <p:cNvPr id="2" name="Rectangle 1"/>
@@ -3513,7 +5047,6 @@
           <a:lstStyle/>
           <a:p>
             <a:pPr algn="ctr"/>
-            <a:endParaRPr/>
           </a:p>
         </p:txBody>
       </p:sp>
@@ -3525,8 +5058,8 @@
         </p:nvSpPr>
         <p:spPr>
           <a:xfrm>
-            <a:off x="548640" y="411480"/>
-            <a:ext cx="11064240" cy="1097280"/>
+            <a:off x="548640" y="365760"/>
+            <a:ext cx="11064240" cy="1143000"/>
           </a:xfrm>
           <a:prstGeom prst="rect">
             <a:avLst/>
@@ -3540,24 +5073,13 @@
           <a:lstStyle/>
           <a:p>
             <a:r>
-              <a:rPr sz="3000" b="1" i="0">
+              <a:rPr sz="2900" b="1" i="0">
                 <a:solidFill>
                   <a:srgbClr val="1D2B3A"/>
                 </a:solidFill>
                 <a:latin typeface="Calibri"/>
               </a:rPr>
-              <a:t>Why it inverts — distance metrics</a:t>
-            </a:r>
-          </a:p>
-          <a:p>
-            <a:r>
-              <a:rPr sz="1400" b="0" i="1">
-                <a:solidFill>
-                  <a:srgbClr val="2A9D8F"/>
-                </a:solidFill>
-                <a:latin typeface="Calibri"/>
-              </a:rPr>
-              <a:t>KS &amp; Wasserstein</a:t>
+              <a:t>Discovery 3 — attack it: robust to tricks, but not to the artifact</a:t>
             </a:r>
           </a:p>
         </p:txBody>
@@ -3570,8 +5092,8 @@
         </p:nvSpPr>
         <p:spPr>
           <a:xfrm>
-            <a:off x="640080" y="1737360"/>
-            <a:ext cx="5852160" cy="4572000"/>
+            <a:off x="9784080" y="384048"/>
+            <a:ext cx="2286000" cy="457200"/>
           </a:xfrm>
           <a:prstGeom prst="rect">
             <a:avLst/>
@@ -3584,74 +5106,125 @@
           </a:bodyPr>
           <a:lstStyle/>
           <a:p>
+            <a:pPr algn="ctr"/>
+            <a:r>
+              <a:rPr sz="1300" b="1" i="0">
+                <a:solidFill>
+                  <a:srgbClr val="E76F51"/>
+                </a:solidFill>
+                <a:latin typeface="Calibri"/>
+              </a:rPr>
+              <a:t>DISCOVERY 3</a:t>
+            </a:r>
+          </a:p>
+        </p:txBody>
+      </p:sp>
+      <p:sp>
+        <p:nvSpPr>
+          <p:cNvPr id="5" name="TextBox 4"/>
+          <p:cNvSpPr txBox="1"/>
+          <p:nvPr/>
+        </p:nvSpPr>
+        <p:spPr>
+          <a:xfrm>
+            <a:off x="640080" y="1783080"/>
+            <a:ext cx="5943600" cy="4754880"/>
+          </a:xfrm>
+          <a:prstGeom prst="rect">
+            <a:avLst/>
+          </a:prstGeom>
+          <a:noFill/>
+        </p:spPr>
+        <p:txBody>
+          <a:bodyPr wrap="square">
+            <a:spAutoFit/>
+          </a:bodyPr>
+          <a:lstStyle/>
+          <a:p>
             <a:pPr>
               <a:spcAft>
-                <a:spcPts val="1000"/>
+                <a:spcPts val="900"/>
               </a:spcAft>
             </a:pPr>
             <a:r>
-              <a:rPr sz="1800" b="0" i="0">
+              <a:rPr sz="1750" b="0" i="0">
                 <a:solidFill>
                   <a:srgbClr val="1D2B3A"/>
                 </a:solidFill>
                 <a:latin typeface="Calibri"/>
               </a:rPr>
-              <a:t>•  Measure the shift PhiUSIIL → Kaggle per feature (KS statistic)</a:t>
+              <a:t>•  Homoglyph / typosquat (char tricks) → recall stays ~0.99</a:t>
+            </a:r>
+          </a:p>
+          <a:p>
+            <a:pPr lvl="1">
+              <a:spcAft>
+                <a:spcPts val="900"/>
+              </a:spcAft>
+            </a:pPr>
+            <a:r>
+              <a:rPr sz="1600" b="0" i="0">
+                <a:solidFill>
+                  <a:srgbClr val="5B6472"/>
+                </a:solidFill>
+                <a:latin typeface="Calibri"/>
+              </a:rPr>
+              <a:t>–  a STRUCTURAL detector ignores letters → resists what BREAKS a text model (nice contrast!)</a:t>
             </a:r>
           </a:p>
           <a:p>
             <a:pPr>
               <a:spcAft>
-                <a:spcPts val="1000"/>
+                <a:spcPts val="900"/>
               </a:spcAft>
             </a:pPr>
             <a:r>
-              <a:rPr sz="1800" b="0" i="0">
+              <a:rPr sz="1750" b="0" i="0">
                 <a:solidFill>
                   <a:srgbClr val="1D2B3A"/>
                 </a:solidFill>
                 <a:latin typeface="Calibri"/>
               </a:rPr>
-              <a:t>•  Most-shifted features = is_https, path_len, n_subdomain</a:t>
+              <a:t>•  Just switch HTTP → HTTPS → recall 0.672</a:t>
             </a:r>
           </a:p>
           <a:p>
             <a:pPr>
               <a:spcAft>
-                <a:spcPts val="1000"/>
+                <a:spcPts val="900"/>
               </a:spcAft>
             </a:pPr>
             <a:r>
-              <a:rPr sz="1800" b="0" i="0">
+              <a:rPr sz="1750" b="0" i="0">
                 <a:solidFill>
                   <a:srgbClr val="1D2B3A"/>
                 </a:solidFill>
                 <a:latin typeface="Calibri"/>
               </a:rPr>
-              <a:t>•  …which are exactly the top SHAP drivers</a:t>
+              <a:t>•  Host on a clean HTTPS domain (mimicry) → recall 0.0  (total evasion)</a:t>
             </a:r>
           </a:p>
           <a:p>
             <a:pPr>
               <a:spcAft>
-                <a:spcPts val="1000"/>
+                <a:spcPts val="900"/>
               </a:spcAft>
             </a:pPr>
             <a:r>
-              <a:rPr sz="1800" b="0" i="0">
+              <a:rPr sz="1750" b="0" i="0">
                 <a:solidFill>
                   <a:srgbClr val="1D2B3A"/>
                 </a:solidFill>
                 <a:latin typeface="Calibri"/>
               </a:rPr>
-              <a:t>•  The model built its decision on the LEAST transferable signals</a:t>
+              <a:t>•  Normalisation defeats homoglyphs; NOTHING URL-only defeats mimicry</a:t>
             </a:r>
           </a:p>
         </p:txBody>
       </p:sp>
       <p:pic>
         <p:nvPicPr>
-          <p:cNvPr id="5" name="Picture 4" descr="F7_domain_shift.png"/>
+          <p:cNvPr id="6" name="Picture 5" descr="F3_arms_race.png"/>
           <p:cNvPicPr>
             <a:picLocks noChangeAspect="1"/>
           </p:cNvPicPr>
@@ -3665,8 +5238,8 @@
         </p:blipFill>
         <p:spPr>
           <a:xfrm>
-            <a:off x="6583680" y="2011680"/>
-            <a:ext cx="5394960" cy="3236976"/>
+            <a:off x="6629400" y="2103120"/>
+            <a:ext cx="5349240" cy="2496312"/>
           </a:xfrm>
           <a:prstGeom prst="rect">
             <a:avLst/>
@@ -3682,7 +5255,7 @@
 </file>
 
 <file path=ppt/slides/slide12.xml><?xml version="1.0" encoding="utf-8"?>
-<p:sld xmlns:a="http://schemas.openxmlformats.org/drawingml/2006/main" xmlns:r="http://schemas.openxmlformats.org/officeDocument/2006/relationships" xmlns:p="http://schemas.openxmlformats.org/presentationml/2006/main">
+<p:sld xmlns:a="http://schemas.openxmlformats.org/drawingml/2006/main" xmlns:p="http://schemas.openxmlformats.org/presentationml/2006/main" xmlns:r="http://schemas.openxmlformats.org/officeDocument/2006/relationships">
   <p:cSld>
     <p:spTree>
       <p:nvGrpSpPr>
@@ -3690,14 +5263,7 @@
         <p:cNvGrpSpPr/>
         <p:nvPr/>
       </p:nvGrpSpPr>
-      <p:grpSpPr>
-        <a:xfrm>
-          <a:off x="0" y="0"/>
-          <a:ext cx="0" cy="0"/>
-          <a:chOff x="0" y="0"/>
-          <a:chExt cx="0" cy="0"/>
-        </a:xfrm>
-      </p:grpSpPr>
+      <p:grpSpPr/>
       <p:sp>
         <p:nvSpPr>
           <p:cNvPr id="2" name="Rectangle 1"/>
@@ -3738,7 +5304,6 @@
           <a:lstStyle/>
           <a:p>
             <a:pPr algn="ctr"/>
-            <a:endParaRPr/>
           </a:p>
         </p:txBody>
       </p:sp>
@@ -3750,8 +5315,8 @@
         </p:nvSpPr>
         <p:spPr>
           <a:xfrm>
-            <a:off x="548640" y="411480"/>
-            <a:ext cx="11064240" cy="1097280"/>
+            <a:off x="548640" y="365760"/>
+            <a:ext cx="11064240" cy="1143000"/>
           </a:xfrm>
           <a:prstGeom prst="rect">
             <a:avLst/>
@@ -3765,13 +5330,24 @@
           <a:lstStyle/>
           <a:p>
             <a:r>
-              <a:rPr sz="3000" b="1" i="0">
+              <a:rPr sz="2900" b="1" i="0">
                 <a:solidFill>
                   <a:srgbClr val="1D2B3A"/>
                 </a:solidFill>
                 <a:latin typeface="Calibri"/>
               </a:rPr>
-              <a:t>So what is a URL detector good for?</a:t>
+              <a:t>Cross-check — can we catch it with NO labels?</a:t>
+            </a:r>
+          </a:p>
+          <a:p>
+            <a:r>
+              <a:rPr sz="1400" b="0" i="1">
+                <a:solidFill>
+                  <a:srgbClr val="2A9D8F"/>
+                </a:solidFill>
+                <a:latin typeface="Calibri"/>
+              </a:rPr>
+              <a:t>anomaly detection</a:t>
             </a:r>
           </a:p>
         </p:txBody>
@@ -3784,8 +5360,8 @@
         </p:nvSpPr>
         <p:spPr>
           <a:xfrm>
-            <a:off x="640080" y="1737360"/>
-            <a:ext cx="10972800" cy="4572000"/>
+            <a:off x="640080" y="1783080"/>
+            <a:ext cx="10972800" cy="4754880"/>
           </a:xfrm>
           <a:prstGeom prst="rect">
             <a:avLst/>
@@ -3800,115 +5376,65 @@
           <a:p>
             <a:pPr>
               <a:spcAft>
-                <a:spcPts val="1000"/>
+                <a:spcPts val="900"/>
               </a:spcAft>
             </a:pPr>
             <a:r>
-              <a:rPr sz="1800" b="0" i="0">
+              <a:rPr sz="1750" b="0" i="0">
                 <a:solidFill>
                   <a:srgbClr val="1D2B3A"/>
                 </a:solidFill>
                 <a:latin typeface="Calibri"/>
               </a:rPr>
-              <a:t>•  Fast (~ms), private, interpretable, robust to character obfuscation, catches today’s phishing</a:t>
+              <a:t>•  Train only on LEGITIMATE URLs; flag anything unusual as phishing</a:t>
             </a:r>
           </a:p>
           <a:p>
             <a:pPr>
               <a:spcAft>
-                <a:spcPts val="1000"/>
+                <a:spcPts val="900"/>
               </a:spcAft>
             </a:pPr>
             <a:r>
-              <a:rPr sz="1800" b="0" i="0">
+              <a:rPr sz="1750" b="0" i="0">
                 <a:solidFill>
                   <a:srgbClr val="1D2B3A"/>
                 </a:solidFill>
                 <a:latin typeface="Calibri"/>
               </a:rPr>
-              <a:t>•  BUT: URL structure alone is not a generalizable phishing signal</a:t>
-            </a:r>
-          </a:p>
-          <a:p>
-            <a:pPr lvl="1">
+              <a:t>•  Isolation Forest → AUC 0.828   (isolates odd points with random splits)</a:t>
+            </a:r>
+          </a:p>
+          <a:p>
+            <a:pPr>
               <a:spcAft>
-                <a:spcPts val="1000"/>
+                <a:spcPts val="900"/>
               </a:spcAft>
             </a:pPr>
             <a:r>
-              <a:rPr sz="1600" b="0" i="0">
-                <a:solidFill>
-                  <a:srgbClr val="5B6472"/>
-                </a:solidFill>
-                <a:latin typeface="Calibri"/>
-              </a:rPr>
-              <a:t>–  trivially evaded by HTTPS + legitimate hosting; collapses across datasets</a:t>
+              <a:rPr sz="1750" b="0" i="0">
+                <a:solidFill>
+                  <a:srgbClr val="1D2B3A"/>
+                </a:solidFill>
+                <a:latin typeface="Calibri"/>
+              </a:rPr>
+              <a:t>•  Local Outlier Factor → AUC 0.944   (compares a point’s density to its neighbours’)</a:t>
             </a:r>
           </a:p>
           <a:p>
             <a:pPr>
               <a:spcAft>
-                <a:spcPts val="1000"/>
+                <a:spcPts val="900"/>
               </a:spcAft>
             </a:pPr>
             <a:r>
-              <a:rPr sz="1800" b="0" i="0">
+              <a:rPr sz="1750" b="0" i="0">
                 <a:solidFill>
                   <a:srgbClr val="1D2B3A"/>
                 </a:solidFill>
                 <a:latin typeface="Calibri"/>
               </a:rPr>
-              <a:t>•  Right design = FUSION: link channel + content channel + reputation/domain-age</a:t>
-            </a:r>
-          </a:p>
-          <a:p>
-            <a:pPr>
-              <a:spcAft>
-                <a:spcPts val="1000"/>
-              </a:spcAft>
-            </a:pPr>
-            <a:r>
-              <a:rPr sz="1800" b="0" i="0">
-                <a:solidFill>
-                  <a:srgbClr val="1D2B3A"/>
-                </a:solidFill>
-                <a:latin typeface="Calibri"/>
-              </a:rPr>
-              <a:t>•  So when an attacker beats one channel, another still fires</a:t>
-            </a:r>
-          </a:p>
-        </p:txBody>
-      </p:sp>
-      <p:sp>
-        <p:nvSpPr>
-          <p:cNvPr id="5" name="TextBox 4"/>
-          <p:cNvSpPr txBox="1"/>
-          <p:nvPr/>
-        </p:nvSpPr>
-        <p:spPr>
-          <a:xfrm>
-            <a:off x="640080" y="5852160"/>
-            <a:ext cx="10972800" cy="731520"/>
-          </a:xfrm>
-          <a:prstGeom prst="rect">
-            <a:avLst/>
-          </a:prstGeom>
-          <a:noFill/>
-        </p:spPr>
-        <p:txBody>
-          <a:bodyPr wrap="square">
-            <a:spAutoFit/>
-          </a:bodyPr>
-          <a:lstStyle/>
-          <a:p>
-            <a:r>
-              <a:rPr sz="1900" b="1" i="0">
-                <a:solidFill>
-                  <a:srgbClr val="E76F51"/>
-                </a:solidFill>
-                <a:latin typeface="Calibri"/>
-              </a:rPr>
-              <a:t>Near-perfect URL benchmarks measure dataset construction, not phishing.</a:t>
+              <a:t>•  Respectable with zero phishing labels — but below supervised, and riding the same artifacts</a:t>
             </a:r>
           </a:p>
         </p:txBody>
@@ -3922,7 +5448,7 @@
 </file>
 
 <file path=ppt/slides/slide13.xml><?xml version="1.0" encoding="utf-8"?>
-<p:sld xmlns:a="http://schemas.openxmlformats.org/drawingml/2006/main" xmlns:r="http://schemas.openxmlformats.org/officeDocument/2006/relationships" xmlns:p="http://schemas.openxmlformats.org/presentationml/2006/main">
+<p:sld xmlns:a="http://schemas.openxmlformats.org/drawingml/2006/main" xmlns:p="http://schemas.openxmlformats.org/presentationml/2006/main" xmlns:r="http://schemas.openxmlformats.org/officeDocument/2006/relationships">
   <p:cSld>
     <p:spTree>
       <p:nvGrpSpPr>
@@ -3930,14 +5456,7 @@
         <p:cNvGrpSpPr/>
         <p:nvPr/>
       </p:nvGrpSpPr>
-      <p:grpSpPr>
-        <a:xfrm>
-          <a:off x="0" y="0"/>
-          <a:ext cx="0" cy="0"/>
-          <a:chOff x="0" y="0"/>
-          <a:chExt cx="0" cy="0"/>
-        </a:xfrm>
-      </p:grpSpPr>
+      <p:grpSpPr/>
       <p:sp>
         <p:nvSpPr>
           <p:cNvPr id="2" name="Rectangle 1"/>
@@ -3978,7 +5497,6 @@
           <a:lstStyle/>
           <a:p>
             <a:pPr algn="ctr"/>
-            <a:endParaRPr/>
           </a:p>
         </p:txBody>
       </p:sp>
@@ -3990,8 +5508,8 @@
         </p:nvSpPr>
         <p:spPr>
           <a:xfrm>
-            <a:off x="548640" y="411480"/>
-            <a:ext cx="11064240" cy="1097280"/>
+            <a:off x="548640" y="365760"/>
+            <a:ext cx="11064240" cy="1143000"/>
           </a:xfrm>
           <a:prstGeom prst="rect">
             <a:avLst/>
@@ -4005,13 +5523,13 @@
           <a:lstStyle/>
           <a:p>
             <a:r>
-              <a:rPr sz="3000" b="1" i="0">
+              <a:rPr sz="2900" b="1" i="0">
                 <a:solidFill>
                   <a:srgbClr val="1D2B3A"/>
                 </a:solidFill>
                 <a:latin typeface="Calibri"/>
               </a:rPr>
-              <a:t>Course concepts used</a:t>
+              <a:t>Discovery 4 — it does NOT generalise</a:t>
             </a:r>
           </a:p>
         </p:txBody>
@@ -4024,8 +5542,8 @@
         </p:nvSpPr>
         <p:spPr>
           <a:xfrm>
-            <a:off x="640080" y="1737360"/>
-            <a:ext cx="10972800" cy="4572000"/>
+            <a:off x="9784080" y="384048"/>
+            <a:ext cx="2286000" cy="457200"/>
           </a:xfrm>
           <a:prstGeom prst="rect">
             <a:avLst/>
@@ -4038,103 +5556,146 @@
           </a:bodyPr>
           <a:lstStyle/>
           <a:p>
+            <a:pPr algn="ctr"/>
+            <a:r>
+              <a:rPr sz="1300" b="1" i="0">
+                <a:solidFill>
+                  <a:srgbClr val="E76F51"/>
+                </a:solidFill>
+                <a:latin typeface="Calibri"/>
+              </a:rPr>
+              <a:t>DISCOVERY 4</a:t>
+            </a:r>
+          </a:p>
+        </p:txBody>
+      </p:sp>
+      <p:sp>
+        <p:nvSpPr>
+          <p:cNvPr id="5" name="TextBox 4"/>
+          <p:cNvSpPr txBox="1"/>
+          <p:nvPr/>
+        </p:nvSpPr>
+        <p:spPr>
+          <a:xfrm>
+            <a:off x="640080" y="1783080"/>
+            <a:ext cx="5943600" cy="4754880"/>
+          </a:xfrm>
+          <a:prstGeom prst="rect">
+            <a:avLst/>
+          </a:prstGeom>
+          <a:noFill/>
+        </p:spPr>
+        <p:txBody>
+          <a:bodyPr wrap="square">
+            <a:spAutoFit/>
+          </a:bodyPr>
+          <a:lstStyle/>
+          <a:p>
             <a:pPr>
               <a:spcAft>
-                <a:spcPts val="1000"/>
+                <a:spcPts val="900"/>
               </a:spcAft>
             </a:pPr>
             <a:r>
-              <a:rPr sz="1600" b="0" i="0">
+              <a:rPr sz="1750" b="0" i="0">
                 <a:solidFill>
                   <a:srgbClr val="1D2B3A"/>
                 </a:solidFill>
                 <a:latin typeface="Calibri"/>
               </a:rPr>
-              <a:t>•  EDA · distributions · skewness/kurtosis · robust stats · Pearson vs Spearman · Mann–Whitney U</a:t>
+              <a:t>•  Train PhiUSIIL, test an INDEPENDENT 651k dataset: F1 0.997 → 0.666</a:t>
             </a:r>
           </a:p>
           <a:p>
             <a:pPr>
               <a:spcAft>
-                <a:spcPts val="1000"/>
+                <a:spcPts val="900"/>
               </a:spcAft>
             </a:pPr>
             <a:r>
+              <a:rPr sz="1750" b="0" i="0">
+                <a:solidFill>
+                  <a:srgbClr val="1D2B3A"/>
+                </a:solidFill>
+                <a:latin typeface="Calibri"/>
+              </a:rPr>
+              <a:t>•  AUC 0.999 → 0.434  — below 0.5 = ‘confidently backwards’</a:t>
+            </a:r>
+          </a:p>
+          <a:p>
+            <a:pPr lvl="1">
+              <a:spcAft>
+                <a:spcPts val="900"/>
+              </a:spcAft>
+            </a:pPr>
+            <a:r>
               <a:rPr sz="1600" b="0" i="0">
                 <a:solidFill>
-                  <a:srgbClr val="1D2B3A"/>
-                </a:solidFill>
-                <a:latin typeface="Calibri"/>
-              </a:rPr>
-              <a:t>•  Feature engineering · Shannon entropy · Levenshtein edit distance</a:t>
+                  <a:srgbClr val="5B6472"/>
+                </a:solidFill>
+                <a:latin typeface="Calibri"/>
+              </a:rPr>
+              <a:t>–  it doesn’t just lose skill; its ranking INVERTS (legit scored above phishing)</a:t>
+            </a:r>
+          </a:p>
+          <a:p>
+            <a:pPr lvl="1">
+              <a:spcAft>
+                <a:spcPts val="900"/>
+              </a:spcAft>
+            </a:pPr>
+            <a:r>
+              <a:rPr sz="1600" b="0" i="0">
+                <a:solidFill>
+                  <a:srgbClr val="5B6472"/>
+                </a:solidFill>
+                <a:latin typeface="Calibri"/>
+              </a:rPr>
+              <a:t>–  both classes collapse to ~1.0 → the model can’t tell them apart at all</a:t>
             </a:r>
           </a:p>
           <a:p>
             <a:pPr>
               <a:spcAft>
-                <a:spcPts val="1000"/>
+                <a:spcPts val="900"/>
               </a:spcAft>
             </a:pPr>
             <a:r>
-              <a:rPr sz="1600" b="0" i="0">
+              <a:rPr sz="1750" b="0" i="0">
                 <a:solidFill>
                   <a:srgbClr val="1D2B3A"/>
                 </a:solidFill>
                 <a:latin typeface="Calibri"/>
               </a:rPr>
-              <a:t>•  Accuracy paradox · P/R/F1/F2/MCC/AUC · cost thresholds · bootstrap CIs · McNemar</a:t>
-            </a:r>
-          </a:p>
-          <a:p>
-            <a:pPr>
-              <a:spcAft>
-                <a:spcPts val="1000"/>
-              </a:spcAft>
-            </a:pPr>
-            <a:r>
-              <a:rPr sz="1600" b="0" i="0">
-                <a:solidFill>
-                  <a:srgbClr val="1D2B3A"/>
-                </a:solidFill>
-                <a:latin typeface="Calibri"/>
-              </a:rPr>
-              <a:t>•  Explainability (SHAP) · adversarial ML (evasion, homoglyphs, adversarial training)</a:t>
-            </a:r>
-          </a:p>
-          <a:p>
-            <a:pPr>
-              <a:spcAft>
-                <a:spcPts val="1000"/>
-              </a:spcAft>
-            </a:pPr>
-            <a:r>
-              <a:rPr sz="1600" b="0" i="0">
-                <a:solidFill>
-                  <a:srgbClr val="1D2B3A"/>
-                </a:solidFill>
-                <a:latin typeface="Calibri"/>
-              </a:rPr>
-              <a:t>•  Anomaly detection (Isolation Forest, LOF) · calibration · distance metrics (KS, Wasserstein)</a:t>
-            </a:r>
-          </a:p>
-          <a:p>
-            <a:pPr>
-              <a:spcAft>
-                <a:spcPts val="1000"/>
-              </a:spcAft>
-            </a:pPr>
-            <a:r>
-              <a:rPr sz="1600" b="0" i="0">
-                <a:solidFill>
-                  <a:srgbClr val="1D2B3A"/>
-                </a:solidFill>
-                <a:latin typeface="Calibri"/>
-              </a:rPr>
-              <a:t>•  Domain shift / concept drift · feature ablation · error analysis</a:t>
-            </a:r>
-          </a:p>
-        </p:txBody>
-      </p:sp>
+              <a:t>•  BUT live OpenPhish phishing: recall 1.0 (today’s phishing is still messy → caught)</a:t>
+            </a:r>
+          </a:p>
+        </p:txBody>
+      </p:sp>
+      <p:pic>
+        <p:nvPicPr>
+          <p:cNvPr id="6" name="Picture 5" descr="F4_cross_dataset.png"/>
+          <p:cNvPicPr>
+            <a:picLocks noChangeAspect="1"/>
+          </p:cNvPicPr>
+          <p:nvPr/>
+        </p:nvPicPr>
+        <p:blipFill>
+          <a:blip r:embed="rId2"/>
+          <a:stretch>
+            <a:fillRect/>
+          </a:stretch>
+        </p:blipFill>
+        <p:spPr>
+          <a:xfrm>
+            <a:off x="6629400" y="2148840"/>
+            <a:ext cx="5349240" cy="3066898"/>
+          </a:xfrm>
+          <a:prstGeom prst="rect">
+            <a:avLst/>
+          </a:prstGeom>
+        </p:spPr>
+      </p:pic>
     </p:spTree>
   </p:cSld>
   <p:clrMapOvr>
@@ -4144,7 +5705,7 @@
 </file>
 
 <file path=ppt/slides/slide14.xml><?xml version="1.0" encoding="utf-8"?>
-<p:sld xmlns:a="http://schemas.openxmlformats.org/drawingml/2006/main" xmlns:r="http://schemas.openxmlformats.org/officeDocument/2006/relationships" xmlns:p="http://schemas.openxmlformats.org/presentationml/2006/main">
+<p:sld xmlns:a="http://schemas.openxmlformats.org/drawingml/2006/main" xmlns:p="http://schemas.openxmlformats.org/presentationml/2006/main" xmlns:r="http://schemas.openxmlformats.org/officeDocument/2006/relationships">
   <p:cSld>
     <p:spTree>
       <p:nvGrpSpPr>
@@ -4152,14 +5713,702 @@
         <p:cNvGrpSpPr/>
         <p:nvPr/>
       </p:nvGrpSpPr>
-      <p:grpSpPr>
-        <a:xfrm>
-          <a:off x="0" y="0"/>
-          <a:ext cx="0" cy="0"/>
-          <a:chOff x="0" y="0"/>
-          <a:chExt cx="0" cy="0"/>
-        </a:xfrm>
-      </p:grpSpPr>
+      <p:grpSpPr/>
+      <p:sp>
+        <p:nvSpPr>
+          <p:cNvPr id="2" name="Rectangle 1"/>
+          <p:cNvSpPr/>
+          <p:nvPr/>
+        </p:nvSpPr>
+        <p:spPr>
+          <a:xfrm>
+            <a:off x="0" y="0"/>
+            <a:ext cx="12191695" cy="164592"/>
+          </a:xfrm>
+          <a:prstGeom prst="rect">
+            <a:avLst/>
+          </a:prstGeom>
+          <a:solidFill>
+            <a:srgbClr val="2A9D8F"/>
+          </a:solidFill>
+          <a:ln>
+            <a:noFill/>
+          </a:ln>
+        </p:spPr>
+        <p:style>
+          <a:lnRef idx="1">
+            <a:schemeClr val="accent1"/>
+          </a:lnRef>
+          <a:fillRef idx="3">
+            <a:schemeClr val="accent1"/>
+          </a:fillRef>
+          <a:effectRef idx="2">
+            <a:schemeClr val="accent1"/>
+          </a:effectRef>
+          <a:fontRef idx="minor">
+            <a:schemeClr val="lt1"/>
+          </a:fontRef>
+        </p:style>
+        <p:txBody>
+          <a:bodyPr rtlCol="0" anchor="ctr"/>
+          <a:lstStyle/>
+          <a:p>
+            <a:pPr algn="ctr"/>
+          </a:p>
+        </p:txBody>
+      </p:sp>
+      <p:sp>
+        <p:nvSpPr>
+          <p:cNvPr id="3" name="TextBox 2"/>
+          <p:cNvSpPr txBox="1"/>
+          <p:nvPr/>
+        </p:nvSpPr>
+        <p:spPr>
+          <a:xfrm>
+            <a:off x="548640" y="365760"/>
+            <a:ext cx="11064240" cy="1143000"/>
+          </a:xfrm>
+          <a:prstGeom prst="rect">
+            <a:avLst/>
+          </a:prstGeom>
+          <a:noFill/>
+        </p:spPr>
+        <p:txBody>
+          <a:bodyPr wrap="square">
+            <a:spAutoFit/>
+          </a:bodyPr>
+          <a:lstStyle/>
+          <a:p>
+            <a:r>
+              <a:rPr sz="2900" b="1" i="0">
+                <a:solidFill>
+                  <a:srgbClr val="1D2B3A"/>
+                </a:solidFill>
+                <a:latin typeface="Calibri"/>
+              </a:rPr>
+              <a:t>Why it inverts — distance metrics pinpoint it</a:t>
+            </a:r>
+          </a:p>
+          <a:p>
+            <a:r>
+              <a:rPr sz="1400" b="0" i="1">
+                <a:solidFill>
+                  <a:srgbClr val="2A9D8F"/>
+                </a:solidFill>
+                <a:latin typeface="Calibri"/>
+              </a:rPr>
+              <a:t>KS &amp; Wasserstein</a:t>
+            </a:r>
+          </a:p>
+        </p:txBody>
+      </p:sp>
+      <p:sp>
+        <p:nvSpPr>
+          <p:cNvPr id="4" name="TextBox 3"/>
+          <p:cNvSpPr txBox="1"/>
+          <p:nvPr/>
+        </p:nvSpPr>
+        <p:spPr>
+          <a:xfrm>
+            <a:off x="640080" y="1783080"/>
+            <a:ext cx="5943600" cy="4754880"/>
+          </a:xfrm>
+          <a:prstGeom prst="rect">
+            <a:avLst/>
+          </a:prstGeom>
+          <a:noFill/>
+        </p:spPr>
+        <p:txBody>
+          <a:bodyPr wrap="square">
+            <a:spAutoFit/>
+          </a:bodyPr>
+          <a:lstStyle/>
+          <a:p>
+            <a:pPr>
+              <a:spcAft>
+                <a:spcPts val="900"/>
+              </a:spcAft>
+            </a:pPr>
+            <a:r>
+              <a:rPr sz="1750" b="0" i="0">
+                <a:solidFill>
+                  <a:srgbClr val="1D2B3A"/>
+                </a:solidFill>
+                <a:latin typeface="Calibri"/>
+              </a:rPr>
+              <a:t>•  Measure how far each feature’s distribution SHIFTS between the two datasets</a:t>
+            </a:r>
+          </a:p>
+          <a:p>
+            <a:pPr lvl="1">
+              <a:spcAft>
+                <a:spcPts val="900"/>
+              </a:spcAft>
+            </a:pPr>
+            <a:r>
+              <a:rPr sz="1600" b="0" i="0">
+                <a:solidFill>
+                  <a:srgbClr val="5B6472"/>
+                </a:solidFill>
+                <a:latin typeface="Calibri"/>
+              </a:rPr>
+              <a:t>–  KS statistic = biggest gap between the two cumulative distributions</a:t>
+            </a:r>
+          </a:p>
+          <a:p>
+            <a:pPr lvl="1">
+              <a:spcAft>
+                <a:spcPts val="900"/>
+              </a:spcAft>
+            </a:pPr>
+            <a:r>
+              <a:rPr sz="1600" b="0" i="0">
+                <a:solidFill>
+                  <a:srgbClr val="5B6472"/>
+                </a:solidFill>
+                <a:latin typeface="Calibri"/>
+              </a:rPr>
+              <a:t>–  Wasserstein (earth-mover) = work to turn one distribution into the other</a:t>
+            </a:r>
+          </a:p>
+          <a:p>
+            <a:pPr>
+              <a:spcAft>
+                <a:spcPts val="900"/>
+              </a:spcAft>
+            </a:pPr>
+            <a:r>
+              <a:rPr sz="1750" b="0" i="0">
+                <a:solidFill>
+                  <a:srgbClr val="1D2B3A"/>
+                </a:solidFill>
+                <a:latin typeface="Calibri"/>
+              </a:rPr>
+              <a:t>•  Most-shifted features = is_https, path_len, n_subdomain</a:t>
+            </a:r>
+          </a:p>
+          <a:p>
+            <a:pPr lvl="1">
+              <a:spcAft>
+                <a:spcPts val="900"/>
+              </a:spcAft>
+            </a:pPr>
+            <a:r>
+              <a:rPr sz="1600" b="0" i="0">
+                <a:solidFill>
+                  <a:srgbClr val="5B6472"/>
+                </a:solidFill>
+                <a:latin typeface="Calibri"/>
+              </a:rPr>
+              <a:t>–  …which are EXACTLY the top SHAP drivers → it built on the least transferable signals</a:t>
+            </a:r>
+          </a:p>
+        </p:txBody>
+      </p:sp>
+      <p:pic>
+        <p:nvPicPr>
+          <p:cNvPr id="5" name="Picture 4" descr="F7_domain_shift.png"/>
+          <p:cNvPicPr>
+            <a:picLocks noChangeAspect="1"/>
+          </p:cNvPicPr>
+          <p:nvPr/>
+        </p:nvPicPr>
+        <p:blipFill>
+          <a:blip r:embed="rId2"/>
+          <a:stretch>
+            <a:fillRect/>
+          </a:stretch>
+        </p:blipFill>
+        <p:spPr>
+          <a:xfrm>
+            <a:off x="6629400" y="2103120"/>
+            <a:ext cx="5349240" cy="3209544"/>
+          </a:xfrm>
+          <a:prstGeom prst="rect">
+            <a:avLst/>
+          </a:prstGeom>
+        </p:spPr>
+      </p:pic>
+    </p:spTree>
+  </p:cSld>
+  <p:clrMapOvr>
+    <a:masterClrMapping/>
+  </p:clrMapOvr>
+</p:sld>
+</file>
+
+<file path=ppt/slides/slide15.xml><?xml version="1.0" encoding="utf-8"?>
+<p:sld xmlns:a="http://schemas.openxmlformats.org/drawingml/2006/main" xmlns:p="http://schemas.openxmlformats.org/presentationml/2006/main" xmlns:r="http://schemas.openxmlformats.org/officeDocument/2006/relationships">
+  <p:cSld>
+    <p:spTree>
+      <p:nvGrpSpPr>
+        <p:cNvPr id="1" name=""/>
+        <p:cNvGrpSpPr/>
+        <p:nvPr/>
+      </p:nvGrpSpPr>
+      <p:grpSpPr/>
+      <p:sp>
+        <p:nvSpPr>
+          <p:cNvPr id="2" name="Rectangle 1"/>
+          <p:cNvSpPr/>
+          <p:nvPr/>
+        </p:nvSpPr>
+        <p:spPr>
+          <a:xfrm>
+            <a:off x="0" y="0"/>
+            <a:ext cx="12191695" cy="164592"/>
+          </a:xfrm>
+          <a:prstGeom prst="rect">
+            <a:avLst/>
+          </a:prstGeom>
+          <a:solidFill>
+            <a:srgbClr val="2A9D8F"/>
+          </a:solidFill>
+          <a:ln>
+            <a:noFill/>
+          </a:ln>
+        </p:spPr>
+        <p:style>
+          <a:lnRef idx="1">
+            <a:schemeClr val="accent1"/>
+          </a:lnRef>
+          <a:fillRef idx="3">
+            <a:schemeClr val="accent1"/>
+          </a:fillRef>
+          <a:effectRef idx="2">
+            <a:schemeClr val="accent1"/>
+          </a:effectRef>
+          <a:fontRef idx="minor">
+            <a:schemeClr val="lt1"/>
+          </a:fontRef>
+        </p:style>
+        <p:txBody>
+          <a:bodyPr rtlCol="0" anchor="ctr"/>
+          <a:lstStyle/>
+          <a:p>
+            <a:pPr algn="ctr"/>
+          </a:p>
+        </p:txBody>
+      </p:sp>
+      <p:sp>
+        <p:nvSpPr>
+          <p:cNvPr id="3" name="TextBox 2"/>
+          <p:cNvSpPr txBox="1"/>
+          <p:nvPr/>
+        </p:nvSpPr>
+        <p:spPr>
+          <a:xfrm>
+            <a:off x="548640" y="365760"/>
+            <a:ext cx="11064240" cy="1143000"/>
+          </a:xfrm>
+          <a:prstGeom prst="rect">
+            <a:avLst/>
+          </a:prstGeom>
+          <a:noFill/>
+        </p:spPr>
+        <p:txBody>
+          <a:bodyPr wrap="square">
+            <a:spAutoFit/>
+          </a:bodyPr>
+          <a:lstStyle/>
+          <a:p>
+            <a:r>
+              <a:rPr sz="2900" b="1" i="0">
+                <a:solidFill>
+                  <a:srgbClr val="1D2B3A"/>
+                </a:solidFill>
+                <a:latin typeface="Calibri"/>
+              </a:rPr>
+              <a:t>Conclusion — a useful second opinion, not a solution</a:t>
+            </a:r>
+          </a:p>
+        </p:txBody>
+      </p:sp>
+      <p:sp>
+        <p:nvSpPr>
+          <p:cNvPr id="4" name="TextBox 3"/>
+          <p:cNvSpPr txBox="1"/>
+          <p:nvPr/>
+        </p:nvSpPr>
+        <p:spPr>
+          <a:xfrm>
+            <a:off x="640080" y="1783080"/>
+            <a:ext cx="10972800" cy="4754880"/>
+          </a:xfrm>
+          <a:prstGeom prst="rect">
+            <a:avLst/>
+          </a:prstGeom>
+          <a:noFill/>
+        </p:spPr>
+        <p:txBody>
+          <a:bodyPr wrap="square">
+            <a:spAutoFit/>
+          </a:bodyPr>
+          <a:lstStyle/>
+          <a:p>
+            <a:pPr>
+              <a:spcAft>
+                <a:spcPts val="900"/>
+              </a:spcAft>
+            </a:pPr>
+            <a:r>
+              <a:rPr sz="1750" b="0" i="0">
+                <a:solidFill>
+                  <a:srgbClr val="1D2B3A"/>
+                </a:solidFill>
+                <a:latin typeface="Calibri"/>
+              </a:rPr>
+              <a:t>•  URL structure alone is NOT a generalisable phishing signal:</a:t>
+            </a:r>
+          </a:p>
+          <a:p>
+            <a:pPr lvl="1">
+              <a:spcAft>
+                <a:spcPts val="900"/>
+              </a:spcAft>
+            </a:pPr>
+            <a:r>
+              <a:rPr sz="1600" b="0" i="0">
+                <a:solidFill>
+                  <a:srgbClr val="5B6472"/>
+                </a:solidFill>
+                <a:latin typeface="Calibri"/>
+              </a:rPr>
+              <a:t>–  built on a dataset artifact (HTTPS + correlated structure) → trivially evaded, collapses OOD</a:t>
+            </a:r>
+          </a:p>
+          <a:p>
+            <a:pPr>
+              <a:spcAft>
+                <a:spcPts val="900"/>
+              </a:spcAft>
+            </a:pPr>
+            <a:r>
+              <a:rPr sz="1750" b="0" i="0">
+                <a:solidFill>
+                  <a:srgbClr val="1D2B3A"/>
+                </a:solidFill>
+                <a:latin typeface="Calibri"/>
+              </a:rPr>
+              <a:t>•  But it IS fast, private, interpretable, and robust to character obfuscation</a:t>
+            </a:r>
+          </a:p>
+          <a:p>
+            <a:pPr>
+              <a:spcAft>
+                <a:spcPts val="900"/>
+              </a:spcAft>
+            </a:pPr>
+            <a:r>
+              <a:rPr sz="1750" b="0" i="0">
+                <a:solidFill>
+                  <a:srgbClr val="1D2B3A"/>
+                </a:solidFill>
+                <a:latin typeface="Calibri"/>
+              </a:rPr>
+              <a:t>•  Right design = FUSION: this link channel + my partner’s content channel + reputation/age</a:t>
+            </a:r>
+          </a:p>
+          <a:p>
+            <a:pPr lvl="1">
+              <a:spcAft>
+                <a:spcPts val="900"/>
+              </a:spcAft>
+            </a:pPr>
+            <a:r>
+              <a:rPr sz="1600" b="0" i="0">
+                <a:solidFill>
+                  <a:srgbClr val="5B6472"/>
+                </a:solidFill>
+                <a:latin typeface="Calibri"/>
+              </a:rPr>
+              <a:t>–  → beat one channel and the other still fires</a:t>
+            </a:r>
+          </a:p>
+        </p:txBody>
+      </p:sp>
+      <p:sp>
+        <p:nvSpPr>
+          <p:cNvPr id="5" name="TextBox 4"/>
+          <p:cNvSpPr txBox="1"/>
+          <p:nvPr/>
+        </p:nvSpPr>
+        <p:spPr>
+          <a:xfrm>
+            <a:off x="640080" y="5989320"/>
+            <a:ext cx="10972800" cy="640080"/>
+          </a:xfrm>
+          <a:prstGeom prst="rect">
+            <a:avLst/>
+          </a:prstGeom>
+          <a:noFill/>
+        </p:spPr>
+        <p:txBody>
+          <a:bodyPr wrap="square">
+            <a:spAutoFit/>
+          </a:bodyPr>
+          <a:lstStyle/>
+          <a:p>
+            <a:r>
+              <a:rPr sz="1700" b="1" i="0">
+                <a:solidFill>
+                  <a:srgbClr val="E76F51"/>
+                </a:solidFill>
+                <a:latin typeface="Calibri"/>
+              </a:rPr>
+              <a:t>Near-perfect URL benchmarks measure dataset construction, not phishing.</a:t>
+            </a:r>
+          </a:p>
+        </p:txBody>
+      </p:sp>
+    </p:spTree>
+  </p:cSld>
+  <p:clrMapOvr>
+    <a:masterClrMapping/>
+  </p:clrMapOvr>
+</p:sld>
+</file>
+
+<file path=ppt/slides/slide16.xml><?xml version="1.0" encoding="utf-8"?>
+<p:sld xmlns:a="http://schemas.openxmlformats.org/drawingml/2006/main" xmlns:p="http://schemas.openxmlformats.org/presentationml/2006/main" xmlns:r="http://schemas.openxmlformats.org/officeDocument/2006/relationships">
+  <p:cSld>
+    <p:spTree>
+      <p:nvGrpSpPr>
+        <p:cNvPr id="1" name=""/>
+        <p:cNvGrpSpPr/>
+        <p:nvPr/>
+      </p:nvGrpSpPr>
+      <p:grpSpPr/>
+      <p:sp>
+        <p:nvSpPr>
+          <p:cNvPr id="2" name="Rectangle 1"/>
+          <p:cNvSpPr/>
+          <p:nvPr/>
+        </p:nvSpPr>
+        <p:spPr>
+          <a:xfrm>
+            <a:off x="0" y="0"/>
+            <a:ext cx="12191695" cy="164592"/>
+          </a:xfrm>
+          <a:prstGeom prst="rect">
+            <a:avLst/>
+          </a:prstGeom>
+          <a:solidFill>
+            <a:srgbClr val="2A9D8F"/>
+          </a:solidFill>
+          <a:ln>
+            <a:noFill/>
+          </a:ln>
+        </p:spPr>
+        <p:style>
+          <a:lnRef idx="1">
+            <a:schemeClr val="accent1"/>
+          </a:lnRef>
+          <a:fillRef idx="3">
+            <a:schemeClr val="accent1"/>
+          </a:fillRef>
+          <a:effectRef idx="2">
+            <a:schemeClr val="accent1"/>
+          </a:effectRef>
+          <a:fontRef idx="minor">
+            <a:schemeClr val="lt1"/>
+          </a:fontRef>
+        </p:style>
+        <p:txBody>
+          <a:bodyPr rtlCol="0" anchor="ctr"/>
+          <a:lstStyle/>
+          <a:p>
+            <a:pPr algn="ctr"/>
+          </a:p>
+        </p:txBody>
+      </p:sp>
+      <p:sp>
+        <p:nvSpPr>
+          <p:cNvPr id="3" name="TextBox 2"/>
+          <p:cNvSpPr txBox="1"/>
+          <p:nvPr/>
+        </p:nvSpPr>
+        <p:spPr>
+          <a:xfrm>
+            <a:off x="548640" y="365760"/>
+            <a:ext cx="11064240" cy="1143000"/>
+          </a:xfrm>
+          <a:prstGeom prst="rect">
+            <a:avLst/>
+          </a:prstGeom>
+          <a:noFill/>
+        </p:spPr>
+        <p:txBody>
+          <a:bodyPr wrap="square">
+            <a:spAutoFit/>
+          </a:bodyPr>
+          <a:lstStyle/>
+          <a:p>
+            <a:r>
+              <a:rPr sz="2900" b="1" i="0">
+                <a:solidFill>
+                  <a:srgbClr val="1D2B3A"/>
+                </a:solidFill>
+                <a:latin typeface="Calibri"/>
+              </a:rPr>
+              <a:t>Course concepts used in this project</a:t>
+            </a:r>
+          </a:p>
+        </p:txBody>
+      </p:sp>
+      <p:sp>
+        <p:nvSpPr>
+          <p:cNvPr id="4" name="TextBox 3"/>
+          <p:cNvSpPr txBox="1"/>
+          <p:nvPr/>
+        </p:nvSpPr>
+        <p:spPr>
+          <a:xfrm>
+            <a:off x="640080" y="1783080"/>
+            <a:ext cx="10972800" cy="4754880"/>
+          </a:xfrm>
+          <a:prstGeom prst="rect">
+            <a:avLst/>
+          </a:prstGeom>
+          <a:noFill/>
+        </p:spPr>
+        <p:txBody>
+          <a:bodyPr wrap="square">
+            <a:spAutoFit/>
+          </a:bodyPr>
+          <a:lstStyle/>
+          <a:p>
+            <a:pPr>
+              <a:spcAft>
+                <a:spcPts val="900"/>
+              </a:spcAft>
+            </a:pPr>
+            <a:r>
+              <a:rPr sz="1550" b="0" i="0">
+                <a:solidFill>
+                  <a:srgbClr val="1D2B3A"/>
+                </a:solidFill>
+                <a:latin typeface="Calibri"/>
+              </a:rPr>
+              <a:t>•  EDA · distributions · skewness/kurtosis · robust stats · Pearson vs Spearman · Mann–Whitney U</a:t>
+            </a:r>
+          </a:p>
+          <a:p>
+            <a:pPr>
+              <a:spcAft>
+                <a:spcPts val="900"/>
+              </a:spcAft>
+            </a:pPr>
+            <a:r>
+              <a:rPr sz="1550" b="0" i="0">
+                <a:solidFill>
+                  <a:srgbClr val="1D2B3A"/>
+                </a:solidFill>
+                <a:latin typeface="Calibri"/>
+              </a:rPr>
+              <a:t>•  Feature engineering · Shannon entropy (information theory) · Levenshtein edit distance</a:t>
+            </a:r>
+          </a:p>
+          <a:p>
+            <a:pPr>
+              <a:spcAft>
+                <a:spcPts val="900"/>
+              </a:spcAft>
+            </a:pPr>
+            <a:r>
+              <a:rPr sz="1550" b="0" i="0">
+                <a:solidFill>
+                  <a:srgbClr val="1D2B3A"/>
+                </a:solidFill>
+                <a:latin typeface="Calibri"/>
+              </a:rPr>
+              <a:t>•  Accuracy paradox · Precision/Recall/F1/F2/MCC/AUC · cost-sensitive thresholds</a:t>
+            </a:r>
+          </a:p>
+          <a:p>
+            <a:pPr>
+              <a:spcAft>
+                <a:spcPts val="900"/>
+              </a:spcAft>
+            </a:pPr>
+            <a:r>
+              <a:rPr sz="1550" b="0" i="0">
+                <a:solidFill>
+                  <a:srgbClr val="1D2B3A"/>
+                </a:solidFill>
+                <a:latin typeface="Calibri"/>
+              </a:rPr>
+              <a:t>•  Bootstrap confidence intervals · McNemar’s test</a:t>
+            </a:r>
+          </a:p>
+          <a:p>
+            <a:pPr>
+              <a:spcAft>
+                <a:spcPts val="900"/>
+              </a:spcAft>
+            </a:pPr>
+            <a:r>
+              <a:rPr sz="1550" b="0" i="0">
+                <a:solidFill>
+                  <a:srgbClr val="1D2B3A"/>
+                </a:solidFill>
+                <a:latin typeface="Calibri"/>
+              </a:rPr>
+              <a:t>•  Explainability (SHAP) · adversarial ML (evasion, homoglyphs, adversarial training)</a:t>
+            </a:r>
+          </a:p>
+          <a:p>
+            <a:pPr>
+              <a:spcAft>
+                <a:spcPts val="900"/>
+              </a:spcAft>
+            </a:pPr>
+            <a:r>
+              <a:rPr sz="1550" b="0" i="0">
+                <a:solidFill>
+                  <a:srgbClr val="1D2B3A"/>
+                </a:solidFill>
+                <a:latin typeface="Calibri"/>
+              </a:rPr>
+              <a:t>•  Anomaly detection (Isolation Forest, LOF) · calibration (Brier)</a:t>
+            </a:r>
+          </a:p>
+          <a:p>
+            <a:pPr>
+              <a:spcAft>
+                <a:spcPts val="900"/>
+              </a:spcAft>
+            </a:pPr>
+            <a:r>
+              <a:rPr sz="1550" b="0" i="0">
+                <a:solidFill>
+                  <a:srgbClr val="1D2B3A"/>
+                </a:solidFill>
+                <a:latin typeface="Calibri"/>
+              </a:rPr>
+              <a:t>•  Domain shift / concept drift · distance metrics (KS, Wasserstein) · feature ablation · error analysis</a:t>
+            </a:r>
+          </a:p>
+        </p:txBody>
+      </p:sp>
+    </p:spTree>
+  </p:cSld>
+  <p:clrMapOvr>
+    <a:masterClrMapping/>
+  </p:clrMapOvr>
+</p:sld>
+</file>
+
+<file path=ppt/slides/slide17.xml><?xml version="1.0" encoding="utf-8"?>
+<p:sld xmlns:a="http://schemas.openxmlformats.org/drawingml/2006/main" xmlns:p="http://schemas.openxmlformats.org/presentationml/2006/main" xmlns:r="http://schemas.openxmlformats.org/officeDocument/2006/relationships">
+  <p:cSld>
+    <p:spTree>
+      <p:nvGrpSpPr>
+        <p:cNvPr id="1" name=""/>
+        <p:cNvGrpSpPr/>
+        <p:nvPr/>
+      </p:nvGrpSpPr>
+      <p:grpSpPr/>
       <p:sp>
         <p:nvSpPr>
           <p:cNvPr id="2" name="Rectangle 1"/>
@@ -4200,7 +6449,6 @@
           <a:lstStyle/>
           <a:p>
             <a:pPr algn="ctr"/>
-            <a:endParaRPr/>
           </a:p>
         </p:txBody>
       </p:sp>
@@ -4212,8 +6460,8 @@
         </p:nvSpPr>
         <p:spPr>
           <a:xfrm>
-            <a:off x="822960" y="2743200"/>
-            <a:ext cx="10515600" cy="1828800"/>
+            <a:off x="822960" y="2651760"/>
+            <a:ext cx="10515600" cy="2011680"/>
           </a:xfrm>
           <a:prstGeom prst="rect">
             <a:avLst/>
@@ -4244,7 +6492,23 @@
                 </a:solidFill>
                 <a:latin typeface="Calibri"/>
               </a:rPr>
-              <a:t>github.com/segals/phishing-url-detector  ·  reproducible: python run_all.py</a:t>
+              <a:t>github.com/segals/phishing-url-detector   ·   reproducible: python run_all.py</a:t>
+            </a:r>
+          </a:p>
+          <a:p>
+            <a:pPr>
+              <a:spcBef>
+                <a:spcPts val="1000"/>
+              </a:spcBef>
+            </a:pPr>
+            <a:r>
+              <a:rPr sz="1800" b="0" i="1">
+                <a:solidFill>
+                  <a:srgbClr val="C7D0D8"/>
+                </a:solidFill>
+                <a:latin typeface="Calibri"/>
+              </a:rPr>
+              <a:t>Questions?</a:t>
             </a:r>
           </a:p>
         </p:txBody>
@@ -4258,7 +6522,7 @@
 </file>
 
 <file path=ppt/slides/slide2.xml><?xml version="1.0" encoding="utf-8"?>
-<p:sld xmlns:a="http://schemas.openxmlformats.org/drawingml/2006/main" xmlns:r="http://schemas.openxmlformats.org/officeDocument/2006/relationships" xmlns:p="http://schemas.openxmlformats.org/presentationml/2006/main">
+<p:sld xmlns:a="http://schemas.openxmlformats.org/drawingml/2006/main" xmlns:p="http://schemas.openxmlformats.org/presentationml/2006/main" xmlns:r="http://schemas.openxmlformats.org/officeDocument/2006/relationships">
   <p:cSld>
     <p:spTree>
       <p:nvGrpSpPr>
@@ -4266,14 +6530,7 @@
         <p:cNvGrpSpPr/>
         <p:nvPr/>
       </p:nvGrpSpPr>
-      <p:grpSpPr>
-        <a:xfrm>
-          <a:off x="0" y="0"/>
-          <a:ext cx="0" cy="0"/>
-          <a:chOff x="0" y="0"/>
-          <a:chExt cx="0" cy="0"/>
-        </a:xfrm>
-      </p:grpSpPr>
+      <p:grpSpPr/>
       <p:sp>
         <p:nvSpPr>
           <p:cNvPr id="2" name="Rectangle 1"/>
@@ -4314,7 +6571,6 @@
           <a:lstStyle/>
           <a:p>
             <a:pPr algn="ctr"/>
-            <a:endParaRPr/>
           </a:p>
         </p:txBody>
       </p:sp>
@@ -4326,8 +6582,8 @@
         </p:nvSpPr>
         <p:spPr>
           <a:xfrm>
-            <a:off x="548640" y="411480"/>
-            <a:ext cx="11064240" cy="1097280"/>
+            <a:off x="548640" y="365760"/>
+            <a:ext cx="11064240" cy="1143000"/>
           </a:xfrm>
           <a:prstGeom prst="rect">
             <a:avLst/>
@@ -4341,24 +6597,13 @@
           <a:lstStyle/>
           <a:p>
             <a:r>
-              <a:rPr sz="3000" b="1" i="0">
+              <a:rPr sz="2900" b="1" i="0">
                 <a:solidFill>
                   <a:srgbClr val="1D2B3A"/>
                 </a:solidFill>
                 <a:latin typeface="Calibri"/>
               </a:rPr>
-              <a:t>The question</a:t>
-            </a:r>
-          </a:p>
-          <a:p>
-            <a:r>
-              <a:rPr sz="1400" b="0" i="1">
-                <a:solidFill>
-                  <a:srgbClr val="2A9D8F"/>
-                </a:solidFill>
-                <a:latin typeface="Calibri"/>
-              </a:rPr>
-              <a:t>one half of a two-part detector</a:t>
+              <a:t>The question, and the project</a:t>
             </a:r>
           </a:p>
         </p:txBody>
@@ -4371,8 +6616,8 @@
         </p:nvSpPr>
         <p:spPr>
           <a:xfrm>
-            <a:off x="640080" y="1737360"/>
-            <a:ext cx="10972800" cy="4572000"/>
+            <a:off x="640080" y="1783080"/>
+            <a:ext cx="10972800" cy="4754880"/>
           </a:xfrm>
           <a:prstGeom prst="rect">
             <a:avLst/>
@@ -4387,81 +6632,81 @@
           <a:p>
             <a:pPr>
               <a:spcAft>
-                <a:spcPts val="1000"/>
+                <a:spcPts val="900"/>
               </a:spcAft>
             </a:pPr>
             <a:r>
-              <a:rPr sz="1800" b="0" i="0">
+              <a:rPr sz="1750" b="0" i="0">
                 <a:solidFill>
                   <a:srgbClr val="1D2B3A"/>
                 </a:solidFill>
                 <a:latin typeface="Calibri"/>
               </a:rPr>
-              <a:t>•  Phishing is the #1 initial-access vector — and much of it is just a link.</a:t>
+              <a:t>•  Phishing is the #1 way attackers get a first foothold — and much of it is just a link.</a:t>
             </a:r>
           </a:p>
           <a:p>
             <a:pPr>
               <a:spcAft>
-                <a:spcPts val="1000"/>
+                <a:spcPts val="900"/>
               </a:spcAft>
             </a:pPr>
             <a:r>
-              <a:rPr sz="1800" b="0" i="0">
+              <a:rPr sz="1750" b="0" i="0">
                 <a:solidFill>
                   <a:srgbClr val="1D2B3A"/>
                 </a:solidFill>
                 <a:latin typeface="Calibri"/>
               </a:rPr>
-              <a:t>•  Can we catch phishing from the URL ALONE (no page fetch, no content)?</a:t>
+              <a:t>•  Can we classify a URL as phishing / legitimate from the STRING ALONE?</a:t>
+            </a:r>
+          </a:p>
+          <a:p>
+            <a:pPr lvl="1">
+              <a:spcAft>
+                <a:spcPts val="900"/>
+              </a:spcAft>
+            </a:pPr>
+            <a:r>
+              <a:rPr sz="1600" b="0" i="0">
+                <a:solidFill>
+                  <a:srgbClr val="5B6472"/>
+                </a:solidFill>
+                <a:latin typeface="Calibri"/>
+              </a:rPr>
+              <a:t>–  no page fetch → fast (~milliseconds), private, works before the user clicks</a:t>
             </a:r>
           </a:p>
           <a:p>
             <a:pPr>
               <a:spcAft>
-                <a:spcPts val="1000"/>
+                <a:spcPts val="900"/>
               </a:spcAft>
             </a:pPr>
             <a:r>
-              <a:rPr sz="1800" b="0" i="0">
+              <a:rPr sz="1750" b="0" i="0">
                 <a:solidFill>
                   <a:srgbClr val="1D2B3A"/>
                 </a:solidFill>
                 <a:latin typeface="Calibri"/>
               </a:rPr>
-              <a:t>•  This project = the URL / link channel. My partner built the text / content channel.</a:t>
+              <a:t>•  Two-part project: this half = the URL / link channel; my partner = the email content channel.</a:t>
             </a:r>
           </a:p>
           <a:p>
             <a:pPr>
               <a:spcAft>
-                <a:spcPts val="1000"/>
+                <a:spcPts val="900"/>
               </a:spcAft>
             </a:pPr>
             <a:r>
-              <a:rPr sz="1800" b="0" i="0">
+              <a:rPr sz="1750" b="0" i="0">
                 <a:solidFill>
                   <a:srgbClr val="1D2B3A"/>
                 </a:solidFill>
                 <a:latin typeface="Calibri"/>
               </a:rPr>
-              <a:t>•  Built to be independent; the two are meant to be fused later.</a:t>
-            </a:r>
-          </a:p>
-          <a:p>
-            <a:pPr>
-              <a:spcAft>
-                <a:spcPts val="1000"/>
-              </a:spcAft>
-            </a:pPr>
-            <a:r>
-              <a:rPr sz="1800" b="0" i="0">
-                <a:solidFill>
-                  <a:srgbClr val="1D2B3A"/>
-                </a:solidFill>
-                <a:latin typeface="Calibri"/>
-              </a:rPr>
-              <a:t>•  Plan: build a URL detector → get a near-perfect score → prove it is a mirage.</a:t>
+              <a:t>•  Built independently. Plan: build a detector → then stress-test whether its score is real.</a:t>
             </a:r>
           </a:p>
         </p:txBody>
@@ -4475,7 +6720,7 @@
 </file>
 
 <file path=ppt/slides/slide3.xml><?xml version="1.0" encoding="utf-8"?>
-<p:sld xmlns:a="http://schemas.openxmlformats.org/drawingml/2006/main" xmlns:r="http://schemas.openxmlformats.org/officeDocument/2006/relationships" xmlns:p="http://schemas.openxmlformats.org/presentationml/2006/main">
+<p:sld xmlns:a="http://schemas.openxmlformats.org/drawingml/2006/main" xmlns:p="http://schemas.openxmlformats.org/presentationml/2006/main" xmlns:r="http://schemas.openxmlformats.org/officeDocument/2006/relationships">
   <p:cSld>
     <p:spTree>
       <p:nvGrpSpPr>
@@ -4483,14 +6728,7 @@
         <p:cNvGrpSpPr/>
         <p:nvPr/>
       </p:nvGrpSpPr>
-      <p:grpSpPr>
-        <a:xfrm>
-          <a:off x="0" y="0"/>
-          <a:ext cx="0" cy="0"/>
-          <a:chOff x="0" y="0"/>
-          <a:chExt cx="0" cy="0"/>
-        </a:xfrm>
-      </p:grpSpPr>
+      <p:grpSpPr/>
       <p:sp>
         <p:nvSpPr>
           <p:cNvPr id="2" name="Rectangle 1"/>
@@ -4531,7 +6769,6 @@
           <a:lstStyle/>
           <a:p>
             <a:pPr algn="ctr"/>
-            <a:endParaRPr/>
           </a:p>
         </p:txBody>
       </p:sp>
@@ -4543,8 +6780,8 @@
         </p:nvSpPr>
         <p:spPr>
           <a:xfrm>
-            <a:off x="548640" y="411480"/>
-            <a:ext cx="11064240" cy="1097280"/>
+            <a:off x="548640" y="365760"/>
+            <a:ext cx="11064240" cy="1143000"/>
           </a:xfrm>
           <a:prstGeom prst="rect">
             <a:avLst/>
@@ -4558,7 +6795,7 @@
           <a:lstStyle/>
           <a:p>
             <a:r>
-              <a:rPr sz="3000" b="1" i="0">
+              <a:rPr sz="2900" b="1" i="0">
                 <a:solidFill>
                   <a:srgbClr val="1D2B3A"/>
                 </a:solidFill>
@@ -4588,8 +6825,8 @@
         </p:nvSpPr>
         <p:spPr>
           <a:xfrm>
-            <a:off x="640080" y="1737360"/>
-            <a:ext cx="5669280" cy="4572000"/>
+            <a:off x="640080" y="1783080"/>
+            <a:ext cx="5852160" cy="4754880"/>
           </a:xfrm>
           <a:prstGeom prst="rect">
             <a:avLst/>
@@ -4604,65 +6841,81 @@
           <a:p>
             <a:pPr>
               <a:spcAft>
-                <a:spcPts val="1000"/>
+                <a:spcPts val="900"/>
               </a:spcAft>
             </a:pPr>
             <a:r>
-              <a:rPr sz="1800" b="0" i="0">
+              <a:rPr sz="1750" b="0" i="0">
                 <a:solidFill>
                   <a:srgbClr val="1D2B3A"/>
                 </a:solidFill>
                 <a:latin typeface="Calibri"/>
               </a:rPr>
-              <a:t>•  PhiUSIIL (Prasad &amp; Chandra, 2024; UCI id 967)</a:t>
+              <a:t>•  PhiUSIIL (Prasad &amp; Chandra, 2024; UCI id 967) — 235,795 real URLs, 43% phishing</a:t>
             </a:r>
           </a:p>
           <a:p>
             <a:pPr>
               <a:spcAft>
-                <a:spcPts val="1000"/>
+                <a:spcPts val="900"/>
               </a:spcAft>
             </a:pPr>
             <a:r>
-              <a:rPr sz="1800" b="0" i="0">
+              <a:rPr sz="1750" b="0" i="0">
                 <a:solidFill>
                   <a:srgbClr val="1D2B3A"/>
                 </a:solidFill>
                 <a:latin typeface="Calibri"/>
               </a:rPr>
-              <a:t>•  235,795 real URLs · 43% phishing · raw URL strings</a:t>
+              <a:t>•  Preprocessing: de-duplicate on the URL BEFORE splitting (no leakage), keep the natural</a:t>
+            </a:r>
+          </a:p>
+          <a:p>
+            <a:pPr lvl="1">
+              <a:spcAft>
+                <a:spcPts val="900"/>
+              </a:spcAft>
+            </a:pPr>
+            <a:r>
+              <a:rPr sz="1600" b="0" i="0">
+                <a:solidFill>
+                  <a:srgbClr val="5B6472"/>
+                </a:solidFill>
+                <a:latin typeface="Calibri"/>
+              </a:rPr>
+              <a:t>–  class balance (no rebalancing), stratified 60/20/20 split, seed 42, test used once</a:t>
             </a:r>
           </a:p>
           <a:p>
             <a:pPr>
               <a:spcAft>
-                <a:spcPts val="1000"/>
+                <a:spcPts val="900"/>
               </a:spcAft>
             </a:pPr>
             <a:r>
-              <a:rPr sz="1800" b="0" i="0">
+              <a:rPr sz="1750" b="0" i="0">
                 <a:solidFill>
                   <a:srgbClr val="1D2B3A"/>
                 </a:solidFill>
                 <a:latin typeface="Calibri"/>
               </a:rPr>
-              <a:t>•  One of the largest, most recent public URL datasets</a:t>
+              <a:t>•  For the generalisation test later: an INDEPENDENT Kaggle set (651k URLs) + live OpenPhish</a:t>
             </a:r>
           </a:p>
           <a:p>
             <a:pPr>
               <a:spcAft>
-                <a:spcPts val="1000"/>
+                <a:spcPts val="900"/>
               </a:spcAft>
             </a:pPr>
             <a:r>
-              <a:rPr sz="1800" b="0" i="0">
+              <a:rPr sz="1750" b="0" i="0">
                 <a:solidFill>
                   <a:srgbClr val="1D2B3A"/>
                 </a:solidFill>
                 <a:latin typeface="Calibri"/>
               </a:rPr>
-              <a:t>•  Cross-dataset test later: Kaggle Malicious-URLs (651k) + live OpenPhish</a:t>
+              <a:t>•  Reproducible: cleaned data is SHA-256 hashed and logged</a:t>
             </a:r>
           </a:p>
         </p:txBody>
@@ -4683,8 +6936,8 @@
         </p:blipFill>
         <p:spPr>
           <a:xfrm>
-            <a:off x="6309360" y="2011680"/>
-            <a:ext cx="5577840" cy="1544633"/>
+            <a:off x="6355080" y="1965960"/>
+            <a:ext cx="5623560" cy="1557294"/>
           </a:xfrm>
           <a:prstGeom prst="rect">
             <a:avLst/>
@@ -4700,7 +6953,7 @@
 </file>
 
 <file path=ppt/slides/slide4.xml><?xml version="1.0" encoding="utf-8"?>
-<p:sld xmlns:a="http://schemas.openxmlformats.org/drawingml/2006/main" xmlns:r="http://schemas.openxmlformats.org/officeDocument/2006/relationships" xmlns:p="http://schemas.openxmlformats.org/presentationml/2006/main">
+<p:sld xmlns:a="http://schemas.openxmlformats.org/drawingml/2006/main" xmlns:p="http://schemas.openxmlformats.org/presentationml/2006/main" xmlns:r="http://schemas.openxmlformats.org/officeDocument/2006/relationships">
   <p:cSld>
     <p:spTree>
       <p:nvGrpSpPr>
@@ -4708,14 +6961,7 @@
         <p:cNvGrpSpPr/>
         <p:nvPr/>
       </p:nvGrpSpPr>
-      <p:grpSpPr>
-        <a:xfrm>
-          <a:off x="0" y="0"/>
-          <a:ext cx="0" cy="0"/>
-          <a:chOff x="0" y="0"/>
-          <a:chExt cx="0" cy="0"/>
-        </a:xfrm>
-      </p:grpSpPr>
+      <p:grpSpPr/>
       <p:sp>
         <p:nvSpPr>
           <p:cNvPr id="2" name="Rectangle 1"/>
@@ -4756,7 +7002,6 @@
           <a:lstStyle/>
           <a:p>
             <a:pPr algn="ctr"/>
-            <a:endParaRPr/>
           </a:p>
         </p:txBody>
       </p:sp>
@@ -4768,8 +7013,8 @@
         </p:nvSpPr>
         <p:spPr>
           <a:xfrm>
-            <a:off x="548640" y="411480"/>
-            <a:ext cx="11064240" cy="1097280"/>
+            <a:off x="548640" y="365760"/>
+            <a:ext cx="11064240" cy="1143000"/>
           </a:xfrm>
           <a:prstGeom prst="rect">
             <a:avLst/>
@@ -4783,13 +7028,24 @@
           <a:lstStyle/>
           <a:p>
             <a:r>
-              <a:rPr sz="3000" b="1" i="0">
+              <a:rPr sz="2900" b="1" i="0">
                 <a:solidFill>
                   <a:srgbClr val="1D2B3A"/>
                 </a:solidFill>
                 <a:latin typeface="Calibri"/>
               </a:rPr>
-              <a:t>It looks perfect — F1 ≈ 1.0</a:t>
+              <a:t>How we chose the features</a:t>
+            </a:r>
+          </a:p>
+          <a:p>
+            <a:r>
+              <a:rPr sz="1400" b="0" i="1">
+                <a:solidFill>
+                  <a:srgbClr val="2A9D8F"/>
+                </a:solidFill>
+                <a:latin typeface="Calibri"/>
+              </a:rPr>
+              <a:t>feature engineering</a:t>
             </a:r>
           </a:p>
         </p:txBody>
@@ -4802,8 +7058,8 @@
         </p:nvSpPr>
         <p:spPr>
           <a:xfrm>
-            <a:off x="640080" y="1737360"/>
-            <a:ext cx="10972800" cy="4572000"/>
+            <a:off x="640080" y="1783080"/>
+            <a:ext cx="10972800" cy="4754880"/>
           </a:xfrm>
           <a:prstGeom prst="rect">
             <a:avLst/>
@@ -4818,115 +7074,97 @@
           <a:p>
             <a:pPr>
               <a:spcAft>
-                <a:spcPts val="1000"/>
+                <a:spcPts val="900"/>
               </a:spcAft>
             </a:pPr>
             <a:r>
-              <a:rPr sz="1800" b="0" i="0">
+              <a:rPr sz="1750" b="0" i="0">
                 <a:solidFill>
                   <a:srgbClr val="1D2B3A"/>
                 </a:solidFill>
                 <a:latin typeface="Calibri"/>
               </a:rPr>
-              <a:t>•  All provided features → F1 1.0</a:t>
+              <a:t>•  A URL is a short, STRUCTURED string — not prose.</a:t>
             </a:r>
           </a:p>
           <a:p>
             <a:pPr>
               <a:spcAft>
-                <a:spcPts val="1000"/>
+                <a:spcPts val="900"/>
               </a:spcAft>
             </a:pPr>
             <a:r>
-              <a:rPr sz="1800" b="0" i="0">
+              <a:rPr sz="1750" b="0" i="0">
                 <a:solidFill>
                   <a:srgbClr val="1D2B3A"/>
                 </a:solidFill>
                 <a:latin typeface="Calibri"/>
               </a:rPr>
-              <a:t>•  ONE feature (URLSimilarityIndex) → F1 0.9953  (≈ the label: leakage)</a:t>
+              <a:t>•  So unlike my partner (who vectorises text with TF-IDF / bag-of-words), I compute</a:t>
+            </a:r>
+          </a:p>
+          <a:p>
+            <a:pPr lvl="1">
+              <a:spcAft>
+                <a:spcPts val="900"/>
+              </a:spcAft>
+            </a:pPr>
+            <a:r>
+              <a:rPr sz="1600" b="0" i="0">
+                <a:solidFill>
+                  <a:srgbClr val="5B6472"/>
+                </a:solidFill>
+                <a:latin typeface="Calibri"/>
+              </a:rPr>
+              <a:t>–  interpretable numbers DIRECTLY from the URL — no learned text embedding.</a:t>
             </a:r>
           </a:p>
           <a:p>
             <a:pPr>
               <a:spcAft>
-                <a:spcPts val="1000"/>
+                <a:spcPts val="900"/>
               </a:spcAft>
             </a:pPr>
             <a:r>
-              <a:rPr sz="1800" b="0" i="0">
+              <a:rPr sz="1750" b="0" i="0">
                 <a:solidFill>
                   <a:srgbClr val="1D2B3A"/>
                 </a:solidFill>
                 <a:latin typeface="Calibri"/>
               </a:rPr>
-              <a:t>•  Even honest hand-built lexical features → F1 0.9967</a:t>
+              <a:t>•  Why interpretable, hand-built features (not a deep character model / URLNet)?</a:t>
+            </a:r>
+          </a:p>
+          <a:p>
+            <a:pPr lvl="1">
+              <a:spcAft>
+                <a:spcPts val="900"/>
+              </a:spcAft>
+            </a:pPr>
+            <a:r>
+              <a:rPr sz="1600" b="0" i="0">
+                <a:solidFill>
+                  <a:srgbClr val="5B6472"/>
+                </a:solidFill>
+                <a:latin typeface="Calibri"/>
+              </a:rPr>
+              <a:t>–  → so I can later attribute the score to specific, human-readable causes</a:t>
             </a:r>
           </a:p>
           <a:p>
             <a:pPr>
               <a:spcAft>
-                <a:spcPts val="1000"/>
+                <a:spcPts val="900"/>
               </a:spcAft>
             </a:pPr>
             <a:r>
-              <a:rPr sz="1800" b="0" i="0">
+              <a:rPr sz="1750" b="0" i="0">
                 <a:solidFill>
                   <a:srgbClr val="1D2B3A"/>
                 </a:solidFill>
                 <a:latin typeface="Calibri"/>
               </a:rPr>
-              <a:t>•  Majority-class baseline: 57% accuracy, 0% recall — the accuracy paradox</a:t>
-            </a:r>
-          </a:p>
-          <a:p>
-            <a:pPr>
-              <a:spcAft>
-                <a:spcPts val="1000"/>
-              </a:spcAft>
-            </a:pPr>
-            <a:r>
-              <a:rPr sz="1800" b="0" i="0">
-                <a:solidFill>
-                  <a:srgbClr val="1D2B3A"/>
-                </a:solidFill>
-                <a:latin typeface="Calibri"/>
-              </a:rPr>
-              <a:t>•  A one-line ‘not-HTTPS → phishing’ rule alone scores F1 0.68</a:t>
-            </a:r>
-          </a:p>
-        </p:txBody>
-      </p:sp>
-      <p:sp>
-        <p:nvSpPr>
-          <p:cNvPr id="5" name="TextBox 4"/>
-          <p:cNvSpPr txBox="1"/>
-          <p:nvPr/>
-        </p:nvSpPr>
-        <p:spPr>
-          <a:xfrm>
-            <a:off x="640080" y="5852160"/>
-            <a:ext cx="10972800" cy="731520"/>
-          </a:xfrm>
-          <a:prstGeom prst="rect">
-            <a:avLst/>
-          </a:prstGeom>
-          <a:noFill/>
-        </p:spPr>
-        <p:txBody>
-          <a:bodyPr wrap="square">
-            <a:spAutoFit/>
-          </a:bodyPr>
-          <a:lstStyle/>
-          <a:p>
-            <a:r>
-              <a:rPr sz="2000" b="1" i="0">
-                <a:solidFill>
-                  <a:srgbClr val="E76F51"/>
-                </a:solidFill>
-                <a:latin typeface="Calibri"/>
-              </a:rPr>
-              <a:t>→ the score is a DATASET ARTIFACT, not phishing detection</a:t>
+              <a:t>•  40 features, grouped into 6 families (next slide)</a:t>
             </a:r>
           </a:p>
         </p:txBody>
@@ -4940,7 +7178,7 @@
 </file>
 
 <file path=ppt/slides/slide5.xml><?xml version="1.0" encoding="utf-8"?>
-<p:sld xmlns:a="http://schemas.openxmlformats.org/drawingml/2006/main" xmlns:r="http://schemas.openxmlformats.org/officeDocument/2006/relationships" xmlns:p="http://schemas.openxmlformats.org/presentationml/2006/main">
+<p:sld xmlns:a="http://schemas.openxmlformats.org/drawingml/2006/main" xmlns:p="http://schemas.openxmlformats.org/presentationml/2006/main" xmlns:r="http://schemas.openxmlformats.org/officeDocument/2006/relationships">
   <p:cSld>
     <p:spTree>
       <p:nvGrpSpPr>
@@ -4948,14 +7186,7 @@
         <p:cNvGrpSpPr/>
         <p:nvPr/>
       </p:nvGrpSpPr>
-      <p:grpSpPr>
-        <a:xfrm>
-          <a:off x="0" y="0"/>
-          <a:ext cx="0" cy="0"/>
-          <a:chOff x="0" y="0"/>
-          <a:chExt cx="0" cy="0"/>
-        </a:xfrm>
-      </p:grpSpPr>
+      <p:grpSpPr/>
       <p:sp>
         <p:nvSpPr>
           <p:cNvPr id="2" name="Rectangle 1"/>
@@ -4996,7 +7227,6 @@
           <a:lstStyle/>
           <a:p>
             <a:pPr algn="ctr"/>
-            <a:endParaRPr/>
           </a:p>
         </p:txBody>
       </p:sp>
@@ -5008,8 +7238,8 @@
         </p:nvSpPr>
         <p:spPr>
           <a:xfrm>
-            <a:off x="548640" y="411480"/>
-            <a:ext cx="11064240" cy="1097280"/>
+            <a:off x="548640" y="365760"/>
+            <a:ext cx="11064240" cy="1143000"/>
           </a:xfrm>
           <a:prstGeom prst="rect">
             <a:avLst/>
@@ -5023,13 +7253,13 @@
           <a:lstStyle/>
           <a:p>
             <a:r>
-              <a:rPr sz="3000" b="1" i="0">
+              <a:rPr sz="2900" b="1" i="0">
                 <a:solidFill>
                   <a:srgbClr val="1D2B3A"/>
                 </a:solidFill>
                 <a:latin typeface="Calibri"/>
               </a:rPr>
-              <a:t>Why? The HTTPS collection artifact</a:t>
+              <a:t>The 40 features — six families</a:t>
             </a:r>
           </a:p>
         </p:txBody>
@@ -5042,8 +7272,8 @@
         </p:nvSpPr>
         <p:spPr>
           <a:xfrm>
-            <a:off x="640080" y="1737360"/>
-            <a:ext cx="5669280" cy="4572000"/>
+            <a:off x="640080" y="1783080"/>
+            <a:ext cx="10972800" cy="4754880"/>
           </a:xfrm>
           <a:prstGeom prst="rect">
             <a:avLst/>
@@ -5058,123 +7288,97 @@
           <a:p>
             <a:pPr>
               <a:spcAft>
-                <a:spcPts val="1000"/>
+                <a:spcPts val="900"/>
               </a:spcAft>
             </a:pPr>
             <a:r>
-              <a:rPr sz="1800" b="0" i="0">
+              <a:rPr sz="1700" b="0" i="0">
                 <a:solidFill>
                   <a:srgbClr val="1D2B3A"/>
                 </a:solidFill>
                 <a:latin typeface="Calibri"/>
               </a:rPr>
-              <a:t>•  Legitimate URLs in PhiUSIIL: 100% HTTPS</a:t>
+              <a:t>•  Lexical / length — URL length; counts of dots, slashes, digits, hyphens; digit ratio</a:t>
             </a:r>
           </a:p>
           <a:p>
             <a:pPr>
               <a:spcAft>
-                <a:spcPts val="1000"/>
+                <a:spcPts val="900"/>
               </a:spcAft>
             </a:pPr>
             <a:r>
-              <a:rPr sz="1800" b="0" i="0">
+              <a:rPr sz="1700" b="0" i="0">
                 <a:solidFill>
                   <a:srgbClr val="1D2B3A"/>
                 </a:solidFill>
                 <a:latin typeface="Calibri"/>
               </a:rPr>
-              <a:t>•  Phishing URLs: only 49% HTTPS</a:t>
+              <a:t>•  Host / domain — number of subdomains; is the host a raw IP; unusual port</a:t>
             </a:r>
           </a:p>
           <a:p>
             <a:pPr>
               <a:spcAft>
-                <a:spcPts val="1000"/>
+                <a:spcPts val="900"/>
               </a:spcAft>
             </a:pPr>
             <a:r>
-              <a:rPr sz="1800" b="0" i="0">
+              <a:rPr sz="1700" b="0" i="0">
                 <a:solidFill>
                   <a:srgbClr val="1D2B3A"/>
                 </a:solidFill>
                 <a:latin typeface="Calibri"/>
               </a:rPr>
-              <a:t>•  So the model largely learns ‘HTTP = phishing’ — a collection bias, not a real signal</a:t>
+              <a:t>•  TLD — the suffix (.com vs .tk vs .xyz); is it an abuse-associated TLD</a:t>
             </a:r>
           </a:p>
           <a:p>
             <a:pPr>
               <a:spcAft>
-                <a:spcPts val="1000"/>
+                <a:spcPts val="900"/>
               </a:spcAft>
             </a:pPr>
             <a:r>
-              <a:rPr sz="1800" b="0" i="0">
+              <a:rPr sz="1700" b="0" i="0">
                 <a:solidFill>
                   <a:srgbClr val="1D2B3A"/>
                 </a:solidFill>
                 <a:latin typeface="Calibri"/>
               </a:rPr>
-              <a:t>•  (Real modern phishing is mostly HTTPS — this rule is backwards in the wild)</a:t>
-            </a:r>
-          </a:p>
-        </p:txBody>
-      </p:sp>
-      <p:pic>
-        <p:nvPicPr>
-          <p:cNvPr id="5" name="Picture 4" descr="F5_shap.png"/>
-          <p:cNvPicPr>
-            <a:picLocks noChangeAspect="1"/>
-          </p:cNvPicPr>
-          <p:nvPr/>
-        </p:nvPicPr>
-        <p:blipFill>
-          <a:blip r:embed="rId2"/>
-          <a:stretch>
-            <a:fillRect/>
-          </a:stretch>
-        </p:blipFill>
-        <p:spPr>
-          <a:xfrm>
-            <a:off x="6400800" y="1828800"/>
-            <a:ext cx="5486400" cy="3918857"/>
-          </a:xfrm>
-          <a:prstGeom prst="rect">
-            <a:avLst/>
-          </a:prstGeom>
-        </p:spPr>
-      </p:pic>
-      <p:sp>
-        <p:nvSpPr>
-          <p:cNvPr id="6" name="TextBox 5"/>
-          <p:cNvSpPr txBox="1"/>
-          <p:nvPr/>
-        </p:nvSpPr>
-        <p:spPr>
-          <a:xfrm>
-            <a:off x="6400800" y="6035040"/>
-            <a:ext cx="5486400" cy="548640"/>
-          </a:xfrm>
-          <a:prstGeom prst="rect">
-            <a:avLst/>
-          </a:prstGeom>
-          <a:noFill/>
-        </p:spPr>
-        <p:txBody>
-          <a:bodyPr wrap="square">
-            <a:spAutoFit/>
-          </a:bodyPr>
-          <a:lstStyle/>
-          <a:p>
-            <a:r>
-              <a:rPr sz="1300" b="0" i="1">
-                <a:solidFill>
-                  <a:srgbClr val="5B6472"/>
-                </a:solidFill>
-                <a:latin typeface="Calibri"/>
-              </a:rPr>
-              <a:t>SHAP: is_https drives it (~3× any other feature)</a:t>
+              <a:t>•  Entropy — randomness of the host string (algorithmically-generated domains)</a:t>
+            </a:r>
+          </a:p>
+          <a:p>
+            <a:pPr>
+              <a:spcAft>
+                <a:spcPts val="900"/>
+              </a:spcAft>
+            </a:pPr>
+            <a:r>
+              <a:rPr sz="1700" b="0" i="0">
+                <a:solidFill>
+                  <a:srgbClr val="1D2B3A"/>
+                </a:solidFill>
+                <a:latin typeface="Calibri"/>
+              </a:rPr>
+              <a:t>•  Scheme / encoding — HTTPS?; punycode (xn--); percent/hex encoding</a:t>
+            </a:r>
+          </a:p>
+          <a:p>
+            <a:pPr>
+              <a:spcAft>
+                <a:spcPts val="900"/>
+              </a:spcAft>
+            </a:pPr>
+            <a:r>
+              <a:rPr sz="1700" b="0" i="0">
+                <a:solidFill>
+                  <a:srgbClr val="1D2B3A"/>
+                </a:solidFill>
+                <a:latin typeface="Calibri"/>
+              </a:rPr>
+              <a:t>•  Brand / cue — words like ‘verify/login/secure’; look-alike distance to real brands</a:t>
             </a:r>
           </a:p>
         </p:txBody>
@@ -5188,7 +7392,7 @@
 </file>
 
 <file path=ppt/slides/slide6.xml><?xml version="1.0" encoding="utf-8"?>
-<p:sld xmlns:a="http://schemas.openxmlformats.org/drawingml/2006/main" xmlns:r="http://schemas.openxmlformats.org/officeDocument/2006/relationships" xmlns:p="http://schemas.openxmlformats.org/presentationml/2006/main">
+<p:sld xmlns:a="http://schemas.openxmlformats.org/drawingml/2006/main" xmlns:p="http://schemas.openxmlformats.org/presentationml/2006/main" xmlns:r="http://schemas.openxmlformats.org/officeDocument/2006/relationships">
   <p:cSld>
     <p:spTree>
       <p:nvGrpSpPr>
@@ -5196,14 +7400,7 @@
         <p:cNvGrpSpPr/>
         <p:nvPr/>
       </p:nvGrpSpPr>
-      <p:grpSpPr>
-        <a:xfrm>
-          <a:off x="0" y="0"/>
-          <a:ext cx="0" cy="0"/>
-          <a:chOff x="0" y="0"/>
-          <a:chExt cx="0" cy="0"/>
-        </a:xfrm>
-      </p:grpSpPr>
+      <p:grpSpPr/>
       <p:sp>
         <p:nvSpPr>
           <p:cNvPr id="2" name="Rectangle 1"/>
@@ -5244,7 +7441,6 @@
           <a:lstStyle/>
           <a:p>
             <a:pPr algn="ctr"/>
-            <a:endParaRPr/>
           </a:p>
         </p:txBody>
       </p:sp>
@@ -5256,8 +7452,8 @@
         </p:nvSpPr>
         <p:spPr>
           <a:xfrm>
-            <a:off x="548640" y="411480"/>
-            <a:ext cx="11064240" cy="1097280"/>
+            <a:off x="548640" y="365760"/>
+            <a:ext cx="11064240" cy="1143000"/>
           </a:xfrm>
           <a:prstGeom prst="rect">
             <a:avLst/>
@@ -5271,13 +7467,13 @@
           <a:lstStyle/>
           <a:p>
             <a:r>
-              <a:rPr sz="3000" b="1" i="0">
+              <a:rPr sz="2900" b="1" i="0">
                 <a:solidFill>
                   <a:srgbClr val="1D2B3A"/>
                 </a:solidFill>
                 <a:latin typeface="Calibri"/>
               </a:rPr>
-              <a:t>40 features from the URL string alone</a:t>
+              <a:t>Two features worth the math</a:t>
             </a:r>
           </a:p>
           <a:p>
@@ -5288,7 +7484,7 @@
                 </a:solidFill>
                 <a:latin typeface="Calibri"/>
               </a:rPr>
-              <a:t>feature engineering · information theory · edit distance</a:t>
+              <a:t>information theory · edit distance</a:t>
             </a:r>
           </a:p>
         </p:txBody>
@@ -5302,7 +7498,7 @@
         <p:spPr>
           <a:xfrm>
             <a:off x="640080" y="1737360"/>
-            <a:ext cx="10972800" cy="4572000"/>
+            <a:ext cx="10972800" cy="4023360"/>
           </a:xfrm>
           <a:prstGeom prst="rect">
             <a:avLst/>
@@ -5315,83 +7511,84 @@
           </a:bodyPr>
           <a:lstStyle/>
           <a:p>
+            <a:r>
+              <a:rPr sz="2200" b="1" i="0">
+                <a:solidFill>
+                  <a:srgbClr val="1D2B3A"/>
+                </a:solidFill>
+                <a:latin typeface="Calibri"/>
+              </a:rPr>
+              <a:t>Shannon entropy of the host:   H = − Σ p · log₂(p)</a:t>
+            </a:r>
+          </a:p>
+          <a:p>
             <a:pPr>
               <a:spcAft>
-                <a:spcPts val="1000"/>
+                <a:spcPts val="600"/>
               </a:spcAft>
             </a:pPr>
             <a:r>
-              <a:rPr sz="1800" b="0" i="0">
+              <a:rPr sz="1600" b="0" i="0">
+                <a:solidFill>
+                  <a:srgbClr val="5B6472"/>
+                </a:solidFill>
+                <a:latin typeface="Calibri"/>
+              </a:rPr>
+              <a:t>“google” = repeating, predictable letters → LOW entropy;  “x7qz9wvt” ≈ random → HIGH entropy.</a:t>
+            </a:r>
+          </a:p>
+          <a:p>
+            <a:r>
+              <a:rPr sz="1600" b="0" i="1">
+                <a:solidFill>
+                  <a:srgbClr val="2A9D8F"/>
+                </a:solidFill>
+                <a:latin typeface="Calibri"/>
+              </a:rPr>
+              <a:t>→ catches algorithmically-generated (DGA) phishing domains.</a:t>
+            </a:r>
+          </a:p>
+          <a:p>
+            <a:pPr>
+              <a:spcBef>
+                <a:spcPts val="2000"/>
+              </a:spcBef>
+            </a:pPr>
+            <a:r>
+              <a:rPr sz="2200" b="1" i="0">
                 <a:solidFill>
                   <a:srgbClr val="1D2B3A"/>
                 </a:solidFill>
                 <a:latin typeface="Calibri"/>
               </a:rPr>
-              <a:t>•  Lexical: length, dots, digits, entropy of the URL/host</a:t>
+              <a:t>Brand look-alike:   Levenshtein edit distance to a known brand</a:t>
             </a:r>
           </a:p>
           <a:p>
             <a:pPr>
               <a:spcAft>
-                <a:spcPts val="1000"/>
+                <a:spcPts val="600"/>
               </a:spcAft>
             </a:pPr>
             <a:r>
-              <a:rPr sz="1800" b="0" i="0">
-                <a:solidFill>
-                  <a:srgbClr val="1D2B3A"/>
-                </a:solidFill>
-                <a:latin typeface="Calibri"/>
-              </a:rPr>
-              <a:t>•  Host/TLD: subdomains, IP-as-host, punycode, suspicious TLDs</a:t>
-            </a:r>
-          </a:p>
-          <a:p>
-            <a:pPr>
-              <a:spcAft>
-                <a:spcPts val="1000"/>
-              </a:spcAft>
-            </a:pPr>
-            <a:r>
-              <a:rPr sz="1800" b="0" i="0">
-                <a:solidFill>
-                  <a:srgbClr val="1D2B3A"/>
-                </a:solidFill>
-                <a:latin typeface="Calibri"/>
-              </a:rPr>
-              <a:t>•  Shannon entropy H = −Σ pᵢ log₂ pᵢ  → random-looking (DGA) domains</a:t>
-            </a:r>
-          </a:p>
-          <a:p>
-            <a:pPr>
-              <a:spcAft>
-                <a:spcPts val="1000"/>
-              </a:spcAft>
-            </a:pPr>
-            <a:r>
-              <a:rPr sz="1800" b="0" i="0">
-                <a:solidFill>
-                  <a:srgbClr val="1D2B3A"/>
-                </a:solidFill>
-                <a:latin typeface="Calibri"/>
-              </a:rPr>
-              <a:t>•  Brand look-alike = Levenshtein edit distance to a known brand (paypa1, arnazon)</a:t>
-            </a:r>
-          </a:p>
-          <a:p>
-            <a:pPr>
-              <a:spcAft>
-                <a:spcPts val="1000"/>
-              </a:spcAft>
-            </a:pPr>
-            <a:r>
-              <a:rPr sz="1800" b="0" i="0">
-                <a:solidFill>
-                  <a:srgbClr val="1D2B3A"/>
-                </a:solidFill>
-                <a:latin typeface="Calibri"/>
-              </a:rPr>
-              <a:t>•  All computable offline → fast (~ms), private, reproducible</a:t>
+              <a:rPr sz="1600" b="0" i="0">
+                <a:solidFill>
+                  <a:srgbClr val="5B6472"/>
+                </a:solidFill>
+                <a:latin typeface="Calibri"/>
+              </a:rPr>
+              <a:t>edit distance = min single-character inserts / deletes / substitutions to turn one word into another.</a:t>
+            </a:r>
+          </a:p>
+          <a:p>
+            <a:r>
+              <a:rPr sz="1600" b="0" i="1">
+                <a:solidFill>
+                  <a:srgbClr val="2A9D8F"/>
+                </a:solidFill>
+                <a:latin typeface="Calibri"/>
+              </a:rPr>
+              <a:t>“paypa1” is edit-distance 1 from “paypal”  → flag distance 1–2 as a typosquat.</a:t>
             </a:r>
           </a:p>
         </p:txBody>
@@ -5405,7 +7602,7 @@
 </file>
 
 <file path=ppt/slides/slide7.xml><?xml version="1.0" encoding="utf-8"?>
-<p:sld xmlns:a="http://schemas.openxmlformats.org/drawingml/2006/main" xmlns:r="http://schemas.openxmlformats.org/officeDocument/2006/relationships" xmlns:p="http://schemas.openxmlformats.org/presentationml/2006/main">
+<p:sld xmlns:a="http://schemas.openxmlformats.org/drawingml/2006/main" xmlns:p="http://schemas.openxmlformats.org/presentationml/2006/main" xmlns:r="http://schemas.openxmlformats.org/officeDocument/2006/relationships">
   <p:cSld>
     <p:spTree>
       <p:nvGrpSpPr>
@@ -5413,14 +7610,7 @@
         <p:cNvGrpSpPr/>
         <p:nvPr/>
       </p:nvGrpSpPr>
-      <p:grpSpPr>
-        <a:xfrm>
-          <a:off x="0" y="0"/>
-          <a:ext cx="0" cy="0"/>
-          <a:chOff x="0" y="0"/>
-          <a:chExt cx="0" cy="0"/>
-        </a:xfrm>
-      </p:grpSpPr>
+      <p:grpSpPr/>
       <p:sp>
         <p:nvSpPr>
           <p:cNvPr id="2" name="Rectangle 1"/>
@@ -5461,7 +7651,6 @@
           <a:lstStyle/>
           <a:p>
             <a:pPr algn="ctr"/>
-            <a:endParaRPr/>
           </a:p>
         </p:txBody>
       </p:sp>
@@ -5473,8 +7662,8 @@
         </p:nvSpPr>
         <p:spPr>
           <a:xfrm>
-            <a:off x="548640" y="411480"/>
-            <a:ext cx="11064240" cy="1097280"/>
+            <a:off x="548640" y="365760"/>
+            <a:ext cx="11064240" cy="1143000"/>
           </a:xfrm>
           <a:prstGeom prst="rect">
             <a:avLst/>
@@ -5488,24 +7677,13 @@
           <a:lstStyle/>
           <a:p>
             <a:r>
-              <a:rPr sz="3000" b="1" i="0">
+              <a:rPr sz="2900" b="1" i="0">
                 <a:solidFill>
                   <a:srgbClr val="1D2B3A"/>
                 </a:solidFill>
                 <a:latin typeface="Calibri"/>
               </a:rPr>
-              <a:t>Evaluation done honestly</a:t>
-            </a:r>
-          </a:p>
-          <a:p>
-            <a:r>
-              <a:rPr sz="1400" b="0" i="1">
-                <a:solidFill>
-                  <a:srgbClr val="2A9D8F"/>
-                </a:solidFill>
-                <a:latin typeface="Calibri"/>
-              </a:rPr>
-              <a:t>the metric zoo + statistics</a:t>
+              <a:t>Step 1 — train it. It looks perfect: F1 ≈ 1.0</a:t>
             </a:r>
           </a:p>
         </p:txBody>
@@ -5518,8 +7696,8 @@
         </p:nvSpPr>
         <p:spPr>
           <a:xfrm>
-            <a:off x="640080" y="1737360"/>
-            <a:ext cx="10972800" cy="4572000"/>
+            <a:off x="640080" y="1783080"/>
+            <a:ext cx="10972800" cy="4754880"/>
           </a:xfrm>
           <a:prstGeom prst="rect">
             <a:avLst/>
@@ -5534,81 +7712,115 @@
           <a:p>
             <a:pPr>
               <a:spcAft>
-                <a:spcPts val="1000"/>
+                <a:spcPts val="900"/>
               </a:spcAft>
             </a:pPr>
             <a:r>
-              <a:rPr sz="1800" b="0" i="0">
+              <a:rPr sz="1750" b="0" i="0">
                 <a:solidFill>
                   <a:srgbClr val="1D2B3A"/>
                 </a:solidFill>
                 <a:latin typeface="Calibri"/>
               </a:rPr>
-              <a:t>•  Never accuracy alone (accuracy paradox) — report Precision/Recall/F1/F2/MCC/AUC</a:t>
+              <a:t>•  All provided features → F1 1.0</a:t>
             </a:r>
           </a:p>
           <a:p>
             <a:pPr>
               <a:spcAft>
-                <a:spcPts val="1000"/>
+                <a:spcPts val="900"/>
               </a:spcAft>
             </a:pPr>
             <a:r>
-              <a:rPr sz="1800" b="0" i="0">
+              <a:rPr sz="1750" b="0" i="0">
                 <a:solidFill>
                   <a:srgbClr val="1D2B3A"/>
                 </a:solidFill>
                 <a:latin typeface="Calibri"/>
               </a:rPr>
-              <a:t>•  F2 &amp; cost-sensitive threshold: a missed phish (FN) costs more than a false alarm (FP)</a:t>
+              <a:t>•  ONE feature (URLSimilarityIndex) alone → F1 0.9953  → basically the label (leakage)</a:t>
             </a:r>
           </a:p>
           <a:p>
             <a:pPr>
               <a:spcAft>
-                <a:spcPts val="1000"/>
+                <a:spcPts val="900"/>
               </a:spcAft>
             </a:pPr>
             <a:r>
-              <a:rPr sz="1800" b="0" i="0">
+              <a:rPr sz="1750" b="0" i="0">
                 <a:solidFill>
                   <a:srgbClr val="1D2B3A"/>
                 </a:solidFill>
                 <a:latin typeface="Calibri"/>
               </a:rPr>
-              <a:t>•  Bootstrap 95% CIs on every headline metric</a:t>
+              <a:t>•  My honest hand-built lexical features → F1 0.9967</a:t>
             </a:r>
           </a:p>
           <a:p>
             <a:pPr>
               <a:spcAft>
-                <a:spcPts val="1000"/>
+                <a:spcPts val="900"/>
               </a:spcAft>
             </a:pPr>
             <a:r>
-              <a:rPr sz="1800" b="0" i="0">
+              <a:rPr sz="1750" b="0" i="0">
                 <a:solidFill>
                   <a:srgbClr val="1D2B3A"/>
                 </a:solidFill>
                 <a:latin typeface="Calibri"/>
               </a:rPr>
-              <a:t>•  McNemar’s test on every pairwise model comparison</a:t>
+              <a:t>•  Accuracy paradox: always-predict-legit = 57% accuracy but 0% recall (catches nothing)</a:t>
             </a:r>
           </a:p>
           <a:p>
             <a:pPr>
               <a:spcAft>
-                <a:spcPts val="1000"/>
+                <a:spcPts val="900"/>
               </a:spcAft>
             </a:pPr>
             <a:r>
-              <a:rPr sz="1800" b="0" i="0">
+              <a:rPr sz="1750" b="0" i="0">
                 <a:solidFill>
                   <a:srgbClr val="1D2B3A"/>
                 </a:solidFill>
                 <a:latin typeface="Calibri"/>
               </a:rPr>
-              <a:t>•  Result: LogReg / RandomForest / HistGBM are all near-perfect &amp; statistically tied</a:t>
+              <a:t>•  A one-line ‘not-HTTPS → phishing’ rule alone already scores F1 0.68</a:t>
+            </a:r>
+          </a:p>
+        </p:txBody>
+      </p:sp>
+      <p:sp>
+        <p:nvSpPr>
+          <p:cNvPr id="5" name="TextBox 4"/>
+          <p:cNvSpPr txBox="1"/>
+          <p:nvPr/>
+        </p:nvSpPr>
+        <p:spPr>
+          <a:xfrm>
+            <a:off x="640080" y="5989320"/>
+            <a:ext cx="10972800" cy="640080"/>
+          </a:xfrm>
+          <a:prstGeom prst="rect">
+            <a:avLst/>
+          </a:prstGeom>
+          <a:noFill/>
+        </p:spPr>
+        <p:txBody>
+          <a:bodyPr wrap="square">
+            <a:spAutoFit/>
+          </a:bodyPr>
+          <a:lstStyle/>
+          <a:p>
+            <a:r>
+              <a:rPr sz="1700" b="1" i="0">
+                <a:solidFill>
+                  <a:srgbClr val="E76F51"/>
+                </a:solidFill>
+                <a:latin typeface="Calibri"/>
+              </a:rPr>
+              <a:t>This is where the FIRST learning ends — and the real project begins.</a:t>
             </a:r>
           </a:p>
         </p:txBody>
@@ -5622,7 +7834,7 @@
 </file>
 
 <file path=ppt/slides/slide8.xml><?xml version="1.0" encoding="utf-8"?>
-<p:sld xmlns:a="http://schemas.openxmlformats.org/drawingml/2006/main" xmlns:r="http://schemas.openxmlformats.org/officeDocument/2006/relationships" xmlns:p="http://schemas.openxmlformats.org/presentationml/2006/main">
+<p:sld xmlns:a="http://schemas.openxmlformats.org/drawingml/2006/main" xmlns:p="http://schemas.openxmlformats.org/presentationml/2006/main" xmlns:r="http://schemas.openxmlformats.org/officeDocument/2006/relationships">
   <p:cSld>
     <p:spTree>
       <p:nvGrpSpPr>
@@ -5630,14 +7842,7 @@
         <p:cNvGrpSpPr/>
         <p:nvPr/>
       </p:nvGrpSpPr>
-      <p:grpSpPr>
-        <a:xfrm>
-          <a:off x="0" y="0"/>
-          <a:ext cx="0" cy="0"/>
-          <a:chOff x="0" y="0"/>
-          <a:chExt cx="0" cy="0"/>
-        </a:xfrm>
-      </p:grpSpPr>
+      <p:grpSpPr/>
       <p:sp>
         <p:nvSpPr>
           <p:cNvPr id="2" name="Rectangle 1"/>
@@ -5678,7 +7883,6 @@
           <a:lstStyle/>
           <a:p>
             <a:pPr algn="ctr"/>
-            <a:endParaRPr/>
           </a:p>
         </p:txBody>
       </p:sp>
@@ -5690,8 +7894,8 @@
         </p:nvSpPr>
         <p:spPr>
           <a:xfrm>
-            <a:off x="548640" y="411480"/>
-            <a:ext cx="11064240" cy="1097280"/>
+            <a:off x="548640" y="365760"/>
+            <a:ext cx="11064240" cy="1143000"/>
           </a:xfrm>
           <a:prstGeom prst="rect">
             <a:avLst/>
@@ -5705,24 +7909,13 @@
           <a:lstStyle/>
           <a:p>
             <a:r>
-              <a:rPr sz="3000" b="1" i="0">
+              <a:rPr sz="2900" b="1" i="0">
                 <a:solidFill>
                   <a:srgbClr val="1D2B3A"/>
                 </a:solidFill>
                 <a:latin typeface="Calibri"/>
               </a:rPr>
-              <a:t>Attack it, then defend it</a:t>
-            </a:r>
-          </a:p>
-          <a:p>
-            <a:r>
-              <a:rPr sz="1400" b="0" i="1">
-                <a:solidFill>
-                  <a:srgbClr val="2A9D8F"/>
-                </a:solidFill>
-                <a:latin typeface="Calibri"/>
-              </a:rPr>
-              <a:t>adversarial ML</a:t>
+              <a:t>Discovery 1 — the score is a collection artifact</a:t>
             </a:r>
           </a:p>
         </p:txBody>
@@ -5735,8 +7928,8 @@
         </p:nvSpPr>
         <p:spPr>
           <a:xfrm>
-            <a:off x="640080" y="1737360"/>
-            <a:ext cx="5852160" cy="4572000"/>
+            <a:off x="9784080" y="384048"/>
+            <a:ext cx="2286000" cy="457200"/>
           </a:xfrm>
           <a:prstGeom prst="rect">
             <a:avLst/>
@@ -5749,111 +7942,122 @@
           </a:bodyPr>
           <a:lstStyle/>
           <a:p>
-            <a:pPr>
-              <a:spcAft>
-                <a:spcPts val="1000"/>
-              </a:spcAft>
-            </a:pPr>
-            <a:r>
-              <a:rPr sz="1800" b="0" i="0">
-                <a:solidFill>
-                  <a:srgbClr val="1D2B3A"/>
-                </a:solidFill>
-                <a:latin typeface="Calibri"/>
-              </a:rPr>
-              <a:t>•  Structural attacks (homoglyph, typo-squat) barely dent it (0.99)</a:t>
-            </a:r>
-          </a:p>
-          <a:p>
-            <a:pPr lvl="1">
-              <a:spcAft>
-                <a:spcPts val="1000"/>
-              </a:spcAft>
-            </a:pPr>
-            <a:r>
-              <a:rPr sz="1600" b="0" i="0">
-                <a:solidFill>
-                  <a:srgbClr val="5B6472"/>
-                </a:solidFill>
-                <a:latin typeface="Calibri"/>
-              </a:rPr>
-              <a:t>–  → a structural detector resists the char-tricks that BREAK text models</a:t>
-            </a:r>
-          </a:p>
-          <a:p>
-            <a:pPr>
-              <a:spcAft>
-                <a:spcPts val="1000"/>
-              </a:spcAft>
-            </a:pPr>
-            <a:r>
-              <a:rPr sz="1800" b="0" i="0">
-                <a:solidFill>
-                  <a:srgbClr val="1D2B3A"/>
-                </a:solidFill>
-                <a:latin typeface="Calibri"/>
-              </a:rPr>
-              <a:t>•  HTTPS-upgrade → recall 0.672</a:t>
-            </a:r>
-          </a:p>
-          <a:p>
-            <a:pPr>
-              <a:spcAft>
-                <a:spcPts val="1000"/>
-              </a:spcAft>
-            </a:pPr>
-            <a:r>
-              <a:rPr sz="1800" b="0" i="0">
-                <a:solidFill>
-                  <a:srgbClr val="1D2B3A"/>
-                </a:solidFill>
-                <a:latin typeface="Calibri"/>
-              </a:rPr>
-              <a:t>•  Home-page mimicry → recall 0.0  (total evasion)</a:t>
-            </a:r>
-          </a:p>
-          <a:p>
-            <a:pPr>
-              <a:spcAft>
-                <a:spcPts val="1000"/>
-              </a:spcAft>
-            </a:pPr>
-            <a:r>
-              <a:rPr sz="1800" b="0" i="0">
-                <a:solidFill>
-                  <a:srgbClr val="1D2B3A"/>
-                </a:solidFill>
-                <a:latin typeface="Calibri"/>
-              </a:rPr>
-              <a:t>•  Normalization defeats homoglyphs; nothing URL-only defeats mimicry</a:t>
-            </a:r>
-          </a:p>
-        </p:txBody>
-      </p:sp>
-      <p:pic>
-        <p:nvPicPr>
-          <p:cNvPr id="5" name="Picture 4" descr="F3_arms_race.png"/>
-          <p:cNvPicPr>
-            <a:picLocks noChangeAspect="1"/>
-          </p:cNvPicPr>
+            <a:pPr algn="ctr"/>
+            <a:r>
+              <a:rPr sz="1300" b="1" i="0">
+                <a:solidFill>
+                  <a:srgbClr val="E76F51"/>
+                </a:solidFill>
+                <a:latin typeface="Calibri"/>
+              </a:rPr>
+              <a:t>DISCOVERY 1</a:t>
+            </a:r>
+          </a:p>
+        </p:txBody>
+      </p:sp>
+      <p:sp>
+        <p:nvSpPr>
+          <p:cNvPr id="5" name="TextBox 4"/>
+          <p:cNvSpPr txBox="1"/>
           <p:nvPr/>
-        </p:nvPicPr>
-        <p:blipFill>
-          <a:blip r:embed="rId2"/>
-          <a:stretch>
-            <a:fillRect/>
-          </a:stretch>
-        </p:blipFill>
+        </p:nvSpPr>
         <p:spPr>
           <a:xfrm>
-            <a:off x="6583680" y="2103120"/>
-            <a:ext cx="5394960" cy="2517648"/>
+            <a:off x="640080" y="1783080"/>
+            <a:ext cx="10972800" cy="4754880"/>
           </a:xfrm>
           <a:prstGeom prst="rect">
             <a:avLst/>
           </a:prstGeom>
+          <a:noFill/>
         </p:spPr>
-      </p:pic>
+        <p:txBody>
+          <a:bodyPr wrap="square">
+            <a:spAutoFit/>
+          </a:bodyPr>
+          <a:lstStyle/>
+          <a:p>
+            <a:pPr>
+              <a:spcAft>
+                <a:spcPts val="900"/>
+              </a:spcAft>
+            </a:pPr>
+            <a:r>
+              <a:rPr sz="1750" b="0" i="0">
+                <a:solidFill>
+                  <a:srgbClr val="1D2B3A"/>
+                </a:solidFill>
+                <a:latin typeface="Calibri"/>
+              </a:rPr>
+              <a:t>•  Legitimate URLs in PhiUSIIL: 1.0 HTTPS.   Phishing: 0.486 HTTPS.</a:t>
+            </a:r>
+          </a:p>
+          <a:p>
+            <a:pPr>
+              <a:spcAft>
+                <a:spcPts val="900"/>
+              </a:spcAft>
+            </a:pPr>
+            <a:r>
+              <a:rPr sz="1750" b="0" i="0">
+                <a:solidFill>
+                  <a:srgbClr val="1D2B3A"/>
+                </a:solidFill>
+                <a:latin typeface="Calibri"/>
+              </a:rPr>
+              <a:t>•  So the model largely learns ‘HTTP = phishing’ — a fact about how the data was collected,</a:t>
+            </a:r>
+          </a:p>
+          <a:p>
+            <a:pPr lvl="1">
+              <a:spcAft>
+                <a:spcPts val="900"/>
+              </a:spcAft>
+            </a:pPr>
+            <a:r>
+              <a:rPr sz="1600" b="0" i="0">
+                <a:solidFill>
+                  <a:srgbClr val="5B6472"/>
+                </a:solidFill>
+                <a:latin typeface="Calibri"/>
+              </a:rPr>
+              <a:t>–  NOT about phishing (real modern phishing is mostly HTTPS — this rule is backwards!)</a:t>
+            </a:r>
+          </a:p>
+          <a:p>
+            <a:pPr>
+              <a:spcAft>
+                <a:spcPts val="900"/>
+              </a:spcAft>
+            </a:pPr>
+            <a:r>
+              <a:rPr sz="1750" b="0" i="0">
+                <a:solidFill>
+                  <a:srgbClr val="1D2B3A"/>
+                </a:solidFill>
+                <a:latin typeface="Calibri"/>
+              </a:rPr>
+              <a:t>•  Legit URLs here are clean home-pages; phishing are messy deep links.</a:t>
+            </a:r>
+          </a:p>
+          <a:p>
+            <a:pPr>
+              <a:spcAft>
+                <a:spcPts val="900"/>
+              </a:spcAft>
+            </a:pPr>
+            <a:r>
+              <a:rPr sz="1750" b="0" i="0">
+                <a:solidFill>
+                  <a:srgbClr val="1D2B3A"/>
+                </a:solidFill>
+                <a:latin typeface="Calibri"/>
+              </a:rPr>
+              <a:t>•  The model learned the dataset’s shape, not danger.</a:t>
+            </a:r>
+          </a:p>
+        </p:txBody>
+      </p:sp>
     </p:spTree>
   </p:cSld>
   <p:clrMapOvr>
@@ -5863,7 +8067,7 @@
 </file>
 
 <file path=ppt/slides/slide9.xml><?xml version="1.0" encoding="utf-8"?>
-<p:sld xmlns:a="http://schemas.openxmlformats.org/drawingml/2006/main" xmlns:r="http://schemas.openxmlformats.org/officeDocument/2006/relationships" xmlns:p="http://schemas.openxmlformats.org/presentationml/2006/main">
+<p:sld xmlns:a="http://schemas.openxmlformats.org/drawingml/2006/main" xmlns:p="http://schemas.openxmlformats.org/presentationml/2006/main" xmlns:r="http://schemas.openxmlformats.org/officeDocument/2006/relationships">
   <p:cSld>
     <p:spTree>
       <p:nvGrpSpPr>
@@ -5871,14 +8075,7 @@
         <p:cNvGrpSpPr/>
         <p:nvPr/>
       </p:nvGrpSpPr>
-      <p:grpSpPr>
-        <a:xfrm>
-          <a:off x="0" y="0"/>
-          <a:ext cx="0" cy="0"/>
-          <a:chOff x="0" y="0"/>
-          <a:chExt cx="0" cy="0"/>
-        </a:xfrm>
-      </p:grpSpPr>
+      <p:grpSpPr/>
       <p:sp>
         <p:nvSpPr>
           <p:cNvPr id="2" name="Rectangle 1"/>
@@ -5919,7 +8116,6 @@
           <a:lstStyle/>
           <a:p>
             <a:pPr algn="ctr"/>
-            <a:endParaRPr/>
           </a:p>
         </p:txBody>
       </p:sp>
@@ -5931,8 +8127,8 @@
         </p:nvSpPr>
         <p:spPr>
           <a:xfrm>
-            <a:off x="548640" y="411480"/>
-            <a:ext cx="11064240" cy="1097280"/>
+            <a:off x="548640" y="365760"/>
+            <a:ext cx="11064240" cy="1143000"/>
           </a:xfrm>
           <a:prstGeom prst="rect">
             <a:avLst/>
@@ -5946,13 +8142,13 @@
           <a:lstStyle/>
           <a:p>
             <a:r>
-              <a:rPr sz="3000" b="1" i="0">
+              <a:rPr sz="2900" b="1" i="0">
                 <a:solidFill>
                   <a:srgbClr val="1D2B3A"/>
                 </a:solidFill>
                 <a:latin typeface="Calibri"/>
               </a:rPr>
-              <a:t>An unsupervised angle</a:t>
+              <a:t>How we evaluate honestly</a:t>
             </a:r>
           </a:p>
           <a:p>
@@ -5963,7 +8159,7 @@
                 </a:solidFill>
                 <a:latin typeface="Calibri"/>
               </a:rPr>
-              <a:t>abnormality detection</a:t>
+              <a:t>the metric toolkit — and why</a:t>
             </a:r>
           </a:p>
         </p:txBody>
@@ -5976,8 +8172,8 @@
         </p:nvSpPr>
         <p:spPr>
           <a:xfrm>
-            <a:off x="640080" y="1737360"/>
-            <a:ext cx="10972800" cy="4572000"/>
+            <a:off x="640080" y="1783080"/>
+            <a:ext cx="10972800" cy="4754880"/>
           </a:xfrm>
           <a:prstGeom prst="rect">
             <a:avLst/>
@@ -5992,65 +8188,97 @@
           <a:p>
             <a:pPr>
               <a:spcAft>
-                <a:spcPts val="1000"/>
+                <a:spcPts val="900"/>
               </a:spcAft>
             </a:pPr>
             <a:r>
-              <a:rPr sz="1800" b="0" i="0">
+              <a:rPr sz="1700" b="0" i="0">
                 <a:solidFill>
                   <a:srgbClr val="1D2B3A"/>
                 </a:solidFill>
                 <a:latin typeface="Calibri"/>
               </a:rPr>
-              <a:t>•  Train on legitimate URLs only; flag phishing as anomalies</a:t>
+              <a:t>•  Accuracy lies under imbalance (paradox) → report Precision, Recall, F1</a:t>
             </a:r>
           </a:p>
           <a:p>
             <a:pPr>
               <a:spcAft>
-                <a:spcPts val="1000"/>
+                <a:spcPts val="900"/>
               </a:spcAft>
             </a:pPr>
             <a:r>
-              <a:rPr sz="1800" b="0" i="0">
+              <a:rPr sz="1700" b="0" i="0">
                 <a:solidFill>
                   <a:srgbClr val="1D2B3A"/>
                 </a:solidFill>
                 <a:latin typeface="Calibri"/>
               </a:rPr>
-              <a:t>•  Isolation Forest: AUC 0.828</a:t>
+              <a:t>•  F2 — like F1 but weights RECALL more: a missed phish (FN) costs more than a false alarm (FP)</a:t>
             </a:r>
           </a:p>
           <a:p>
             <a:pPr>
               <a:spcAft>
-                <a:spcPts val="1000"/>
+                <a:spcPts val="900"/>
               </a:spcAft>
             </a:pPr>
             <a:r>
-              <a:rPr sz="1800" b="0" i="0">
+              <a:rPr sz="1700" b="0" i="0">
                 <a:solidFill>
                   <a:srgbClr val="1D2B3A"/>
                 </a:solidFill>
                 <a:latin typeface="Calibri"/>
               </a:rPr>
-              <a:t>•  Local Outlier Factor: AUC 0.944</a:t>
+              <a:t>•  MCC (Matthews) — one score in [−1,1] using ALL 4 confusion cells; honest under imbalance</a:t>
             </a:r>
           </a:p>
           <a:p>
             <a:pPr>
               <a:spcAft>
-                <a:spcPts val="1000"/>
+                <a:spcPts val="900"/>
               </a:spcAft>
             </a:pPr>
             <a:r>
-              <a:rPr sz="1800" b="0" i="0">
+              <a:rPr sz="1700" b="0" i="0">
                 <a:solidFill>
                   <a:srgbClr val="1D2B3A"/>
                 </a:solidFill>
                 <a:latin typeface="Calibri"/>
               </a:rPr>
-              <a:t>•  Respectable with NO labels — but below supervised, and riding the same artifacts</a:t>
+              <a:t>•  AUC — P(a random phish scores above a random legit); 0.5 = coin-flip</a:t>
+            </a:r>
+          </a:p>
+          <a:p>
+            <a:pPr>
+              <a:spcAft>
+                <a:spcPts val="900"/>
+              </a:spcAft>
+            </a:pPr>
+            <a:r>
+              <a:rPr sz="1700" b="0" i="0">
+                <a:solidFill>
+                  <a:srgbClr val="1D2B3A"/>
+                </a:solidFill>
+                <a:latin typeface="Calibri"/>
+              </a:rPr>
+              <a:t>•  Bootstrap 95% CI — resample the test set 1000× to get error bars on every metric</a:t>
+            </a:r>
+          </a:p>
+          <a:p>
+            <a:pPr>
+              <a:spcAft>
+                <a:spcPts val="900"/>
+              </a:spcAft>
+            </a:pPr>
+            <a:r>
+              <a:rPr sz="1700" b="0" i="0">
+                <a:solidFill>
+                  <a:srgbClr val="1D2B3A"/>
+                </a:solidFill>
+                <a:latin typeface="Calibri"/>
+              </a:rPr>
+              <a:t>•  McNemar test — is model A really better than B, or just luck on this split?</a:t>
             </a:r>
           </a:p>
         </p:txBody>
@@ -6381,4 +8609,324 @@
   </a:objectDefaults>
   <a:extraClrSchemeLst/>
 </a:theme>
+</file>
+
+<file path=ppt/theme/theme2.xml><?xml version="1.0" encoding="utf-8"?>
+<a:theme xmlns:a="http://schemas.openxmlformats.org/drawingml/2006/main" name="Office Theme">
+  <a:themeElements>
+    <a:clrScheme name="Office">
+      <a:dk1>
+        <a:sysClr val="windowText" lastClr="000000"/>
+      </a:dk1>
+      <a:lt1>
+        <a:sysClr val="window" lastClr="FFFFFF"/>
+      </a:lt1>
+      <a:dk2>
+        <a:srgbClr val="1F497D"/>
+      </a:dk2>
+      <a:lt2>
+        <a:srgbClr val="EEECE1"/>
+      </a:lt2>
+      <a:accent1>
+        <a:srgbClr val="4F81BD"/>
+      </a:accent1>
+      <a:accent2>
+        <a:srgbClr val="C0504D"/>
+      </a:accent2>
+      <a:accent3>
+        <a:srgbClr val="9BBB59"/>
+      </a:accent3>
+      <a:accent4>
+        <a:srgbClr val="8064A2"/>
+      </a:accent4>
+      <a:accent5>
+        <a:srgbClr val="4BACC6"/>
+      </a:accent5>
+      <a:accent6>
+        <a:srgbClr val="F79646"/>
+      </a:accent6>
+      <a:hlink>
+        <a:srgbClr val="0000FF"/>
+      </a:hlink>
+      <a:folHlink>
+        <a:srgbClr val="800080"/>
+      </a:folHlink>
+    </a:clrScheme>
+    <a:fontScheme name="Office">
+      <a:majorFont>
+        <a:latin typeface="Calibri"/>
+        <a:ea typeface=""/>
+        <a:cs typeface=""/>
+        <a:font script="Jpan" typeface="ＭＳ Ｐゴシック"/>
+        <a:font script="Hang" typeface="맑은 고딕"/>
+        <a:font script="Hans" typeface="宋体"/>
+        <a:font script="Hant" typeface="新細明體"/>
+        <a:font script="Arab" typeface="Times New Roman"/>
+        <a:font script="Hebr" typeface="Times New Roman"/>
+        <a:font script="Thai" typeface="Angsana New"/>
+        <a:font script="Ethi" typeface="Nyala"/>
+        <a:font script="Beng" typeface="Vrinda"/>
+        <a:font script="Gujr" typeface="Shruti"/>
+        <a:font script="Khmr" typeface="MoolBoran"/>
+        <a:font script="Knda" typeface="Tunga"/>
+        <a:font script="Guru" typeface="Raavi"/>
+        <a:font script="Cans" typeface="Euphemia"/>
+        <a:font script="Cher" typeface="Plantagenet Cherokee"/>
+        <a:font script="Yiii" typeface="Microsoft Yi Baiti"/>
+        <a:font script="Tibt" typeface="Microsoft Himalaya"/>
+        <a:font script="Thaa" typeface="MV Boli"/>
+        <a:font script="Deva" typeface="Mangal"/>
+        <a:font script="Telu" typeface="Gautami"/>
+        <a:font script="Taml" typeface="Latha"/>
+        <a:font script="Syrc" typeface="Estrangelo Edessa"/>
+        <a:font script="Orya" typeface="Kalinga"/>
+        <a:font script="Mlym" typeface="Kartika"/>
+        <a:font script="Laoo" typeface="DokChampa"/>
+        <a:font script="Sinh" typeface="Iskoola Pota"/>
+        <a:font script="Mong" typeface="Mongolian Baiti"/>
+        <a:font script="Viet" typeface="Times New Roman"/>
+        <a:font script="Uigh" typeface="Microsoft Uighur"/>
+        <a:font script="Geor" typeface="Sylfaen"/>
+      </a:majorFont>
+      <a:minorFont>
+        <a:latin typeface="Calibri"/>
+        <a:ea typeface=""/>
+        <a:cs typeface=""/>
+        <a:font script="Jpan" typeface="ＭＳ Ｐゴシック"/>
+        <a:font script="Hang" typeface="맑은 고딕"/>
+        <a:font script="Hans" typeface="宋体"/>
+        <a:font script="Hant" typeface="新細明體"/>
+        <a:font script="Arab" typeface="Arial"/>
+        <a:font script="Hebr" typeface="Arial"/>
+        <a:font script="Thai" typeface="Cordia New"/>
+        <a:font script="Ethi" typeface="Nyala"/>
+        <a:font script="Beng" typeface="Vrinda"/>
+        <a:font script="Gujr" typeface="Shruti"/>
+        <a:font script="Khmr" typeface="DaunPenh"/>
+        <a:font script="Knda" typeface="Tunga"/>
+        <a:font script="Guru" typeface="Raavi"/>
+        <a:font script="Cans" typeface="Euphemia"/>
+        <a:font script="Cher" typeface="Plantagenet Cherokee"/>
+        <a:font script="Yiii" typeface="Microsoft Yi Baiti"/>
+        <a:font script="Tibt" typeface="Microsoft Himalaya"/>
+        <a:font script="Thaa" typeface="MV Boli"/>
+        <a:font script="Deva" typeface="Mangal"/>
+        <a:font script="Telu" typeface="Gautami"/>
+        <a:font script="Taml" typeface="Latha"/>
+        <a:font script="Syrc" typeface="Estrangelo Edessa"/>
+        <a:font script="Orya" typeface="Kalinga"/>
+        <a:font script="Mlym" typeface="Kartika"/>
+        <a:font script="Laoo" typeface="DokChampa"/>
+        <a:font script="Sinh" typeface="Iskoola Pota"/>
+        <a:font script="Mong" typeface="Mongolian Baiti"/>
+        <a:font script="Viet" typeface="Arial"/>
+        <a:font script="Uigh" typeface="Microsoft Uighur"/>
+        <a:font script="Geor" typeface="Sylfaen"/>
+      </a:minorFont>
+    </a:fontScheme>
+    <a:fmtScheme name="Office">
+      <a:fillStyleLst>
+        <a:solidFill>
+          <a:schemeClr val="phClr"/>
+        </a:solidFill>
+        <a:gradFill rotWithShape="1">
+          <a:gsLst>
+            <a:gs pos="0">
+              <a:schemeClr val="phClr">
+                <a:tint val="50000"/>
+                <a:satMod val="300000"/>
+              </a:schemeClr>
+            </a:gs>
+            <a:gs pos="35000">
+              <a:schemeClr val="phClr">
+                <a:tint val="37000"/>
+                <a:satMod val="300000"/>
+              </a:schemeClr>
+            </a:gs>
+            <a:gs pos="100000">
+              <a:schemeClr val="phClr">
+                <a:tint val="15000"/>
+                <a:satMod val="350000"/>
+              </a:schemeClr>
+            </a:gs>
+          </a:gsLst>
+          <a:lin ang="16200000" scaled="1"/>
+        </a:gradFill>
+        <a:gradFill rotWithShape="1">
+          <a:gsLst>
+            <a:gs pos="0">
+              <a:schemeClr val="phClr">
+                <a:tint val="100000"/>
+                <a:shade val="100000"/>
+                <a:satMod val="130000"/>
+              </a:schemeClr>
+            </a:gs>
+            <a:gs pos="100000">
+              <a:schemeClr val="phClr">
+                <a:tint val="50000"/>
+                <a:shade val="100000"/>
+                <a:satMod val="350000"/>
+              </a:schemeClr>
+            </a:gs>
+          </a:gsLst>
+          <a:lin ang="16200000" scaled="0"/>
+        </a:gradFill>
+      </a:fillStyleLst>
+      <a:lnStyleLst>
+        <a:ln w="9525" cap="flat" cmpd="sng" algn="ctr">
+          <a:solidFill>
+            <a:schemeClr val="phClr">
+              <a:shade val="95000"/>
+              <a:satMod val="105000"/>
+            </a:schemeClr>
+          </a:solidFill>
+          <a:prstDash val="solid"/>
+        </a:ln>
+        <a:ln w="25400" cap="flat" cmpd="sng" algn="ctr">
+          <a:solidFill>
+            <a:schemeClr val="phClr"/>
+          </a:solidFill>
+          <a:prstDash val="solid"/>
+        </a:ln>
+        <a:ln w="38100" cap="flat" cmpd="sng" algn="ctr">
+          <a:solidFill>
+            <a:schemeClr val="phClr"/>
+          </a:solidFill>
+          <a:prstDash val="solid"/>
+        </a:ln>
+      </a:lnStyleLst>
+      <a:effectStyleLst>
+        <a:effectStyle>
+          <a:effectLst>
+            <a:outerShdw blurRad="40000" dist="20000" dir="5400000" rotWithShape="0">
+              <a:srgbClr val="000000">
+                <a:alpha val="38000"/>
+              </a:srgbClr>
+            </a:outerShdw>
+          </a:effectLst>
+        </a:effectStyle>
+        <a:effectStyle>
+          <a:effectLst>
+            <a:outerShdw blurRad="40000" dist="23000" dir="5400000" rotWithShape="0">
+              <a:srgbClr val="000000">
+                <a:alpha val="35000"/>
+              </a:srgbClr>
+            </a:outerShdw>
+          </a:effectLst>
+        </a:effectStyle>
+        <a:effectStyle>
+          <a:effectLst>
+            <a:outerShdw blurRad="40000" dist="23000" dir="5400000" rotWithShape="0">
+              <a:srgbClr val="000000">
+                <a:alpha val="35000"/>
+              </a:srgbClr>
+            </a:outerShdw>
+          </a:effectLst>
+          <a:scene3d>
+            <a:camera prst="orthographicFront">
+              <a:rot lat="0" lon="0" rev="0"/>
+            </a:camera>
+            <a:lightRig rig="threePt" dir="t">
+              <a:rot lat="0" lon="0" rev="1200000"/>
+            </a:lightRig>
+          </a:scene3d>
+          <a:sp3d>
+            <a:bevelT w="63500" h="25400"/>
+          </a:sp3d>
+        </a:effectStyle>
+      </a:effectStyleLst>
+      <a:bgFillStyleLst>
+        <a:solidFill>
+          <a:schemeClr val="phClr"/>
+        </a:solidFill>
+        <a:gradFill rotWithShape="1">
+          <a:gsLst>
+            <a:gs pos="0">
+              <a:schemeClr val="phClr">
+                <a:tint val="40000"/>
+                <a:satMod val="350000"/>
+              </a:schemeClr>
+            </a:gs>
+            <a:gs pos="40000">
+              <a:schemeClr val="phClr">
+                <a:tint val="45000"/>
+                <a:shade val="99000"/>
+                <a:satMod val="350000"/>
+              </a:schemeClr>
+            </a:gs>
+            <a:gs pos="100000">
+              <a:schemeClr val="phClr">
+                <a:shade val="20000"/>
+                <a:satMod val="255000"/>
+              </a:schemeClr>
+            </a:gs>
+          </a:gsLst>
+          <a:path path="circle">
+            <a:fillToRect l="50000" t="-80000" r="50000" b="180000"/>
+          </a:path>
+        </a:gradFill>
+        <a:gradFill rotWithShape="1">
+          <a:gsLst>
+            <a:gs pos="0">
+              <a:schemeClr val="phClr">
+                <a:tint val="80000"/>
+                <a:satMod val="300000"/>
+              </a:schemeClr>
+            </a:gs>
+            <a:gs pos="100000">
+              <a:schemeClr val="phClr">
+                <a:shade val="30000"/>
+                <a:satMod val="200000"/>
+              </a:schemeClr>
+            </a:gs>
+          </a:gsLst>
+          <a:path path="circle">
+            <a:fillToRect l="50000" t="50000" r="50000" b="50000"/>
+          </a:path>
+        </a:gradFill>
+      </a:bgFillStyleLst>
+    </a:fmtScheme>
+  </a:themeElements>
+  <a:objectDefaults>
+    <a:spDef>
+      <a:spPr/>
+      <a:bodyPr/>
+      <a:lstStyle/>
+      <a:style>
+        <a:lnRef idx="1">
+          <a:schemeClr val="accent1"/>
+        </a:lnRef>
+        <a:fillRef idx="3">
+          <a:schemeClr val="accent1"/>
+        </a:fillRef>
+        <a:effectRef idx="2">
+          <a:schemeClr val="accent1"/>
+        </a:effectRef>
+        <a:fontRef idx="minor">
+          <a:schemeClr val="lt1"/>
+        </a:fontRef>
+      </a:style>
+    </a:spDef>
+    <a:lnDef>
+      <a:spPr/>
+      <a:bodyPr/>
+      <a:lstStyle/>
+      <a:style>
+        <a:lnRef idx="2">
+          <a:schemeClr val="accent1"/>
+        </a:lnRef>
+        <a:fillRef idx="0">
+          <a:schemeClr val="accent1"/>
+        </a:fillRef>
+        <a:effectRef idx="1">
+          <a:schemeClr val="accent1"/>
+        </a:effectRef>
+        <a:fontRef idx="minor">
+          <a:schemeClr val="tx1"/>
+        </a:fontRef>
+      </a:style>
+    </a:lnDef>
+  </a:objectDefaults>
+  <a:extraClrSchemeLst/>
+</a:theme>
 </file>
--- a/presentation/url_detector.pptx
+++ b/presentation/url_detector.pptx
@@ -4,26 +4,28 @@
   <p:sldMasterIdLst>
     <p:sldMasterId id="2147483648" r:id="rId1"/>
   </p:sldMasterIdLst>
+  <p:notesMasterIdLst>
+    <p:notesMasterId r:id="rId18"/>
+  </p:notesMasterIdLst>
   <p:sldIdLst>
-    <p:sldId id="256" r:id="rId7"/>
-    <p:sldId id="257" r:id="rId9"/>
-    <p:sldId id="258" r:id="rId10"/>
-    <p:sldId id="259" r:id="rId11"/>
-    <p:sldId id="260" r:id="rId12"/>
-    <p:sldId id="261" r:id="rId13"/>
-    <p:sldId id="262" r:id="rId14"/>
-    <p:sldId id="263" r:id="rId15"/>
-    <p:sldId id="264" r:id="rId16"/>
-    <p:sldId id="265" r:id="rId17"/>
-    <p:sldId id="266" r:id="rId18"/>
-    <p:sldId id="267" r:id="rId19"/>
-    <p:sldId id="268" r:id="rId20"/>
-    <p:sldId id="269" r:id="rId21"/>
-    <p:sldId id="270" r:id="rId22"/>
-    <p:sldId id="271" r:id="rId23"/>
-    <p:sldId id="272" r:id="rId24"/>
+    <p:sldId id="256" r:id="rId2"/>
+    <p:sldId id="257" r:id="rId3"/>
+    <p:sldId id="258" r:id="rId4"/>
+    <p:sldId id="259" r:id="rId5"/>
+    <p:sldId id="260" r:id="rId6"/>
+    <p:sldId id="261" r:id="rId7"/>
+    <p:sldId id="262" r:id="rId8"/>
+    <p:sldId id="263" r:id="rId9"/>
+    <p:sldId id="264" r:id="rId10"/>
+    <p:sldId id="265" r:id="rId11"/>
+    <p:sldId id="266" r:id="rId12"/>
+    <p:sldId id="268" r:id="rId13"/>
+    <p:sldId id="269" r:id="rId14"/>
+    <p:sldId id="270" r:id="rId15"/>
+    <p:sldId id="271" r:id="rId16"/>
+    <p:sldId id="272" r:id="rId17"/>
   </p:sldIdLst>
-  <p:sldSz cx="12191695" cy="6858000" type="screen4x3"/>
+  <p:sldSz cx="12192000" cy="6858000"/>
   <p:notesSz cx="6858000" cy="9144000"/>
   <p:defaultTextStyle>
     <a:defPPr>
@@ -120,11 +122,27 @@
       </a:defRPr>
     </a:lvl9pPr>
   </p:defaultTextStyle>
+  <p:extLst>
+    <p:ext uri="{EFAFB233-063F-42B5-8137-9DF3F51BA10A}">
+      <p15:sldGuideLst xmlns:p15="http://schemas.microsoft.com/office/powerpoint/2012/main">
+        <p15:guide id="1" orient="horz" pos="2160">
+          <p15:clr>
+            <a:srgbClr val="A4A3A4"/>
+          </p15:clr>
+        </p15:guide>
+        <p15:guide id="2" pos="2880">
+          <p15:clr>
+            <a:srgbClr val="A4A3A4"/>
+          </p15:clr>
+        </p15:guide>
+      </p15:sldGuideLst>
+    </p:ext>
+  </p:extLst>
 </p:presentation>
 </file>
 
 <file path=ppt/notesMasters/notesMaster1.xml><?xml version="1.0" encoding="utf-8"?>
-<p:notesMaster xmlns:a="http://schemas.openxmlformats.org/drawingml/2006/main" xmlns:p="http://schemas.openxmlformats.org/presentationml/2006/main" xmlns:r="http://schemas.openxmlformats.org/officeDocument/2006/relationships">
+<p:notesMaster xmlns:a="http://schemas.openxmlformats.org/drawingml/2006/main" xmlns:r="http://schemas.openxmlformats.org/officeDocument/2006/relationships" xmlns:p="http://schemas.openxmlformats.org/presentationml/2006/main">
   <p:cSld>
     <p:bg>
       <p:bgRef idx="1001">
@@ -145,241 +163,16 @@
           <a:chExt cx="0" cy="0"/>
         </a:xfrm>
       </p:grpSpPr>
-      <p:sp>
-        <p:nvSpPr>
-          <p:cNvPr id="2" name="Header Placeholder 1"/>
-          <p:cNvSpPr>
-            <a:spLocks noGrp="1"/>
-          </p:cNvSpPr>
-          <p:nvPr>
-            <p:ph type="hdr" sz="quarter"/>
-          </p:nvPr>
-        </p:nvSpPr>
-        <p:spPr>
-          <a:xfrm>
-            <a:off x="0" y="0"/>
-            <a:ext cx="2971800" cy="457200"/>
-          </a:xfrm>
-          <a:prstGeom prst="rect">
-            <a:avLst/>
-          </a:prstGeom>
-        </p:spPr>
-        <p:txBody>
-          <a:bodyPr vert="horz" lIns="91440" tIns="45720" rIns="91440" bIns="45720" rtlCol="0"/>
-          <a:lstStyle>
-            <a:lvl1pPr algn="l">
-              <a:defRPr sz="1200"/>
-            </a:lvl1pPr>
-          </a:lstStyle>
-          <a:p>
-            <a:endParaRPr lang="en-US"/>
-          </a:p>
-        </p:txBody>
-      </p:sp>
-      <p:sp>
-        <p:nvSpPr>
-          <p:cNvPr id="3" name="Date Placeholder 2"/>
-          <p:cNvSpPr>
-            <a:spLocks noGrp="1"/>
-          </p:cNvSpPr>
-          <p:nvPr>
-            <p:ph type="dt" idx="1"/>
-          </p:nvPr>
-        </p:nvSpPr>
-        <p:spPr>
-          <a:xfrm>
-            <a:off x="3884613" y="0"/>
-            <a:ext cx="2971800" cy="457200"/>
-          </a:xfrm>
-          <a:prstGeom prst="rect">
-            <a:avLst/>
-          </a:prstGeom>
-        </p:spPr>
-        <p:txBody>
-          <a:bodyPr vert="horz" lIns="91440" tIns="45720" rIns="91440" bIns="45720" rtlCol="0"/>
-          <a:lstStyle>
-            <a:lvl1pPr algn="r">
-              <a:defRPr sz="1200"/>
-            </a:lvl1pPr>
-          </a:lstStyle>
-          <a:p>
-            <a:fld id="{0F89C1C7-3DCD-1040-A9CF-14679D8B5DDD}" type="datetimeFigureOut">
-              <a:rPr lang="en-US" smtClean="0"/>
-              <a:t>10/17/16</a:t>
-            </a:fld>
-            <a:endParaRPr lang="en-US"/>
-          </a:p>
-        </p:txBody>
-      </p:sp>
-      <p:sp>
-        <p:nvSpPr>
-          <p:cNvPr id="4" name="Slide Image Placeholder 3"/>
-          <p:cNvSpPr>
-            <a:spLocks noGrp="1" noRot="1" noChangeAspect="1"/>
-          </p:cNvSpPr>
-          <p:nvPr>
-            <p:ph type="sldImg" idx="2"/>
-          </p:nvPr>
-        </p:nvSpPr>
-        <p:spPr>
-          <a:xfrm>
-            <a:off x="1143000" y="685800"/>
-            <a:ext cx="4572000" cy="3429000"/>
-          </a:xfrm>
-          <a:prstGeom prst="rect">
-            <a:avLst/>
-          </a:prstGeom>
-          <a:noFill/>
-          <a:ln w="12700">
-            <a:solidFill>
-              <a:prstClr val="black"/>
-            </a:solidFill>
-          </a:ln>
-        </p:spPr>
-        <p:txBody>
-          <a:bodyPr vert="horz" lIns="91440" tIns="45720" rIns="91440" bIns="45720" rtlCol="0" anchor="ctr"/>
-          <a:lstStyle/>
-          <a:p>
-            <a:endParaRPr lang="en-US"/>
-          </a:p>
-        </p:txBody>
-      </p:sp>
-      <p:sp>
-        <p:nvSpPr>
-          <p:cNvPr id="5" name="Notes Placeholder 4"/>
-          <p:cNvSpPr>
-            <a:spLocks noGrp="1"/>
-          </p:cNvSpPr>
-          <p:nvPr>
-            <p:ph type="body" sz="quarter" idx="3"/>
-          </p:nvPr>
-        </p:nvSpPr>
-        <p:spPr>
-          <a:xfrm>
-            <a:off x="685800" y="4343400"/>
-            <a:ext cx="5486400" cy="4114800"/>
-          </a:xfrm>
-          <a:prstGeom prst="rect">
-            <a:avLst/>
-          </a:prstGeom>
-        </p:spPr>
-        <p:txBody>
-          <a:bodyPr vert="horz" lIns="91440" tIns="45720" rIns="91440" bIns="45720" rtlCol="0"/>
-          <a:lstStyle/>
-          <a:p>
-            <a:pPr lvl="0"/>
-            <a:r>
-              <a:rPr lang="en-US" smtClean="0"/>
-              <a:t>Click to edit Master text styles</a:t>
-            </a:r>
-          </a:p>
-          <a:p>
-            <a:pPr lvl="1"/>
-            <a:r>
-              <a:rPr lang="en-US" smtClean="0"/>
-              <a:t>Second level</a:t>
-            </a:r>
-          </a:p>
-          <a:p>
-            <a:pPr lvl="2"/>
-            <a:r>
-              <a:rPr lang="en-US" smtClean="0"/>
-              <a:t>Third level</a:t>
-            </a:r>
-          </a:p>
-          <a:p>
-            <a:pPr lvl="3"/>
-            <a:r>
-              <a:rPr lang="en-US" smtClean="0"/>
-              <a:t>Fourth level</a:t>
-            </a:r>
-          </a:p>
-          <a:p>
-            <a:pPr lvl="4"/>
-            <a:r>
-              <a:rPr lang="en-US" smtClean="0"/>
-              <a:t>Fifth level</a:t>
-            </a:r>
-            <a:endParaRPr lang="en-US"/>
-          </a:p>
-        </p:txBody>
-      </p:sp>
-      <p:sp>
-        <p:nvSpPr>
-          <p:cNvPr id="6" name="Footer Placeholder 5"/>
-          <p:cNvSpPr>
-            <a:spLocks noGrp="1"/>
-          </p:cNvSpPr>
-          <p:nvPr>
-            <p:ph type="ftr" sz="quarter" idx="4"/>
-          </p:nvPr>
-        </p:nvSpPr>
-        <p:spPr>
-          <a:xfrm>
-            <a:off x="0" y="8685213"/>
-            <a:ext cx="2971800" cy="457200"/>
-          </a:xfrm>
-          <a:prstGeom prst="rect">
-            <a:avLst/>
-          </a:prstGeom>
-        </p:spPr>
-        <p:txBody>
-          <a:bodyPr vert="horz" lIns="91440" tIns="45720" rIns="91440" bIns="45720" rtlCol="0" anchor="b"/>
-          <a:lstStyle>
-            <a:lvl1pPr algn="l">
-              <a:defRPr sz="1200"/>
-            </a:lvl1pPr>
-          </a:lstStyle>
-          <a:p>
-            <a:endParaRPr lang="en-US"/>
-          </a:p>
-        </p:txBody>
-      </p:sp>
-      <p:sp>
-        <p:nvSpPr>
-          <p:cNvPr id="7" name="Slide Number Placeholder 6"/>
-          <p:cNvSpPr>
-            <a:spLocks noGrp="1"/>
-          </p:cNvSpPr>
-          <p:nvPr>
-            <p:ph type="sldNum" sz="quarter" idx="5"/>
-          </p:nvPr>
-        </p:nvSpPr>
-        <p:spPr>
-          <a:xfrm>
-            <a:off x="3884613" y="8685213"/>
-            <a:ext cx="2971800" cy="457200"/>
-          </a:xfrm>
-          <a:prstGeom prst="rect">
-            <a:avLst/>
-          </a:prstGeom>
-        </p:spPr>
-        <p:txBody>
-          <a:bodyPr vert="horz" lIns="91440" tIns="45720" rIns="91440" bIns="45720" rtlCol="0" anchor="b"/>
-          <a:lstStyle>
-            <a:lvl1pPr algn="r">
-              <a:defRPr sz="1200"/>
-            </a:lvl1pPr>
-          </a:lstStyle>
-          <a:p>
-            <a:fld id="{BB5E49A5-4136-284D-997B-48E1D791AD67}" type="slidenum">
-              <a:rPr lang="en-US" smtClean="0"/>
-              <a:t>‹#›</a:t>
-            </a:fld>
-            <a:endParaRPr lang="en-US"/>
-          </a:p>
-        </p:txBody>
-      </p:sp>
     </p:spTree>
     <p:extLst>
       <p:ext uri="{BB962C8B-B14F-4D97-AF65-F5344CB8AC3E}">
-        <p14:creationId xmlns:p14="http://schemas.microsoft.com/office/powerpoint/2010/main" val="2623252185"/>
+        <p14:creationId xmlns:p14="http://schemas.microsoft.com/office/powerpoint/2010/main" val="3385859600"/>
       </p:ext>
     </p:extLst>
   </p:cSld>
   <p:clrMap bg1="lt1" tx1="dk1" bg2="lt2" tx2="dk2" accent1="accent1" accent2="accent2" accent3="accent3" accent4="accent4" accent5="accent5" accent6="accent6" hlink="hlink" folHlink="folHlink"/>
   <p:notesStyle>
-    <a:lvl1pPr marL="0" algn="l" defTabSz="457200" rtl="0" eaLnBrk="1" latinLnBrk="0" hangingPunct="1">
+    <a:lvl1pPr marL="0" algn="r" defTabSz="914400" rtl="1" eaLnBrk="1" latinLnBrk="0" hangingPunct="1">
       <a:defRPr sz="1200" kern="1200">
         <a:solidFill>
           <a:schemeClr val="tx1"/>
@@ -389,7 +182,7 @@
         <a:cs typeface="+mn-cs"/>
       </a:defRPr>
     </a:lvl1pPr>
-    <a:lvl2pPr marL="457200" algn="l" defTabSz="457200" rtl="0" eaLnBrk="1" latinLnBrk="0" hangingPunct="1">
+    <a:lvl2pPr marL="457200" algn="r" defTabSz="914400" rtl="1" eaLnBrk="1" latinLnBrk="0" hangingPunct="1">
       <a:defRPr sz="1200" kern="1200">
         <a:solidFill>
           <a:schemeClr val="tx1"/>
@@ -399,7 +192,7 @@
         <a:cs typeface="+mn-cs"/>
       </a:defRPr>
     </a:lvl2pPr>
-    <a:lvl3pPr marL="914400" algn="l" defTabSz="457200" rtl="0" eaLnBrk="1" latinLnBrk="0" hangingPunct="1">
+    <a:lvl3pPr marL="914400" algn="r" defTabSz="914400" rtl="1" eaLnBrk="1" latinLnBrk="0" hangingPunct="1">
       <a:defRPr sz="1200" kern="1200">
         <a:solidFill>
           <a:schemeClr val="tx1"/>
@@ -409,7 +202,7 @@
         <a:cs typeface="+mn-cs"/>
       </a:defRPr>
     </a:lvl3pPr>
-    <a:lvl4pPr marL="1371600" algn="l" defTabSz="457200" rtl="0" eaLnBrk="1" latinLnBrk="0" hangingPunct="1">
+    <a:lvl4pPr marL="1371600" algn="r" defTabSz="914400" rtl="1" eaLnBrk="1" latinLnBrk="0" hangingPunct="1">
       <a:defRPr sz="1200" kern="1200">
         <a:solidFill>
           <a:schemeClr val="tx1"/>
@@ -419,7 +212,7 @@
         <a:cs typeface="+mn-cs"/>
       </a:defRPr>
     </a:lvl4pPr>
-    <a:lvl5pPr marL="1828800" algn="l" defTabSz="457200" rtl="0" eaLnBrk="1" latinLnBrk="0" hangingPunct="1">
+    <a:lvl5pPr marL="1828800" algn="r" defTabSz="914400" rtl="1" eaLnBrk="1" latinLnBrk="0" hangingPunct="1">
       <a:defRPr sz="1200" kern="1200">
         <a:solidFill>
           <a:schemeClr val="tx1"/>
@@ -429,7 +222,7 @@
         <a:cs typeface="+mn-cs"/>
       </a:defRPr>
     </a:lvl5pPr>
-    <a:lvl6pPr marL="2286000" algn="l" defTabSz="457200" rtl="0" eaLnBrk="1" latinLnBrk="0" hangingPunct="1">
+    <a:lvl6pPr marL="2286000" algn="r" defTabSz="914400" rtl="1" eaLnBrk="1" latinLnBrk="0" hangingPunct="1">
       <a:defRPr sz="1200" kern="1200">
         <a:solidFill>
           <a:schemeClr val="tx1"/>
@@ -439,7 +232,7 @@
         <a:cs typeface="+mn-cs"/>
       </a:defRPr>
     </a:lvl6pPr>
-    <a:lvl7pPr marL="2743200" algn="l" defTabSz="457200" rtl="0" eaLnBrk="1" latinLnBrk="0" hangingPunct="1">
+    <a:lvl7pPr marL="2743200" algn="r" defTabSz="914400" rtl="1" eaLnBrk="1" latinLnBrk="0" hangingPunct="1">
       <a:defRPr sz="1200" kern="1200">
         <a:solidFill>
           <a:schemeClr val="tx1"/>
@@ -449,7 +242,7 @@
         <a:cs typeface="+mn-cs"/>
       </a:defRPr>
     </a:lvl7pPr>
-    <a:lvl8pPr marL="3200400" algn="l" defTabSz="457200" rtl="0" eaLnBrk="1" latinLnBrk="0" hangingPunct="1">
+    <a:lvl8pPr marL="3200400" algn="r" defTabSz="914400" rtl="1" eaLnBrk="1" latinLnBrk="0" hangingPunct="1">
       <a:defRPr sz="1200" kern="1200">
         <a:solidFill>
           <a:schemeClr val="tx1"/>
@@ -459,7 +252,7 @@
         <a:cs typeface="+mn-cs"/>
       </a:defRPr>
     </a:lvl8pPr>
-    <a:lvl9pPr marL="3657600" algn="l" defTabSz="457200" rtl="0" eaLnBrk="1" latinLnBrk="0" hangingPunct="1">
+    <a:lvl9pPr marL="3657600" algn="r" defTabSz="914400" rtl="1" eaLnBrk="1" latinLnBrk="0" hangingPunct="1">
       <a:defRPr sz="1200" kern="1200">
         <a:solidFill>
           <a:schemeClr val="tx1"/>
@@ -474,7 +267,7 @@
 </file>
 
 <file path=ppt/notesSlides/notesSlide1.xml><?xml version="1.0" encoding="utf-8"?>
-<p:notes xmlns:a="http://schemas.openxmlformats.org/drawingml/2006/main" xmlns:p="http://schemas.openxmlformats.org/presentationml/2006/main" xmlns:r="http://schemas.openxmlformats.org/officeDocument/2006/relationships">
+<p:notes xmlns:a="http://schemas.openxmlformats.org/drawingml/2006/main" xmlns:r="http://schemas.openxmlformats.org/officeDocument/2006/relationships" xmlns:p="http://schemas.openxmlformats.org/presentationml/2006/main">
   <p:cSld>
     <p:spTree>
       <p:nvGrpSpPr>
@@ -494,7 +287,7 @@
         <p:nvSpPr>
           <p:cNvPr id="2" name="Slide Image Placeholder 1"/>
           <p:cNvSpPr>
-            <a:spLocks noGrp="1"/>
+            <a:spLocks noGrp="1" noRot="1" noChangeAspect="1"/>
           </p:cNvSpPr>
           <p:nvPr>
             <p:ph type="sldImg" idx="2"/>
@@ -509,7 +302,7 @@
             <a:spLocks noGrp="1"/>
           </p:cNvSpPr>
           <p:nvPr>
-            <p:ph type="body" idx="3" sz="quarter"/>
+            <p:ph type="body" sz="quarter" idx="3"/>
           </p:nvPr>
         </p:nvSpPr>
         <p:spPr/>
@@ -530,7 +323,7 @@
             <a:spLocks noGrp="1"/>
           </p:cNvSpPr>
           <p:nvPr>
-            <p:ph type="sldNum" idx="5" sz="quarter"/>
+            <p:ph type="sldNum" sz="quarter" idx="5"/>
           </p:nvPr>
         </p:nvSpPr>
         <p:spPr/>
@@ -544,7 +337,7 @@
 </file>
 
 <file path=ppt/notesSlides/notesSlide10.xml><?xml version="1.0" encoding="utf-8"?>
-<p:notes xmlns:a="http://schemas.openxmlformats.org/drawingml/2006/main" xmlns:p="http://schemas.openxmlformats.org/presentationml/2006/main" xmlns:r="http://schemas.openxmlformats.org/officeDocument/2006/relationships">
+<p:notes xmlns:a="http://schemas.openxmlformats.org/drawingml/2006/main" xmlns:r="http://schemas.openxmlformats.org/officeDocument/2006/relationships" xmlns:p="http://schemas.openxmlformats.org/presentationml/2006/main">
   <p:cSld>
     <p:spTree>
       <p:nvGrpSpPr>
@@ -564,7 +357,7 @@
         <p:nvSpPr>
           <p:cNvPr id="2" name="Slide Image Placeholder 1"/>
           <p:cNvSpPr>
-            <a:spLocks noGrp="1"/>
+            <a:spLocks noGrp="1" noRot="1" noChangeAspect="1"/>
           </p:cNvSpPr>
           <p:nvPr>
             <p:ph type="sldImg" idx="2"/>
@@ -579,7 +372,7 @@
             <a:spLocks noGrp="1"/>
           </p:cNvSpPr>
           <p:nvPr>
-            <p:ph type="body" idx="3" sz="quarter"/>
+            <p:ph type="body" sz="quarter" idx="3"/>
           </p:nvPr>
         </p:nvSpPr>
         <p:spPr/>
@@ -600,7 +393,7 @@
             <a:spLocks noGrp="1"/>
           </p:cNvSpPr>
           <p:nvPr>
-            <p:ph type="sldNum" idx="5" sz="quarter"/>
+            <p:ph type="sldNum" sz="quarter" idx="5"/>
           </p:nvPr>
         </p:nvSpPr>
         <p:spPr/>
@@ -614,7 +407,7 @@
 </file>
 
 <file path=ppt/notesSlides/notesSlide11.xml><?xml version="1.0" encoding="utf-8"?>
-<p:notes xmlns:a="http://schemas.openxmlformats.org/drawingml/2006/main" xmlns:p="http://schemas.openxmlformats.org/presentationml/2006/main" xmlns:r="http://schemas.openxmlformats.org/officeDocument/2006/relationships">
+<p:notes xmlns:a="http://schemas.openxmlformats.org/drawingml/2006/main" xmlns:r="http://schemas.openxmlformats.org/officeDocument/2006/relationships" xmlns:p="http://schemas.openxmlformats.org/presentationml/2006/main">
   <p:cSld>
     <p:spTree>
       <p:nvGrpSpPr>
@@ -634,7 +427,7 @@
         <p:nvSpPr>
           <p:cNvPr id="2" name="Slide Image Placeholder 1"/>
           <p:cNvSpPr>
-            <a:spLocks noGrp="1"/>
+            <a:spLocks noGrp="1" noRot="1" noChangeAspect="1"/>
           </p:cNvSpPr>
           <p:nvPr>
             <p:ph type="sldImg" idx="2"/>
@@ -649,7 +442,7 @@
             <a:spLocks noGrp="1"/>
           </p:cNvSpPr>
           <p:nvPr>
-            <p:ph type="body" idx="3" sz="quarter"/>
+            <p:ph type="body" sz="quarter" idx="3"/>
           </p:nvPr>
         </p:nvSpPr>
         <p:spPr/>
@@ -670,7 +463,7 @@
             <a:spLocks noGrp="1"/>
           </p:cNvSpPr>
           <p:nvPr>
-            <p:ph type="sldNum" idx="5" sz="quarter"/>
+            <p:ph type="sldNum" sz="quarter" idx="5"/>
           </p:nvPr>
         </p:nvSpPr>
         <p:spPr/>
@@ -684,7 +477,7 @@
 </file>
 
 <file path=ppt/notesSlides/notesSlide12.xml><?xml version="1.0" encoding="utf-8"?>
-<p:notes xmlns:a="http://schemas.openxmlformats.org/drawingml/2006/main" xmlns:p="http://schemas.openxmlformats.org/presentationml/2006/main" xmlns:r="http://schemas.openxmlformats.org/officeDocument/2006/relationships">
+<p:notes xmlns:a="http://schemas.openxmlformats.org/drawingml/2006/main" xmlns:r="http://schemas.openxmlformats.org/officeDocument/2006/relationships" xmlns:p="http://schemas.openxmlformats.org/presentationml/2006/main">
   <p:cSld>
     <p:spTree>
       <p:nvGrpSpPr>
@@ -704,7 +497,7 @@
         <p:nvSpPr>
           <p:cNvPr id="2" name="Slide Image Placeholder 1"/>
           <p:cNvSpPr>
-            <a:spLocks noGrp="1"/>
+            <a:spLocks noGrp="1" noRot="1" noChangeAspect="1"/>
           </p:cNvSpPr>
           <p:nvPr>
             <p:ph type="sldImg" idx="2"/>
@@ -719,7 +512,7 @@
             <a:spLocks noGrp="1"/>
           </p:cNvSpPr>
           <p:nvPr>
-            <p:ph type="body" idx="3" sz="quarter"/>
+            <p:ph type="body" sz="quarter" idx="3"/>
           </p:nvPr>
         </p:nvSpPr>
         <p:spPr/>
@@ -728,7 +521,7 @@
           <a:lstStyle/>
           <a:p>
             <a:r>
-              <a:t>[COURSE: abnormality / anomaly detection — Isolation Forest, LOF.] A weaker-assumption sanity check: with no phishing labels at all, unsupervised detectors trained only on legit URLs still get AUC 0.83 / 0.94. Isolation Forest isolates anomalies quickly with random splits; LOF flags points in low-density regions relative to their neighbours. Useful, but still built on the same structural signals, so they inherit the same fragility.</a:t>
+              <a:t>[COURSE: domain shift / concept drift; AUC.] The real test — a totally different dataset. The near-perfect model collapses to F1 0.67, AUC 0.43. AUC below 0.5 is the key idea: AUC is the chance a random phishing URL scores above a random legit one; 0.5 is a coin flip. Below 0.5 means the model is systematically ranking legit ABOVE phishing — it learned a real pattern but that pattern is inverted in the new data. I call this 'confidently backwards': not clueless, but confidently wrong. The boxplot shows why: in-distribution the classes separate cleanly; on the new data both pile up at ~1.0. Yet it still catches 100% of live current phishing, because real phishing today is still structurally messy — a genuinely nuanced result.</a:t>
             </a:r>
           </a:p>
         </p:txBody>
@@ -740,7 +533,7 @@
             <a:spLocks noGrp="1"/>
           </p:cNvSpPr>
           <p:nvPr>
-            <p:ph type="sldNum" idx="5" sz="quarter"/>
+            <p:ph type="sldNum" sz="quarter" idx="5"/>
           </p:nvPr>
         </p:nvSpPr>
         <p:spPr/>
@@ -754,7 +547,7 @@
 </file>
 
 <file path=ppt/notesSlides/notesSlide13.xml><?xml version="1.0" encoding="utf-8"?>
-<p:notes xmlns:a="http://schemas.openxmlformats.org/drawingml/2006/main" xmlns:p="http://schemas.openxmlformats.org/presentationml/2006/main" xmlns:r="http://schemas.openxmlformats.org/officeDocument/2006/relationships">
+<p:notes xmlns:a="http://schemas.openxmlformats.org/drawingml/2006/main" xmlns:r="http://schemas.openxmlformats.org/officeDocument/2006/relationships" xmlns:p="http://schemas.openxmlformats.org/presentationml/2006/main">
   <p:cSld>
     <p:spTree>
       <p:nvGrpSpPr>
@@ -774,7 +567,7 @@
         <p:nvSpPr>
           <p:cNvPr id="2" name="Slide Image Placeholder 1"/>
           <p:cNvSpPr>
-            <a:spLocks noGrp="1"/>
+            <a:spLocks noGrp="1" noRot="1" noChangeAspect="1"/>
           </p:cNvSpPr>
           <p:nvPr>
             <p:ph type="sldImg" idx="2"/>
@@ -789,7 +582,7 @@
             <a:spLocks noGrp="1"/>
           </p:cNvSpPr>
           <p:nvPr>
-            <p:ph type="body" idx="3" sz="quarter"/>
+            <p:ph type="body" sz="quarter" idx="3"/>
           </p:nvPr>
         </p:nvSpPr>
         <p:spPr/>
@@ -798,7 +591,7 @@
           <a:lstStyle/>
           <a:p>
             <a:r>
-              <a:t>[COURSE: domain shift / concept drift; AUC.] The real test — a totally different dataset. The near-perfect model collapses to F1 0.67, AUC 0.43. AUC below 0.5 is the key idea: AUC is the chance a random phishing URL scores above a random legit one; 0.5 is a coin flip. Below 0.5 means the model is systematically ranking legit ABOVE phishing — it learned a real pattern but that pattern is inverted in the new data. I call this 'confidently backwards': not clueless, but confidently wrong. The boxplot shows why: in-distribution the classes separate cleanly; on the new data both pile up at ~1.0. Yet it still catches 100% of live current phishing, because real phishing today is still structurally messy — a genuinely nuanced result.</a:t>
+              <a:t>[COURSE: distance metrics — Kolmogorov–Smirnov, Wasserstein/EMD.] This closes the loop. I measure, feature by feature, how different the two datasets are, using two standard distances: KS (largest gap between the two cumulative distribution curves) and Wasserstein (the earth-mover distance — how much probability mass must move, and how far). The most-shifted features turn out to be precisely is_https, path_len, n_subdomain — the same features SHAP flagged as the model's top drivers. So the collapse isn't mysterious: the model built its decision on the three least-transferable signals. Two different tools (SHAP + distance metrics) corroborate one causal story.</a:t>
             </a:r>
           </a:p>
         </p:txBody>
@@ -810,7 +603,7 @@
             <a:spLocks noGrp="1"/>
           </p:cNvSpPr>
           <p:nvPr>
-            <p:ph type="sldNum" idx="5" sz="quarter"/>
+            <p:ph type="sldNum" sz="quarter" idx="5"/>
           </p:nvPr>
         </p:nvSpPr>
         <p:spPr/>
@@ -824,7 +617,7 @@
 </file>
 
 <file path=ppt/notesSlides/notesSlide14.xml><?xml version="1.0" encoding="utf-8"?>
-<p:notes xmlns:a="http://schemas.openxmlformats.org/drawingml/2006/main" xmlns:p="http://schemas.openxmlformats.org/presentationml/2006/main" xmlns:r="http://schemas.openxmlformats.org/officeDocument/2006/relationships">
+<p:notes xmlns:a="http://schemas.openxmlformats.org/drawingml/2006/main" xmlns:r="http://schemas.openxmlformats.org/officeDocument/2006/relationships" xmlns:p="http://schemas.openxmlformats.org/presentationml/2006/main">
   <p:cSld>
     <p:spTree>
       <p:nvGrpSpPr>
@@ -844,7 +637,7 @@
         <p:nvSpPr>
           <p:cNvPr id="2" name="Slide Image Placeholder 1"/>
           <p:cNvSpPr>
-            <a:spLocks noGrp="1"/>
+            <a:spLocks noGrp="1" noRot="1" noChangeAspect="1"/>
           </p:cNvSpPr>
           <p:nvPr>
             <p:ph type="sldImg" idx="2"/>
@@ -859,7 +652,7 @@
             <a:spLocks noGrp="1"/>
           </p:cNvSpPr>
           <p:nvPr>
-            <p:ph type="body" idx="3" sz="quarter"/>
+            <p:ph type="body" sz="quarter" idx="3"/>
           </p:nvPr>
         </p:nvSpPr>
         <p:spPr/>
@@ -868,7 +661,7 @@
           <a:lstStyle/>
           <a:p>
             <a:r>
-              <a:t>[COURSE: distance metrics — Kolmogorov–Smirnov, Wasserstein/EMD.] This closes the loop. I measure, feature by feature, how different the two datasets are, using two standard distances: KS (largest gap between the two cumulative distribution curves) and Wasserstein (the earth-mover distance — how much probability mass must move, and how far). The most-shifted features turn out to be precisely is_https, path_len, n_subdomain — the same features SHAP flagged as the model's top drivers. So the collapse isn't mysterious: the model built its decision on the three least-transferable signals. Two different tools (SHAP + distance metrics) corroborate one causal story.</a:t>
+              <a:t>The honest bottom line. The detector isn't worthless — it's fast, private, interpretable, and resists cheap character tricks, and it catches today's messy phishing. But it can't stand alone: it's an artifact-driven benchmark score that an attacker beats by using legitimate hosting, and it doesn't survive a change of dataset. Hence fusion with the content channel — the two look at completely independent evidence.</a:t>
             </a:r>
           </a:p>
         </p:txBody>
@@ -880,7 +673,7 @@
             <a:spLocks noGrp="1"/>
           </p:cNvSpPr>
           <p:nvPr>
-            <p:ph type="sldNum" idx="5" sz="quarter"/>
+            <p:ph type="sldNum" sz="quarter" idx="5"/>
           </p:nvPr>
         </p:nvSpPr>
         <p:spPr/>
@@ -894,7 +687,7 @@
 </file>
 
 <file path=ppt/notesSlides/notesSlide15.xml><?xml version="1.0" encoding="utf-8"?>
-<p:notes xmlns:a="http://schemas.openxmlformats.org/drawingml/2006/main" xmlns:p="http://schemas.openxmlformats.org/presentationml/2006/main" xmlns:r="http://schemas.openxmlformats.org/officeDocument/2006/relationships">
+<p:notes xmlns:a="http://schemas.openxmlformats.org/drawingml/2006/main" xmlns:r="http://schemas.openxmlformats.org/officeDocument/2006/relationships" xmlns:p="http://schemas.openxmlformats.org/presentationml/2006/main">
   <p:cSld>
     <p:spTree>
       <p:nvGrpSpPr>
@@ -914,7 +707,7 @@
         <p:nvSpPr>
           <p:cNvPr id="2" name="Slide Image Placeholder 1"/>
           <p:cNvSpPr>
-            <a:spLocks noGrp="1"/>
+            <a:spLocks noGrp="1" noRot="1" noChangeAspect="1"/>
           </p:cNvSpPr>
           <p:nvPr>
             <p:ph type="sldImg" idx="2"/>
@@ -929,7 +722,7 @@
             <a:spLocks noGrp="1"/>
           </p:cNvSpPr>
           <p:nvPr>
-            <p:ph type="body" idx="3" sz="quarter"/>
+            <p:ph type="body" sz="quarter" idx="3"/>
           </p:nvPr>
         </p:nvSpPr>
         <p:spPr/>
@@ -938,7 +731,7 @@
           <a:lstStyle/>
           <a:p>
             <a:r>
-              <a:t>The honest bottom line. The detector isn't worthless — it's fast, private, interpretable, and resists cheap character tricks, and it catches today's messy phishing. But it can't stand alone: it's an artifact-driven benchmark score that an attacker beats by using legitimate hosting, and it doesn't survive a change of dataset. Hence fusion with the content channel — the two look at completely independent evidence.</a:t>
+              <a:t>The explicit concept map — this is the slide to point to if the lecturer asks 'where did you use what we taught?'. Every item here is earned in a specific experiment, and the mapping is also in the report appendix and the notebook's final section.</a:t>
             </a:r>
           </a:p>
         </p:txBody>
@@ -950,7 +743,7 @@
             <a:spLocks noGrp="1"/>
           </p:cNvSpPr>
           <p:nvPr>
-            <p:ph type="sldNum" idx="5" sz="quarter"/>
+            <p:ph type="sldNum" sz="quarter" idx="5"/>
           </p:nvPr>
         </p:nvSpPr>
         <p:spPr/>
@@ -964,7 +757,7 @@
 </file>
 
 <file path=ppt/notesSlides/notesSlide16.xml><?xml version="1.0" encoding="utf-8"?>
-<p:notes xmlns:a="http://schemas.openxmlformats.org/drawingml/2006/main" xmlns:p="http://schemas.openxmlformats.org/presentationml/2006/main" xmlns:r="http://schemas.openxmlformats.org/officeDocument/2006/relationships">
+<p:notes xmlns:a="http://schemas.openxmlformats.org/drawingml/2006/main" xmlns:r="http://schemas.openxmlformats.org/officeDocument/2006/relationships" xmlns:p="http://schemas.openxmlformats.org/presentationml/2006/main">
   <p:cSld>
     <p:spTree>
       <p:nvGrpSpPr>
@@ -984,7 +777,7 @@
         <p:nvSpPr>
           <p:cNvPr id="2" name="Slide Image Placeholder 1"/>
           <p:cNvSpPr>
-            <a:spLocks noGrp="1"/>
+            <a:spLocks noGrp="1" noRot="1" noChangeAspect="1"/>
           </p:cNvSpPr>
           <p:nvPr>
             <p:ph type="sldImg" idx="2"/>
@@ -999,7 +792,7 @@
             <a:spLocks noGrp="1"/>
           </p:cNvSpPr>
           <p:nvPr>
-            <p:ph type="body" idx="3" sz="quarter"/>
+            <p:ph type="body" sz="quarter" idx="3"/>
           </p:nvPr>
         </p:nvSpPr>
         <p:spPr/>
@@ -1008,7 +801,7 @@
           <a:lstStyle/>
           <a:p>
             <a:r>
-              <a:t>The explicit concept map — this is the slide to point to if the lecturer asks 'where did you use what we taught?'. Every item here is earned in a specific experiment, and the mapping is also in the report appendix and the notebook's final section.</a:t>
+              <a:t>Likely questions: (1) 'Why is your score so high?' → it's an artifact, that's the whole point. (2) 'Did you cause it by preprocessing?' → no; only dedup + split, no rebalancing, hash logged. (3) 'Biggest weakness?' → doesn't generalise (AUC 0.43) and evaded by legit hosting → fusion. (4) 'Why not deep learning / URLNet?' → interpretability, so I can name the artifact.</a:t>
             </a:r>
           </a:p>
         </p:txBody>
@@ -1020,7 +813,7 @@
             <a:spLocks noGrp="1"/>
           </p:cNvSpPr>
           <p:nvPr>
-            <p:ph type="sldNum" idx="5" sz="quarter"/>
+            <p:ph type="sldNum" sz="quarter" idx="5"/>
           </p:nvPr>
         </p:nvSpPr>
         <p:spPr/>
@@ -1033,8 +826,8 @@
 </p:notes>
 </file>
 
-<file path=ppt/notesSlides/notesSlide17.xml><?xml version="1.0" encoding="utf-8"?>
-<p:notes xmlns:a="http://schemas.openxmlformats.org/drawingml/2006/main" xmlns:p="http://schemas.openxmlformats.org/presentationml/2006/main" xmlns:r="http://schemas.openxmlformats.org/officeDocument/2006/relationships">
+<file path=ppt/notesSlides/notesSlide2.xml><?xml version="1.0" encoding="utf-8"?>
+<p:notes xmlns:a="http://schemas.openxmlformats.org/drawingml/2006/main" xmlns:r="http://schemas.openxmlformats.org/officeDocument/2006/relationships" xmlns:p="http://schemas.openxmlformats.org/presentationml/2006/main">
   <p:cSld>
     <p:spTree>
       <p:nvGrpSpPr>
@@ -1054,7 +847,7 @@
         <p:nvSpPr>
           <p:cNvPr id="2" name="Slide Image Placeholder 1"/>
           <p:cNvSpPr>
-            <a:spLocks noGrp="1"/>
+            <a:spLocks noGrp="1" noRot="1" noChangeAspect="1"/>
           </p:cNvSpPr>
           <p:nvPr>
             <p:ph type="sldImg" idx="2"/>
@@ -1069,7 +862,7 @@
             <a:spLocks noGrp="1"/>
           </p:cNvSpPr>
           <p:nvPr>
-            <p:ph type="body" idx="3" sz="quarter"/>
+            <p:ph type="body" sz="quarter" idx="3"/>
           </p:nvPr>
         </p:nvSpPr>
         <p:spPr/>
@@ -1078,7 +871,7 @@
           <a:lstStyle/>
           <a:p>
             <a:r>
-              <a:t>Likely questions: (1) 'Why is your score so high?' → it's an artifact, that's the whole point. (2) 'Did you cause it by preprocessing?' → no; only dedup + split, no rebalancing, hash logged. (3) 'Biggest weakness?' → doesn't generalise (AUC 0.43) and evaded by legit hosting → fusion. (4) 'Why not deep learning / URLNet?' → interpretability, so I can name the artifact.</a:t>
+              <a:t>Frame the two-part project: my partner reads the words of the email; I read the link. Both are meant to be fused later (out of scope here). The plan is deliberately 'build then break' — the 20% that is model-building sets up the 80% that is critical evaluation.</a:t>
             </a:r>
           </a:p>
         </p:txBody>
@@ -1090,7 +883,7 @@
             <a:spLocks noGrp="1"/>
           </p:cNvSpPr>
           <p:nvPr>
-            <p:ph type="sldNum" idx="5" sz="quarter"/>
+            <p:ph type="sldNum" sz="quarter" idx="5"/>
           </p:nvPr>
         </p:nvSpPr>
         <p:spPr/>
@@ -1103,8 +896,8 @@
 </p:notes>
 </file>
 
-<file path=ppt/notesSlides/notesSlide2.xml><?xml version="1.0" encoding="utf-8"?>
-<p:notes xmlns:a="http://schemas.openxmlformats.org/drawingml/2006/main" xmlns:p="http://schemas.openxmlformats.org/presentationml/2006/main" xmlns:r="http://schemas.openxmlformats.org/officeDocument/2006/relationships">
+<file path=ppt/notesSlides/notesSlide3.xml><?xml version="1.0" encoding="utf-8"?>
+<p:notes xmlns:a="http://schemas.openxmlformats.org/drawingml/2006/main" xmlns:r="http://schemas.openxmlformats.org/officeDocument/2006/relationships" xmlns:p="http://schemas.openxmlformats.org/presentationml/2006/main">
   <p:cSld>
     <p:spTree>
       <p:nvGrpSpPr>
@@ -1124,7 +917,7 @@
         <p:nvSpPr>
           <p:cNvPr id="2" name="Slide Image Placeholder 1"/>
           <p:cNvSpPr>
-            <a:spLocks noGrp="1"/>
+            <a:spLocks noGrp="1" noRot="1" noChangeAspect="1"/>
           </p:cNvSpPr>
           <p:nvPr>
             <p:ph type="sldImg" idx="2"/>
@@ -1139,7 +932,7 @@
             <a:spLocks noGrp="1"/>
           </p:cNvSpPr>
           <p:nvPr>
-            <p:ph type="body" idx="3" sz="quarter"/>
+            <p:ph type="body" sz="quarter" idx="3"/>
           </p:nvPr>
         </p:nvSpPr>
         <p:spPr/>
@@ -1148,7 +941,24 @@
           <a:lstStyle/>
           <a:p>
             <a:r>
-              <a:t>Frame the two-part project: my partner reads the words of the email; I read the link. Both are meant to be fused later (out of scope here). The plan is deliberately 'build then break' — the 20% that is model-building sets up the 80% that is critical evaluation.</a:t>
+              <a:rPr sz="1800" dirty="0"/>
+              <a:t>[COURSE: EDA + train/</a:t>
+            </a:r>
+            <a:r>
+              <a:rPr sz="1800" dirty="0" err="1"/>
+              <a:t>val</a:t>
+            </a:r>
+            <a:r>
+              <a:rPr sz="1800" dirty="0"/>
+              <a:t>/test methodology.] Data prep was minimal on purpose: only a label </a:t>
+            </a:r>
+            <a:r>
+              <a:rPr sz="1800" dirty="0" err="1"/>
+              <a:t>standardisation</a:t>
+            </a:r>
+            <a:r>
+              <a:rPr sz="1800" dirty="0"/>
+              <a:t> (1=phishing), dropping empties, and de-duplicating identical URLs before the split so the same URL can't appear in train and test. I did NOT rebalance classes, remove outliers, or scale the raw data — so the near-perfect score I'm about to show is a property of the RAW data, not of my cleaning. Right figure: the EDA already looks suspicious — the classes separate almost perfectly on trivial quantities, which never happens with genuinely hard data.</a:t>
             </a:r>
           </a:p>
         </p:txBody>
@@ -1160,7 +970,7 @@
             <a:spLocks noGrp="1"/>
           </p:cNvSpPr>
           <p:nvPr>
-            <p:ph type="sldNum" idx="5" sz="quarter"/>
+            <p:ph type="sldNum" sz="quarter" idx="5"/>
           </p:nvPr>
         </p:nvSpPr>
         <p:spPr/>
@@ -1173,8 +983,8 @@
 </p:notes>
 </file>
 
-<file path=ppt/notesSlides/notesSlide3.xml><?xml version="1.0" encoding="utf-8"?>
-<p:notes xmlns:a="http://schemas.openxmlformats.org/drawingml/2006/main" xmlns:p="http://schemas.openxmlformats.org/presentationml/2006/main" xmlns:r="http://schemas.openxmlformats.org/officeDocument/2006/relationships">
+<file path=ppt/notesSlides/notesSlide4.xml><?xml version="1.0" encoding="utf-8"?>
+<p:notes xmlns:a="http://schemas.openxmlformats.org/drawingml/2006/main" xmlns:r="http://schemas.openxmlformats.org/officeDocument/2006/relationships" xmlns:p="http://schemas.openxmlformats.org/presentationml/2006/main">
   <p:cSld>
     <p:spTree>
       <p:nvGrpSpPr>
@@ -1194,7 +1004,7 @@
         <p:nvSpPr>
           <p:cNvPr id="2" name="Slide Image Placeholder 1"/>
           <p:cNvSpPr>
-            <a:spLocks noGrp="1"/>
+            <a:spLocks noGrp="1" noRot="1" noChangeAspect="1"/>
           </p:cNvSpPr>
           <p:nvPr>
             <p:ph type="sldImg" idx="2"/>
@@ -1209,7 +1019,7 @@
             <a:spLocks noGrp="1"/>
           </p:cNvSpPr>
           <p:nvPr>
-            <p:ph type="body" idx="3" sz="quarter"/>
+            <p:ph type="body" sz="quarter" idx="3"/>
           </p:nvPr>
         </p:nvSpPr>
         <p:spPr/>
@@ -1218,7 +1028,7 @@
           <a:lstStyle/>
           <a:p>
             <a:r>
-              <a:t>[COURSE: EDA + train/val/test methodology.] Data prep was minimal on purpose: only a label standardisation (1=phishing), dropping empties, and de-duplicating identical URLs before the split so the same URL can't appear in train and test. I did NOT rebalance classes, remove outliers, or scale the raw data — so the near-perfect score I'm about to show is a property of the RAW data, not of my cleaning. Right figure: the EDA already looks suspicious — the classes separate almost perfectly on trivial quantities, which never happens with genuinely hard data.</a:t>
+              <a:t>[COURSE: feature engineering.] This is the key design choice. Text has to be turned into numbers somehow — my partner uses TF-IDF (term frequency × inverse document frequency) over words. A URL isn't a sentence; it's structured (scheme://host/path?query). So I hand-engineer 40 numeric features straight from the string. I deliberately avoided a black-box deep model (like URLNet) because interpretability is the whole point: when I find the near-perfect score is an artifact, I want to name exactly which feature is responsible — which a black box would hide.</a:t>
             </a:r>
           </a:p>
         </p:txBody>
@@ -1230,7 +1040,7 @@
             <a:spLocks noGrp="1"/>
           </p:cNvSpPr>
           <p:nvPr>
-            <p:ph type="sldNum" idx="5" sz="quarter"/>
+            <p:ph type="sldNum" sz="quarter" idx="5"/>
           </p:nvPr>
         </p:nvSpPr>
         <p:spPr/>
@@ -1243,8 +1053,8 @@
 </p:notes>
 </file>
 
-<file path=ppt/notesSlides/notesSlide4.xml><?xml version="1.0" encoding="utf-8"?>
-<p:notes xmlns:a="http://schemas.openxmlformats.org/drawingml/2006/main" xmlns:p="http://schemas.openxmlformats.org/presentationml/2006/main" xmlns:r="http://schemas.openxmlformats.org/officeDocument/2006/relationships">
+<file path=ppt/notesSlides/notesSlide5.xml><?xml version="1.0" encoding="utf-8"?>
+<p:notes xmlns:a="http://schemas.openxmlformats.org/drawingml/2006/main" xmlns:r="http://schemas.openxmlformats.org/officeDocument/2006/relationships" xmlns:p="http://schemas.openxmlformats.org/presentationml/2006/main">
   <p:cSld>
     <p:spTree>
       <p:nvGrpSpPr>
@@ -1264,7 +1074,7 @@
         <p:nvSpPr>
           <p:cNvPr id="2" name="Slide Image Placeholder 1"/>
           <p:cNvSpPr>
-            <a:spLocks noGrp="1"/>
+            <a:spLocks noGrp="1" noRot="1" noChangeAspect="1"/>
           </p:cNvSpPr>
           <p:nvPr>
             <p:ph type="sldImg" idx="2"/>
@@ -1279,7 +1089,7 @@
             <a:spLocks noGrp="1"/>
           </p:cNvSpPr>
           <p:nvPr>
-            <p:ph type="body" idx="3" sz="quarter"/>
+            <p:ph type="body" sz="quarter" idx="3"/>
           </p:nvPr>
         </p:nvSpPr>
         <p:spPr/>
@@ -1288,7 +1098,7 @@
           <a:lstStyle/>
           <a:p>
             <a:r>
-              <a:t>[COURSE: feature engineering.] This is the key design choice. Text has to be turned into numbers somehow — my partner uses TF-IDF (term frequency × inverse document frequency) over words. A URL isn't a sentence; it's structured (scheme://host/path?query). So I hand-engineer 40 numeric features straight from the string. I deliberately avoided a black-box deep model (like URLNet) because interpretability is the whole point: when I find the near-perfect score is an artifact, I want to name exactly which feature is responsible — which a black box would hide.</a:t>
+              <a:t>Walk the six families briefly. Lexical = size and punctuation of the string. Host/domain = structure of the hostname (an IP literal instead of a domain name is suspicious). TLD = the suffix; some cheap TLDs (.tk, .xyz) are over-represented in abuse feeds. Entropy and Brand each have real theory — next slide. Scheme/encoding includes HTTPS (which turns out to be the villain of the story) and punycode, the xn-- encoding used to register look-alike international-character domains.</a:t>
             </a:r>
           </a:p>
         </p:txBody>
@@ -1300,7 +1110,7 @@
             <a:spLocks noGrp="1"/>
           </p:cNvSpPr>
           <p:nvPr>
-            <p:ph type="sldNum" idx="5" sz="quarter"/>
+            <p:ph type="sldNum" sz="quarter" idx="5"/>
           </p:nvPr>
         </p:nvSpPr>
         <p:spPr/>
@@ -1313,8 +1123,8 @@
 </p:notes>
 </file>
 
-<file path=ppt/notesSlides/notesSlide5.xml><?xml version="1.0" encoding="utf-8"?>
-<p:notes xmlns:a="http://schemas.openxmlformats.org/drawingml/2006/main" xmlns:p="http://schemas.openxmlformats.org/presentationml/2006/main" xmlns:r="http://schemas.openxmlformats.org/officeDocument/2006/relationships">
+<file path=ppt/notesSlides/notesSlide6.xml><?xml version="1.0" encoding="utf-8"?>
+<p:notes xmlns:a="http://schemas.openxmlformats.org/drawingml/2006/main" xmlns:r="http://schemas.openxmlformats.org/officeDocument/2006/relationships" xmlns:p="http://schemas.openxmlformats.org/presentationml/2006/main">
   <p:cSld>
     <p:spTree>
       <p:nvGrpSpPr>
@@ -1334,7 +1144,7 @@
         <p:nvSpPr>
           <p:cNvPr id="2" name="Slide Image Placeholder 1"/>
           <p:cNvSpPr>
-            <a:spLocks noGrp="1"/>
+            <a:spLocks noGrp="1" noRot="1" noChangeAspect="1"/>
           </p:cNvSpPr>
           <p:nvPr>
             <p:ph type="sldImg" idx="2"/>
@@ -1349,7 +1159,7 @@
             <a:spLocks noGrp="1"/>
           </p:cNvSpPr>
           <p:nvPr>
-            <p:ph type="body" idx="3" sz="quarter"/>
+            <p:ph type="body" sz="quarter" idx="3"/>
           </p:nvPr>
         </p:nvSpPr>
         <p:spPr/>
@@ -1358,7 +1168,7 @@
           <a:lstStyle/>
           <a:p>
             <a:r>
-              <a:t>Walk the six families briefly. Lexical = size and punctuation of the string. Host/domain = structure of the hostname (an IP literal instead of a domain name is suspicious). TLD = the suffix; some cheap TLDs (.tk, .xyz) are over-represented in abuse feeds. Entropy and Brand each have real theory — next slide. Scheme/encoding includes HTTPS (which turns out to be the villain of the story) and punycode, the xn-- encoding used to register look-alike international-character domains.</a:t>
+              <a:t>[COURSE: Shannon entropy / information theory; edit distance.] Entropy formula: sum over the character distribution of the host, p·log2(p). Intuitively it measures unpredictability — a real brand name is low-entropy, a random string is high-entropy. Levenshtein distance is the classic string-similarity measure, computed by dynamic programming; paypa1→paypal is one substitution, so distance 1. Domains within edit distance 1–2 of a known brand get flagged as typosquats. These two features are where the URL side borrows the same math toolkit as the rest of the course.</a:t>
             </a:r>
           </a:p>
         </p:txBody>
@@ -1370,7 +1180,7 @@
             <a:spLocks noGrp="1"/>
           </p:cNvSpPr>
           <p:nvPr>
-            <p:ph type="sldNum" idx="5" sz="quarter"/>
+            <p:ph type="sldNum" sz="quarter" idx="5"/>
           </p:nvPr>
         </p:nvSpPr>
         <p:spPr/>
@@ -1383,8 +1193,8 @@
 </p:notes>
 </file>
 
-<file path=ppt/notesSlides/notesSlide6.xml><?xml version="1.0" encoding="utf-8"?>
-<p:notes xmlns:a="http://schemas.openxmlformats.org/drawingml/2006/main" xmlns:p="http://schemas.openxmlformats.org/presentationml/2006/main" xmlns:r="http://schemas.openxmlformats.org/officeDocument/2006/relationships">
+<file path=ppt/notesSlides/notesSlide7.xml><?xml version="1.0" encoding="utf-8"?>
+<p:notes xmlns:a="http://schemas.openxmlformats.org/drawingml/2006/main" xmlns:r="http://schemas.openxmlformats.org/officeDocument/2006/relationships" xmlns:p="http://schemas.openxmlformats.org/presentationml/2006/main">
   <p:cSld>
     <p:spTree>
       <p:nvGrpSpPr>
@@ -1404,7 +1214,7 @@
         <p:nvSpPr>
           <p:cNvPr id="2" name="Slide Image Placeholder 1"/>
           <p:cNvSpPr>
-            <a:spLocks noGrp="1"/>
+            <a:spLocks noGrp="1" noRot="1" noChangeAspect="1"/>
           </p:cNvSpPr>
           <p:nvPr>
             <p:ph type="sldImg" idx="2"/>
@@ -1419,7 +1229,7 @@
             <a:spLocks noGrp="1"/>
           </p:cNvSpPr>
           <p:nvPr>
-            <p:ph type="body" idx="3" sz="quarter"/>
+            <p:ph type="body" sz="quarter" idx="3"/>
           </p:nvPr>
         </p:nvSpPr>
         <p:spPr/>
@@ -1428,7 +1238,7 @@
           <a:lstStyle/>
           <a:p>
             <a:r>
-              <a:t>[COURSE: Shannon entropy / information theory; edit distance.] Entropy formula: sum over the character distribution of the host, p·log2(p). Intuitively it measures unpredictability — a real brand name is low-entropy, a random string is high-entropy. Levenshtein distance is the classic string-similarity measure, computed by dynamic programming; paypa1→paypal is one substitution, so distance 1. Domains within edit distance 1–2 of a known brand get flagged as typosquats. These two features are where the URL side borrows the same math toolkit as the rest of the course.</a:t>
+              <a:t>[COURSE: the accuracy paradox.] This is the model you 'got' in the first round. It's excellent — and that's the problem. The decomposition is the first alarm: a single provided column scores 0.995, meaning it's essentially a copy of the answer key (leakage). And the accuracy paradox: 57% of the data is legit, so a do-nothing model looks 57% accurate while catching zero phishing — which is why I never report accuracy alone. Everything after this slide is a 'discovery' about why the perfect score is fake.</a:t>
             </a:r>
           </a:p>
         </p:txBody>
@@ -1440,7 +1250,7 @@
             <a:spLocks noGrp="1"/>
           </p:cNvSpPr>
           <p:nvPr>
-            <p:ph type="sldNum" idx="5" sz="quarter"/>
+            <p:ph type="sldNum" sz="quarter" idx="5"/>
           </p:nvPr>
         </p:nvSpPr>
         <p:spPr/>
@@ -1453,8 +1263,8 @@
 </p:notes>
 </file>
 
-<file path=ppt/notesSlides/notesSlide7.xml><?xml version="1.0" encoding="utf-8"?>
-<p:notes xmlns:a="http://schemas.openxmlformats.org/drawingml/2006/main" xmlns:p="http://schemas.openxmlformats.org/presentationml/2006/main" xmlns:r="http://schemas.openxmlformats.org/officeDocument/2006/relationships">
+<file path=ppt/notesSlides/notesSlide8.xml><?xml version="1.0" encoding="utf-8"?>
+<p:notes xmlns:a="http://schemas.openxmlformats.org/drawingml/2006/main" xmlns:r="http://schemas.openxmlformats.org/officeDocument/2006/relationships" xmlns:p="http://schemas.openxmlformats.org/presentationml/2006/main">
   <p:cSld>
     <p:spTree>
       <p:nvGrpSpPr>
@@ -1474,7 +1284,7 @@
         <p:nvSpPr>
           <p:cNvPr id="2" name="Slide Image Placeholder 1"/>
           <p:cNvSpPr>
-            <a:spLocks noGrp="1"/>
+            <a:spLocks noGrp="1" noRot="1" noChangeAspect="1"/>
           </p:cNvSpPr>
           <p:nvPr>
             <p:ph type="sldImg" idx="2"/>
@@ -1489,7 +1299,7 @@
             <a:spLocks noGrp="1"/>
           </p:cNvSpPr>
           <p:nvPr>
-            <p:ph type="body" idx="3" sz="quarter"/>
+            <p:ph type="body" sz="quarter" idx="3"/>
           </p:nvPr>
         </p:nvSpPr>
         <p:spPr/>
@@ -1498,7 +1308,7 @@
           <a:lstStyle/>
           <a:p>
             <a:r>
-              <a:t>[COURSE: the accuracy paradox.] This is the model you 'got' in the first round. It's excellent — and that's the problem. The decomposition is the first alarm: a single provided column scores 0.995, meaning it's essentially a copy of the answer key (leakage). And the accuracy paradox: 57% of the data is legit, so a do-nothing model looks 57% accurate while catching zero phishing — which is why I never report accuracy alone. Everything after this slide is a 'discovery' about why the perfect score is fake.</a:t>
+              <a:t>Discovery 1: WHY is it perfect? Legit URLs are 100% HTTPS, phishing only 49% — a 51-point gap baked into how the two classes were gathered. The model is basically an HTTPS detector. This is the core critical finding: near-perfect benchmark scores measure dataset construction, not the phishing problem. Note the irony — in the real world phishing is mostly HTTPS now, so this learned rule is actually backwards outside the dataset.</a:t>
             </a:r>
           </a:p>
         </p:txBody>
@@ -1510,7 +1320,7 @@
             <a:spLocks noGrp="1"/>
           </p:cNvSpPr>
           <p:nvPr>
-            <p:ph type="sldNum" idx="5" sz="quarter"/>
+            <p:ph type="sldNum" sz="quarter" idx="5"/>
           </p:nvPr>
         </p:nvSpPr>
         <p:spPr/>
@@ -1523,8 +1333,8 @@
 </p:notes>
 </file>
 
-<file path=ppt/notesSlides/notesSlide8.xml><?xml version="1.0" encoding="utf-8"?>
-<p:notes xmlns:a="http://schemas.openxmlformats.org/drawingml/2006/main" xmlns:p="http://schemas.openxmlformats.org/presentationml/2006/main" xmlns:r="http://schemas.openxmlformats.org/officeDocument/2006/relationships">
+<file path=ppt/notesSlides/notesSlide9.xml><?xml version="1.0" encoding="utf-8"?>
+<p:notes xmlns:a="http://schemas.openxmlformats.org/drawingml/2006/main" xmlns:r="http://schemas.openxmlformats.org/officeDocument/2006/relationships" xmlns:p="http://schemas.openxmlformats.org/presentationml/2006/main">
   <p:cSld>
     <p:spTree>
       <p:nvGrpSpPr>
@@ -1544,7 +1354,7 @@
         <p:nvSpPr>
           <p:cNvPr id="2" name="Slide Image Placeholder 1"/>
           <p:cNvSpPr>
-            <a:spLocks noGrp="1"/>
+            <a:spLocks noGrp="1" noRot="1" noChangeAspect="1"/>
           </p:cNvSpPr>
           <p:nvPr>
             <p:ph type="sldImg" idx="2"/>
@@ -1559,7 +1369,7 @@
             <a:spLocks noGrp="1"/>
           </p:cNvSpPr>
           <p:nvPr>
-            <p:ph type="body" idx="3" sz="quarter"/>
+            <p:ph type="body" sz="quarter" idx="3"/>
           </p:nvPr>
         </p:nvSpPr>
         <p:spPr/>
@@ -1568,7 +1378,7 @@
           <a:lstStyle/>
           <a:p>
             <a:r>
-              <a:t>Discovery 1: WHY is it perfect? Legit URLs are 100% HTTPS, phishing only 49% — a 51-point gap baked into how the two classes were gathered. The model is basically an HTTPS detector. This is the core critical finding: near-perfect benchmark scores measure dataset construction, not the phishing problem. Note the irony — in the real world phishing is mostly HTTPS now, so this learned rule is actually backwards outside the dataset.</a:t>
+              <a:t>[COURSE: evaluation metrics + statistical validity.] Explain the two that get asked about. MCC = Matthews Correlation Coefficient: computed from true/false positives and negatives all four together, it ranges −1 (perfectly wrong) to +1 (perfect), 0 = random. Unlike accuracy or even F1, you can't fake a good MCC by exploiting the majority class — that's why it's the honest single number under imbalance. Bootstrap CI: instead of trusting one number from one test set, I resample the test set with replacement 1000 times, recompute the metric each time, and report the middle 95% — it tells me how much the number would wobble, so I don't over-read a 0.001 difference. McNemar does the same job for comparing two models.</a:t>
             </a:r>
           </a:p>
         </p:txBody>
@@ -1580,77 +1390,7 @@
             <a:spLocks noGrp="1"/>
           </p:cNvSpPr>
           <p:nvPr>
-            <p:ph type="sldNum" idx="5" sz="quarter"/>
-          </p:nvPr>
-        </p:nvSpPr>
-        <p:spPr/>
-      </p:sp>
-    </p:spTree>
-  </p:cSld>
-  <p:clrMapOvr>
-    <a:masterClrMapping/>
-  </p:clrMapOvr>
-</p:notes>
-</file>
-
-<file path=ppt/notesSlides/notesSlide9.xml><?xml version="1.0" encoding="utf-8"?>
-<p:notes xmlns:a="http://schemas.openxmlformats.org/drawingml/2006/main" xmlns:p="http://schemas.openxmlformats.org/presentationml/2006/main" xmlns:r="http://schemas.openxmlformats.org/officeDocument/2006/relationships">
-  <p:cSld>
-    <p:spTree>
-      <p:nvGrpSpPr>
-        <p:cNvPr id="1" name=""/>
-        <p:cNvGrpSpPr/>
-        <p:nvPr/>
-      </p:nvGrpSpPr>
-      <p:grpSpPr>
-        <a:xfrm>
-          <a:off x="0" y="0"/>
-          <a:ext cx="0" cy="0"/>
-          <a:chOff x="0" y="0"/>
-          <a:chExt cx="0" cy="0"/>
-        </a:xfrm>
-      </p:grpSpPr>
-      <p:sp>
-        <p:nvSpPr>
-          <p:cNvPr id="2" name="Slide Image Placeholder 1"/>
-          <p:cNvSpPr>
-            <a:spLocks noGrp="1"/>
-          </p:cNvSpPr>
-          <p:nvPr>
-            <p:ph type="sldImg" idx="2"/>
-          </p:nvPr>
-        </p:nvSpPr>
-        <p:spPr/>
-      </p:sp>
-      <p:sp>
-        <p:nvSpPr>
-          <p:cNvPr id="3" name="Notes Placeholder 2"/>
-          <p:cNvSpPr>
-            <a:spLocks noGrp="1"/>
-          </p:cNvSpPr>
-          <p:nvPr>
-            <p:ph type="body" idx="3" sz="quarter"/>
-          </p:nvPr>
-        </p:nvSpPr>
-        <p:spPr/>
-        <p:txBody>
-          <a:bodyPr/>
-          <a:lstStyle/>
-          <a:p>
-            <a:r>
-              <a:t>[COURSE: evaluation metrics + statistical validity.] Explain the two that get asked about. MCC = Matthews Correlation Coefficient: computed from true/false positives and negatives all four together, it ranges −1 (perfectly wrong) to +1 (perfect), 0 = random. Unlike accuracy or even F1, you can't fake a good MCC by exploiting the majority class — that's why it's the honest single number under imbalance. Bootstrap CI: instead of trusting one number from one test set, I resample the test set with replacement 1000 times, recompute the metric each time, and report the middle 95% — it tells me how much the number would wobble, so I don't over-read a 0.001 difference. McNemar does the same job for comparing two models.</a:t>
-            </a:r>
-          </a:p>
-        </p:txBody>
-      </p:sp>
-      <p:sp>
-        <p:nvSpPr>
-          <p:cNvPr id="4" name="Slide Number Placeholder 3"/>
-          <p:cNvSpPr>
-            <a:spLocks noGrp="1"/>
-          </p:cNvSpPr>
-          <p:nvPr>
-            <p:ph type="sldNum" idx="5" sz="quarter"/>
+            <p:ph type="sldNum" sz="quarter" idx="5"/>
           </p:nvPr>
         </p:nvSpPr>
         <p:spPr/>
@@ -1701,10 +1441,9 @@
           <a:lstStyle/>
           <a:p>
             <a:r>
-              <a:rPr lang="en-US" smtClean="0"/>
+              <a:rPr lang="en-US"/>
               <a:t>Click to edit Master title style</a:t>
             </a:r>
-            <a:endParaRPr lang="en-US"/>
           </a:p>
         </p:txBody>
       </p:sp>
@@ -1820,10 +1559,9 @@
           </a:lstStyle>
           <a:p>
             <a:r>
-              <a:rPr lang="en-US" smtClean="0"/>
+              <a:rPr lang="en-US"/>
               <a:t>Click to edit Master subtitle style</a:t>
             </a:r>
-            <a:endParaRPr lang="en-US"/>
           </a:p>
         </p:txBody>
       </p:sp>
@@ -1844,7 +1582,7 @@
           <a:p>
             <a:fld id="{5BCAD085-E8A6-8845-BD4E-CB4CCA059FC4}" type="datetimeFigureOut">
               <a:rPr lang="en-US" smtClean="0"/>
-              <a:t>1/27/13</a:t>
+              <a:t>7/22/2026</a:t>
             </a:fld>
             <a:endParaRPr lang="en-US"/>
           </a:p>
@@ -1938,10 +1676,9 @@
           <a:lstStyle/>
           <a:p>
             <a:r>
-              <a:rPr lang="en-US" smtClean="0"/>
+              <a:rPr lang="en-US"/>
               <a:t>Click to edit Master title style</a:t>
             </a:r>
-            <a:endParaRPr lang="en-US"/>
           </a:p>
         </p:txBody>
       </p:sp>
@@ -1962,38 +1699,37 @@
           <a:p>
             <a:pPr lvl="0"/>
             <a:r>
-              <a:rPr lang="en-US" smtClean="0"/>
+              <a:rPr lang="en-US"/>
               <a:t>Click to edit Master text styles</a:t>
             </a:r>
           </a:p>
           <a:p>
             <a:pPr lvl="1"/>
             <a:r>
-              <a:rPr lang="en-US" smtClean="0"/>
+              <a:rPr lang="en-US"/>
               <a:t>Second level</a:t>
             </a:r>
           </a:p>
           <a:p>
             <a:pPr lvl="2"/>
             <a:r>
-              <a:rPr lang="en-US" smtClean="0"/>
+              <a:rPr lang="en-US"/>
               <a:t>Third level</a:t>
             </a:r>
           </a:p>
           <a:p>
             <a:pPr lvl="3"/>
             <a:r>
-              <a:rPr lang="en-US" smtClean="0"/>
+              <a:rPr lang="en-US"/>
               <a:t>Fourth level</a:t>
             </a:r>
           </a:p>
           <a:p>
             <a:pPr lvl="4"/>
             <a:r>
-              <a:rPr lang="en-US" smtClean="0"/>
+              <a:rPr lang="en-US"/>
               <a:t>Fifth level</a:t>
             </a:r>
-            <a:endParaRPr lang="en-US"/>
           </a:p>
         </p:txBody>
       </p:sp>
@@ -2014,7 +1750,7 @@
           <a:p>
             <a:fld id="{5BCAD085-E8A6-8845-BD4E-CB4CCA059FC4}" type="datetimeFigureOut">
               <a:rPr lang="en-US" smtClean="0"/>
-              <a:t>1/27/13</a:t>
+              <a:t>7/22/2026</a:t>
             </a:fld>
             <a:endParaRPr lang="en-US"/>
           </a:p>
@@ -2113,10 +1849,9 @@
           <a:lstStyle/>
           <a:p>
             <a:r>
-              <a:rPr lang="en-US" smtClean="0"/>
+              <a:rPr lang="en-US"/>
               <a:t>Click to edit Master title style</a:t>
             </a:r>
-            <a:endParaRPr lang="en-US"/>
           </a:p>
         </p:txBody>
       </p:sp>
@@ -2142,38 +1877,37 @@
           <a:p>
             <a:pPr lvl="0"/>
             <a:r>
-              <a:rPr lang="en-US" smtClean="0"/>
+              <a:rPr lang="en-US"/>
               <a:t>Click to edit Master text styles</a:t>
             </a:r>
           </a:p>
           <a:p>
             <a:pPr lvl="1"/>
             <a:r>
-              <a:rPr lang="en-US" smtClean="0"/>
+              <a:rPr lang="en-US"/>
               <a:t>Second level</a:t>
             </a:r>
           </a:p>
           <a:p>
             <a:pPr lvl="2"/>
             <a:r>
-              <a:rPr lang="en-US" smtClean="0"/>
+              <a:rPr lang="en-US"/>
               <a:t>Third level</a:t>
             </a:r>
           </a:p>
           <a:p>
             <a:pPr lvl="3"/>
             <a:r>
-              <a:rPr lang="en-US" smtClean="0"/>
+              <a:rPr lang="en-US"/>
               <a:t>Fourth level</a:t>
             </a:r>
           </a:p>
           <a:p>
             <a:pPr lvl="4"/>
             <a:r>
-              <a:rPr lang="en-US" smtClean="0"/>
+              <a:rPr lang="en-US"/>
               <a:t>Fifth level</a:t>
             </a:r>
-            <a:endParaRPr lang="en-US"/>
           </a:p>
         </p:txBody>
       </p:sp>
@@ -2194,7 +1928,7 @@
           <a:p>
             <a:fld id="{5BCAD085-E8A6-8845-BD4E-CB4CCA059FC4}" type="datetimeFigureOut">
               <a:rPr lang="en-US" smtClean="0"/>
-              <a:t>1/27/13</a:t>
+              <a:t>7/22/2026</a:t>
             </a:fld>
             <a:endParaRPr lang="en-US"/>
           </a:p>
@@ -2288,10 +2022,9 @@
           <a:lstStyle/>
           <a:p>
             <a:r>
-              <a:rPr lang="en-US" smtClean="0"/>
+              <a:rPr lang="en-US"/>
               <a:t>Click to edit Master title style</a:t>
             </a:r>
-            <a:endParaRPr lang="en-US"/>
           </a:p>
         </p:txBody>
       </p:sp>
@@ -2312,38 +2045,37 @@
           <a:p>
             <a:pPr lvl="0"/>
             <a:r>
-              <a:rPr lang="en-US" smtClean="0"/>
+              <a:rPr lang="en-US"/>
               <a:t>Click to edit Master text styles</a:t>
             </a:r>
           </a:p>
           <a:p>
             <a:pPr lvl="1"/>
             <a:r>
-              <a:rPr lang="en-US" smtClean="0"/>
+              <a:rPr lang="en-US"/>
               <a:t>Second level</a:t>
             </a:r>
           </a:p>
           <a:p>
             <a:pPr lvl="2"/>
             <a:r>
-              <a:rPr lang="en-US" smtClean="0"/>
+              <a:rPr lang="en-US"/>
               <a:t>Third level</a:t>
             </a:r>
           </a:p>
           <a:p>
             <a:pPr lvl="3"/>
             <a:r>
-              <a:rPr lang="en-US" smtClean="0"/>
+              <a:rPr lang="en-US"/>
               <a:t>Fourth level</a:t>
             </a:r>
           </a:p>
           <a:p>
             <a:pPr lvl="4"/>
             <a:r>
-              <a:rPr lang="en-US" smtClean="0"/>
+              <a:rPr lang="en-US"/>
               <a:t>Fifth level</a:t>
             </a:r>
-            <a:endParaRPr lang="en-US"/>
           </a:p>
         </p:txBody>
       </p:sp>
@@ -2364,7 +2096,7 @@
           <a:p>
             <a:fld id="{5BCAD085-E8A6-8845-BD4E-CB4CCA059FC4}" type="datetimeFigureOut">
               <a:rPr lang="en-US" smtClean="0"/>
-              <a:t>1/27/13</a:t>
+              <a:t>7/22/2026</a:t>
             </a:fld>
             <a:endParaRPr lang="en-US"/>
           </a:p>
@@ -2467,10 +2199,9 @@
           </a:lstStyle>
           <a:p>
             <a:r>
-              <a:rPr lang="en-US" smtClean="0"/>
+              <a:rPr lang="en-US"/>
               <a:t>Click to edit Master title style</a:t>
             </a:r>
-            <a:endParaRPr lang="en-US"/>
           </a:p>
         </p:txBody>
       </p:sp>
@@ -2587,7 +2318,7 @@
           <a:p>
             <a:pPr lvl="0"/>
             <a:r>
-              <a:rPr lang="en-US" smtClean="0"/>
+              <a:rPr lang="en-US"/>
               <a:t>Click to edit Master text styles</a:t>
             </a:r>
           </a:p>
@@ -2610,7 +2341,7 @@
           <a:p>
             <a:fld id="{5BCAD085-E8A6-8845-BD4E-CB4CCA059FC4}" type="datetimeFigureOut">
               <a:rPr lang="en-US" smtClean="0"/>
-              <a:t>1/27/13</a:t>
+              <a:t>7/22/2026</a:t>
             </a:fld>
             <a:endParaRPr lang="en-US"/>
           </a:p>
@@ -2704,10 +2435,9 @@
           <a:lstStyle/>
           <a:p>
             <a:r>
-              <a:rPr lang="en-US" smtClean="0"/>
+              <a:rPr lang="en-US"/>
               <a:t>Click to edit Master title style</a:t>
             </a:r>
-            <a:endParaRPr lang="en-US"/>
           </a:p>
         </p:txBody>
       </p:sp>
@@ -2761,38 +2491,37 @@
           <a:p>
             <a:pPr lvl="0"/>
             <a:r>
-              <a:rPr lang="en-US" smtClean="0"/>
+              <a:rPr lang="en-US"/>
               <a:t>Click to edit Master text styles</a:t>
             </a:r>
           </a:p>
           <a:p>
             <a:pPr lvl="1"/>
             <a:r>
-              <a:rPr lang="en-US" smtClean="0"/>
+              <a:rPr lang="en-US"/>
               <a:t>Second level</a:t>
             </a:r>
           </a:p>
           <a:p>
             <a:pPr lvl="2"/>
             <a:r>
-              <a:rPr lang="en-US" smtClean="0"/>
+              <a:rPr lang="en-US"/>
               <a:t>Third level</a:t>
             </a:r>
           </a:p>
           <a:p>
             <a:pPr lvl="3"/>
             <a:r>
-              <a:rPr lang="en-US" smtClean="0"/>
+              <a:rPr lang="en-US"/>
               <a:t>Fourth level</a:t>
             </a:r>
           </a:p>
           <a:p>
             <a:pPr lvl="4"/>
             <a:r>
-              <a:rPr lang="en-US" smtClean="0"/>
+              <a:rPr lang="en-US"/>
               <a:t>Fifth level</a:t>
             </a:r>
-            <a:endParaRPr lang="en-US"/>
           </a:p>
         </p:txBody>
       </p:sp>
@@ -2846,38 +2575,37 @@
           <a:p>
             <a:pPr lvl="0"/>
             <a:r>
-              <a:rPr lang="en-US" smtClean="0"/>
+              <a:rPr lang="en-US"/>
               <a:t>Click to edit Master text styles</a:t>
             </a:r>
           </a:p>
           <a:p>
             <a:pPr lvl="1"/>
             <a:r>
-              <a:rPr lang="en-US" smtClean="0"/>
+              <a:rPr lang="en-US"/>
               <a:t>Second level</a:t>
             </a:r>
           </a:p>
           <a:p>
             <a:pPr lvl="2"/>
             <a:r>
-              <a:rPr lang="en-US" smtClean="0"/>
+              <a:rPr lang="en-US"/>
               <a:t>Third level</a:t>
             </a:r>
           </a:p>
           <a:p>
             <a:pPr lvl="3"/>
             <a:r>
-              <a:rPr lang="en-US" smtClean="0"/>
+              <a:rPr lang="en-US"/>
               <a:t>Fourth level</a:t>
             </a:r>
           </a:p>
           <a:p>
             <a:pPr lvl="4"/>
             <a:r>
-              <a:rPr lang="en-US" smtClean="0"/>
+              <a:rPr lang="en-US"/>
               <a:t>Fifth level</a:t>
             </a:r>
-            <a:endParaRPr lang="en-US"/>
           </a:p>
         </p:txBody>
       </p:sp>
@@ -2898,7 +2626,7 @@
           <a:p>
             <a:fld id="{5BCAD085-E8A6-8845-BD4E-CB4CCA059FC4}" type="datetimeFigureOut">
               <a:rPr lang="en-US" smtClean="0"/>
-              <a:t>1/27/13</a:t>
+              <a:t>7/22/2026</a:t>
             </a:fld>
             <a:endParaRPr lang="en-US"/>
           </a:p>
@@ -2996,10 +2724,9 @@
           </a:lstStyle>
           <a:p>
             <a:r>
-              <a:rPr lang="en-US" smtClean="0"/>
+              <a:rPr lang="en-US"/>
               <a:t>Click to edit Master title style</a:t>
             </a:r>
-            <a:endParaRPr lang="en-US"/>
           </a:p>
         </p:txBody>
       </p:sp>
@@ -3062,7 +2789,7 @@
           <a:p>
             <a:pPr lvl="0"/>
             <a:r>
-              <a:rPr lang="en-US" smtClean="0"/>
+              <a:rPr lang="en-US"/>
               <a:t>Click to edit Master text styles</a:t>
             </a:r>
           </a:p>
@@ -3118,38 +2845,37 @@
           <a:p>
             <a:pPr lvl="0"/>
             <a:r>
-              <a:rPr lang="en-US" smtClean="0"/>
+              <a:rPr lang="en-US"/>
               <a:t>Click to edit Master text styles</a:t>
             </a:r>
           </a:p>
           <a:p>
             <a:pPr lvl="1"/>
             <a:r>
-              <a:rPr lang="en-US" smtClean="0"/>
+              <a:rPr lang="en-US"/>
               <a:t>Second level</a:t>
             </a:r>
           </a:p>
           <a:p>
             <a:pPr lvl="2"/>
             <a:r>
-              <a:rPr lang="en-US" smtClean="0"/>
+              <a:rPr lang="en-US"/>
               <a:t>Third level</a:t>
             </a:r>
           </a:p>
           <a:p>
             <a:pPr lvl="3"/>
             <a:r>
-              <a:rPr lang="en-US" smtClean="0"/>
+              <a:rPr lang="en-US"/>
               <a:t>Fourth level</a:t>
             </a:r>
           </a:p>
           <a:p>
             <a:pPr lvl="4"/>
             <a:r>
-              <a:rPr lang="en-US" smtClean="0"/>
+              <a:rPr lang="en-US"/>
               <a:t>Fifth level</a:t>
             </a:r>
-            <a:endParaRPr lang="en-US"/>
           </a:p>
         </p:txBody>
       </p:sp>
@@ -3212,7 +2938,7 @@
           <a:p>
             <a:pPr lvl="0"/>
             <a:r>
-              <a:rPr lang="en-US" smtClean="0"/>
+              <a:rPr lang="en-US"/>
               <a:t>Click to edit Master text styles</a:t>
             </a:r>
           </a:p>
@@ -3268,38 +2994,37 @@
           <a:p>
             <a:pPr lvl="0"/>
             <a:r>
-              <a:rPr lang="en-US" smtClean="0"/>
+              <a:rPr lang="en-US"/>
               <a:t>Click to edit Master text styles</a:t>
             </a:r>
           </a:p>
           <a:p>
             <a:pPr lvl="1"/>
             <a:r>
-              <a:rPr lang="en-US" smtClean="0"/>
+              <a:rPr lang="en-US"/>
               <a:t>Second level</a:t>
             </a:r>
           </a:p>
           <a:p>
             <a:pPr lvl="2"/>
             <a:r>
-              <a:rPr lang="en-US" smtClean="0"/>
+              <a:rPr lang="en-US"/>
               <a:t>Third level</a:t>
             </a:r>
           </a:p>
           <a:p>
             <a:pPr lvl="3"/>
             <a:r>
-              <a:rPr lang="en-US" smtClean="0"/>
+              <a:rPr lang="en-US"/>
               <a:t>Fourth level</a:t>
             </a:r>
           </a:p>
           <a:p>
             <a:pPr lvl="4"/>
             <a:r>
-              <a:rPr lang="en-US" smtClean="0"/>
+              <a:rPr lang="en-US"/>
               <a:t>Fifth level</a:t>
             </a:r>
-            <a:endParaRPr lang="en-US"/>
           </a:p>
         </p:txBody>
       </p:sp>
@@ -3320,7 +3045,7 @@
           <a:p>
             <a:fld id="{5BCAD085-E8A6-8845-BD4E-CB4CCA059FC4}" type="datetimeFigureOut">
               <a:rPr lang="en-US" smtClean="0"/>
-              <a:t>1/27/13</a:t>
+              <a:t>7/22/2026</a:t>
             </a:fld>
             <a:endParaRPr lang="en-US"/>
           </a:p>
@@ -3414,10 +3139,9 @@
           <a:lstStyle/>
           <a:p>
             <a:r>
-              <a:rPr lang="en-US" smtClean="0"/>
+              <a:rPr lang="en-US"/>
               <a:t>Click to edit Master title style</a:t>
             </a:r>
-            <a:endParaRPr lang="en-US"/>
           </a:p>
         </p:txBody>
       </p:sp>
@@ -3438,7 +3162,7 @@
           <a:p>
             <a:fld id="{5BCAD085-E8A6-8845-BD4E-CB4CCA059FC4}" type="datetimeFigureOut">
               <a:rPr lang="en-US" smtClean="0"/>
-              <a:t>1/27/13</a:t>
+              <a:t>7/22/2026</a:t>
             </a:fld>
             <a:endParaRPr lang="en-US"/>
           </a:p>
@@ -3533,7 +3257,7 @@
           <a:p>
             <a:fld id="{5BCAD085-E8A6-8845-BD4E-CB4CCA059FC4}" type="datetimeFigureOut">
               <a:rPr lang="en-US" smtClean="0"/>
-              <a:t>1/27/13</a:t>
+              <a:t>7/22/2026</a:t>
             </a:fld>
             <a:endParaRPr lang="en-US"/>
           </a:p>
@@ -3636,10 +3360,9 @@
           </a:lstStyle>
           <a:p>
             <a:r>
-              <a:rPr lang="en-US" smtClean="0"/>
+              <a:rPr lang="en-US"/>
               <a:t>Click to edit Master title style</a:t>
             </a:r>
-            <a:endParaRPr lang="en-US"/>
           </a:p>
         </p:txBody>
       </p:sp>
@@ -3693,38 +3416,37 @@
           <a:p>
             <a:pPr lvl="0"/>
             <a:r>
-              <a:rPr lang="en-US" smtClean="0"/>
+              <a:rPr lang="en-US"/>
               <a:t>Click to edit Master text styles</a:t>
             </a:r>
           </a:p>
           <a:p>
             <a:pPr lvl="1"/>
             <a:r>
-              <a:rPr lang="en-US" smtClean="0"/>
+              <a:rPr lang="en-US"/>
               <a:t>Second level</a:t>
             </a:r>
           </a:p>
           <a:p>
             <a:pPr lvl="2"/>
             <a:r>
-              <a:rPr lang="en-US" smtClean="0"/>
+              <a:rPr lang="en-US"/>
               <a:t>Third level</a:t>
             </a:r>
           </a:p>
           <a:p>
             <a:pPr lvl="3"/>
             <a:r>
-              <a:rPr lang="en-US" smtClean="0"/>
+              <a:rPr lang="en-US"/>
               <a:t>Fourth level</a:t>
             </a:r>
           </a:p>
           <a:p>
             <a:pPr lvl="4"/>
             <a:r>
-              <a:rPr lang="en-US" smtClean="0"/>
+              <a:rPr lang="en-US"/>
               <a:t>Fifth level</a:t>
             </a:r>
-            <a:endParaRPr lang="en-US"/>
           </a:p>
         </p:txBody>
       </p:sp>
@@ -3787,7 +3509,7 @@
           <a:p>
             <a:pPr lvl="0"/>
             <a:r>
-              <a:rPr lang="en-US" smtClean="0"/>
+              <a:rPr lang="en-US"/>
               <a:t>Click to edit Master text styles</a:t>
             </a:r>
           </a:p>
@@ -3810,7 +3532,7 @@
           <a:p>
             <a:fld id="{5BCAD085-E8A6-8845-BD4E-CB4CCA059FC4}" type="datetimeFigureOut">
               <a:rPr lang="en-US" smtClean="0"/>
-              <a:t>1/27/13</a:t>
+              <a:t>7/22/2026</a:t>
             </a:fld>
             <a:endParaRPr lang="en-US"/>
           </a:p>
@@ -3913,10 +3635,9 @@
           </a:lstStyle>
           <a:p>
             <a:r>
-              <a:rPr lang="en-US" smtClean="0"/>
+              <a:rPr lang="en-US"/>
               <a:t>Click to edit Master title style</a:t>
             </a:r>
-            <a:endParaRPr lang="en-US"/>
           </a:p>
         </p:txBody>
       </p:sp>
@@ -4040,7 +3761,7 @@
           <a:p>
             <a:pPr lvl="0"/>
             <a:r>
-              <a:rPr lang="en-US" smtClean="0"/>
+              <a:rPr lang="en-US"/>
               <a:t>Click to edit Master text styles</a:t>
             </a:r>
           </a:p>
@@ -4063,7 +3784,7 @@
           <a:p>
             <a:fld id="{5BCAD085-E8A6-8845-BD4E-CB4CCA059FC4}" type="datetimeFigureOut">
               <a:rPr lang="en-US" smtClean="0"/>
-              <a:t>1/27/13</a:t>
+              <a:t>7/22/2026</a:t>
             </a:fld>
             <a:endParaRPr lang="en-US"/>
           </a:p>
@@ -4172,10 +3893,9 @@
           <a:lstStyle/>
           <a:p>
             <a:r>
-              <a:rPr lang="en-US" smtClean="0"/>
+              <a:rPr lang="en-US"/>
               <a:t>Click to edit Master title style</a:t>
             </a:r>
-            <a:endParaRPr lang="en-US"/>
           </a:p>
         </p:txBody>
       </p:sp>
@@ -4206,38 +3926,37 @@
           <a:p>
             <a:pPr lvl="0"/>
             <a:r>
-              <a:rPr lang="en-US" smtClean="0"/>
+              <a:rPr lang="en-US"/>
               <a:t>Click to edit Master text styles</a:t>
             </a:r>
           </a:p>
           <a:p>
             <a:pPr lvl="1"/>
             <a:r>
-              <a:rPr lang="en-US" smtClean="0"/>
+              <a:rPr lang="en-US"/>
               <a:t>Second level</a:t>
             </a:r>
           </a:p>
           <a:p>
             <a:pPr lvl="2"/>
             <a:r>
-              <a:rPr lang="en-US" smtClean="0"/>
+              <a:rPr lang="en-US"/>
               <a:t>Third level</a:t>
             </a:r>
           </a:p>
           <a:p>
             <a:pPr lvl="3"/>
             <a:r>
-              <a:rPr lang="en-US" smtClean="0"/>
+              <a:rPr lang="en-US"/>
               <a:t>Fourth level</a:t>
             </a:r>
           </a:p>
           <a:p>
             <a:pPr lvl="4"/>
             <a:r>
-              <a:rPr lang="en-US" smtClean="0"/>
+              <a:rPr lang="en-US"/>
               <a:t>Fifth level</a:t>
             </a:r>
-            <a:endParaRPr lang="en-US"/>
           </a:p>
         </p:txBody>
       </p:sp>
@@ -4276,7 +3995,7 @@
           <a:p>
             <a:fld id="{5BCAD085-E8A6-8845-BD4E-CB4CCA059FC4}" type="datetimeFigureOut">
               <a:rPr lang="en-US" smtClean="0"/>
-              <a:t>1/27/13</a:t>
+              <a:t>7/22/2026</a:t>
             </a:fld>
             <a:endParaRPr lang="en-US"/>
           </a:p>
@@ -4635,7 +4354,7 @@
 </file>
 
 <file path=ppt/slides/slide1.xml><?xml version="1.0" encoding="utf-8"?>
-<p:sld xmlns:a="http://schemas.openxmlformats.org/drawingml/2006/main" xmlns:p="http://schemas.openxmlformats.org/presentationml/2006/main" xmlns:r="http://schemas.openxmlformats.org/officeDocument/2006/relationships">
+<p:sld xmlns:a="http://schemas.openxmlformats.org/drawingml/2006/main" xmlns:r="http://schemas.openxmlformats.org/officeDocument/2006/relationships" xmlns:p="http://schemas.openxmlformats.org/presentationml/2006/main">
   <p:cSld>
     <p:spTree>
       <p:nvGrpSpPr>
@@ -4643,7 +4362,14 @@
         <p:cNvGrpSpPr/>
         <p:nvPr/>
       </p:nvGrpSpPr>
-      <p:grpSpPr/>
+      <p:grpSpPr>
+        <a:xfrm>
+          <a:off x="0" y="0"/>
+          <a:ext cx="0" cy="0"/>
+          <a:chOff x="0" y="0"/>
+          <a:chExt cx="0" cy="0"/>
+        </a:xfrm>
+      </p:grpSpPr>
       <p:sp>
         <p:nvSpPr>
           <p:cNvPr id="2" name="Rectangle 1"/>
@@ -4684,6 +4410,7 @@
           <a:lstStyle/>
           <a:p>
             <a:pPr algn="ctr"/>
+            <a:endParaRPr/>
           </a:p>
         </p:txBody>
       </p:sp>
@@ -4696,7 +4423,7 @@
         <p:spPr>
           <a:xfrm>
             <a:off x="822960" y="2103120"/>
-            <a:ext cx="10515600" cy="2926080"/>
+            <a:ext cx="10515600" cy="1579920"/>
           </a:xfrm>
           <a:prstGeom prst="rect">
             <a:avLst/>
@@ -4710,7 +4437,7 @@
           <a:lstStyle/>
           <a:p>
             <a:r>
-              <a:rPr sz="4000" b="1" i="0">
+              <a:rPr sz="4000" b="1" i="0" dirty="0">
                 <a:solidFill>
                   <a:srgbClr val="FFFFFF"/>
                 </a:solidFill>
@@ -4721,7 +4448,7 @@
           </a:p>
           <a:p>
             <a:r>
-              <a:rPr sz="2000" b="0" i="1">
+              <a:rPr sz="2000" b="0" i="1" dirty="0">
                 <a:solidFill>
                   <a:srgbClr val="9AD1C9"/>
                 </a:solidFill>
@@ -4737,13 +4464,31 @@
               </a:spcBef>
             </a:pPr>
             <a:r>
-              <a:rPr sz="1500" b="0" i="0">
+              <a:rPr sz="1500" b="0" i="0" dirty="0">
                 <a:solidFill>
                   <a:srgbClr val="C7D0D8"/>
                 </a:solidFill>
                 <a:latin typeface="Calibri"/>
               </a:rPr>
-              <a:t>Data Science &amp; Cyber  ·  the URL / link detector (Student B)</a:t>
+              <a:t>Data Science &amp; Cyber  ·  the URL / link detector (</a:t>
+            </a:r>
+            <a:r>
+              <a:rPr lang="en-US" sz="1500" b="0" i="0" dirty="0">
+                <a:solidFill>
+                  <a:srgbClr val="C7D0D8"/>
+                </a:solidFill>
+                <a:latin typeface="Calibri"/>
+              </a:rPr>
+              <a:t>Gilad Segal 216214353</a:t>
+            </a:r>
+            <a:r>
+              <a:rPr sz="1500" b="0" i="0" dirty="0">
+                <a:solidFill>
+                  <a:srgbClr val="C7D0D8"/>
+                </a:solidFill>
+                <a:latin typeface="Calibri"/>
+              </a:rPr>
+              <a:t>)</a:t>
             </a:r>
           </a:p>
         </p:txBody>
@@ -4757,7 +4502,7 @@
 </file>
 
 <file path=ppt/slides/slide10.xml><?xml version="1.0" encoding="utf-8"?>
-<p:sld xmlns:a="http://schemas.openxmlformats.org/drawingml/2006/main" xmlns:p="http://schemas.openxmlformats.org/presentationml/2006/main" xmlns:r="http://schemas.openxmlformats.org/officeDocument/2006/relationships">
+<p:sld xmlns:a="http://schemas.openxmlformats.org/drawingml/2006/main" xmlns:r="http://schemas.openxmlformats.org/officeDocument/2006/relationships" xmlns:p="http://schemas.openxmlformats.org/presentationml/2006/main">
   <p:cSld>
     <p:spTree>
       <p:nvGrpSpPr>
@@ -4765,7 +4510,14 @@
         <p:cNvGrpSpPr/>
         <p:nvPr/>
       </p:nvGrpSpPr>
-      <p:grpSpPr/>
+      <p:grpSpPr>
+        <a:xfrm>
+          <a:off x="0" y="0"/>
+          <a:ext cx="0" cy="0"/>
+          <a:chOff x="0" y="0"/>
+          <a:chExt cx="0" cy="0"/>
+        </a:xfrm>
+      </p:grpSpPr>
       <p:sp>
         <p:nvSpPr>
           <p:cNvPr id="2" name="Rectangle 1"/>
@@ -4806,6 +4558,7 @@
           <a:lstStyle/>
           <a:p>
             <a:pPr algn="ctr"/>
+            <a:endParaRPr/>
           </a:p>
         </p:txBody>
       </p:sp>
@@ -4974,7 +4727,7 @@
           <p:nvPr/>
         </p:nvPicPr>
         <p:blipFill>
-          <a:blip r:embed="rId2"/>
+          <a:blip r:embed="rId3"/>
           <a:stretch>
             <a:fillRect/>
           </a:stretch>
@@ -4998,7 +4751,7 @@
 </file>
 
 <file path=ppt/slides/slide11.xml><?xml version="1.0" encoding="utf-8"?>
-<p:sld xmlns:a="http://schemas.openxmlformats.org/drawingml/2006/main" xmlns:p="http://schemas.openxmlformats.org/presentationml/2006/main" xmlns:r="http://schemas.openxmlformats.org/officeDocument/2006/relationships">
+<p:sld xmlns:a="http://schemas.openxmlformats.org/drawingml/2006/main" xmlns:r="http://schemas.openxmlformats.org/officeDocument/2006/relationships" xmlns:p="http://schemas.openxmlformats.org/presentationml/2006/main">
   <p:cSld>
     <p:spTree>
       <p:nvGrpSpPr>
@@ -5006,7 +4759,14 @@
         <p:cNvGrpSpPr/>
         <p:nvPr/>
       </p:nvGrpSpPr>
-      <p:grpSpPr/>
+      <p:grpSpPr>
+        <a:xfrm>
+          <a:off x="0" y="0"/>
+          <a:ext cx="0" cy="0"/>
+          <a:chOff x="0" y="0"/>
+          <a:chExt cx="0" cy="0"/>
+        </a:xfrm>
+      </p:grpSpPr>
       <p:sp>
         <p:nvSpPr>
           <p:cNvPr id="2" name="Rectangle 1"/>
@@ -5047,6 +4807,7 @@
           <a:lstStyle/>
           <a:p>
             <a:pPr algn="ctr"/>
+            <a:endParaRPr/>
           </a:p>
         </p:txBody>
       </p:sp>
@@ -5147,13 +4908,31 @@
               </a:spcAft>
             </a:pPr>
             <a:r>
-              <a:rPr sz="1750" b="0" i="0">
-                <a:solidFill>
-                  <a:srgbClr val="1D2B3A"/>
-                </a:solidFill>
-                <a:latin typeface="Calibri"/>
-              </a:rPr>
-              <a:t>•  Homoglyph / typosquat (char tricks) → recall stays ~0.99</a:t>
+              <a:rPr sz="1750" b="0" i="0" dirty="0">
+                <a:solidFill>
+                  <a:srgbClr val="1D2B3A"/>
+                </a:solidFill>
+                <a:latin typeface="Calibri"/>
+              </a:rPr>
+              <a:t>•  Homoglyph / </a:t>
+            </a:r>
+            <a:r>
+              <a:rPr sz="1750" b="0" i="0" dirty="0" err="1">
+                <a:solidFill>
+                  <a:srgbClr val="1D2B3A"/>
+                </a:solidFill>
+                <a:latin typeface="Calibri"/>
+              </a:rPr>
+              <a:t>typosquat</a:t>
+            </a:r>
+            <a:r>
+              <a:rPr sz="1750" b="0" i="0" dirty="0">
+                <a:solidFill>
+                  <a:srgbClr val="1D2B3A"/>
+                </a:solidFill>
+                <a:latin typeface="Calibri"/>
+              </a:rPr>
+              <a:t> (char tricks) → recall stays ~0.99</a:t>
             </a:r>
           </a:p>
           <a:p>
@@ -5163,7 +4942,7 @@
               </a:spcAft>
             </a:pPr>
             <a:r>
-              <a:rPr sz="1600" b="0" i="0">
+              <a:rPr sz="1600" b="0" i="0" dirty="0">
                 <a:solidFill>
                   <a:srgbClr val="5B6472"/>
                 </a:solidFill>
@@ -5179,7 +4958,7 @@
               </a:spcAft>
             </a:pPr>
             <a:r>
-              <a:rPr sz="1750" b="0" i="0">
+              <a:rPr sz="1750" b="0" i="0" dirty="0">
                 <a:solidFill>
                   <a:srgbClr val="1D2B3A"/>
                 </a:solidFill>
@@ -5195,7 +4974,7 @@
               </a:spcAft>
             </a:pPr>
             <a:r>
-              <a:rPr sz="1750" b="0" i="0">
+              <a:rPr sz="1750" b="0" i="0" dirty="0">
                 <a:solidFill>
                   <a:srgbClr val="1D2B3A"/>
                 </a:solidFill>
@@ -5211,13 +4990,31 @@
               </a:spcAft>
             </a:pPr>
             <a:r>
-              <a:rPr sz="1750" b="0" i="0">
-                <a:solidFill>
-                  <a:srgbClr val="1D2B3A"/>
-                </a:solidFill>
-                <a:latin typeface="Calibri"/>
-              </a:rPr>
-              <a:t>•  Normalisation defeats homoglyphs; NOTHING URL-only defeats mimicry</a:t>
+              <a:rPr sz="1750" b="0" i="0" dirty="0">
+                <a:solidFill>
+                  <a:srgbClr val="1D2B3A"/>
+                </a:solidFill>
+                <a:latin typeface="Calibri"/>
+              </a:rPr>
+              <a:t>•  </a:t>
+            </a:r>
+            <a:r>
+              <a:rPr sz="1750" b="0" i="0" dirty="0" err="1">
+                <a:solidFill>
+                  <a:srgbClr val="1D2B3A"/>
+                </a:solidFill>
+                <a:latin typeface="Calibri"/>
+              </a:rPr>
+              <a:t>Normalisation</a:t>
+            </a:r>
+            <a:r>
+              <a:rPr sz="1750" b="0" i="0" dirty="0">
+                <a:solidFill>
+                  <a:srgbClr val="1D2B3A"/>
+                </a:solidFill>
+                <a:latin typeface="Calibri"/>
+              </a:rPr>
+              <a:t> defeats homoglyphs; NOTHING URL-only defeats mimicry</a:t>
             </a:r>
           </a:p>
         </p:txBody>
@@ -5231,7 +5028,7 @@
           <p:nvPr/>
         </p:nvPicPr>
         <p:blipFill>
-          <a:blip r:embed="rId2"/>
+          <a:blip r:embed="rId3"/>
           <a:stretch>
             <a:fillRect/>
           </a:stretch>
@@ -5255,7 +5052,7 @@
 </file>
 
 <file path=ppt/slides/slide12.xml><?xml version="1.0" encoding="utf-8"?>
-<p:sld xmlns:a="http://schemas.openxmlformats.org/drawingml/2006/main" xmlns:p="http://schemas.openxmlformats.org/presentationml/2006/main" xmlns:r="http://schemas.openxmlformats.org/officeDocument/2006/relationships">
+<p:sld xmlns:a="http://schemas.openxmlformats.org/drawingml/2006/main" xmlns:r="http://schemas.openxmlformats.org/officeDocument/2006/relationships" xmlns:p="http://schemas.openxmlformats.org/presentationml/2006/main">
   <p:cSld>
     <p:spTree>
       <p:nvGrpSpPr>
@@ -5263,7 +5060,14 @@
         <p:cNvGrpSpPr/>
         <p:nvPr/>
       </p:nvGrpSpPr>
-      <p:grpSpPr/>
+      <p:grpSpPr>
+        <a:xfrm>
+          <a:off x="0" y="0"/>
+          <a:ext cx="0" cy="0"/>
+          <a:chOff x="0" y="0"/>
+          <a:chExt cx="0" cy="0"/>
+        </a:xfrm>
+      </p:grpSpPr>
       <p:sp>
         <p:nvSpPr>
           <p:cNvPr id="2" name="Rectangle 1"/>
@@ -5304,6 +5108,7 @@
           <a:lstStyle/>
           <a:p>
             <a:pPr algn="ctr"/>
+            <a:endParaRPr/>
           </a:p>
         </p:txBody>
       </p:sp>
@@ -5336,18 +5141,7 @@
                 </a:solidFill>
                 <a:latin typeface="Calibri"/>
               </a:rPr>
-              <a:t>Cross-check — can we catch it with NO labels?</a:t>
-            </a:r>
-          </a:p>
-          <a:p>
-            <a:r>
-              <a:rPr sz="1400" b="0" i="1">
-                <a:solidFill>
-                  <a:srgbClr val="2A9D8F"/>
-                </a:solidFill>
-                <a:latin typeface="Calibri"/>
-              </a:rPr>
-              <a:t>anomaly detection</a:t>
+              <a:t>Discovery 4 — it does NOT generalise</a:t>
             </a:r>
           </a:p>
         </p:txBody>
@@ -5360,8 +5154,8 @@
         </p:nvSpPr>
         <p:spPr>
           <a:xfrm>
-            <a:off x="640080" y="1783080"/>
-            <a:ext cx="10972800" cy="4754880"/>
+            <a:off x="9784080" y="384048"/>
+            <a:ext cx="2286000" cy="457200"/>
           </a:xfrm>
           <a:prstGeom prst="rect">
             <a:avLst/>
@@ -5374,6 +5168,41 @@
           </a:bodyPr>
           <a:lstStyle/>
           <a:p>
+            <a:pPr algn="ctr"/>
+            <a:r>
+              <a:rPr sz="1300" b="1" i="0">
+                <a:solidFill>
+                  <a:srgbClr val="E76F51"/>
+                </a:solidFill>
+                <a:latin typeface="Calibri"/>
+              </a:rPr>
+              <a:t>DISCOVERY 4</a:t>
+            </a:r>
+          </a:p>
+        </p:txBody>
+      </p:sp>
+      <p:sp>
+        <p:nvSpPr>
+          <p:cNvPr id="5" name="TextBox 4"/>
+          <p:cNvSpPr txBox="1"/>
+          <p:nvPr/>
+        </p:nvSpPr>
+        <p:spPr>
+          <a:xfrm>
+            <a:off x="640080" y="1783080"/>
+            <a:ext cx="5943600" cy="4754880"/>
+          </a:xfrm>
+          <a:prstGeom prst="rect">
+            <a:avLst/>
+          </a:prstGeom>
+          <a:noFill/>
+        </p:spPr>
+        <p:txBody>
+          <a:bodyPr wrap="square">
+            <a:spAutoFit/>
+          </a:bodyPr>
+          <a:lstStyle/>
+          <a:p>
             <a:pPr>
               <a:spcAft>
                 <a:spcPts val="900"/>
@@ -5386,7 +5215,7 @@
                 </a:solidFill>
                 <a:latin typeface="Calibri"/>
               </a:rPr>
-              <a:t>•  Train only on LEGITIMATE URLs; flag anything unusual as phishing</a:t>
+              <a:t>•  Train PhiUSIIL, test an INDEPENDENT 651k dataset: F1 0.997 → 0.666</a:t>
             </a:r>
           </a:p>
           <a:p>
@@ -5402,7 +5231,39 @@
                 </a:solidFill>
                 <a:latin typeface="Calibri"/>
               </a:rPr>
-              <a:t>•  Isolation Forest → AUC 0.828   (isolates odd points with random splits)</a:t>
+              <a:t>•  AUC 0.999 → 0.434  — below 0.5 = ‘confidently backwards’</a:t>
+            </a:r>
+          </a:p>
+          <a:p>
+            <a:pPr lvl="1">
+              <a:spcAft>
+                <a:spcPts val="900"/>
+              </a:spcAft>
+            </a:pPr>
+            <a:r>
+              <a:rPr sz="1600" b="0" i="0">
+                <a:solidFill>
+                  <a:srgbClr val="5B6472"/>
+                </a:solidFill>
+                <a:latin typeface="Calibri"/>
+              </a:rPr>
+              <a:t>–  it doesn’t just lose skill; its ranking INVERTS (legit scored above phishing)</a:t>
+            </a:r>
+          </a:p>
+          <a:p>
+            <a:pPr lvl="1">
+              <a:spcAft>
+                <a:spcPts val="900"/>
+              </a:spcAft>
+            </a:pPr>
+            <a:r>
+              <a:rPr sz="1600" b="0" i="0">
+                <a:solidFill>
+                  <a:srgbClr val="5B6472"/>
+                </a:solidFill>
+                <a:latin typeface="Calibri"/>
+              </a:rPr>
+              <a:t>–  both classes collapse to ~1.0 → the model can’t tell them apart at all</a:t>
             </a:r>
           </a:p>
           <a:p>
@@ -5418,27 +5279,35 @@
                 </a:solidFill>
                 <a:latin typeface="Calibri"/>
               </a:rPr>
-              <a:t>•  Local Outlier Factor → AUC 0.944   (compares a point’s density to its neighbours’)</a:t>
-            </a:r>
-          </a:p>
-          <a:p>
-            <a:pPr>
-              <a:spcAft>
-                <a:spcPts val="900"/>
-              </a:spcAft>
-            </a:pPr>
-            <a:r>
-              <a:rPr sz="1750" b="0" i="0">
-                <a:solidFill>
-                  <a:srgbClr val="1D2B3A"/>
-                </a:solidFill>
-                <a:latin typeface="Calibri"/>
-              </a:rPr>
-              <a:t>•  Respectable with zero phishing labels — but below supervised, and riding the same artifacts</a:t>
-            </a:r>
-          </a:p>
-        </p:txBody>
-      </p:sp>
+              <a:t>•  BUT live OpenPhish phishing: recall 1.0 (today’s phishing is still messy → caught)</a:t>
+            </a:r>
+          </a:p>
+        </p:txBody>
+      </p:sp>
+      <p:pic>
+        <p:nvPicPr>
+          <p:cNvPr id="6" name="Picture 5" descr="F4_cross_dataset.png"/>
+          <p:cNvPicPr>
+            <a:picLocks noChangeAspect="1"/>
+          </p:cNvPicPr>
+          <p:nvPr/>
+        </p:nvPicPr>
+        <p:blipFill>
+          <a:blip r:embed="rId3"/>
+          <a:stretch>
+            <a:fillRect/>
+          </a:stretch>
+        </p:blipFill>
+        <p:spPr>
+          <a:xfrm>
+            <a:off x="6629400" y="2148840"/>
+            <a:ext cx="5349240" cy="3066898"/>
+          </a:xfrm>
+          <a:prstGeom prst="rect">
+            <a:avLst/>
+          </a:prstGeom>
+        </p:spPr>
+      </p:pic>
     </p:spTree>
   </p:cSld>
   <p:clrMapOvr>
@@ -5448,7 +5317,7 @@
 </file>
 
 <file path=ppt/slides/slide13.xml><?xml version="1.0" encoding="utf-8"?>
-<p:sld xmlns:a="http://schemas.openxmlformats.org/drawingml/2006/main" xmlns:p="http://schemas.openxmlformats.org/presentationml/2006/main" xmlns:r="http://schemas.openxmlformats.org/officeDocument/2006/relationships">
+<p:sld xmlns:a="http://schemas.openxmlformats.org/drawingml/2006/main" xmlns:r="http://schemas.openxmlformats.org/officeDocument/2006/relationships" xmlns:p="http://schemas.openxmlformats.org/presentationml/2006/main">
   <p:cSld>
     <p:spTree>
       <p:nvGrpSpPr>
@@ -5456,7 +5325,14 @@
         <p:cNvGrpSpPr/>
         <p:nvPr/>
       </p:nvGrpSpPr>
-      <p:grpSpPr/>
+      <p:grpSpPr>
+        <a:xfrm>
+          <a:off x="0" y="0"/>
+          <a:ext cx="0" cy="0"/>
+          <a:chOff x="0" y="0"/>
+          <a:chExt cx="0" cy="0"/>
+        </a:xfrm>
+      </p:grpSpPr>
       <p:sp>
         <p:nvSpPr>
           <p:cNvPr id="2" name="Rectangle 1"/>
@@ -5497,6 +5373,7 @@
           <a:lstStyle/>
           <a:p>
             <a:pPr algn="ctr"/>
+            <a:endParaRPr/>
           </a:p>
         </p:txBody>
       </p:sp>
@@ -5529,7 +5406,18 @@
                 </a:solidFill>
                 <a:latin typeface="Calibri"/>
               </a:rPr>
-              <a:t>Discovery 4 — it does NOT generalise</a:t>
+              <a:t>Why it inverts — distance metrics pinpoint it</a:t>
+            </a:r>
+          </a:p>
+          <a:p>
+            <a:r>
+              <a:rPr sz="1400" b="0" i="1">
+                <a:solidFill>
+                  <a:srgbClr val="2A9D8F"/>
+                </a:solidFill>
+                <a:latin typeface="Calibri"/>
+              </a:rPr>
+              <a:t>KS &amp; Wasserstein</a:t>
             </a:r>
           </a:p>
         </p:txBody>
@@ -5537,41 +5425,6 @@
       <p:sp>
         <p:nvSpPr>
           <p:cNvPr id="4" name="TextBox 3"/>
-          <p:cNvSpPr txBox="1"/>
-          <p:nvPr/>
-        </p:nvSpPr>
-        <p:spPr>
-          <a:xfrm>
-            <a:off x="9784080" y="384048"/>
-            <a:ext cx="2286000" cy="457200"/>
-          </a:xfrm>
-          <a:prstGeom prst="rect">
-            <a:avLst/>
-          </a:prstGeom>
-          <a:noFill/>
-        </p:spPr>
-        <p:txBody>
-          <a:bodyPr wrap="square">
-            <a:spAutoFit/>
-          </a:bodyPr>
-          <a:lstStyle/>
-          <a:p>
-            <a:pPr algn="ctr"/>
-            <a:r>
-              <a:rPr sz="1300" b="1" i="0">
-                <a:solidFill>
-                  <a:srgbClr val="E76F51"/>
-                </a:solidFill>
-                <a:latin typeface="Calibri"/>
-              </a:rPr>
-              <a:t>DISCOVERY 4</a:t>
-            </a:r>
-          </a:p>
-        </p:txBody>
-      </p:sp>
-      <p:sp>
-        <p:nvSpPr>
-          <p:cNvPr id="5" name="TextBox 4"/>
           <p:cNvSpPr txBox="1"/>
           <p:nvPr/>
         </p:nvSpPr>
@@ -5603,7 +5456,39 @@
                 </a:solidFill>
                 <a:latin typeface="Calibri"/>
               </a:rPr>
-              <a:t>•  Train PhiUSIIL, test an INDEPENDENT 651k dataset: F1 0.997 → 0.666</a:t>
+              <a:t>•  Measure how far each feature’s distribution SHIFTS between the two datasets</a:t>
+            </a:r>
+          </a:p>
+          <a:p>
+            <a:pPr lvl="1">
+              <a:spcAft>
+                <a:spcPts val="900"/>
+              </a:spcAft>
+            </a:pPr>
+            <a:r>
+              <a:rPr sz="1600" b="0" i="0">
+                <a:solidFill>
+                  <a:srgbClr val="5B6472"/>
+                </a:solidFill>
+                <a:latin typeface="Calibri"/>
+              </a:rPr>
+              <a:t>–  KS statistic = biggest gap between the two cumulative distributions</a:t>
+            </a:r>
+          </a:p>
+          <a:p>
+            <a:pPr lvl="1">
+              <a:spcAft>
+                <a:spcPts val="900"/>
+              </a:spcAft>
+            </a:pPr>
+            <a:r>
+              <a:rPr sz="1600" b="0" i="0">
+                <a:solidFill>
+                  <a:srgbClr val="5B6472"/>
+                </a:solidFill>
+                <a:latin typeface="Calibri"/>
+              </a:rPr>
+              <a:t>–  Wasserstein (earth-mover) = work to turn one distribution into the other</a:t>
             </a:r>
           </a:p>
           <a:p>
@@ -5619,7 +5504,7 @@
                 </a:solidFill>
                 <a:latin typeface="Calibri"/>
               </a:rPr>
-              <a:t>•  AUC 0.999 → 0.434  — below 0.5 = ‘confidently backwards’</a:t>
+              <a:t>•  Most-shifted features = is_https, path_len, n_subdomain</a:t>
             </a:r>
           </a:p>
           <a:p>
@@ -5635,61 +5520,29 @@
                 </a:solidFill>
                 <a:latin typeface="Calibri"/>
               </a:rPr>
-              <a:t>–  it doesn’t just lose skill; its ranking INVERTS (legit scored above phishing)</a:t>
-            </a:r>
-          </a:p>
-          <a:p>
-            <a:pPr lvl="1">
-              <a:spcAft>
-                <a:spcPts val="900"/>
-              </a:spcAft>
-            </a:pPr>
-            <a:r>
-              <a:rPr sz="1600" b="0" i="0">
-                <a:solidFill>
-                  <a:srgbClr val="5B6472"/>
-                </a:solidFill>
-                <a:latin typeface="Calibri"/>
-              </a:rPr>
-              <a:t>–  both classes collapse to ~1.0 → the model can’t tell them apart at all</a:t>
-            </a:r>
-          </a:p>
-          <a:p>
-            <a:pPr>
-              <a:spcAft>
-                <a:spcPts val="900"/>
-              </a:spcAft>
-            </a:pPr>
-            <a:r>
-              <a:rPr sz="1750" b="0" i="0">
-                <a:solidFill>
-                  <a:srgbClr val="1D2B3A"/>
-                </a:solidFill>
-                <a:latin typeface="Calibri"/>
-              </a:rPr>
-              <a:t>•  BUT live OpenPhish phishing: recall 1.0 (today’s phishing is still messy → caught)</a:t>
+              <a:t>–  …which are EXACTLY the top SHAP drivers → it built on the least transferable signals</a:t>
             </a:r>
           </a:p>
         </p:txBody>
       </p:sp>
       <p:pic>
         <p:nvPicPr>
-          <p:cNvPr id="6" name="Picture 5" descr="F4_cross_dataset.png"/>
+          <p:cNvPr id="5" name="Picture 4" descr="F7_domain_shift.png"/>
           <p:cNvPicPr>
             <a:picLocks noChangeAspect="1"/>
           </p:cNvPicPr>
           <p:nvPr/>
         </p:nvPicPr>
         <p:blipFill>
-          <a:blip r:embed="rId2"/>
+          <a:blip r:embed="rId3"/>
           <a:stretch>
             <a:fillRect/>
           </a:stretch>
         </p:blipFill>
         <p:spPr>
           <a:xfrm>
-            <a:off x="6629400" y="2148840"/>
-            <a:ext cx="5349240" cy="3066898"/>
+            <a:off x="6629400" y="2103120"/>
+            <a:ext cx="5349240" cy="3209544"/>
           </a:xfrm>
           <a:prstGeom prst="rect">
             <a:avLst/>
@@ -5705,7 +5558,7 @@
 </file>
 
 <file path=ppt/slides/slide14.xml><?xml version="1.0" encoding="utf-8"?>
-<p:sld xmlns:a="http://schemas.openxmlformats.org/drawingml/2006/main" xmlns:p="http://schemas.openxmlformats.org/presentationml/2006/main" xmlns:r="http://schemas.openxmlformats.org/officeDocument/2006/relationships">
+<p:sld xmlns:a="http://schemas.openxmlformats.org/drawingml/2006/main" xmlns:r="http://schemas.openxmlformats.org/officeDocument/2006/relationships" xmlns:p="http://schemas.openxmlformats.org/presentationml/2006/main">
   <p:cSld>
     <p:spTree>
       <p:nvGrpSpPr>
@@ -5713,7 +5566,14 @@
         <p:cNvGrpSpPr/>
         <p:nvPr/>
       </p:nvGrpSpPr>
-      <p:grpSpPr/>
+      <p:grpSpPr>
+        <a:xfrm>
+          <a:off x="0" y="0"/>
+          <a:ext cx="0" cy="0"/>
+          <a:chOff x="0" y="0"/>
+          <a:chExt cx="0" cy="0"/>
+        </a:xfrm>
+      </p:grpSpPr>
       <p:sp>
         <p:nvSpPr>
           <p:cNvPr id="2" name="Rectangle 1"/>
@@ -5754,6 +5614,7 @@
           <a:lstStyle/>
           <a:p>
             <a:pPr algn="ctr"/>
+            <a:endParaRPr/>
           </a:p>
         </p:txBody>
       </p:sp>
@@ -5786,18 +5647,7 @@
                 </a:solidFill>
                 <a:latin typeface="Calibri"/>
               </a:rPr>
-              <a:t>Why it inverts — distance metrics pinpoint it</a:t>
-            </a:r>
-          </a:p>
-          <a:p>
-            <a:r>
-              <a:rPr sz="1400" b="0" i="1">
-                <a:solidFill>
-                  <a:srgbClr val="2A9D8F"/>
-                </a:solidFill>
-                <a:latin typeface="Calibri"/>
-              </a:rPr>
-              <a:t>KS &amp; Wasserstein</a:t>
+              <a:t>Conclusion — a useful second opinion, not a solution</a:t>
             </a:r>
           </a:p>
         </p:txBody>
@@ -5811,7 +5661,7 @@
         <p:spPr>
           <a:xfrm>
             <a:off x="640080" y="1783080"/>
-            <a:ext cx="5943600" cy="4754880"/>
+            <a:ext cx="10972800" cy="1854354"/>
           </a:xfrm>
           <a:prstGeom prst="rect">
             <a:avLst/>
@@ -5830,13 +5680,31 @@
               </a:spcAft>
             </a:pPr>
             <a:r>
-              <a:rPr sz="1750" b="0" i="0">
-                <a:solidFill>
-                  <a:srgbClr val="1D2B3A"/>
-                </a:solidFill>
-                <a:latin typeface="Calibri"/>
-              </a:rPr>
-              <a:t>•  Measure how far each feature’s distribution SHIFTS between the two datasets</a:t>
+              <a:rPr sz="1750" b="0" i="0" dirty="0">
+                <a:solidFill>
+                  <a:srgbClr val="1D2B3A"/>
+                </a:solidFill>
+                <a:latin typeface="Calibri"/>
+              </a:rPr>
+              <a:t>•  URL structure alone is NOT a </a:t>
+            </a:r>
+            <a:r>
+              <a:rPr sz="1750" b="0" i="0" dirty="0" err="1">
+                <a:solidFill>
+                  <a:srgbClr val="1D2B3A"/>
+                </a:solidFill>
+                <a:latin typeface="Calibri"/>
+              </a:rPr>
+              <a:t>generalisable</a:t>
+            </a:r>
+            <a:r>
+              <a:rPr sz="1750" b="0" i="0" dirty="0">
+                <a:solidFill>
+                  <a:srgbClr val="1D2B3A"/>
+                </a:solidFill>
+                <a:latin typeface="Calibri"/>
+              </a:rPr>
+              <a:t> phishing signal:</a:t>
             </a:r>
           </a:p>
           <a:p>
@@ -5846,13 +5714,63 @@
               </a:spcAft>
             </a:pPr>
             <a:r>
-              <a:rPr sz="1600" b="0" i="0">
+              <a:rPr sz="1600" b="0" i="0" dirty="0">
                 <a:solidFill>
                   <a:srgbClr val="5B6472"/>
                 </a:solidFill>
                 <a:latin typeface="Calibri"/>
               </a:rPr>
-              <a:t>–  KS statistic = biggest gap between the two cumulative distributions</a:t>
+              <a:t>–  built on a dataset artifact (HTTPS + correlated structure) → trivially evaded, collapses OOD</a:t>
+            </a:r>
+          </a:p>
+          <a:p>
+            <a:pPr>
+              <a:spcAft>
+                <a:spcPts val="900"/>
+              </a:spcAft>
+            </a:pPr>
+            <a:r>
+              <a:rPr sz="1750" b="0" i="0" dirty="0">
+                <a:solidFill>
+                  <a:srgbClr val="1D2B3A"/>
+                </a:solidFill>
+                <a:latin typeface="Calibri"/>
+              </a:rPr>
+              <a:t>•  But it IS fast, private, interpretable, and robust to character obfuscation</a:t>
+            </a:r>
+          </a:p>
+          <a:p>
+            <a:pPr>
+              <a:spcAft>
+                <a:spcPts val="900"/>
+              </a:spcAft>
+            </a:pPr>
+            <a:r>
+              <a:rPr sz="1750" b="0" i="0" dirty="0">
+                <a:solidFill>
+                  <a:srgbClr val="1D2B3A"/>
+                </a:solidFill>
+                <a:latin typeface="Calibri"/>
+              </a:rPr>
+              <a:t>•  Right design = FUSION: this link channel + my partner’s content</a:t>
+            </a:r>
+            <a:r>
+              <a:rPr lang="en-US" sz="1750" b="0" i="0" dirty="0">
+                <a:solidFill>
+                  <a:srgbClr val="1D2B3A"/>
+                </a:solidFill>
+                <a:latin typeface="Calibri"/>
+              </a:rPr>
+              <a:t> </a:t>
+            </a:r>
+            <a:r>
+              <a:rPr lang="en-US" sz="1750" b="0" dirty="0">
+                <a:solidFill>
+                  <a:srgbClr val="1D2B3A"/>
+                </a:solidFill>
+                <a:latin typeface="Calibri"/>
+              </a:rPr>
+              <a:t>channel</a:t>
             </a:r>
           </a:p>
           <a:p>
@@ -5862,73 +5780,51 @@
               </a:spcAft>
             </a:pPr>
             <a:r>
-              <a:rPr sz="1600" b="0" i="0">
+              <a:rPr lang="en-US" sz="1600" b="0" dirty="0">
                 <a:solidFill>
                   <a:srgbClr val="5B6472"/>
                 </a:solidFill>
                 <a:latin typeface="Calibri"/>
               </a:rPr>
-              <a:t>–  Wasserstein (earth-mover) = work to turn one distribution into the other</a:t>
-            </a:r>
-          </a:p>
-          <a:p>
-            <a:pPr>
-              <a:spcAft>
-                <a:spcPts val="900"/>
-              </a:spcAft>
-            </a:pPr>
-            <a:r>
-              <a:rPr sz="1750" b="0" i="0">
-                <a:solidFill>
-                  <a:srgbClr val="1D2B3A"/>
-                </a:solidFill>
-                <a:latin typeface="Calibri"/>
-              </a:rPr>
-              <a:t>•  Most-shifted features = is_https, path_len, n_subdomain</a:t>
-            </a:r>
-          </a:p>
-          <a:p>
-            <a:pPr lvl="1">
-              <a:spcAft>
-                <a:spcPts val="900"/>
-              </a:spcAft>
-            </a:pPr>
-            <a:r>
-              <a:rPr sz="1600" b="0" i="0">
-                <a:solidFill>
-                  <a:srgbClr val="5B6472"/>
-                </a:solidFill>
-                <a:latin typeface="Calibri"/>
-              </a:rPr>
-              <a:t>–  …which are EXACTLY the top SHAP drivers → it built on the least transferable signals</a:t>
-            </a:r>
-          </a:p>
-        </p:txBody>
-      </p:sp>
-      <p:pic>
-        <p:nvPicPr>
-          <p:cNvPr id="5" name="Picture 4" descr="F7_domain_shift.png"/>
-          <p:cNvPicPr>
-            <a:picLocks noChangeAspect="1"/>
-          </p:cNvPicPr>
+              <a:t>–  → beat one channel and the other still fires</a:t>
+            </a:r>
+          </a:p>
+        </p:txBody>
+      </p:sp>
+      <p:sp>
+        <p:nvSpPr>
+          <p:cNvPr id="5" name="TextBox 4"/>
+          <p:cNvSpPr txBox="1"/>
           <p:nvPr/>
-        </p:nvPicPr>
-        <p:blipFill>
-          <a:blip r:embed="rId2"/>
-          <a:stretch>
-            <a:fillRect/>
-          </a:stretch>
-        </p:blipFill>
+        </p:nvSpPr>
         <p:spPr>
           <a:xfrm>
-            <a:off x="6629400" y="2103120"/>
-            <a:ext cx="5349240" cy="3209544"/>
+            <a:off x="640080" y="5989320"/>
+            <a:ext cx="10972800" cy="640080"/>
           </a:xfrm>
           <a:prstGeom prst="rect">
             <a:avLst/>
           </a:prstGeom>
+          <a:noFill/>
         </p:spPr>
-      </p:pic>
+        <p:txBody>
+          <a:bodyPr wrap="square">
+            <a:spAutoFit/>
+          </a:bodyPr>
+          <a:lstStyle/>
+          <a:p>
+            <a:r>
+              <a:rPr sz="1700" b="1" i="0">
+                <a:solidFill>
+                  <a:srgbClr val="E76F51"/>
+                </a:solidFill>
+                <a:latin typeface="Calibri"/>
+              </a:rPr>
+              <a:t>Near-perfect URL benchmarks measure dataset construction, not phishing.</a:t>
+            </a:r>
+          </a:p>
+        </p:txBody>
+      </p:sp>
     </p:spTree>
   </p:cSld>
   <p:clrMapOvr>
@@ -5938,7 +5834,7 @@
 </file>
 
 <file path=ppt/slides/slide15.xml><?xml version="1.0" encoding="utf-8"?>
-<p:sld xmlns:a="http://schemas.openxmlformats.org/drawingml/2006/main" xmlns:p="http://schemas.openxmlformats.org/presentationml/2006/main" xmlns:r="http://schemas.openxmlformats.org/officeDocument/2006/relationships">
+<p:sld xmlns:a="http://schemas.openxmlformats.org/drawingml/2006/main" xmlns:r="http://schemas.openxmlformats.org/officeDocument/2006/relationships" xmlns:p="http://schemas.openxmlformats.org/presentationml/2006/main">
   <p:cSld>
     <p:spTree>
       <p:nvGrpSpPr>
@@ -5946,7 +5842,14 @@
         <p:cNvGrpSpPr/>
         <p:nvPr/>
       </p:nvGrpSpPr>
-      <p:grpSpPr/>
+      <p:grpSpPr>
+        <a:xfrm>
+          <a:off x="0" y="0"/>
+          <a:ext cx="0" cy="0"/>
+          <a:chOff x="0" y="0"/>
+          <a:chExt cx="0" cy="0"/>
+        </a:xfrm>
+      </p:grpSpPr>
       <p:sp>
         <p:nvSpPr>
           <p:cNvPr id="2" name="Rectangle 1"/>
@@ -5987,6 +5890,7 @@
           <a:lstStyle/>
           <a:p>
             <a:pPr algn="ctr"/>
+            <a:endParaRPr/>
           </a:p>
         </p:txBody>
       </p:sp>
@@ -6019,7 +5923,7 @@
                 </a:solidFill>
                 <a:latin typeface="Calibri"/>
               </a:rPr>
-              <a:t>Conclusion — a useful second opinion, not a solution</a:t>
+              <a:t>Course concepts used in this project</a:t>
             </a:r>
           </a:p>
         </p:txBody>
@@ -6033,7 +5937,7 @@
         <p:spPr>
           <a:xfrm>
             <a:off x="640080" y="1783080"/>
-            <a:ext cx="10972800" cy="4754880"/>
+            <a:ext cx="10972800" cy="2100575"/>
           </a:xfrm>
           <a:prstGeom prst="rect">
             <a:avLst/>
@@ -6052,30 +5956,29 @@
               </a:spcAft>
             </a:pPr>
             <a:r>
-              <a:rPr sz="1750" b="0" i="0">
-                <a:solidFill>
-                  <a:srgbClr val="1D2B3A"/>
-                </a:solidFill>
-                <a:latin typeface="Calibri"/>
-              </a:rPr>
-              <a:t>•  URL structure alone is NOT a generalisable phishing signal:</a:t>
-            </a:r>
-          </a:p>
-          <a:p>
-            <a:pPr lvl="1">
-              <a:spcAft>
-                <a:spcPts val="900"/>
-              </a:spcAft>
-            </a:pPr>
-            <a:r>
-              <a:rPr sz="1600" b="0" i="0">
-                <a:solidFill>
-                  <a:srgbClr val="5B6472"/>
-                </a:solidFill>
-                <a:latin typeface="Calibri"/>
-              </a:rPr>
-              <a:t>–  built on a dataset artifact (HTTPS + correlated structure) → trivially evaded, collapses OOD</a:t>
-            </a:r>
+              <a:rPr sz="1550" b="0" i="0" dirty="0">
+                <a:solidFill>
+                  <a:srgbClr val="1D2B3A"/>
+                </a:solidFill>
+                <a:latin typeface="Calibri"/>
+              </a:rPr>
+              <a:t>•  EDA · distributions · skewness/kurtosis · </a:t>
+            </a:r>
+            <a:r>
+              <a:rPr sz="1550" b="0" i="0">
+                <a:solidFill>
+                  <a:srgbClr val="1D2B3A"/>
+                </a:solidFill>
+                <a:latin typeface="Calibri"/>
+              </a:rPr>
+              <a:t>robust stats</a:t>
+            </a:r>
+            <a:endParaRPr lang="en-US" sz="1550" b="0" i="0">
+              <a:solidFill>
+                <a:srgbClr val="1D2B3A"/>
+              </a:solidFill>
+              <a:latin typeface="Calibri"/>
+            </a:endParaRPr>
           </a:p>
           <a:p>
             <a:pPr>
@@ -6084,13 +5987,31 @@
               </a:spcAft>
             </a:pPr>
             <a:r>
-              <a:rPr sz="1750" b="0" i="0">
-                <a:solidFill>
-                  <a:srgbClr val="1D2B3A"/>
-                </a:solidFill>
-                <a:latin typeface="Calibri"/>
-              </a:rPr>
-              <a:t>•  But it IS fast, private, interpretable, and robust to character obfuscation</a:t>
+              <a:rPr sz="1550" b="0" i="0" dirty="0">
+                <a:solidFill>
+                  <a:srgbClr val="1D2B3A"/>
+                </a:solidFill>
+                <a:latin typeface="Calibri"/>
+              </a:rPr>
+              <a:t>•  Feature engineering · Shannon entropy (information theory) · </a:t>
+            </a:r>
+            <a:r>
+              <a:rPr sz="1550" b="0" i="0" dirty="0" err="1">
+                <a:solidFill>
+                  <a:srgbClr val="1D2B3A"/>
+                </a:solidFill>
+                <a:latin typeface="Calibri"/>
+              </a:rPr>
+              <a:t>Levenshtein</a:t>
+            </a:r>
+            <a:r>
+              <a:rPr sz="1550" b="0" i="0" dirty="0">
+                <a:solidFill>
+                  <a:srgbClr val="1D2B3A"/>
+                </a:solidFill>
+                <a:latin typeface="Calibri"/>
+              </a:rPr>
+              <a:t> edit distance</a:t>
             </a:r>
           </a:p>
           <a:p>
@@ -6100,63 +6021,76 @@
               </a:spcAft>
             </a:pPr>
             <a:r>
-              <a:rPr sz="1750" b="0" i="0">
-                <a:solidFill>
-                  <a:srgbClr val="1D2B3A"/>
-                </a:solidFill>
-                <a:latin typeface="Calibri"/>
-              </a:rPr>
-              <a:t>•  Right design = FUSION: this link channel + my partner’s content channel + reputation/age</a:t>
-            </a:r>
-          </a:p>
-          <a:p>
-            <a:pPr lvl="1">
+              <a:rPr sz="1550" b="0" i="0" dirty="0">
+                <a:solidFill>
+                  <a:srgbClr val="1D2B3A"/>
+                </a:solidFill>
+                <a:latin typeface="Calibri"/>
+              </a:rPr>
+              <a:t>•  Accuracy paradox · Precision/Recall/F1/F2/MCC/AUC · cost-sensitive thresholds</a:t>
+            </a:r>
+          </a:p>
+          <a:p>
+            <a:pPr>
               <a:spcAft>
                 <a:spcPts val="900"/>
               </a:spcAft>
             </a:pPr>
             <a:r>
-              <a:rPr sz="1600" b="0" i="0">
-                <a:solidFill>
-                  <a:srgbClr val="5B6472"/>
-                </a:solidFill>
-                <a:latin typeface="Calibri"/>
-              </a:rPr>
-              <a:t>–  → beat one channel and the other still fires</a:t>
-            </a:r>
-          </a:p>
-        </p:txBody>
-      </p:sp>
-      <p:sp>
-        <p:nvSpPr>
-          <p:cNvPr id="5" name="TextBox 4"/>
-          <p:cNvSpPr txBox="1"/>
-          <p:nvPr/>
-        </p:nvSpPr>
-        <p:spPr>
-          <a:xfrm>
-            <a:off x="640080" y="5989320"/>
-            <a:ext cx="10972800" cy="640080"/>
-          </a:xfrm>
-          <a:prstGeom prst="rect">
-            <a:avLst/>
-          </a:prstGeom>
-          <a:noFill/>
-        </p:spPr>
-        <p:txBody>
-          <a:bodyPr wrap="square">
-            <a:spAutoFit/>
-          </a:bodyPr>
-          <a:lstStyle/>
-          <a:p>
-            <a:r>
-              <a:rPr sz="1700" b="1" i="0">
-                <a:solidFill>
-                  <a:srgbClr val="E76F51"/>
-                </a:solidFill>
-                <a:latin typeface="Calibri"/>
-              </a:rPr>
-              <a:t>Near-perfect URL benchmarks measure dataset construction, not phishing.</a:t>
+              <a:rPr sz="1550" b="0" i="0" dirty="0">
+                <a:solidFill>
+                  <a:srgbClr val="1D2B3A"/>
+                </a:solidFill>
+                <a:latin typeface="Calibri"/>
+              </a:rPr>
+              <a:t>•  Bootstrap confidence intervals · McNemar’s test</a:t>
+            </a:r>
+          </a:p>
+          <a:p>
+            <a:pPr>
+              <a:spcAft>
+                <a:spcPts val="900"/>
+              </a:spcAft>
+            </a:pPr>
+            <a:r>
+              <a:rPr sz="1550" b="0" i="0" dirty="0">
+                <a:solidFill>
+                  <a:srgbClr val="1D2B3A"/>
+                </a:solidFill>
+                <a:latin typeface="Calibri"/>
+              </a:rPr>
+              <a:t>•  Explainability (SHAP</a:t>
+            </a:r>
+            <a:r>
+              <a:rPr lang="en-US" sz="1550" b="0" i="0" dirty="0">
+                <a:solidFill>
+                  <a:srgbClr val="1D2B3A"/>
+                </a:solidFill>
+                <a:latin typeface="Calibri"/>
+              </a:rPr>
+              <a:t>)</a:t>
+            </a:r>
+            <a:endParaRPr sz="1550" b="0" i="0" dirty="0">
+              <a:solidFill>
+                <a:srgbClr val="1D2B3A"/>
+              </a:solidFill>
+              <a:latin typeface="Calibri"/>
+            </a:endParaRPr>
+          </a:p>
+          <a:p>
+            <a:pPr>
+              <a:spcAft>
+                <a:spcPts val="900"/>
+              </a:spcAft>
+            </a:pPr>
+            <a:r>
+              <a:rPr sz="1550" b="0" i="0" dirty="0">
+                <a:solidFill>
+                  <a:srgbClr val="1D2B3A"/>
+                </a:solidFill>
+                <a:latin typeface="Calibri"/>
+              </a:rPr>
+              <a:t>•  Domain shift / concept drift · distance metrics (KS, Wasserstein) · error analysis</a:t>
             </a:r>
           </a:p>
         </p:txBody>
@@ -6170,7 +6104,7 @@
 </file>
 
 <file path=ppt/slides/slide16.xml><?xml version="1.0" encoding="utf-8"?>
-<p:sld xmlns:a="http://schemas.openxmlformats.org/drawingml/2006/main" xmlns:p="http://schemas.openxmlformats.org/presentationml/2006/main" xmlns:r="http://schemas.openxmlformats.org/officeDocument/2006/relationships">
+<p:sld xmlns:a="http://schemas.openxmlformats.org/drawingml/2006/main" xmlns:r="http://schemas.openxmlformats.org/officeDocument/2006/relationships" xmlns:p="http://schemas.openxmlformats.org/presentationml/2006/main">
   <p:cSld>
     <p:spTree>
       <p:nvGrpSpPr>
@@ -6178,7 +6112,144 @@
         <p:cNvGrpSpPr/>
         <p:nvPr/>
       </p:nvGrpSpPr>
-      <p:grpSpPr/>
+      <p:grpSpPr>
+        <a:xfrm>
+          <a:off x="0" y="0"/>
+          <a:ext cx="0" cy="0"/>
+          <a:chOff x="0" y="0"/>
+          <a:chExt cx="0" cy="0"/>
+        </a:xfrm>
+      </p:grpSpPr>
+      <p:sp>
+        <p:nvSpPr>
+          <p:cNvPr id="2" name="Rectangle 1"/>
+          <p:cNvSpPr/>
+          <p:nvPr/>
+        </p:nvSpPr>
+        <p:spPr>
+          <a:xfrm>
+            <a:off x="0" y="0"/>
+            <a:ext cx="12191695" cy="6858000"/>
+          </a:xfrm>
+          <a:prstGeom prst="rect">
+            <a:avLst/>
+          </a:prstGeom>
+          <a:solidFill>
+            <a:srgbClr val="1D2B3A"/>
+          </a:solidFill>
+          <a:ln>
+            <a:noFill/>
+          </a:ln>
+        </p:spPr>
+        <p:style>
+          <a:lnRef idx="1">
+            <a:schemeClr val="accent1"/>
+          </a:lnRef>
+          <a:fillRef idx="3">
+            <a:schemeClr val="accent1"/>
+          </a:fillRef>
+          <a:effectRef idx="2">
+            <a:schemeClr val="accent1"/>
+          </a:effectRef>
+          <a:fontRef idx="minor">
+            <a:schemeClr val="lt1"/>
+          </a:fontRef>
+        </p:style>
+        <p:txBody>
+          <a:bodyPr rtlCol="0" anchor="ctr"/>
+          <a:lstStyle/>
+          <a:p>
+            <a:pPr algn="ctr"/>
+            <a:endParaRPr/>
+          </a:p>
+        </p:txBody>
+      </p:sp>
+      <p:sp>
+        <p:nvSpPr>
+          <p:cNvPr id="3" name="TextBox 2"/>
+          <p:cNvSpPr txBox="1"/>
+          <p:nvPr/>
+        </p:nvSpPr>
+        <p:spPr>
+          <a:xfrm>
+            <a:off x="822960" y="2651760"/>
+            <a:ext cx="10515600" cy="2011680"/>
+          </a:xfrm>
+          <a:prstGeom prst="rect">
+            <a:avLst/>
+          </a:prstGeom>
+          <a:noFill/>
+        </p:spPr>
+        <p:txBody>
+          <a:bodyPr wrap="square">
+            <a:spAutoFit/>
+          </a:bodyPr>
+          <a:lstStyle/>
+          <a:p>
+            <a:r>
+              <a:rPr sz="4000" b="1" i="0">
+                <a:solidFill>
+                  <a:srgbClr val="FFFFFF"/>
+                </a:solidFill>
+                <a:latin typeface="Calibri"/>
+              </a:rPr>
+              <a:t>Thank you</a:t>
+            </a:r>
+          </a:p>
+          <a:p>
+            <a:r>
+              <a:rPr sz="1600" b="0" i="0">
+                <a:solidFill>
+                  <a:srgbClr val="9AD1C9"/>
+                </a:solidFill>
+                <a:latin typeface="Calibri"/>
+              </a:rPr>
+              <a:t>github.com/segals/phishing-url-detector   ·   reproducible: python run_all.py</a:t>
+            </a:r>
+          </a:p>
+          <a:p>
+            <a:pPr>
+              <a:spcBef>
+                <a:spcPts val="1000"/>
+              </a:spcBef>
+            </a:pPr>
+            <a:r>
+              <a:rPr sz="1800" b="0" i="1">
+                <a:solidFill>
+                  <a:srgbClr val="C7D0D8"/>
+                </a:solidFill>
+                <a:latin typeface="Calibri"/>
+              </a:rPr>
+              <a:t>Questions?</a:t>
+            </a:r>
+          </a:p>
+        </p:txBody>
+      </p:sp>
+    </p:spTree>
+  </p:cSld>
+  <p:clrMapOvr>
+    <a:masterClrMapping/>
+  </p:clrMapOvr>
+</p:sld>
+</file>
+
+<file path=ppt/slides/slide2.xml><?xml version="1.0" encoding="utf-8"?>
+<p:sld xmlns:a="http://schemas.openxmlformats.org/drawingml/2006/main" xmlns:r="http://schemas.openxmlformats.org/officeDocument/2006/relationships" xmlns:p="http://schemas.openxmlformats.org/presentationml/2006/main">
+  <p:cSld>
+    <p:spTree>
+      <p:nvGrpSpPr>
+        <p:cNvPr id="1" name=""/>
+        <p:cNvGrpSpPr/>
+        <p:nvPr/>
+      </p:nvGrpSpPr>
+      <p:grpSpPr>
+        <a:xfrm>
+          <a:off x="0" y="0"/>
+          <a:ext cx="0" cy="0"/>
+          <a:chOff x="0" y="0"/>
+          <a:chExt cx="0" cy="0"/>
+        </a:xfrm>
+      </p:grpSpPr>
       <p:sp>
         <p:nvSpPr>
           <p:cNvPr id="2" name="Rectangle 1"/>
@@ -6219,6 +6290,7 @@
           <a:lstStyle/>
           <a:p>
             <a:pPr algn="ctr"/>
+            <a:endParaRPr/>
           </a:p>
         </p:txBody>
       </p:sp>
@@ -6251,7 +6323,7 @@
                 </a:solidFill>
                 <a:latin typeface="Calibri"/>
               </a:rPr>
-              <a:t>Course concepts used in this project</a:t>
+              <a:t>The question, and the project</a:t>
             </a:r>
           </a:p>
         </p:txBody>
@@ -6265,7 +6337,7 @@
         <p:spPr>
           <a:xfrm>
             <a:off x="640080" y="1783080"/>
-            <a:ext cx="10972800" cy="4754880"/>
+            <a:ext cx="10972800" cy="1515800"/>
           </a:xfrm>
           <a:prstGeom prst="rect">
             <a:avLst/>
@@ -6284,13 +6356,13 @@
               </a:spcAft>
             </a:pPr>
             <a:r>
-              <a:rPr sz="1550" b="0" i="0">
-                <a:solidFill>
-                  <a:srgbClr val="1D2B3A"/>
-                </a:solidFill>
-                <a:latin typeface="Calibri"/>
-              </a:rPr>
-              <a:t>•  EDA · distributions · skewness/kurtosis · robust stats · Pearson vs Spearman · Mann–Whitney U</a:t>
+              <a:rPr sz="1750" b="0" i="0" dirty="0">
+                <a:solidFill>
+                  <a:srgbClr val="1D2B3A"/>
+                </a:solidFill>
+                <a:latin typeface="Calibri"/>
+              </a:rPr>
+              <a:t>•  Phishing is the #1 way attackers get a first foothold — and much of it is just a link.</a:t>
             </a:r>
           </a:p>
           <a:p>
@@ -6300,13 +6372,13 @@
               </a:spcAft>
             </a:pPr>
             <a:r>
-              <a:rPr sz="1550" b="0" i="0">
-                <a:solidFill>
-                  <a:srgbClr val="1D2B3A"/>
-                </a:solidFill>
-                <a:latin typeface="Calibri"/>
-              </a:rPr>
-              <a:t>•  Feature engineering · Shannon entropy (information theory) · Levenshtein edit distance</a:t>
+              <a:rPr sz="1750" b="0" i="0" dirty="0">
+                <a:solidFill>
+                  <a:srgbClr val="1D2B3A"/>
+                </a:solidFill>
+                <a:latin typeface="Calibri"/>
+              </a:rPr>
+              <a:t>•  Can we classify a URL as phishing / legitimate from the STRING ALONE?</a:t>
             </a:r>
           </a:p>
           <a:p>
@@ -6316,13 +6388,13 @@
               </a:spcAft>
             </a:pPr>
             <a:r>
-              <a:rPr sz="1550" b="0" i="0">
-                <a:solidFill>
-                  <a:srgbClr val="1D2B3A"/>
-                </a:solidFill>
-                <a:latin typeface="Calibri"/>
-              </a:rPr>
-              <a:t>•  Accuracy paradox · Precision/Recall/F1/F2/MCC/AUC · cost-sensitive thresholds</a:t>
+              <a:rPr sz="1750" b="0" i="0" dirty="0">
+                <a:solidFill>
+                  <a:srgbClr val="1D2B3A"/>
+                </a:solidFill>
+                <a:latin typeface="Calibri"/>
+              </a:rPr>
+              <a:t>•  Two-part project: this half = the URL / link channel; my partner = the email content channel.</a:t>
             </a:r>
           </a:p>
           <a:p>
@@ -6332,61 +6404,13 @@
               </a:spcAft>
             </a:pPr>
             <a:r>
-              <a:rPr sz="1550" b="0" i="0">
-                <a:solidFill>
-                  <a:srgbClr val="1D2B3A"/>
-                </a:solidFill>
-                <a:latin typeface="Calibri"/>
-              </a:rPr>
-              <a:t>•  Bootstrap confidence intervals · McNemar’s test</a:t>
-            </a:r>
-          </a:p>
-          <a:p>
-            <a:pPr>
-              <a:spcAft>
-                <a:spcPts val="900"/>
-              </a:spcAft>
-            </a:pPr>
-            <a:r>
-              <a:rPr sz="1550" b="0" i="0">
-                <a:solidFill>
-                  <a:srgbClr val="1D2B3A"/>
-                </a:solidFill>
-                <a:latin typeface="Calibri"/>
-              </a:rPr>
-              <a:t>•  Explainability (SHAP) · adversarial ML (evasion, homoglyphs, adversarial training)</a:t>
-            </a:r>
-          </a:p>
-          <a:p>
-            <a:pPr>
-              <a:spcAft>
-                <a:spcPts val="900"/>
-              </a:spcAft>
-            </a:pPr>
-            <a:r>
-              <a:rPr sz="1550" b="0" i="0">
-                <a:solidFill>
-                  <a:srgbClr val="1D2B3A"/>
-                </a:solidFill>
-                <a:latin typeface="Calibri"/>
-              </a:rPr>
-              <a:t>•  Anomaly detection (Isolation Forest, LOF) · calibration (Brier)</a:t>
-            </a:r>
-          </a:p>
-          <a:p>
-            <a:pPr>
-              <a:spcAft>
-                <a:spcPts val="900"/>
-              </a:spcAft>
-            </a:pPr>
-            <a:r>
-              <a:rPr sz="1550" b="0" i="0">
-                <a:solidFill>
-                  <a:srgbClr val="1D2B3A"/>
-                </a:solidFill>
-                <a:latin typeface="Calibri"/>
-              </a:rPr>
-              <a:t>•  Domain shift / concept drift · distance metrics (KS, Wasserstein) · feature ablation · error analysis</a:t>
+              <a:rPr sz="1750" b="0" i="0" dirty="0">
+                <a:solidFill>
+                  <a:srgbClr val="1D2B3A"/>
+                </a:solidFill>
+                <a:latin typeface="Calibri"/>
+              </a:rPr>
+              <a:t>•  Built independently. Plan: build a detector → then stress-test whether its score is real.</a:t>
             </a:r>
           </a:p>
         </p:txBody>
@@ -6399,8 +6423,8 @@
 </p:sld>
 </file>
 
-<file path=ppt/slides/slide17.xml><?xml version="1.0" encoding="utf-8"?>
-<p:sld xmlns:a="http://schemas.openxmlformats.org/drawingml/2006/main" xmlns:p="http://schemas.openxmlformats.org/presentationml/2006/main" xmlns:r="http://schemas.openxmlformats.org/officeDocument/2006/relationships">
+<file path=ppt/slides/slide3.xml><?xml version="1.0" encoding="utf-8"?>
+<p:sld xmlns:a="http://schemas.openxmlformats.org/drawingml/2006/main" xmlns:r="http://schemas.openxmlformats.org/officeDocument/2006/relationships" xmlns:p="http://schemas.openxmlformats.org/presentationml/2006/main">
   <p:cSld>
     <p:spTree>
       <p:nvGrpSpPr>
@@ -6408,129 +6432,14 @@
         <p:cNvGrpSpPr/>
         <p:nvPr/>
       </p:nvGrpSpPr>
-      <p:grpSpPr/>
-      <p:sp>
-        <p:nvSpPr>
-          <p:cNvPr id="2" name="Rectangle 1"/>
-          <p:cNvSpPr/>
-          <p:nvPr/>
-        </p:nvSpPr>
-        <p:spPr>
-          <a:xfrm>
-            <a:off x="0" y="0"/>
-            <a:ext cx="12191695" cy="6858000"/>
-          </a:xfrm>
-          <a:prstGeom prst="rect">
-            <a:avLst/>
-          </a:prstGeom>
-          <a:solidFill>
-            <a:srgbClr val="1D2B3A"/>
-          </a:solidFill>
-          <a:ln>
-            <a:noFill/>
-          </a:ln>
-        </p:spPr>
-        <p:style>
-          <a:lnRef idx="1">
-            <a:schemeClr val="accent1"/>
-          </a:lnRef>
-          <a:fillRef idx="3">
-            <a:schemeClr val="accent1"/>
-          </a:fillRef>
-          <a:effectRef idx="2">
-            <a:schemeClr val="accent1"/>
-          </a:effectRef>
-          <a:fontRef idx="minor">
-            <a:schemeClr val="lt1"/>
-          </a:fontRef>
-        </p:style>
-        <p:txBody>
-          <a:bodyPr rtlCol="0" anchor="ctr"/>
-          <a:lstStyle/>
-          <a:p>
-            <a:pPr algn="ctr"/>
-          </a:p>
-        </p:txBody>
-      </p:sp>
-      <p:sp>
-        <p:nvSpPr>
-          <p:cNvPr id="3" name="TextBox 2"/>
-          <p:cNvSpPr txBox="1"/>
-          <p:nvPr/>
-        </p:nvSpPr>
-        <p:spPr>
-          <a:xfrm>
-            <a:off x="822960" y="2651760"/>
-            <a:ext cx="10515600" cy="2011680"/>
-          </a:xfrm>
-          <a:prstGeom prst="rect">
-            <a:avLst/>
-          </a:prstGeom>
-          <a:noFill/>
-        </p:spPr>
-        <p:txBody>
-          <a:bodyPr wrap="square">
-            <a:spAutoFit/>
-          </a:bodyPr>
-          <a:lstStyle/>
-          <a:p>
-            <a:r>
-              <a:rPr sz="4000" b="1" i="0">
-                <a:solidFill>
-                  <a:srgbClr val="FFFFFF"/>
-                </a:solidFill>
-                <a:latin typeface="Calibri"/>
-              </a:rPr>
-              <a:t>Thank you</a:t>
-            </a:r>
-          </a:p>
-          <a:p>
-            <a:r>
-              <a:rPr sz="1600" b="0" i="0">
-                <a:solidFill>
-                  <a:srgbClr val="9AD1C9"/>
-                </a:solidFill>
-                <a:latin typeface="Calibri"/>
-              </a:rPr>
-              <a:t>github.com/segals/phishing-url-detector   ·   reproducible: python run_all.py</a:t>
-            </a:r>
-          </a:p>
-          <a:p>
-            <a:pPr>
-              <a:spcBef>
-                <a:spcPts val="1000"/>
-              </a:spcBef>
-            </a:pPr>
-            <a:r>
-              <a:rPr sz="1800" b="0" i="1">
-                <a:solidFill>
-                  <a:srgbClr val="C7D0D8"/>
-                </a:solidFill>
-                <a:latin typeface="Calibri"/>
-              </a:rPr>
-              <a:t>Questions?</a:t>
-            </a:r>
-          </a:p>
-        </p:txBody>
-      </p:sp>
-    </p:spTree>
-  </p:cSld>
-  <p:clrMapOvr>
-    <a:masterClrMapping/>
-  </p:clrMapOvr>
-</p:sld>
-</file>
-
-<file path=ppt/slides/slide2.xml><?xml version="1.0" encoding="utf-8"?>
-<p:sld xmlns:a="http://schemas.openxmlformats.org/drawingml/2006/main" xmlns:p="http://schemas.openxmlformats.org/presentationml/2006/main" xmlns:r="http://schemas.openxmlformats.org/officeDocument/2006/relationships">
-  <p:cSld>
-    <p:spTree>
-      <p:nvGrpSpPr>
-        <p:cNvPr id="1" name=""/>
-        <p:cNvGrpSpPr/>
-        <p:nvPr/>
-      </p:nvGrpSpPr>
-      <p:grpSpPr/>
+      <p:grpSpPr>
+        <a:xfrm>
+          <a:off x="0" y="0"/>
+          <a:ext cx="0" cy="0"/>
+          <a:chOff x="0" y="0"/>
+          <a:chExt cx="0" cy="0"/>
+        </a:xfrm>
+      </p:grpSpPr>
       <p:sp>
         <p:nvSpPr>
           <p:cNvPr id="2" name="Rectangle 1"/>
@@ -6571,6 +6480,7 @@
           <a:lstStyle/>
           <a:p>
             <a:pPr algn="ctr"/>
+            <a:endParaRPr/>
           </a:p>
         </p:txBody>
       </p:sp>
@@ -6603,7 +6513,18 @@
                 </a:solidFill>
                 <a:latin typeface="Calibri"/>
               </a:rPr>
-              <a:t>The question, and the project</a:t>
+              <a:t>The data</a:t>
+            </a:r>
+          </a:p>
+          <a:p>
+            <a:r>
+              <a:rPr sz="1400" b="0" i="1">
+                <a:solidFill>
+                  <a:srgbClr val="2A9D8F"/>
+                </a:solidFill>
+                <a:latin typeface="Calibri"/>
+              </a:rPr>
+              <a:t>real, public, recent</a:t>
             </a:r>
           </a:p>
         </p:txBody>
@@ -6617,7 +6538,7 @@
         <p:spPr>
           <a:xfrm>
             <a:off x="640080" y="1783080"/>
-            <a:ext cx="10972800" cy="4754880"/>
+            <a:ext cx="5852160" cy="2546851"/>
           </a:xfrm>
           <a:prstGeom prst="rect">
             <a:avLst/>
@@ -6636,13 +6557,31 @@
               </a:spcAft>
             </a:pPr>
             <a:r>
-              <a:rPr sz="1750" b="0" i="0">
-                <a:solidFill>
-                  <a:srgbClr val="1D2B3A"/>
-                </a:solidFill>
-                <a:latin typeface="Calibri"/>
-              </a:rPr>
-              <a:t>•  Phishing is the #1 way attackers get a first foothold — and much of it is just a link.</a:t>
+              <a:rPr sz="1750" b="0" i="0" dirty="0">
+                <a:solidFill>
+                  <a:srgbClr val="1D2B3A"/>
+                </a:solidFill>
+                <a:latin typeface="Calibri"/>
+              </a:rPr>
+              <a:t>•  </a:t>
+            </a:r>
+            <a:r>
+              <a:rPr sz="1750" b="0" i="0" dirty="0" err="1">
+                <a:solidFill>
+                  <a:srgbClr val="1D2B3A"/>
+                </a:solidFill>
+                <a:latin typeface="Calibri"/>
+              </a:rPr>
+              <a:t>PhiUSIIL</a:t>
+            </a:r>
+            <a:r>
+              <a:rPr sz="1750" b="0" i="0" dirty="0">
+                <a:solidFill>
+                  <a:srgbClr val="1D2B3A"/>
+                </a:solidFill>
+                <a:latin typeface="Calibri"/>
+              </a:rPr>
+              <a:t> (Prasad &amp; Chandra, 2024; UCI id 967) — 235,795 real URLs, 43% phishing</a:t>
             </a:r>
           </a:p>
           <a:p>
@@ -6652,14 +6591,29 @@
               </a:spcAft>
             </a:pPr>
             <a:r>
-              <a:rPr sz="1750" b="0" i="0">
-                <a:solidFill>
-                  <a:srgbClr val="1D2B3A"/>
-                </a:solidFill>
-                <a:latin typeface="Calibri"/>
-              </a:rPr>
-              <a:t>•  Can we classify a URL as phishing / legitimate from the STRING ALONE?</a:t>
-            </a:r>
+              <a:rPr sz="1750" b="0" i="0" dirty="0">
+                <a:solidFill>
+                  <a:srgbClr val="1D2B3A"/>
+                </a:solidFill>
+                <a:latin typeface="Calibri"/>
+              </a:rPr>
+              <a:t>•  Preprocessing: de-duplicate on the URL BEFORE splitting (no leakage)</a:t>
+            </a:r>
+            <a:r>
+              <a:rPr lang="he-IL" sz="1750" dirty="0">
+                <a:solidFill>
+                  <a:srgbClr val="1D2B3A"/>
+                </a:solidFill>
+                <a:latin typeface="Calibri"/>
+              </a:rPr>
+              <a:t>.</a:t>
+            </a:r>
+            <a:endParaRPr sz="1750" b="0" i="0" dirty="0">
+              <a:solidFill>
+                <a:srgbClr val="1D2B3A"/>
+              </a:solidFill>
+              <a:latin typeface="Calibri"/>
+            </a:endParaRPr>
           </a:p>
           <a:p>
             <a:pPr lvl="1">
@@ -6668,13 +6622,13 @@
               </a:spcAft>
             </a:pPr>
             <a:r>
-              <a:rPr sz="1600" b="0" i="0">
+              <a:rPr sz="1600" b="0" i="0" dirty="0">
                 <a:solidFill>
                   <a:srgbClr val="5B6472"/>
                 </a:solidFill>
                 <a:latin typeface="Calibri"/>
               </a:rPr>
-              <a:t>–  no page fetch → fast (~milliseconds), private, works before the user clicks</a:t>
+              <a:t>–  class balance (no rebalancing), stratified 60/20/20 split, seed 42, test used once</a:t>
             </a:r>
           </a:p>
           <a:p>
@@ -6684,33 +6638,74 @@
               </a:spcAft>
             </a:pPr>
             <a:r>
-              <a:rPr sz="1750" b="0" i="0">
-                <a:solidFill>
-                  <a:srgbClr val="1D2B3A"/>
-                </a:solidFill>
-                <a:latin typeface="Calibri"/>
-              </a:rPr>
-              <a:t>•  Two-part project: this half = the URL / link channel; my partner = the email content channel.</a:t>
-            </a:r>
-          </a:p>
-          <a:p>
-            <a:pPr>
-              <a:spcAft>
-                <a:spcPts val="900"/>
-              </a:spcAft>
-            </a:pPr>
-            <a:r>
-              <a:rPr sz="1750" b="0" i="0">
-                <a:solidFill>
-                  <a:srgbClr val="1D2B3A"/>
-                </a:solidFill>
-                <a:latin typeface="Calibri"/>
-              </a:rPr>
-              <a:t>•  Built independently. Plan: build a detector → then stress-test whether its score is real.</a:t>
-            </a:r>
-          </a:p>
-        </p:txBody>
-      </p:sp>
+              <a:rPr sz="1750" b="0" i="0" dirty="0">
+                <a:solidFill>
+                  <a:srgbClr val="1D2B3A"/>
+                </a:solidFill>
+                <a:latin typeface="Calibri"/>
+              </a:rPr>
+              <a:t>•  For the </a:t>
+            </a:r>
+            <a:r>
+              <a:rPr sz="1750" b="0" i="0" dirty="0" err="1">
+                <a:solidFill>
+                  <a:srgbClr val="1D2B3A"/>
+                </a:solidFill>
+                <a:latin typeface="Calibri"/>
+              </a:rPr>
+              <a:t>generalisation</a:t>
+            </a:r>
+            <a:r>
+              <a:rPr sz="1750" b="0" i="0" dirty="0">
+                <a:solidFill>
+                  <a:srgbClr val="1D2B3A"/>
+                </a:solidFill>
+                <a:latin typeface="Calibri"/>
+              </a:rPr>
+              <a:t> test later: an INDEPENDENT Kaggle set (651k URLs) + live </a:t>
+            </a:r>
+            <a:r>
+              <a:rPr sz="1750" b="0" i="0" dirty="0" err="1">
+                <a:solidFill>
+                  <a:srgbClr val="1D2B3A"/>
+                </a:solidFill>
+                <a:latin typeface="Calibri"/>
+              </a:rPr>
+              <a:t>OpenPhish</a:t>
+            </a:r>
+            <a:endParaRPr sz="1750" b="0" i="0" dirty="0">
+              <a:solidFill>
+                <a:srgbClr val="1D2B3A"/>
+              </a:solidFill>
+              <a:latin typeface="Calibri"/>
+            </a:endParaRPr>
+          </a:p>
+        </p:txBody>
+      </p:sp>
+      <p:pic>
+        <p:nvPicPr>
+          <p:cNvPr id="5" name="Picture 4" descr="F1_eda.png"/>
+          <p:cNvPicPr>
+            <a:picLocks noChangeAspect="1"/>
+          </p:cNvPicPr>
+          <p:nvPr/>
+        </p:nvPicPr>
+        <p:blipFill>
+          <a:blip r:embed="rId3"/>
+          <a:stretch>
+            <a:fillRect/>
+          </a:stretch>
+        </p:blipFill>
+        <p:spPr>
+          <a:xfrm>
+            <a:off x="6492240" y="2331720"/>
+            <a:ext cx="5623560" cy="1557294"/>
+          </a:xfrm>
+          <a:prstGeom prst="rect">
+            <a:avLst/>
+          </a:prstGeom>
+        </p:spPr>
+      </p:pic>
     </p:spTree>
   </p:cSld>
   <p:clrMapOvr>
@@ -6719,8 +6714,8 @@
 </p:sld>
 </file>
 
-<file path=ppt/slides/slide3.xml><?xml version="1.0" encoding="utf-8"?>
-<p:sld xmlns:a="http://schemas.openxmlformats.org/drawingml/2006/main" xmlns:p="http://schemas.openxmlformats.org/presentationml/2006/main" xmlns:r="http://schemas.openxmlformats.org/officeDocument/2006/relationships">
+<file path=ppt/slides/slide4.xml><?xml version="1.0" encoding="utf-8"?>
+<p:sld xmlns:a="http://schemas.openxmlformats.org/drawingml/2006/main" xmlns:r="http://schemas.openxmlformats.org/officeDocument/2006/relationships" xmlns:p="http://schemas.openxmlformats.org/presentationml/2006/main">
   <p:cSld>
     <p:spTree>
       <p:nvGrpSpPr>
@@ -6728,7 +6723,14 @@
         <p:cNvGrpSpPr/>
         <p:nvPr/>
       </p:nvGrpSpPr>
-      <p:grpSpPr/>
+      <p:grpSpPr>
+        <a:xfrm>
+          <a:off x="0" y="0"/>
+          <a:ext cx="0" cy="0"/>
+          <a:chOff x="0" y="0"/>
+          <a:chExt cx="0" cy="0"/>
+        </a:xfrm>
+      </p:grpSpPr>
       <p:sp>
         <p:nvSpPr>
           <p:cNvPr id="2" name="Rectangle 1"/>
@@ -6769,6 +6771,7 @@
           <a:lstStyle/>
           <a:p>
             <a:pPr algn="ctr"/>
+            <a:endParaRPr/>
           </a:p>
         </p:txBody>
       </p:sp>
@@ -6801,7 +6804,7 @@
                 </a:solidFill>
                 <a:latin typeface="Calibri"/>
               </a:rPr>
-              <a:t>The data</a:t>
+              <a:t>How we chose the features</a:t>
             </a:r>
           </a:p>
           <a:p>
@@ -6812,7 +6815,7 @@
                 </a:solidFill>
                 <a:latin typeface="Calibri"/>
               </a:rPr>
-              <a:t>real, public, recent</a:t>
+              <a:t>feature engineering</a:t>
             </a:r>
           </a:p>
         </p:txBody>
@@ -6826,7 +6829,7 @@
         <p:spPr>
           <a:xfrm>
             <a:off x="640080" y="1783080"/>
-            <a:ext cx="5852160" cy="4754880"/>
+            <a:ext cx="10972800" cy="1877437"/>
           </a:xfrm>
           <a:prstGeom prst="rect">
             <a:avLst/>
@@ -6845,13 +6848,31 @@
               </a:spcAft>
             </a:pPr>
             <a:r>
-              <a:rPr sz="1750" b="0" i="0">
-                <a:solidFill>
-                  <a:srgbClr val="1D2B3A"/>
-                </a:solidFill>
-                <a:latin typeface="Calibri"/>
-              </a:rPr>
-              <a:t>•  PhiUSIIL (Prasad &amp; Chandra, 2024; UCI id 967) — 235,795 real URLs, 43% phishing</a:t>
+              <a:rPr sz="1750" b="0" i="0" dirty="0">
+                <a:solidFill>
+                  <a:srgbClr val="1D2B3A"/>
+                </a:solidFill>
+                <a:latin typeface="Calibri"/>
+              </a:rPr>
+              <a:t>•  A URL is a short, STRUCTURE</a:t>
+            </a:r>
+            <a:r>
+              <a:rPr lang="en-US" sz="1750" b="0" i="0" dirty="0">
+                <a:solidFill>
+                  <a:srgbClr val="1D2B3A"/>
+                </a:solidFill>
+                <a:latin typeface="Calibri"/>
+              </a:rPr>
+              <a:t>D</a:t>
+            </a:r>
+            <a:r>
+              <a:rPr sz="1750" b="0" i="0" dirty="0">
+                <a:solidFill>
+                  <a:srgbClr val="1D2B3A"/>
+                </a:solidFill>
+                <a:latin typeface="Calibri"/>
+              </a:rPr>
+              <a:t>.</a:t>
             </a:r>
           </a:p>
           <a:p>
@@ -6861,13 +6882,74 @@
               </a:spcAft>
             </a:pPr>
             <a:r>
-              <a:rPr sz="1750" b="0" i="0">
-                <a:solidFill>
-                  <a:srgbClr val="1D2B3A"/>
-                </a:solidFill>
-                <a:latin typeface="Calibri"/>
-              </a:rPr>
-              <a:t>•  Preprocessing: de-duplicate on the URL BEFORE splitting (no leakage), keep the natural</a:t>
+              <a:rPr sz="1750" b="0" i="0" dirty="0">
+                <a:solidFill>
+                  <a:srgbClr val="1D2B3A"/>
+                </a:solidFill>
+                <a:latin typeface="Calibri"/>
+              </a:rPr>
+              <a:t>•  I </a:t>
+            </a:r>
+            <a:r>
+              <a:rPr sz="1750" dirty="0">
+                <a:solidFill>
+                  <a:srgbClr val="1D2B3A"/>
+                </a:solidFill>
+                <a:latin typeface="Calibri"/>
+              </a:rPr>
+              <a:t>compute</a:t>
+            </a:r>
+            <a:r>
+              <a:rPr lang="en-US" sz="1750" dirty="0">
+                <a:solidFill>
+                  <a:srgbClr val="1D2B3A"/>
+                </a:solidFill>
+                <a:latin typeface="Calibri"/>
+              </a:rPr>
+              <a:t> </a:t>
+            </a:r>
+            <a:r>
+              <a:rPr sz="1750" dirty="0">
+                <a:solidFill>
+                  <a:srgbClr val="1D2B3A"/>
+                </a:solidFill>
+                <a:latin typeface="Calibri"/>
+              </a:rPr>
+              <a:t>interpretable numbers DIRECTLY from the URL — no learned text embedding.</a:t>
+            </a:r>
+          </a:p>
+          <a:p>
+            <a:pPr>
+              <a:spcAft>
+                <a:spcPts val="900"/>
+              </a:spcAft>
+            </a:pPr>
+            <a:r>
+              <a:rPr sz="1750" b="0" i="0" dirty="0">
+                <a:solidFill>
+                  <a:srgbClr val="1D2B3A"/>
+                </a:solidFill>
+                <a:latin typeface="Calibri"/>
+              </a:rPr>
+              <a:t>•  Why interpretable, hand-built features (not a deep character model / </a:t>
+            </a:r>
+            <a:r>
+              <a:rPr sz="1750" b="0" i="0" dirty="0" err="1">
+                <a:solidFill>
+                  <a:srgbClr val="1D2B3A"/>
+                </a:solidFill>
+                <a:latin typeface="Calibri"/>
+              </a:rPr>
+              <a:t>URLNet</a:t>
+            </a:r>
+            <a:r>
+              <a:rPr sz="1750" b="0" i="0" dirty="0">
+                <a:solidFill>
+                  <a:srgbClr val="1D2B3A"/>
+                </a:solidFill>
+                <a:latin typeface="Calibri"/>
+              </a:rPr>
+              <a:t>)?</a:t>
             </a:r>
           </a:p>
           <a:p>
@@ -6877,13 +6959,31 @@
               </a:spcAft>
             </a:pPr>
             <a:r>
-              <a:rPr sz="1600" b="0" i="0">
+              <a:rPr sz="1600" b="0" i="0" dirty="0">
                 <a:solidFill>
                   <a:srgbClr val="5B6472"/>
                 </a:solidFill>
                 <a:latin typeface="Calibri"/>
               </a:rPr>
-              <a:t>–  class balance (no rebalancing), stratified 60/20/20 split, seed 42, test used once</a:t>
+              <a:t>–  → </a:t>
+            </a:r>
+            <a:r>
+              <a:rPr lang="en-US" sz="1600" b="0" i="0" dirty="0">
+                <a:solidFill>
+                  <a:srgbClr val="5B6472"/>
+                </a:solidFill>
+                <a:latin typeface="Calibri"/>
+              </a:rPr>
+              <a:t>so,</a:t>
+            </a:r>
+            <a:r>
+              <a:rPr sz="1600" b="0" i="0" dirty="0">
+                <a:solidFill>
+                  <a:srgbClr val="5B6472"/>
+                </a:solidFill>
+                <a:latin typeface="Calibri"/>
+              </a:rPr>
+              <a:t> I can later attribute the score to specific, human-readable causes</a:t>
             </a:r>
           </a:p>
           <a:p>
@@ -6893,57 +6993,17 @@
               </a:spcAft>
             </a:pPr>
             <a:r>
-              <a:rPr sz="1750" b="0" i="0">
-                <a:solidFill>
-                  <a:srgbClr val="1D2B3A"/>
-                </a:solidFill>
-                <a:latin typeface="Calibri"/>
-              </a:rPr>
-              <a:t>•  For the generalisation test later: an INDEPENDENT Kaggle set (651k URLs) + live OpenPhish</a:t>
-            </a:r>
-          </a:p>
-          <a:p>
-            <a:pPr>
-              <a:spcAft>
-                <a:spcPts val="900"/>
-              </a:spcAft>
-            </a:pPr>
-            <a:r>
-              <a:rPr sz="1750" b="0" i="0">
-                <a:solidFill>
-                  <a:srgbClr val="1D2B3A"/>
-                </a:solidFill>
-                <a:latin typeface="Calibri"/>
-              </a:rPr>
-              <a:t>•  Reproducible: cleaned data is SHA-256 hashed and logged</a:t>
-            </a:r>
-          </a:p>
-        </p:txBody>
-      </p:sp>
-      <p:pic>
-        <p:nvPicPr>
-          <p:cNvPr id="5" name="Picture 4" descr="F1_eda.png"/>
-          <p:cNvPicPr>
-            <a:picLocks noChangeAspect="1"/>
-          </p:cNvPicPr>
-          <p:nvPr/>
-        </p:nvPicPr>
-        <p:blipFill>
-          <a:blip r:embed="rId2"/>
-          <a:stretch>
-            <a:fillRect/>
-          </a:stretch>
-        </p:blipFill>
-        <p:spPr>
-          <a:xfrm>
-            <a:off x="6355080" y="1965960"/>
-            <a:ext cx="5623560" cy="1557294"/>
-          </a:xfrm>
-          <a:prstGeom prst="rect">
-            <a:avLst/>
-          </a:prstGeom>
-        </p:spPr>
-      </p:pic>
+              <a:rPr sz="1750" b="0" i="0" dirty="0">
+                <a:solidFill>
+                  <a:srgbClr val="1D2B3A"/>
+                </a:solidFill>
+                <a:latin typeface="Calibri"/>
+              </a:rPr>
+              <a:t>•  40 features, grouped into 6 families</a:t>
+            </a:r>
+          </a:p>
+        </p:txBody>
+      </p:sp>
     </p:spTree>
   </p:cSld>
   <p:clrMapOvr>
@@ -6952,8 +7012,8 @@
 </p:sld>
 </file>
 
-<file path=ppt/slides/slide4.xml><?xml version="1.0" encoding="utf-8"?>
-<p:sld xmlns:a="http://schemas.openxmlformats.org/drawingml/2006/main" xmlns:p="http://schemas.openxmlformats.org/presentationml/2006/main" xmlns:r="http://schemas.openxmlformats.org/officeDocument/2006/relationships">
+<file path=ppt/slides/slide5.xml><?xml version="1.0" encoding="utf-8"?>
+<p:sld xmlns:a="http://schemas.openxmlformats.org/drawingml/2006/main" xmlns:r="http://schemas.openxmlformats.org/officeDocument/2006/relationships" xmlns:p="http://schemas.openxmlformats.org/presentationml/2006/main">
   <p:cSld>
     <p:spTree>
       <p:nvGrpSpPr>
@@ -6961,7 +7021,14 @@
         <p:cNvGrpSpPr/>
         <p:nvPr/>
       </p:nvGrpSpPr>
-      <p:grpSpPr/>
+      <p:grpSpPr>
+        <a:xfrm>
+          <a:off x="0" y="0"/>
+          <a:ext cx="0" cy="0"/>
+          <a:chOff x="0" y="0"/>
+          <a:chExt cx="0" cy="0"/>
+        </a:xfrm>
+      </p:grpSpPr>
       <p:sp>
         <p:nvSpPr>
           <p:cNvPr id="2" name="Rectangle 1"/>
@@ -7002,6 +7069,7 @@
           <a:lstStyle/>
           <a:p>
             <a:pPr algn="ctr"/>
+            <a:endParaRPr/>
           </a:p>
         </p:txBody>
       </p:sp>
@@ -7034,18 +7102,7 @@
                 </a:solidFill>
                 <a:latin typeface="Calibri"/>
               </a:rPr>
-              <a:t>How we chose the features</a:t>
-            </a:r>
-          </a:p>
-          <a:p>
-            <a:r>
-              <a:rPr sz="1400" b="0" i="1">
-                <a:solidFill>
-                  <a:srgbClr val="2A9D8F"/>
-                </a:solidFill>
-                <a:latin typeface="Calibri"/>
-              </a:rPr>
-              <a:t>feature engineering</a:t>
+              <a:t>The 40 features — six families</a:t>
             </a:r>
           </a:p>
         </p:txBody>
@@ -7078,13 +7135,13 @@
               </a:spcAft>
             </a:pPr>
             <a:r>
-              <a:rPr sz="1750" b="0" i="0">
-                <a:solidFill>
-                  <a:srgbClr val="1D2B3A"/>
-                </a:solidFill>
-                <a:latin typeface="Calibri"/>
-              </a:rPr>
-              <a:t>•  A URL is a short, STRUCTURED string — not prose.</a:t>
+              <a:rPr sz="1700" b="0" i="0">
+                <a:solidFill>
+                  <a:srgbClr val="1D2B3A"/>
+                </a:solidFill>
+                <a:latin typeface="Calibri"/>
+              </a:rPr>
+              <a:t>•  Lexical / length — URL length; counts of dots, slashes, digits, hyphens; digit ratio</a:t>
             </a:r>
           </a:p>
           <a:p>
@@ -7094,29 +7151,13 @@
               </a:spcAft>
             </a:pPr>
             <a:r>
-              <a:rPr sz="1750" b="0" i="0">
-                <a:solidFill>
-                  <a:srgbClr val="1D2B3A"/>
-                </a:solidFill>
-                <a:latin typeface="Calibri"/>
-              </a:rPr>
-              <a:t>•  So unlike my partner (who vectorises text with TF-IDF / bag-of-words), I compute</a:t>
-            </a:r>
-          </a:p>
-          <a:p>
-            <a:pPr lvl="1">
-              <a:spcAft>
-                <a:spcPts val="900"/>
-              </a:spcAft>
-            </a:pPr>
-            <a:r>
-              <a:rPr sz="1600" b="0" i="0">
-                <a:solidFill>
-                  <a:srgbClr val="5B6472"/>
-                </a:solidFill>
-                <a:latin typeface="Calibri"/>
-              </a:rPr>
-              <a:t>–  interpretable numbers DIRECTLY from the URL — no learned text embedding.</a:t>
+              <a:rPr sz="1700" b="0" i="0">
+                <a:solidFill>
+                  <a:srgbClr val="1D2B3A"/>
+                </a:solidFill>
+                <a:latin typeface="Calibri"/>
+              </a:rPr>
+              <a:t>•  Host / domain — number of subdomains; is the host a raw IP; unusual port</a:t>
             </a:r>
           </a:p>
           <a:p>
@@ -7126,29 +7167,13 @@
               </a:spcAft>
             </a:pPr>
             <a:r>
-              <a:rPr sz="1750" b="0" i="0">
-                <a:solidFill>
-                  <a:srgbClr val="1D2B3A"/>
-                </a:solidFill>
-                <a:latin typeface="Calibri"/>
-              </a:rPr>
-              <a:t>•  Why interpretable, hand-built features (not a deep character model / URLNet)?</a:t>
-            </a:r>
-          </a:p>
-          <a:p>
-            <a:pPr lvl="1">
-              <a:spcAft>
-                <a:spcPts val="900"/>
-              </a:spcAft>
-            </a:pPr>
-            <a:r>
-              <a:rPr sz="1600" b="0" i="0">
-                <a:solidFill>
-                  <a:srgbClr val="5B6472"/>
-                </a:solidFill>
-                <a:latin typeface="Calibri"/>
-              </a:rPr>
-              <a:t>–  → so I can later attribute the score to specific, human-readable causes</a:t>
+              <a:rPr sz="1700" b="0" i="0">
+                <a:solidFill>
+                  <a:srgbClr val="1D2B3A"/>
+                </a:solidFill>
+                <a:latin typeface="Calibri"/>
+              </a:rPr>
+              <a:t>•  TLD — the suffix (.com vs .tk vs .xyz); is it an abuse-associated TLD</a:t>
             </a:r>
           </a:p>
           <a:p>
@@ -7158,13 +7183,45 @@
               </a:spcAft>
             </a:pPr>
             <a:r>
-              <a:rPr sz="1750" b="0" i="0">
-                <a:solidFill>
-                  <a:srgbClr val="1D2B3A"/>
-                </a:solidFill>
-                <a:latin typeface="Calibri"/>
-              </a:rPr>
-              <a:t>•  40 features, grouped into 6 families (next slide)</a:t>
+              <a:rPr sz="1700" b="0" i="0">
+                <a:solidFill>
+                  <a:srgbClr val="1D2B3A"/>
+                </a:solidFill>
+                <a:latin typeface="Calibri"/>
+              </a:rPr>
+              <a:t>•  Entropy — randomness of the host string (algorithmically-generated domains)</a:t>
+            </a:r>
+          </a:p>
+          <a:p>
+            <a:pPr>
+              <a:spcAft>
+                <a:spcPts val="900"/>
+              </a:spcAft>
+            </a:pPr>
+            <a:r>
+              <a:rPr sz="1700" b="0" i="0">
+                <a:solidFill>
+                  <a:srgbClr val="1D2B3A"/>
+                </a:solidFill>
+                <a:latin typeface="Calibri"/>
+              </a:rPr>
+              <a:t>•  Scheme / encoding — HTTPS?; punycode (xn--); percent/hex encoding</a:t>
+            </a:r>
+          </a:p>
+          <a:p>
+            <a:pPr>
+              <a:spcAft>
+                <a:spcPts val="900"/>
+              </a:spcAft>
+            </a:pPr>
+            <a:r>
+              <a:rPr sz="1700" b="0" i="0">
+                <a:solidFill>
+                  <a:srgbClr val="1D2B3A"/>
+                </a:solidFill>
+                <a:latin typeface="Calibri"/>
+              </a:rPr>
+              <a:t>•  Brand / cue — words like ‘verify/login/secure’; look-alike distance to real brands</a:t>
             </a:r>
           </a:p>
         </p:txBody>
@@ -7177,8 +7234,8 @@
 </p:sld>
 </file>
 
-<file path=ppt/slides/slide5.xml><?xml version="1.0" encoding="utf-8"?>
-<p:sld xmlns:a="http://schemas.openxmlformats.org/drawingml/2006/main" xmlns:p="http://schemas.openxmlformats.org/presentationml/2006/main" xmlns:r="http://schemas.openxmlformats.org/officeDocument/2006/relationships">
+<file path=ppt/slides/slide6.xml><?xml version="1.0" encoding="utf-8"?>
+<p:sld xmlns:a="http://schemas.openxmlformats.org/drawingml/2006/main" xmlns:r="http://schemas.openxmlformats.org/officeDocument/2006/relationships" xmlns:p="http://schemas.openxmlformats.org/presentationml/2006/main">
   <p:cSld>
     <p:spTree>
       <p:nvGrpSpPr>
@@ -7186,7 +7243,14 @@
         <p:cNvGrpSpPr/>
         <p:nvPr/>
       </p:nvGrpSpPr>
-      <p:grpSpPr/>
+      <p:grpSpPr>
+        <a:xfrm>
+          <a:off x="0" y="0"/>
+          <a:ext cx="0" cy="0"/>
+          <a:chOff x="0" y="0"/>
+          <a:chExt cx="0" cy="0"/>
+        </a:xfrm>
+      </p:grpSpPr>
       <p:sp>
         <p:nvSpPr>
           <p:cNvPr id="2" name="Rectangle 1"/>
@@ -7227,6 +7291,7 @@
           <a:lstStyle/>
           <a:p>
             <a:pPr algn="ctr"/>
+            <a:endParaRPr/>
           </a:p>
         </p:txBody>
       </p:sp>
@@ -7259,7 +7324,18 @@
                 </a:solidFill>
                 <a:latin typeface="Calibri"/>
               </a:rPr>
-              <a:t>The 40 features — six families</a:t>
+              <a:t>Two features worth the math</a:t>
+            </a:r>
+          </a:p>
+          <a:p>
+            <a:r>
+              <a:rPr sz="1400" b="0" i="1">
+                <a:solidFill>
+                  <a:srgbClr val="2A9D8F"/>
+                </a:solidFill>
+                <a:latin typeface="Calibri"/>
+              </a:rPr>
+              <a:t>information theory · edit distance</a:t>
             </a:r>
           </a:p>
         </p:txBody>
@@ -7272,8 +7348,8 @@
         </p:nvSpPr>
         <p:spPr>
           <a:xfrm>
-            <a:off x="640080" y="1783080"/>
-            <a:ext cx="10972800" cy="4754880"/>
+            <a:off x="640080" y="1737360"/>
+            <a:ext cx="10972800" cy="4023360"/>
           </a:xfrm>
           <a:prstGeom prst="rect">
             <a:avLst/>
@@ -7286,99 +7362,138 @@
           </a:bodyPr>
           <a:lstStyle/>
           <a:p>
+            <a:r>
+              <a:rPr sz="2200" b="1" i="0" dirty="0">
+                <a:solidFill>
+                  <a:srgbClr val="1D2B3A"/>
+                </a:solidFill>
+                <a:latin typeface="Calibri"/>
+              </a:rPr>
+              <a:t>Shannon entropy of the host:   H = − Σ p · log₂(p)</a:t>
+            </a:r>
+          </a:p>
+          <a:p>
             <a:pPr>
               <a:spcAft>
-                <a:spcPts val="900"/>
+                <a:spcPts val="600"/>
               </a:spcAft>
             </a:pPr>
             <a:r>
-              <a:rPr sz="1700" b="0" i="0">
-                <a:solidFill>
-                  <a:srgbClr val="1D2B3A"/>
-                </a:solidFill>
-                <a:latin typeface="Calibri"/>
-              </a:rPr>
-              <a:t>•  Lexical / length — URL length; counts of dots, slashes, digits, hyphens; digit ratio</a:t>
+              <a:rPr sz="1600" b="0" i="0" dirty="0">
+                <a:solidFill>
+                  <a:srgbClr val="5B6472"/>
+                </a:solidFill>
+                <a:latin typeface="Calibri"/>
+              </a:rPr>
+              <a:t>“google” = repeating, predictable letters → LOW entropy;  “x7qz9wvt” ≈ random → HIGH entropy.</a:t>
+            </a:r>
+          </a:p>
+          <a:p>
+            <a:r>
+              <a:rPr sz="1600" b="0" i="1" dirty="0">
+                <a:solidFill>
+                  <a:srgbClr val="2A9D8F"/>
+                </a:solidFill>
+                <a:latin typeface="Calibri"/>
+              </a:rPr>
+              <a:t>→ catches algorithmically-generated (DGA) phishing domains.</a:t>
+            </a:r>
+          </a:p>
+          <a:p>
+            <a:pPr>
+              <a:spcBef>
+                <a:spcPts val="2000"/>
+              </a:spcBef>
+            </a:pPr>
+            <a:r>
+              <a:rPr sz="2200" b="1" i="0" dirty="0">
+                <a:solidFill>
+                  <a:srgbClr val="1D2B3A"/>
+                </a:solidFill>
+                <a:latin typeface="Calibri"/>
+              </a:rPr>
+              <a:t>Brand look-alike:   </a:t>
+            </a:r>
+            <a:r>
+              <a:rPr sz="2200" b="1" i="0" dirty="0" err="1">
+                <a:solidFill>
+                  <a:srgbClr val="1D2B3A"/>
+                </a:solidFill>
+                <a:latin typeface="Calibri"/>
+              </a:rPr>
+              <a:t>Levenshtein</a:t>
+            </a:r>
+            <a:r>
+              <a:rPr sz="2200" b="1" i="0" dirty="0">
+                <a:solidFill>
+                  <a:srgbClr val="1D2B3A"/>
+                </a:solidFill>
+                <a:latin typeface="Calibri"/>
+              </a:rPr>
+              <a:t> edit distance to a known brand</a:t>
             </a:r>
           </a:p>
           <a:p>
             <a:pPr>
               <a:spcAft>
-                <a:spcPts val="900"/>
+                <a:spcPts val="600"/>
               </a:spcAft>
             </a:pPr>
             <a:r>
-              <a:rPr sz="1700" b="0" i="0">
-                <a:solidFill>
-                  <a:srgbClr val="1D2B3A"/>
-                </a:solidFill>
-                <a:latin typeface="Calibri"/>
-              </a:rPr>
-              <a:t>•  Host / domain — number of subdomains; is the host a raw IP; unusual port</a:t>
-            </a:r>
-          </a:p>
-          <a:p>
-            <a:pPr>
-              <a:spcAft>
-                <a:spcPts val="900"/>
-              </a:spcAft>
-            </a:pPr>
-            <a:r>
-              <a:rPr sz="1700" b="0" i="0">
-                <a:solidFill>
-                  <a:srgbClr val="1D2B3A"/>
-                </a:solidFill>
-                <a:latin typeface="Calibri"/>
-              </a:rPr>
-              <a:t>•  TLD — the suffix (.com vs .tk vs .xyz); is it an abuse-associated TLD</a:t>
-            </a:r>
-          </a:p>
-          <a:p>
-            <a:pPr>
-              <a:spcAft>
-                <a:spcPts val="900"/>
-              </a:spcAft>
-            </a:pPr>
-            <a:r>
-              <a:rPr sz="1700" b="0" i="0">
-                <a:solidFill>
-                  <a:srgbClr val="1D2B3A"/>
-                </a:solidFill>
-                <a:latin typeface="Calibri"/>
-              </a:rPr>
-              <a:t>•  Entropy — randomness of the host string (algorithmically-generated domains)</a:t>
-            </a:r>
-          </a:p>
-          <a:p>
-            <a:pPr>
-              <a:spcAft>
-                <a:spcPts val="900"/>
-              </a:spcAft>
-            </a:pPr>
-            <a:r>
-              <a:rPr sz="1700" b="0" i="0">
-                <a:solidFill>
-                  <a:srgbClr val="1D2B3A"/>
-                </a:solidFill>
-                <a:latin typeface="Calibri"/>
-              </a:rPr>
-              <a:t>•  Scheme / encoding — HTTPS?; punycode (xn--); percent/hex encoding</a:t>
-            </a:r>
-          </a:p>
-          <a:p>
-            <a:pPr>
-              <a:spcAft>
-                <a:spcPts val="900"/>
-              </a:spcAft>
-            </a:pPr>
-            <a:r>
-              <a:rPr sz="1700" b="0" i="0">
-                <a:solidFill>
-                  <a:srgbClr val="1D2B3A"/>
-                </a:solidFill>
-                <a:latin typeface="Calibri"/>
-              </a:rPr>
-              <a:t>•  Brand / cue — words like ‘verify/login/secure’; look-alike distance to real brands</a:t>
+              <a:rPr sz="1600" b="0" i="0" dirty="0">
+                <a:solidFill>
+                  <a:srgbClr val="5B6472"/>
+                </a:solidFill>
+                <a:latin typeface="Calibri"/>
+              </a:rPr>
+              <a:t>edit distance = min single-character inserts / deletes / substitutions to turn one word into another.</a:t>
+            </a:r>
+          </a:p>
+          <a:p>
+            <a:r>
+              <a:rPr sz="1600" b="0" i="1" dirty="0">
+                <a:solidFill>
+                  <a:srgbClr val="2A9D8F"/>
+                </a:solidFill>
+                <a:latin typeface="Calibri"/>
+              </a:rPr>
+              <a:t>“paypa1” is edit-distance 1 from “</a:t>
+            </a:r>
+            <a:r>
+              <a:rPr sz="1600" b="0" i="1" dirty="0" err="1">
+                <a:solidFill>
+                  <a:srgbClr val="2A9D8F"/>
+                </a:solidFill>
+                <a:latin typeface="Calibri"/>
+              </a:rPr>
+              <a:t>paypal</a:t>
+            </a:r>
+            <a:r>
+              <a:rPr sz="1600" b="0" i="1" dirty="0">
+                <a:solidFill>
+                  <a:srgbClr val="2A9D8F"/>
+                </a:solidFill>
+                <a:latin typeface="Calibri"/>
+              </a:rPr>
+              <a:t>”  → flag distance 1–2 as a </a:t>
+            </a:r>
+            <a:r>
+              <a:rPr sz="1600" b="0" i="1" dirty="0" err="1">
+                <a:solidFill>
+                  <a:srgbClr val="2A9D8F"/>
+                </a:solidFill>
+                <a:latin typeface="Calibri"/>
+              </a:rPr>
+              <a:t>typosquat</a:t>
+            </a:r>
+            <a:r>
+              <a:rPr sz="1600" b="0" i="1" dirty="0">
+                <a:solidFill>
+                  <a:srgbClr val="2A9D8F"/>
+                </a:solidFill>
+                <a:latin typeface="Calibri"/>
+              </a:rPr>
+              <a:t>.</a:t>
             </a:r>
           </a:p>
         </p:txBody>
@@ -7391,8 +7506,8 @@
 </p:sld>
 </file>
 
-<file path=ppt/slides/slide6.xml><?xml version="1.0" encoding="utf-8"?>
-<p:sld xmlns:a="http://schemas.openxmlformats.org/drawingml/2006/main" xmlns:p="http://schemas.openxmlformats.org/presentationml/2006/main" xmlns:r="http://schemas.openxmlformats.org/officeDocument/2006/relationships">
+<file path=ppt/slides/slide7.xml><?xml version="1.0" encoding="utf-8"?>
+<p:sld xmlns:a="http://schemas.openxmlformats.org/drawingml/2006/main" xmlns:r="http://schemas.openxmlformats.org/officeDocument/2006/relationships" xmlns:p="http://schemas.openxmlformats.org/presentationml/2006/main">
   <p:cSld>
     <p:spTree>
       <p:nvGrpSpPr>
@@ -7400,7 +7515,14 @@
         <p:cNvGrpSpPr/>
         <p:nvPr/>
       </p:nvGrpSpPr>
-      <p:grpSpPr/>
+      <p:grpSpPr>
+        <a:xfrm>
+          <a:off x="0" y="0"/>
+          <a:ext cx="0" cy="0"/>
+          <a:chOff x="0" y="0"/>
+          <a:chExt cx="0" cy="0"/>
+        </a:xfrm>
+      </p:grpSpPr>
       <p:sp>
         <p:nvSpPr>
           <p:cNvPr id="2" name="Rectangle 1"/>
@@ -7441,6 +7563,7 @@
           <a:lstStyle/>
           <a:p>
             <a:pPr algn="ctr"/>
+            <a:endParaRPr/>
           </a:p>
         </p:txBody>
       </p:sp>
@@ -7473,18 +7596,7 @@
                 </a:solidFill>
                 <a:latin typeface="Calibri"/>
               </a:rPr>
-              <a:t>Two features worth the math</a:t>
-            </a:r>
-          </a:p>
-          <a:p>
-            <a:r>
-              <a:rPr sz="1400" b="0" i="1">
-                <a:solidFill>
-                  <a:srgbClr val="2A9D8F"/>
-                </a:solidFill>
-                <a:latin typeface="Calibri"/>
-              </a:rPr>
-              <a:t>information theory · edit distance</a:t>
+              <a:t>Step 1 — train it. It looks perfect: F1 ≈ 1.0</a:t>
             </a:r>
           </a:p>
         </p:txBody>
@@ -7497,8 +7609,8 @@
         </p:nvSpPr>
         <p:spPr>
           <a:xfrm>
-            <a:off x="640080" y="1737360"/>
-            <a:ext cx="10972800" cy="4023360"/>
+            <a:off x="640080" y="1783080"/>
+            <a:ext cx="10972800" cy="4754880"/>
           </a:xfrm>
           <a:prstGeom prst="rect">
             <a:avLst/>
@@ -7511,84 +7623,117 @@
           </a:bodyPr>
           <a:lstStyle/>
           <a:p>
-            <a:r>
-              <a:rPr sz="2200" b="1" i="0">
-                <a:solidFill>
-                  <a:srgbClr val="1D2B3A"/>
-                </a:solidFill>
-                <a:latin typeface="Calibri"/>
-              </a:rPr>
-              <a:t>Shannon entropy of the host:   H = − Σ p · log₂(p)</a:t>
-            </a:r>
-          </a:p>
-          <a:p>
             <a:pPr>
               <a:spcAft>
-                <a:spcPts val="600"/>
+                <a:spcPts val="900"/>
               </a:spcAft>
             </a:pPr>
             <a:r>
-              <a:rPr sz="1600" b="0" i="0">
-                <a:solidFill>
-                  <a:srgbClr val="5B6472"/>
-                </a:solidFill>
-                <a:latin typeface="Calibri"/>
-              </a:rPr>
-              <a:t>“google” = repeating, predictable letters → LOW entropy;  “x7qz9wvt” ≈ random → HIGH entropy.</a:t>
-            </a:r>
-          </a:p>
-          <a:p>
-            <a:r>
-              <a:rPr sz="1600" b="0" i="1">
-                <a:solidFill>
-                  <a:srgbClr val="2A9D8F"/>
-                </a:solidFill>
-                <a:latin typeface="Calibri"/>
-              </a:rPr>
-              <a:t>→ catches algorithmically-generated (DGA) phishing domains.</a:t>
-            </a:r>
-          </a:p>
-          <a:p>
-            <a:pPr>
-              <a:spcBef>
-                <a:spcPts val="2000"/>
-              </a:spcBef>
-            </a:pPr>
-            <a:r>
-              <a:rPr sz="2200" b="1" i="0">
-                <a:solidFill>
-                  <a:srgbClr val="1D2B3A"/>
-                </a:solidFill>
-                <a:latin typeface="Calibri"/>
-              </a:rPr>
-              <a:t>Brand look-alike:   Levenshtein edit distance to a known brand</a:t>
+              <a:rPr sz="1750" b="0" i="0">
+                <a:solidFill>
+                  <a:srgbClr val="1D2B3A"/>
+                </a:solidFill>
+                <a:latin typeface="Calibri"/>
+              </a:rPr>
+              <a:t>•  All provided features → F1 1.0</a:t>
             </a:r>
           </a:p>
           <a:p>
             <a:pPr>
               <a:spcAft>
-                <a:spcPts val="600"/>
+                <a:spcPts val="900"/>
               </a:spcAft>
             </a:pPr>
             <a:r>
-              <a:rPr sz="1600" b="0" i="0">
-                <a:solidFill>
-                  <a:srgbClr val="5B6472"/>
-                </a:solidFill>
-                <a:latin typeface="Calibri"/>
-              </a:rPr>
-              <a:t>edit distance = min single-character inserts / deletes / substitutions to turn one word into another.</a:t>
-            </a:r>
-          </a:p>
-          <a:p>
-            <a:r>
-              <a:rPr sz="1600" b="0" i="1">
-                <a:solidFill>
-                  <a:srgbClr val="2A9D8F"/>
-                </a:solidFill>
-                <a:latin typeface="Calibri"/>
-              </a:rPr>
-              <a:t>“paypa1” is edit-distance 1 from “paypal”  → flag distance 1–2 as a typosquat.</a:t>
+              <a:rPr sz="1750" b="0" i="0">
+                <a:solidFill>
+                  <a:srgbClr val="1D2B3A"/>
+                </a:solidFill>
+                <a:latin typeface="Calibri"/>
+              </a:rPr>
+              <a:t>•  ONE feature (URLSimilarityIndex) alone → F1 0.9953  → basically the label (leakage)</a:t>
+            </a:r>
+          </a:p>
+          <a:p>
+            <a:pPr>
+              <a:spcAft>
+                <a:spcPts val="900"/>
+              </a:spcAft>
+            </a:pPr>
+            <a:r>
+              <a:rPr sz="1750" b="0" i="0">
+                <a:solidFill>
+                  <a:srgbClr val="1D2B3A"/>
+                </a:solidFill>
+                <a:latin typeface="Calibri"/>
+              </a:rPr>
+              <a:t>•  My honest hand-built lexical features → F1 0.9967</a:t>
+            </a:r>
+          </a:p>
+          <a:p>
+            <a:pPr>
+              <a:spcAft>
+                <a:spcPts val="900"/>
+              </a:spcAft>
+            </a:pPr>
+            <a:r>
+              <a:rPr sz="1750" b="0" i="0">
+                <a:solidFill>
+                  <a:srgbClr val="1D2B3A"/>
+                </a:solidFill>
+                <a:latin typeface="Calibri"/>
+              </a:rPr>
+              <a:t>•  Accuracy paradox: always-predict-legit = 57% accuracy but 0% recall (catches nothing)</a:t>
+            </a:r>
+          </a:p>
+          <a:p>
+            <a:pPr>
+              <a:spcAft>
+                <a:spcPts val="900"/>
+              </a:spcAft>
+            </a:pPr>
+            <a:r>
+              <a:rPr sz="1750" b="0" i="0">
+                <a:solidFill>
+                  <a:srgbClr val="1D2B3A"/>
+                </a:solidFill>
+                <a:latin typeface="Calibri"/>
+              </a:rPr>
+              <a:t>•  A one-line ‘not-HTTPS → phishing’ rule alone already scores F1 0.68</a:t>
+            </a:r>
+          </a:p>
+        </p:txBody>
+      </p:sp>
+      <p:sp>
+        <p:nvSpPr>
+          <p:cNvPr id="5" name="TextBox 4"/>
+          <p:cNvSpPr txBox="1"/>
+          <p:nvPr/>
+        </p:nvSpPr>
+        <p:spPr>
+          <a:xfrm>
+            <a:off x="640080" y="5989320"/>
+            <a:ext cx="10972800" cy="640080"/>
+          </a:xfrm>
+          <a:prstGeom prst="rect">
+            <a:avLst/>
+          </a:prstGeom>
+          <a:noFill/>
+        </p:spPr>
+        <p:txBody>
+          <a:bodyPr wrap="square">
+            <a:spAutoFit/>
+          </a:bodyPr>
+          <a:lstStyle/>
+          <a:p>
+            <a:r>
+              <a:rPr sz="1700" b="1" i="0">
+                <a:solidFill>
+                  <a:srgbClr val="E76F51"/>
+                </a:solidFill>
+                <a:latin typeface="Calibri"/>
+              </a:rPr>
+              <a:t>This is where the FIRST learning ends — and the real project begins.</a:t>
             </a:r>
           </a:p>
         </p:txBody>
@@ -7601,8 +7746,8 @@
 </p:sld>
 </file>
 
-<file path=ppt/slides/slide7.xml><?xml version="1.0" encoding="utf-8"?>
-<p:sld xmlns:a="http://schemas.openxmlformats.org/drawingml/2006/main" xmlns:p="http://schemas.openxmlformats.org/presentationml/2006/main" xmlns:r="http://schemas.openxmlformats.org/officeDocument/2006/relationships">
+<file path=ppt/slides/slide8.xml><?xml version="1.0" encoding="utf-8"?>
+<p:sld xmlns:a="http://schemas.openxmlformats.org/drawingml/2006/main" xmlns:r="http://schemas.openxmlformats.org/officeDocument/2006/relationships" xmlns:p="http://schemas.openxmlformats.org/presentationml/2006/main">
   <p:cSld>
     <p:spTree>
       <p:nvGrpSpPr>
@@ -7610,7 +7755,14 @@
         <p:cNvGrpSpPr/>
         <p:nvPr/>
       </p:nvGrpSpPr>
-      <p:grpSpPr/>
+      <p:grpSpPr>
+        <a:xfrm>
+          <a:off x="0" y="0"/>
+          <a:ext cx="0" cy="0"/>
+          <a:chOff x="0" y="0"/>
+          <a:chExt cx="0" cy="0"/>
+        </a:xfrm>
+      </p:grpSpPr>
       <p:sp>
         <p:nvSpPr>
           <p:cNvPr id="2" name="Rectangle 1"/>
@@ -7651,6 +7803,7 @@
           <a:lstStyle/>
           <a:p>
             <a:pPr algn="ctr"/>
+            <a:endParaRPr/>
           </a:p>
         </p:txBody>
       </p:sp>
@@ -7683,7 +7836,7 @@
                 </a:solidFill>
                 <a:latin typeface="Calibri"/>
               </a:rPr>
-              <a:t>Step 1 — train it. It looks perfect: F1 ≈ 1.0</a:t>
+              <a:t>Discovery 1 — the score is a collection artifact</a:t>
             </a:r>
           </a:p>
         </p:txBody>
@@ -7696,8 +7849,8 @@
         </p:nvSpPr>
         <p:spPr>
           <a:xfrm>
-            <a:off x="640080" y="1783080"/>
-            <a:ext cx="10972800" cy="4754880"/>
+            <a:off x="9784080" y="384048"/>
+            <a:ext cx="2286000" cy="457200"/>
           </a:xfrm>
           <a:prstGeom prst="rect">
             <a:avLst/>
@@ -7710,83 +7863,15 @@
           </a:bodyPr>
           <a:lstStyle/>
           <a:p>
-            <a:pPr>
-              <a:spcAft>
-                <a:spcPts val="900"/>
-              </a:spcAft>
-            </a:pPr>
-            <a:r>
-              <a:rPr sz="1750" b="0" i="0">
-                <a:solidFill>
-                  <a:srgbClr val="1D2B3A"/>
-                </a:solidFill>
-                <a:latin typeface="Calibri"/>
-              </a:rPr>
-              <a:t>•  All provided features → F1 1.0</a:t>
-            </a:r>
-          </a:p>
-          <a:p>
-            <a:pPr>
-              <a:spcAft>
-                <a:spcPts val="900"/>
-              </a:spcAft>
-            </a:pPr>
-            <a:r>
-              <a:rPr sz="1750" b="0" i="0">
-                <a:solidFill>
-                  <a:srgbClr val="1D2B3A"/>
-                </a:solidFill>
-                <a:latin typeface="Calibri"/>
-              </a:rPr>
-              <a:t>•  ONE feature (URLSimilarityIndex) alone → F1 0.9953  → basically the label (leakage)</a:t>
-            </a:r>
-          </a:p>
-          <a:p>
-            <a:pPr>
-              <a:spcAft>
-                <a:spcPts val="900"/>
-              </a:spcAft>
-            </a:pPr>
-            <a:r>
-              <a:rPr sz="1750" b="0" i="0">
-                <a:solidFill>
-                  <a:srgbClr val="1D2B3A"/>
-                </a:solidFill>
-                <a:latin typeface="Calibri"/>
-              </a:rPr>
-              <a:t>•  My honest hand-built lexical features → F1 0.9967</a:t>
-            </a:r>
-          </a:p>
-          <a:p>
-            <a:pPr>
-              <a:spcAft>
-                <a:spcPts val="900"/>
-              </a:spcAft>
-            </a:pPr>
-            <a:r>
-              <a:rPr sz="1750" b="0" i="0">
-                <a:solidFill>
-                  <a:srgbClr val="1D2B3A"/>
-                </a:solidFill>
-                <a:latin typeface="Calibri"/>
-              </a:rPr>
-              <a:t>•  Accuracy paradox: always-predict-legit = 57% accuracy but 0% recall (catches nothing)</a:t>
-            </a:r>
-          </a:p>
-          <a:p>
-            <a:pPr>
-              <a:spcAft>
-                <a:spcPts val="900"/>
-              </a:spcAft>
-            </a:pPr>
-            <a:r>
-              <a:rPr sz="1750" b="0" i="0">
-                <a:solidFill>
-                  <a:srgbClr val="1D2B3A"/>
-                </a:solidFill>
-                <a:latin typeface="Calibri"/>
-              </a:rPr>
-              <a:t>•  A one-line ‘not-HTTPS → phishing’ rule alone already scores F1 0.68</a:t>
+            <a:pPr algn="ctr"/>
+            <a:r>
+              <a:rPr sz="1300" b="1" i="0">
+                <a:solidFill>
+                  <a:srgbClr val="E76F51"/>
+                </a:solidFill>
+                <a:latin typeface="Calibri"/>
+              </a:rPr>
+              <a:t>DISCOVERY 1</a:t>
             </a:r>
           </a:p>
         </p:txBody>
@@ -7799,8 +7884,8 @@
         </p:nvSpPr>
         <p:spPr>
           <a:xfrm>
-            <a:off x="640080" y="5989320"/>
-            <a:ext cx="10972800" cy="640080"/>
+            <a:off x="640080" y="1783080"/>
+            <a:ext cx="10972800" cy="1492716"/>
           </a:xfrm>
           <a:prstGeom prst="rect">
             <a:avLst/>
@@ -7813,14 +7898,85 @@
           </a:bodyPr>
           <a:lstStyle/>
           <a:p>
-            <a:r>
-              <a:rPr sz="1700" b="1" i="0">
-                <a:solidFill>
-                  <a:srgbClr val="E76F51"/>
-                </a:solidFill>
-                <a:latin typeface="Calibri"/>
-              </a:rPr>
-              <a:t>This is where the FIRST learning ends — and the real project begins.</a:t>
+            <a:pPr>
+              <a:spcAft>
+                <a:spcPts val="900"/>
+              </a:spcAft>
+            </a:pPr>
+            <a:r>
+              <a:rPr sz="1750" b="0" i="0" dirty="0">
+                <a:solidFill>
+                  <a:srgbClr val="1D2B3A"/>
+                </a:solidFill>
+                <a:latin typeface="Calibri"/>
+              </a:rPr>
+              <a:t>•  Legitimate URLs in </a:t>
+            </a:r>
+            <a:r>
+              <a:rPr sz="1750" b="0" i="0" dirty="0" err="1">
+                <a:solidFill>
+                  <a:srgbClr val="1D2B3A"/>
+                </a:solidFill>
+                <a:latin typeface="Calibri"/>
+              </a:rPr>
+              <a:t>PhiUSIIL</a:t>
+            </a:r>
+            <a:r>
+              <a:rPr sz="1750" b="0" i="0" dirty="0">
+                <a:solidFill>
+                  <a:srgbClr val="1D2B3A"/>
+                </a:solidFill>
+                <a:latin typeface="Calibri"/>
+              </a:rPr>
+              <a:t>: 1.0 HTTPS.   Phishing: 0.486 HTTPS.</a:t>
+            </a:r>
+          </a:p>
+          <a:p>
+            <a:pPr>
+              <a:spcAft>
+                <a:spcPts val="900"/>
+              </a:spcAft>
+            </a:pPr>
+            <a:r>
+              <a:rPr sz="1750" b="0" i="0" dirty="0">
+                <a:solidFill>
+                  <a:srgbClr val="1D2B3A"/>
+                </a:solidFill>
+                <a:latin typeface="Calibri"/>
+              </a:rPr>
+              <a:t>•  So the model largely learns ‘HTTP = phishing’ — a fact about how the data was collected,</a:t>
+            </a:r>
+          </a:p>
+          <a:p>
+            <a:pPr lvl="1">
+              <a:spcAft>
+                <a:spcPts val="900"/>
+              </a:spcAft>
+            </a:pPr>
+            <a:r>
+              <a:rPr sz="1600" b="0" i="0" dirty="0">
+                <a:solidFill>
+                  <a:srgbClr val="5B6472"/>
+                </a:solidFill>
+                <a:latin typeface="Calibri"/>
+              </a:rPr>
+              <a:t>–  NOT about phishing (real modern phishing is mostly HTTPS — this rule is backwards!)</a:t>
+            </a:r>
+          </a:p>
+          <a:p>
+            <a:pPr>
+              <a:spcAft>
+                <a:spcPts val="900"/>
+              </a:spcAft>
+            </a:pPr>
+            <a:r>
+              <a:rPr sz="1750" b="0" i="0" dirty="0">
+                <a:solidFill>
+                  <a:srgbClr val="1D2B3A"/>
+                </a:solidFill>
+                <a:latin typeface="Calibri"/>
+              </a:rPr>
+              <a:t>•  Legit URLs here are clean home-pages; phishing are messy deep links.</a:t>
             </a:r>
           </a:p>
         </p:txBody>
@@ -7833,8 +7989,8 @@
 </p:sld>
 </file>
 
-<file path=ppt/slides/slide8.xml><?xml version="1.0" encoding="utf-8"?>
-<p:sld xmlns:a="http://schemas.openxmlformats.org/drawingml/2006/main" xmlns:p="http://schemas.openxmlformats.org/presentationml/2006/main" xmlns:r="http://schemas.openxmlformats.org/officeDocument/2006/relationships">
+<file path=ppt/slides/slide9.xml><?xml version="1.0" encoding="utf-8"?>
+<p:sld xmlns:a="http://schemas.openxmlformats.org/drawingml/2006/main" xmlns:r="http://schemas.openxmlformats.org/officeDocument/2006/relationships" xmlns:p="http://schemas.openxmlformats.org/presentationml/2006/main">
   <p:cSld>
     <p:spTree>
       <p:nvGrpSpPr>
@@ -7842,7 +7998,14 @@
         <p:cNvGrpSpPr/>
         <p:nvPr/>
       </p:nvGrpSpPr>
-      <p:grpSpPr/>
+      <p:grpSpPr>
+        <a:xfrm>
+          <a:off x="0" y="0"/>
+          <a:ext cx="0" cy="0"/>
+          <a:chOff x="0" y="0"/>
+          <a:chExt cx="0" cy="0"/>
+        </a:xfrm>
+      </p:grpSpPr>
       <p:sp>
         <p:nvSpPr>
           <p:cNvPr id="2" name="Rectangle 1"/>
@@ -7883,239 +8046,7 @@
           <a:lstStyle/>
           <a:p>
             <a:pPr algn="ctr"/>
-          </a:p>
-        </p:txBody>
-      </p:sp>
-      <p:sp>
-        <p:nvSpPr>
-          <p:cNvPr id="3" name="TextBox 2"/>
-          <p:cNvSpPr txBox="1"/>
-          <p:nvPr/>
-        </p:nvSpPr>
-        <p:spPr>
-          <a:xfrm>
-            <a:off x="548640" y="365760"/>
-            <a:ext cx="11064240" cy="1143000"/>
-          </a:xfrm>
-          <a:prstGeom prst="rect">
-            <a:avLst/>
-          </a:prstGeom>
-          <a:noFill/>
-        </p:spPr>
-        <p:txBody>
-          <a:bodyPr wrap="square">
-            <a:spAutoFit/>
-          </a:bodyPr>
-          <a:lstStyle/>
-          <a:p>
-            <a:r>
-              <a:rPr sz="2900" b="1" i="0">
-                <a:solidFill>
-                  <a:srgbClr val="1D2B3A"/>
-                </a:solidFill>
-                <a:latin typeface="Calibri"/>
-              </a:rPr>
-              <a:t>Discovery 1 — the score is a collection artifact</a:t>
-            </a:r>
-          </a:p>
-        </p:txBody>
-      </p:sp>
-      <p:sp>
-        <p:nvSpPr>
-          <p:cNvPr id="4" name="TextBox 3"/>
-          <p:cNvSpPr txBox="1"/>
-          <p:nvPr/>
-        </p:nvSpPr>
-        <p:spPr>
-          <a:xfrm>
-            <a:off x="9784080" y="384048"/>
-            <a:ext cx="2286000" cy="457200"/>
-          </a:xfrm>
-          <a:prstGeom prst="rect">
-            <a:avLst/>
-          </a:prstGeom>
-          <a:noFill/>
-        </p:spPr>
-        <p:txBody>
-          <a:bodyPr wrap="square">
-            <a:spAutoFit/>
-          </a:bodyPr>
-          <a:lstStyle/>
-          <a:p>
-            <a:pPr algn="ctr"/>
-            <a:r>
-              <a:rPr sz="1300" b="1" i="0">
-                <a:solidFill>
-                  <a:srgbClr val="E76F51"/>
-                </a:solidFill>
-                <a:latin typeface="Calibri"/>
-              </a:rPr>
-              <a:t>DISCOVERY 1</a:t>
-            </a:r>
-          </a:p>
-        </p:txBody>
-      </p:sp>
-      <p:sp>
-        <p:nvSpPr>
-          <p:cNvPr id="5" name="TextBox 4"/>
-          <p:cNvSpPr txBox="1"/>
-          <p:nvPr/>
-        </p:nvSpPr>
-        <p:spPr>
-          <a:xfrm>
-            <a:off x="640080" y="1783080"/>
-            <a:ext cx="10972800" cy="4754880"/>
-          </a:xfrm>
-          <a:prstGeom prst="rect">
-            <a:avLst/>
-          </a:prstGeom>
-          <a:noFill/>
-        </p:spPr>
-        <p:txBody>
-          <a:bodyPr wrap="square">
-            <a:spAutoFit/>
-          </a:bodyPr>
-          <a:lstStyle/>
-          <a:p>
-            <a:pPr>
-              <a:spcAft>
-                <a:spcPts val="900"/>
-              </a:spcAft>
-            </a:pPr>
-            <a:r>
-              <a:rPr sz="1750" b="0" i="0">
-                <a:solidFill>
-                  <a:srgbClr val="1D2B3A"/>
-                </a:solidFill>
-                <a:latin typeface="Calibri"/>
-              </a:rPr>
-              <a:t>•  Legitimate URLs in PhiUSIIL: 1.0 HTTPS.   Phishing: 0.486 HTTPS.</a:t>
-            </a:r>
-          </a:p>
-          <a:p>
-            <a:pPr>
-              <a:spcAft>
-                <a:spcPts val="900"/>
-              </a:spcAft>
-            </a:pPr>
-            <a:r>
-              <a:rPr sz="1750" b="0" i="0">
-                <a:solidFill>
-                  <a:srgbClr val="1D2B3A"/>
-                </a:solidFill>
-                <a:latin typeface="Calibri"/>
-              </a:rPr>
-              <a:t>•  So the model largely learns ‘HTTP = phishing’ — a fact about how the data was collected,</a:t>
-            </a:r>
-          </a:p>
-          <a:p>
-            <a:pPr lvl="1">
-              <a:spcAft>
-                <a:spcPts val="900"/>
-              </a:spcAft>
-            </a:pPr>
-            <a:r>
-              <a:rPr sz="1600" b="0" i="0">
-                <a:solidFill>
-                  <a:srgbClr val="5B6472"/>
-                </a:solidFill>
-                <a:latin typeface="Calibri"/>
-              </a:rPr>
-              <a:t>–  NOT about phishing (real modern phishing is mostly HTTPS — this rule is backwards!)</a:t>
-            </a:r>
-          </a:p>
-          <a:p>
-            <a:pPr>
-              <a:spcAft>
-                <a:spcPts val="900"/>
-              </a:spcAft>
-            </a:pPr>
-            <a:r>
-              <a:rPr sz="1750" b="0" i="0">
-                <a:solidFill>
-                  <a:srgbClr val="1D2B3A"/>
-                </a:solidFill>
-                <a:latin typeface="Calibri"/>
-              </a:rPr>
-              <a:t>•  Legit URLs here are clean home-pages; phishing are messy deep links.</a:t>
-            </a:r>
-          </a:p>
-          <a:p>
-            <a:pPr>
-              <a:spcAft>
-                <a:spcPts val="900"/>
-              </a:spcAft>
-            </a:pPr>
-            <a:r>
-              <a:rPr sz="1750" b="0" i="0">
-                <a:solidFill>
-                  <a:srgbClr val="1D2B3A"/>
-                </a:solidFill>
-                <a:latin typeface="Calibri"/>
-              </a:rPr>
-              <a:t>•  The model learned the dataset’s shape, not danger.</a:t>
-            </a:r>
-          </a:p>
-        </p:txBody>
-      </p:sp>
-    </p:spTree>
-  </p:cSld>
-  <p:clrMapOvr>
-    <a:masterClrMapping/>
-  </p:clrMapOvr>
-</p:sld>
-</file>
-
-<file path=ppt/slides/slide9.xml><?xml version="1.0" encoding="utf-8"?>
-<p:sld xmlns:a="http://schemas.openxmlformats.org/drawingml/2006/main" xmlns:p="http://schemas.openxmlformats.org/presentationml/2006/main" xmlns:r="http://schemas.openxmlformats.org/officeDocument/2006/relationships">
-  <p:cSld>
-    <p:spTree>
-      <p:nvGrpSpPr>
-        <p:cNvPr id="1" name=""/>
-        <p:cNvGrpSpPr/>
-        <p:nvPr/>
-      </p:nvGrpSpPr>
-      <p:grpSpPr/>
-      <p:sp>
-        <p:nvSpPr>
-          <p:cNvPr id="2" name="Rectangle 1"/>
-          <p:cNvSpPr/>
-          <p:nvPr/>
-        </p:nvSpPr>
-        <p:spPr>
-          <a:xfrm>
-            <a:off x="0" y="0"/>
-            <a:ext cx="12191695" cy="164592"/>
-          </a:xfrm>
-          <a:prstGeom prst="rect">
-            <a:avLst/>
-          </a:prstGeom>
-          <a:solidFill>
-            <a:srgbClr val="2A9D8F"/>
-          </a:solidFill>
-          <a:ln>
-            <a:noFill/>
-          </a:ln>
-        </p:spPr>
-        <p:style>
-          <a:lnRef idx="1">
-            <a:schemeClr val="accent1"/>
-          </a:lnRef>
-          <a:fillRef idx="3">
-            <a:schemeClr val="accent1"/>
-          </a:fillRef>
-          <a:effectRef idx="2">
-            <a:schemeClr val="accent1"/>
-          </a:effectRef>
-          <a:fontRef idx="minor">
-            <a:schemeClr val="lt1"/>
-          </a:fontRef>
-        </p:style>
-        <p:txBody>
-          <a:bodyPr rtlCol="0" anchor="ctr"/>
-          <a:lstStyle/>
-          <a:p>
-            <a:pPr algn="ctr"/>
+            <a:endParaRPr/>
           </a:p>
         </p:txBody>
       </p:sp>
@@ -8612,7 +8543,7 @@
 </file>
 
 <file path=ppt/theme/theme2.xml><?xml version="1.0" encoding="utf-8"?>
-<a:theme xmlns:a="http://schemas.openxmlformats.org/drawingml/2006/main" name="Office Theme">
+<a:theme xmlns:a="http://schemas.openxmlformats.org/drawingml/2006/main" name="ערכת נושא Office">
   <a:themeElements>
     <a:clrScheme name="Office">
       <a:dk1>
@@ -8622,44 +8553,44 @@
         <a:sysClr val="window" lastClr="FFFFFF"/>
       </a:lt1>
       <a:dk2>
-        <a:srgbClr val="1F497D"/>
+        <a:srgbClr val="0E2841"/>
       </a:dk2>
       <a:lt2>
-        <a:srgbClr val="EEECE1"/>
+        <a:srgbClr val="E8E8E8"/>
       </a:lt2>
       <a:accent1>
-        <a:srgbClr val="4F81BD"/>
+        <a:srgbClr val="156082"/>
       </a:accent1>
       <a:accent2>
-        <a:srgbClr val="C0504D"/>
+        <a:srgbClr val="E97132"/>
       </a:accent2>
       <a:accent3>
-        <a:srgbClr val="9BBB59"/>
+        <a:srgbClr val="196B24"/>
       </a:accent3>
       <a:accent4>
-        <a:srgbClr val="8064A2"/>
+        <a:srgbClr val="0F9ED5"/>
       </a:accent4>
       <a:accent5>
-        <a:srgbClr val="4BACC6"/>
+        <a:srgbClr val="A02B93"/>
       </a:accent5>
       <a:accent6>
-        <a:srgbClr val="F79646"/>
+        <a:srgbClr val="4EA72E"/>
       </a:accent6>
       <a:hlink>
-        <a:srgbClr val="0000FF"/>
+        <a:srgbClr val="467886"/>
       </a:hlink>
       <a:folHlink>
-        <a:srgbClr val="800080"/>
+        <a:srgbClr val="96607D"/>
       </a:folHlink>
     </a:clrScheme>
     <a:fontScheme name="Office">
       <a:majorFont>
-        <a:latin typeface="Calibri"/>
+        <a:latin typeface="Aptos Display" panose="02110004020202020204"/>
         <a:ea typeface=""/>
         <a:cs typeface=""/>
-        <a:font script="Jpan" typeface="ＭＳ Ｐゴシック"/>
+        <a:font script="Jpan" typeface="游ゴシック Light"/>
         <a:font script="Hang" typeface="맑은 고딕"/>
-        <a:font script="Hans" typeface="宋体"/>
+        <a:font script="Hans" typeface="等线 Light"/>
         <a:font script="Hant" typeface="新細明體"/>
         <a:font script="Arab" typeface="Times New Roman"/>
         <a:font script="Hebr" typeface="Times New Roman"/>
@@ -8687,14 +8618,31 @@
         <a:font script="Viet" typeface="Times New Roman"/>
         <a:font script="Uigh" typeface="Microsoft Uighur"/>
         <a:font script="Geor" typeface="Sylfaen"/>
+        <a:font script="Armn" typeface="Arial"/>
+        <a:font script="Bugi" typeface="Leelawadee UI"/>
+        <a:font script="Bopo" typeface="Microsoft JhengHei"/>
+        <a:font script="Java" typeface="Javanese Text"/>
+        <a:font script="Lisu" typeface="Segoe UI"/>
+        <a:font script="Mymr" typeface="Myanmar Text"/>
+        <a:font script="Nkoo" typeface="Ebrima"/>
+        <a:font script="Olck" typeface="Nirmala UI"/>
+        <a:font script="Osma" typeface="Ebrima"/>
+        <a:font script="Phag" typeface="Phagspa"/>
+        <a:font script="Syrn" typeface="Estrangelo Edessa"/>
+        <a:font script="Syrj" typeface="Estrangelo Edessa"/>
+        <a:font script="Syre" typeface="Estrangelo Edessa"/>
+        <a:font script="Sora" typeface="Nirmala UI"/>
+        <a:font script="Tale" typeface="Microsoft Tai Le"/>
+        <a:font script="Talu" typeface="Microsoft New Tai Lue"/>
+        <a:font script="Tfng" typeface="Ebrima"/>
       </a:majorFont>
       <a:minorFont>
-        <a:latin typeface="Calibri"/>
+        <a:latin typeface="Aptos" panose="02110004020202020204"/>
         <a:ea typeface=""/>
         <a:cs typeface=""/>
-        <a:font script="Jpan" typeface="ＭＳ Ｐゴシック"/>
+        <a:font script="Jpan" typeface="游ゴシック"/>
         <a:font script="Hang" typeface="맑은 고딕"/>
-        <a:font script="Hans" typeface="宋体"/>
+        <a:font script="Hans" typeface="等线"/>
         <a:font script="Hant" typeface="新細明體"/>
         <a:font script="Arab" typeface="Arial"/>
         <a:font script="Hebr" typeface="Arial"/>
@@ -8722,6 +8670,23 @@
         <a:font script="Viet" typeface="Arial"/>
         <a:font script="Uigh" typeface="Microsoft Uighur"/>
         <a:font script="Geor" typeface="Sylfaen"/>
+        <a:font script="Armn" typeface="Arial"/>
+        <a:font script="Bugi" typeface="Leelawadee UI"/>
+        <a:font script="Bopo" typeface="Microsoft JhengHei"/>
+        <a:font script="Java" typeface="Javanese Text"/>
+        <a:font script="Lisu" typeface="Segoe UI"/>
+        <a:font script="Mymr" typeface="Myanmar Text"/>
+        <a:font script="Nkoo" typeface="Ebrima"/>
+        <a:font script="Olck" typeface="Nirmala UI"/>
+        <a:font script="Osma" typeface="Ebrima"/>
+        <a:font script="Phag" typeface="Phagspa"/>
+        <a:font script="Syrn" typeface="Estrangelo Edessa"/>
+        <a:font script="Syrj" typeface="Estrangelo Edessa"/>
+        <a:font script="Syre" typeface="Estrangelo Edessa"/>
+        <a:font script="Sora" typeface="Nirmala UI"/>
+        <a:font script="Tale" typeface="Microsoft Tai Le"/>
+        <a:font script="Talu" typeface="Microsoft New Tai Lue"/>
+        <a:font script="Tfng" typeface="Ebrima"/>
       </a:minorFont>
     </a:fontScheme>
     <a:fmtScheme name="Office">
@@ -8733,180 +8698,136 @@
           <a:gsLst>
             <a:gs pos="0">
               <a:schemeClr val="phClr">
-                <a:tint val="50000"/>
-                <a:satMod val="300000"/>
+                <a:lumMod val="110000"/>
+                <a:satMod val="105000"/>
+                <a:tint val="67000"/>
               </a:schemeClr>
             </a:gs>
-            <a:gs pos="35000">
+            <a:gs pos="50000">
               <a:schemeClr val="phClr">
-                <a:tint val="37000"/>
-                <a:satMod val="300000"/>
+                <a:lumMod val="105000"/>
+                <a:satMod val="103000"/>
+                <a:tint val="73000"/>
               </a:schemeClr>
             </a:gs>
             <a:gs pos="100000">
               <a:schemeClr val="phClr">
-                <a:tint val="15000"/>
-                <a:satMod val="350000"/>
+                <a:lumMod val="105000"/>
+                <a:satMod val="109000"/>
+                <a:tint val="81000"/>
               </a:schemeClr>
             </a:gs>
           </a:gsLst>
-          <a:lin ang="16200000" scaled="1"/>
+          <a:lin ang="5400000" scaled="0"/>
         </a:gradFill>
         <a:gradFill rotWithShape="1">
           <a:gsLst>
             <a:gs pos="0">
               <a:schemeClr val="phClr">
-                <a:tint val="100000"/>
+                <a:satMod val="103000"/>
+                <a:lumMod val="102000"/>
+                <a:tint val="94000"/>
+              </a:schemeClr>
+            </a:gs>
+            <a:gs pos="50000">
+              <a:schemeClr val="phClr">
+                <a:satMod val="110000"/>
+                <a:lumMod val="100000"/>
                 <a:shade val="100000"/>
-                <a:satMod val="130000"/>
               </a:schemeClr>
             </a:gs>
             <a:gs pos="100000">
               <a:schemeClr val="phClr">
-                <a:tint val="50000"/>
-                <a:shade val="100000"/>
-                <a:satMod val="350000"/>
+                <a:lumMod val="99000"/>
+                <a:satMod val="120000"/>
+                <a:shade val="78000"/>
               </a:schemeClr>
             </a:gs>
           </a:gsLst>
-          <a:lin ang="16200000" scaled="0"/>
+          <a:lin ang="5400000" scaled="0"/>
         </a:gradFill>
       </a:fillStyleLst>
       <a:lnStyleLst>
-        <a:ln w="9525" cap="flat" cmpd="sng" algn="ctr">
+        <a:ln w="12700" cap="flat" cmpd="sng" algn="ctr">
           <a:solidFill>
-            <a:schemeClr val="phClr">
-              <a:shade val="95000"/>
-              <a:satMod val="105000"/>
-            </a:schemeClr>
+            <a:schemeClr val="phClr"/>
           </a:solidFill>
           <a:prstDash val="solid"/>
+          <a:miter lim="800000"/>
+        </a:ln>
+        <a:ln w="19050" cap="flat" cmpd="sng" algn="ctr">
+          <a:solidFill>
+            <a:schemeClr val="phClr"/>
+          </a:solidFill>
+          <a:prstDash val="solid"/>
+          <a:miter lim="800000"/>
         </a:ln>
         <a:ln w="25400" cap="flat" cmpd="sng" algn="ctr">
           <a:solidFill>
             <a:schemeClr val="phClr"/>
           </a:solidFill>
           <a:prstDash val="solid"/>
-        </a:ln>
-        <a:ln w="38100" cap="flat" cmpd="sng" algn="ctr">
-          <a:solidFill>
-            <a:schemeClr val="phClr"/>
-          </a:solidFill>
-          <a:prstDash val="solid"/>
+          <a:miter lim="800000"/>
         </a:ln>
       </a:lnStyleLst>
       <a:effectStyleLst>
         <a:effectStyle>
+          <a:effectLst/>
+        </a:effectStyle>
+        <a:effectStyle>
+          <a:effectLst/>
+        </a:effectStyle>
+        <a:effectStyle>
           <a:effectLst>
-            <a:outerShdw blurRad="40000" dist="20000" dir="5400000" rotWithShape="0">
+            <a:outerShdw blurRad="57150" dist="19050" dir="5400000" algn="ctr" rotWithShape="0">
               <a:srgbClr val="000000">
-                <a:alpha val="38000"/>
+                <a:alpha val="63000"/>
               </a:srgbClr>
             </a:outerShdw>
           </a:effectLst>
-        </a:effectStyle>
-        <a:effectStyle>
-          <a:effectLst>
-            <a:outerShdw blurRad="40000" dist="23000" dir="5400000" rotWithShape="0">
-              <a:srgbClr val="000000">
-                <a:alpha val="35000"/>
-              </a:srgbClr>
-            </a:outerShdw>
-          </a:effectLst>
-        </a:effectStyle>
-        <a:effectStyle>
-          <a:effectLst>
-            <a:outerShdw blurRad="40000" dist="23000" dir="5400000" rotWithShape="0">
-              <a:srgbClr val="000000">
-                <a:alpha val="35000"/>
-              </a:srgbClr>
-            </a:outerShdw>
-          </a:effectLst>
-          <a:scene3d>
-            <a:camera prst="orthographicFront">
-              <a:rot lat="0" lon="0" rev="0"/>
-            </a:camera>
-            <a:lightRig rig="threePt" dir="t">
-              <a:rot lat="0" lon="0" rev="1200000"/>
-            </a:lightRig>
-          </a:scene3d>
-          <a:sp3d>
-            <a:bevelT w="63500" h="25400"/>
-          </a:sp3d>
         </a:effectStyle>
       </a:effectStyleLst>
       <a:bgFillStyleLst>
         <a:solidFill>
           <a:schemeClr val="phClr"/>
         </a:solidFill>
+        <a:solidFill>
+          <a:schemeClr val="phClr">
+            <a:tint val="95000"/>
+            <a:satMod val="170000"/>
+          </a:schemeClr>
+        </a:solidFill>
         <a:gradFill rotWithShape="1">
           <a:gsLst>
             <a:gs pos="0">
               <a:schemeClr val="phClr">
-                <a:tint val="40000"/>
-                <a:satMod val="350000"/>
+                <a:tint val="93000"/>
+                <a:satMod val="150000"/>
+                <a:shade val="98000"/>
+                <a:lumMod val="102000"/>
               </a:schemeClr>
             </a:gs>
-            <a:gs pos="40000">
+            <a:gs pos="50000">
               <a:schemeClr val="phClr">
-                <a:tint val="45000"/>
-                <a:shade val="99000"/>
-                <a:satMod val="350000"/>
+                <a:tint val="98000"/>
+                <a:satMod val="130000"/>
+                <a:shade val="90000"/>
+                <a:lumMod val="103000"/>
               </a:schemeClr>
             </a:gs>
             <a:gs pos="100000">
               <a:schemeClr val="phClr">
-                <a:shade val="20000"/>
-                <a:satMod val="255000"/>
+                <a:shade val="63000"/>
+                <a:satMod val="120000"/>
               </a:schemeClr>
             </a:gs>
           </a:gsLst>
-          <a:path path="circle">
-            <a:fillToRect l="50000" t="-80000" r="50000" b="180000"/>
-          </a:path>
-        </a:gradFill>
-        <a:gradFill rotWithShape="1">
-          <a:gsLst>
-            <a:gs pos="0">
-              <a:schemeClr val="phClr">
-                <a:tint val="80000"/>
-                <a:satMod val="300000"/>
-              </a:schemeClr>
-            </a:gs>
-            <a:gs pos="100000">
-              <a:schemeClr val="phClr">
-                <a:shade val="30000"/>
-                <a:satMod val="200000"/>
-              </a:schemeClr>
-            </a:gs>
-          </a:gsLst>
-          <a:path path="circle">
-            <a:fillToRect l="50000" t="50000" r="50000" b="50000"/>
-          </a:path>
+          <a:lin ang="5400000" scaled="0"/>
         </a:gradFill>
       </a:bgFillStyleLst>
     </a:fmtScheme>
   </a:themeElements>
   <a:objectDefaults>
-    <a:spDef>
-      <a:spPr/>
-      <a:bodyPr/>
-      <a:lstStyle/>
-      <a:style>
-        <a:lnRef idx="1">
-          <a:schemeClr val="accent1"/>
-        </a:lnRef>
-        <a:fillRef idx="3">
-          <a:schemeClr val="accent1"/>
-        </a:fillRef>
-        <a:effectRef idx="2">
-          <a:schemeClr val="accent1"/>
-        </a:effectRef>
-        <a:fontRef idx="minor">
-          <a:schemeClr val="lt1"/>
-        </a:fontRef>
-      </a:style>
-    </a:spDef>
     <a:lnDef>
       <a:spPr/>
       <a:bodyPr/>
@@ -8928,5 +8849,10 @@
     </a:lnDef>
   </a:objectDefaults>
   <a:extraClrSchemeLst/>
+  <a:extLst>
+    <a:ext uri="{05A4C25C-085E-4340-85A3-A5531E510DB2}">
+      <thm15:themeFamily xmlns:thm15="http://schemas.microsoft.com/office/thememl/2012/main" name="Office Theme" id="{2E142A2C-CD16-42D6-873A-C26D2A0506FA}" vid="{1BDDFF52-6CD6-40A5-AB3C-68EB2F1E4D0A}"/>
+    </a:ext>
+  </a:extLst>
 </a:theme>
 </file>
--- a/presentation/url_detector.pptx
+++ b/presentation/url_detector.pptx
@@ -6854,7 +6854,7 @@
                 </a:solidFill>
                 <a:latin typeface="Calibri"/>
               </a:rPr>
-              <a:t>•  A URL is a short, STRUCTURE</a:t>
+              <a:t>•  A URL is a short, STRUCTURED string, not prose.</a:t>
             </a:r>
             <a:r>
               <a:rPr lang="en-US" sz="1750" b="0" i="0" dirty="0">
@@ -6863,7 +6863,7 @@
                 </a:solidFill>
                 <a:latin typeface="Calibri"/>
               </a:rPr>
-              <a:t>D</a:t>
+              <a:t/>
             </a:r>
             <a:r>
               <a:rPr sz="1750" b="0" i="0" dirty="0">
@@ -6872,7 +6872,7 @@
                 </a:solidFill>
                 <a:latin typeface="Calibri"/>
               </a:rPr>
-              <a:t>.</a:t>
+              <a:t/>
             </a:r>
           </a:p>
           <a:p>
@@ -6965,7 +6965,7 @@
                 </a:solidFill>
                 <a:latin typeface="Calibri"/>
               </a:rPr>
-              <a:t>–  → </a:t>
+              <a:t>–  → so I can later attribute the score to specific, human-readable causes</a:t>
             </a:r>
             <a:r>
               <a:rPr lang="en-US" sz="1600" b="0" i="0" dirty="0">
@@ -6974,7 +6974,7 @@
                 </a:solidFill>
                 <a:latin typeface="Calibri"/>
               </a:rPr>
-              <a:t>so,</a:t>
+              <a:t/>
             </a:r>
             <a:r>
               <a:rPr sz="1600" b="0" i="0" dirty="0">
@@ -6983,7 +6983,7 @@
                 </a:solidFill>
                 <a:latin typeface="Calibri"/>
               </a:rPr>
-              <a:t> I can later attribute the score to specific, human-readable causes</a:t>
+              <a:t/>
             </a:r>
           </a:p>
           <a:p>
@@ -7910,7 +7910,7 @@
                 </a:solidFill>
                 <a:latin typeface="Calibri"/>
               </a:rPr>
-              <a:t>•  Legitimate URLs in </a:t>
+              <a:t>•  Legitimate URLs in PhiUSIIL: 100% HTTPS.   Phishing: only 49%.</a:t>
             </a:r>
             <a:r>
               <a:rPr sz="1750" b="0" i="0" dirty="0" err="1">
@@ -7919,7 +7919,7 @@
                 </a:solidFill>
                 <a:latin typeface="Calibri"/>
               </a:rPr>
-              <a:t>PhiUSIIL</a:t>
+              <a:t/>
             </a:r>
             <a:r>
               <a:rPr sz="1750" b="0" i="0" dirty="0">
@@ -7928,7 +7928,7 @@
                 </a:solidFill>
                 <a:latin typeface="Calibri"/>
               </a:rPr>
-              <a:t>: 1.0 HTTPS.   Phishing: 0.486 HTTPS.</a:t>
+              <a:t/>
             </a:r>
           </a:p>
           <a:p>
